--- a/library/lectures/lec-05/rendered/lec-05.pptx
+++ b/library/lectures/lec-05/rendered/lec-05.pptx
@@ -557,12 +557,12 @@
           <a:lstStyle/>
           <a:p>
             <a:r>
-              <a:t>Начнём не с определения, а с парадокса. Anthropic описывает собственный внутренний опыт так: задачи, которые раньше занимали недели написания и ревью кода, теперь занимают часы — агент пишет реализацию, проходит тесты, и код почти бесплатен. Одновременно летом две тысячи двадцать пятого года исследовательская группа при MIT Media Lab опубликовала отчёт, растиражированный медиа как «девяносто пять процентов организаций получают нулевую отдачу от генеративного AI». Два факта одновременно правдивы и на первый взгляд взаимоисключающи: сборка почти бесплатна — и почти никто не извлекает из этого ценность. Как это возможно?</a:t>
-            </a:r>
-          </a:p>
-          <a:p>
-            <a:r>
-              <a:t>Мы не разрешим парадокс прямо сейчас — это payoff всей лекции, мы вернёмся к нему в самом конце. Но зафиксируем его форму сразу: сборка стала почти бесплатной, а превращение сборки в реальную ценность — нет. Именно это несоответствие — предмет сегодняшней лекции. Мы пройдём весь жизненный цикл продукта: от намерения через исследование, дизайн, сборку, измерение, эксплуатацию — и на каждой фазе будем спрашивать одно и то же: что здесь AI удешевил, и что осталось дорогим и человеческим.</a:t>
+              <a:t>Начнём не с определения, а с парадокса. Anthropic описывает собственный внутренний опыт так: задачи, которые раньше занимали недели написания и ревью кода, теперь занимают часы — агент пишет реализацию, проходит тесты, и код почти бесплатен. Одновременно летом две тысячи двадцать пятого года исследовательская группа при MIT Media Lab опубликовала отчёт, растиражированный медиа как «девяносто пять процентов организаций получают нулевую отдачу от генеративного ИИ». Два факта одновременно правдивы и на первый взгляд взаимоисключающи: сборка почти бесплатна — и почти никто не извлекает из этого ценность. Как это возможно?</a:t>
+            </a:r>
+          </a:p>
+          <a:p>
+            <a:r>
+              <a:t>Мы не разрешим парадокс прямо сейчас — это payoff всей лекции, мы вернёмся к нему в самом конце. Но зафиксируем его форму сразу: сборка стала почти бесплатной, а превращение сборки в реальную ценность — нет. Именно это несоответствие — предмет сегодняшней лекции. Мы пройдём весь жизненный цикл продукта: от намерения через исследование, дизайн, сборку, измерение, эксплуатацию — и на каждой фазе будем спрашивать одно и то же: что здесь ИИ удешевил, и что осталось дорогим и человеческим.</a:t>
             </a:r>
           </a:p>
           <a:p>
@@ -722,17 +722,17 @@
           <a:lstStyle/>
           <a:p>
             <a:r>
-              <a:t>Теперь — что AI меняет в этой фазе, конкретно и по инструментам. Desk research — обзор рыночных отчётов, жалоб, тикетов — до единого часа. Perplexity, особенно режим Deep Research, широко признаётся лучшим инструментом для этой задачи: сервис планирует траекторию исследования, читает источники и возвращает отчёт со ссылками за минуты. Практики сообщают о сокращении времени примерно на пятьдесят процентов. Обязательная практика, а не опция: проверять важные данные напрямую по источнику, прежде чем использовать их в решении — ссылки существуют именно для того, чтобы верификация была возможна, но инструмент не отменяет сам шаг верификации.</a:t>
-            </a:r>
-          </a:p>
-          <a:p>
-            <a:r>
-              <a:t>Синтез интервью: Dovetail специально построен для кросс-интервью синтеза с дизайном «цитата привязана к источнику» — это защищает от дрейфа в непроверяемое резюме. AI по-настоящему силён в кластеризации — группировке сотен тикетов в повторяющиеся темы боли, и в построении reference dataset — эталонного набора пар «запрос → правильный ответ», который мы ещё вернём в разделах три и четыре как формальный launch-артефакт и набор для оценки.</a:t>
-            </a:r>
-          </a:p>
-          <a:p>
-            <a:r>
-              <a:t>Синтетические пользователи как pre-research — узкая, легитимная область: пилотирование гайда обсуждения, черновик прото-персон, генерация гипотез. Ни один из этих выходов не должен рассматриваться как доказательство для решения «запускать или нет». Показательно: девяносто семь процентов исследователей используют AI, но лишь около восьми процентов доверяют AI-сгенерированным участникам как источнику данных — разрыв осознан самой профессией. Тереза Торрес, один из ведущих практиков дискавери, использует AI для черновика первого прохода, но правило двух шагов синтеза сохраняется без исключений, и она прямо советует против синтетических интервью — потому что само мышление команды и есть смысл процесса.</a:t>
+              <a:t>Теперь — что ИИ меняет в этой фазе, конкретно и по инструментам. Desk research — обзор рыночных отчётов, жалоб, тикетов — до единого часа. Perplexity, особенно режим Deep Research, широко признаётся лучшим инструментом для этой задачи: сервис планирует траекторию исследования, читает источники и возвращает отчёт со ссылками за минуты. Практики сообщают о сокращении времени примерно на пятьдесят процентов. Обязательная практика, а не опция: проверять важные данные напрямую по источнику, прежде чем использовать их в решении — ссылки существуют именно для того, чтобы верификация была возможна, но инструмент не отменяет сам шаг верификации.</a:t>
+            </a:r>
+          </a:p>
+          <a:p>
+            <a:r>
+              <a:t>Синтез интервью: Dovetail специально построен для кросс-интервью синтеза с дизайном «цитата привязана к источнику» — это защищает от дрейфа в непроверяемое резюме. ИИ по-настоящему силён в кластеризации — группировке сотен тикетов в повторяющиеся темы боли, и в построении reference dataset — эталонного набора пар «запрос → правильный ответ», который мы ещё вернём в разделах три и четыре как формальный launch-артефакт и набор для оценки.</a:t>
+            </a:r>
+          </a:p>
+          <a:p>
+            <a:r>
+              <a:t>Синтетические пользователи как pre-research — узкая, легитимная область: пилотирование гайда обсуждения, черновик прото-персон, генерация гипотез. Ни один из этих выходов не должен рассматриваться как доказательство для решения «запускать или нет». Показательно: девяносто семь процентов исследователей используют ИИ, но лишь около восьми процентов доверяют ИИ-сгенерированным участникам как источнику данных — разрыв осознан самой профессией. Тереза Торрес, один из ведущих практиков дискавери, использует ИИ для черновика первого прохода, но правило двух шагов синтеза сохраняется без исключений, и она прямо советует против синтетических интервью — потому что само мышление команды и есть смысл процесса.</a:t>
             </a:r>
           </a:p>
           <a:p>
@@ -807,7 +807,7 @@
           <a:lstStyle/>
           <a:p>
             <a:r>
-              <a:t>Пятый риск дискавери — этический, но материализуется он как конкретный, измеримый механизм: AI-резюме может упускать двадцать-сорок процентов важной детали интервью, когда синтез пропускает шаг «сначала по отдельности» и сразу прыгает к кросс-интервью теме. Это не расплывчатое «AI иногда ошибается» — это прослеживаемый до конкретного шага сбой.</a:t>
+              <a:t>Пятый риск дискавери — этический, но материализуется он как конкретный, измеримый механизм: ИИ-резюме может упускать двадцать-сорок процентов важной детали интервью, когда синтез пропускает шаг «сначала по отдельности» и сразу прыгает к кросс-интервью теме. Это не расплывчатое «ИИ иногда ошибается» — это прослеживаемый до конкретного шага сбой.</a:t>
             </a:r>
           </a:p>
           <a:p>
@@ -817,7 +817,7 @@
           </a:p>
           <a:p>
             <a:r>
-              <a:t>Сделаем это проверяемым через три операциональных критерия. Первый: цена ошибки go/no-go высока — нужен источник, способный сказать «нет», а синтетический по построению не способен. Второй: нужно реальное прошлое, а не правдоподобное — если гипотеза о конкретном прошлом поведении, синтетическая персона его достраивает, а не помнит. Третий: нужна валидация реальным обязательством — предзаказ, депозит, интро — AI-заменителя здесь нет вовсе. Что явно остаётся из классики: три правила Mom Test применяются одинаково, кто бы ни задавал вопрос; гипотезо-первая дисциплина Бланка — противоядие от однокликового AI-дерева. Правило суммарно: чем ближе выход к необратимому решению о реальных людях, тем строже нужен реальный человек; чем дальше — тем уместнее AI как ускоритель черновика.</a:t>
+              <a:t>Сделаем это проверяемым через три операциональных критерия. Первый: цена ошибки go/no-go высока — нужен источник, способный сказать «нет», а синтетический по построению не способен. Второй: нужно реальное прошлое, а не правдоподобное — если гипотеза о конкретном прошлом поведении, синтетическая персона его достраивает, а не помнит. Третий: нужна валидация реальным обязательством — предзаказ, депозит, интро — ИИ-заменителя здесь нет вовсе. Что явно остаётся из классики: три правила Mom Test применяются одинаково, кто бы ни задавал вопрос; гипотезо-первая дисциплина Бланка — противоядие от однокликового ИИ-дерева. Правило суммарно: чем ближе выход к необратимому решению о реальных людях, тем строже нужен реальный человек; чем дальше — тем уместнее ИИ как ускоритель черновика.</a:t>
             </a:r>
           </a:p>
         </p:txBody>
@@ -887,7 +887,7 @@
           <a:lstStyle/>
           <a:p>
             <a:r>
-              <a:t>Nielsen Norman Group провела контролируемое сравнение в рамках исследования юзабилити онбординга: реальные пользователи в среднем завершили три из семи шагов; AI-сгенерированная панель синтетических пользователей, тестировавшая тот же самый поток, ложно отчиталась о завершении всех семи из семи. Отдельно реальные пользователи описали функцию дискуссионного форума как надуманную и бесполезную, тогда как синтетические персоны выдали восторженные похвалы той же функции; один синтетический пользователь назвал непрактичную концепцию доставки дронами «изменяющей правила игры».</a:t>
+              <a:t>Nielsen Norman Group провела контролируемое сравнение в рамках исследования юзабилити онбординга: реальные пользователи в среднем завершили три из семи шагов; ИИ-сгенерированная панель синтетических пользователей, тестировавшая тот же самый поток, ложно отчиталась о завершении всех семи из семи. Отдельно реальные пользователи описали функцию дискуссионного форума как надуманную и бесполезную, тогда как синтетические персоны выдали восторженные похвалы той же функции; один синтетический пользователь назвал непрактичную концепцию доставки дронами «изменяющей правила игры».</a:t>
             </a:r>
           </a:p>
           <a:p>
@@ -972,7 +972,7 @@
           <a:lstStyle/>
           <a:p>
             <a:r>
-              <a:t>Deloitte Australia в две тысячи двадцать пятом году сдала правительству Австралии отчёт стоимостью четыреста сорок тысяч австралийских долларов, содержащий ссылки на несуществующие академические статьи и сфабрикованную цитату, приписанную реальному судебному решению. Отчёт был подготовлен с использованием Azure OpenAI без прохождения человеческой верификации на уровне цитат. После того как независимый исследователь обнаружил несоответствия, Deloitte частично вернула деньги и публично признала использование генеративного AI. База для сравнения: это не единичный случай — база данных фиксирует более семисот двенадцати судебных решений по миру с AI-галлюцинированными цитатами, из которых около девяноста процентов пришлись именно на две тысячи двадцать пятый год.</a:t>
+              <a:t>Deloitte Australia в две тысячи двадцать пятом году сдала правительству Австралии отчёт стоимостью четыреста сорок тысяч австралийских долларов, содержащий ссылки на несуществующие академические статьи и сфабрикованную цитату, приписанную реальному судебному решению. Отчёт был подготовлен с использованием Azure OpenAI без прохождения человеческой верификации на уровне цитат. После того как независимый исследователь обнаружил несоответствия, Deloitte частично вернула деньги и публично признала использование генеративного ИИ. База для сравнения: это не единичный случай — база данных фиксирует более семисот двенадцати судебных решений по миру с ИИ-галлюцинированными цитатами, из которых около девяноста процентов пришлись именно на две тысячи двадцать пятый год.</a:t>
             </a:r>
           </a:p>
           <a:p>
@@ -1067,7 +1067,7 @@
           </a:p>
           <a:p>
             <a:r>
-              <a:t>Урок: discovery-фаза AI-продукта в high-stakes домене обязана верифицировать репрезентативность обучающих данных до демонстрации возможностей клиентам; маркетинговая демонстрация — это не валидация. Критерий: если весь доступный датасет — это small-N синтетические кейсы от узкой группы экспертов, а не реальные исходы на больших выборках, — это сигнал, что для продукта рано, нужна отдельная фаза сбора и валидации данных. Альтернатива: evidence-based системы на структурированных клинических guidelines с прозрачной трассируемостью источника, либо supervised-пилот с человеком-в-контуре. Три провала раздела — один класс: синтетический источник, принятый за валидированную основу решения, меняется только цена ошибки.</a:t>
+              <a:t>Урок: discovery-фаза ИИ-продукта в high-stakes домене обязана верифицировать репрезентативность обучающих данных до демонстрации возможностей клиентам; маркетинговая демонстрация — это не валидация. Критерий: если весь доступный датасет — это small-N синтетические кейсы от узкой группы экспертов, а не реальные исходы на больших выборках, — это сигнал, что для продукта рано, нужна отдельная фаза сбора и валидации данных. Альтернатива: evidence-based системы на структурированных клинических guidelines с прозрачной трассируемостью источника, либо supervised-пилот с человеком-в-контуре. Три провала раздела — один класс: синтетический источник, принятый за валидированную основу решения, меняется только цена ошибки.</a:t>
             </a:r>
           </a:p>
           <a:p>
@@ -1142,12 +1142,12 @@
           <a:lstStyle/>
           <a:p>
             <a:r>
-              <a:t>Раздел два — вторая стрелка петли: как гипотеза из предыдущего раздела превращается в конкретный артефакт, который можно показать человеку. Аудитория курса технически сильна, но, как правило, не проходила формального дизайн-образования — поэтому раздел, как и предыдущий, начинается с классики, прежде чем переходить к AI-инструментам генерации интерфейсов.</a:t>
-            </a:r>
-          </a:p>
-          <a:p>
-            <a:r>
-              <a:t>Сегодня — единый несущий каркас дизайн-процесса, эвристики экспертной оценки, что AI даёт для генерации интерфейсов в две тысячи двадцать пятом-двадцать шестом, где он ломается на недетерминированном выводе, и два провала, которые представляют два разных, взаимодополняющих класса дизайн-провала.</a:t>
+              <a:t>Раздел два — вторая стрелка петли: как гипотеза из предыдущего раздела превращается в конкретный артефакт, который можно показать человеку. Аудитория курса технически сильна, но, как правило, не проходила формального дизайн-образования — поэтому раздел, как и предыдущий, начинается с классики, прежде чем переходить к ИИ-инструментам генерации интерфейсов.</a:t>
+            </a:r>
+          </a:p>
+          <a:p>
+            <a:r>
+              <a:t>Сегодня — единый несущий каркас дизайн-процесса, эвристики экспертной оценки, что ИИ даёт для генерации интерфейсов в две тысячи двадцать пятом-двадцать шестом, где он ломается на недетерминированном выводе, и два провала, которые представляют два разных, взаимодополняющих класса дизайн-провала.</a:t>
             </a:r>
           </a:p>
         </p:txBody>
@@ -1227,7 +1227,7 @@
           </a:p>
           <a:p>
             <a:r>
-              <a:t>Ещё одна мысль этой фазы, к которой мы вернёмся на реальном провале: безопасность продукта закладывается здесь, в дизайн-брифе, а не прикручивается патчем после того, как что-то пошло не так. AI умеет генерировать десятки вариантов интерфейса за минуты — но выбор и проверка на реальном человеке остаются за вами.</a:t>
+              <a:t>Ещё одна мысль этой фазы, к которой мы вернёмся на реальном провале: безопасность продукта закладывается здесь, в дизайн-брифе, а не прикручивается патчем после того, как что-то пошло не так. ИИ умеет генерировать десятки вариантов интерфейса за минуты — но выбор и проверка на реальном человеке остаются за вами.</a:t>
             </a:r>
           </a:p>
         </p:txBody>
@@ -1382,12 +1382,12 @@
           </a:p>
           <a:p>
             <a:r>
-              <a:t>Дизайн-система — живой, управляемый набор принципов, токенов, компонентов и паттернов, поддерживающий согласованность продукта в масштабе. Ключевая мысль, которая станет несущей для AI-раздела: дизайн-система — это guardrail, механизм, удерживающий генеративную свободу в рамках уже провалидированного бренда, поэтому она — естественная упряжь для AI-генерации интерфейсов.</a:t>
-            </a:r>
-          </a:p>
-          <a:p>
-            <a:r>
-              <a:t>Собственный жёсткий урок Нильсена, повторяемый в индустрии как мантра: «вы не пользователь» — любой, кто близок к проекту, систематически неверно предсказывает, что запутает реального человека. Тест с одним пользователем в среднем вскрывает около тридцати одного процента проблем юзабилити; классические пять пользователей находят около восьмидесяти пяти процентов. Это необходимый противовес для следующего слайда: сколько бы AI ни ускорил генерацию прототипа, поставить артефакт перед реальным человеком и наблюдать его реальную растерянность — не имеет AI-заменителя.</a:t>
+              <a:t>Дизайн-система — живой, управляемый набор принципов, токенов, компонентов и паттернов, поддерживающий согласованность продукта в масштабе. Ключевая мысль, которая станет несущей для ИИ-раздела: дизайн-система — это guardrail, механизм, удерживающий генеративную свободу в рамках уже провалидированного бренда, поэтому она — естественная упряжь для ИИ-генерации интерфейсов.</a:t>
+            </a:r>
+          </a:p>
+          <a:p>
+            <a:r>
+              <a:t>Собственный жёсткий урок Нильсена, повторяемый в индустрии как мантра: «вы не пользователь» — любой, кто близок к проекту, систематически неверно предсказывает, что запутает реального человека. Тест с одним пользователем в среднем вскрывает около тридцати одного процента проблем юзабилити; классические пять пользователей находят около восьмидесяти пяти процентов. Это необходимый противовес для следующего слайда: сколько бы ИИ ни ускорил генерацию прототипа, поставить артефакт перед реальным человеком и наблюдать его реальную растерянность — не имеет ИИ-заменителя.</a:t>
             </a:r>
           </a:p>
         </p:txBody>
@@ -1457,12 +1457,12 @@
           <a:lstStyle/>
           <a:p>
             <a:r>
-              <a:t>Лекция 4 разбирала жизненный цикл кода. Сегодняшняя лекция — это увеличение масштаба: код — одна, теперь резко подешевевшая фаза внутри гораздо более широкого жизненного цикла продукта. Вы технически сильны и ежедневно пишете код с AI-ассистентами, но большинство продуктовых дисциплин — customer development, дизайн-мышление, продуктовые эксперименты, эксплуатацию по модели инженерии надёжности — видите, скорее всего, впервые. Поэтому каждый из шести разделов сегодня начинается не с AI, а с классической базы: откуда взялась дисциплина и какую проблему она решает без единого упоминания искусственного интеллекта. Только после этого мы спрашиваем, что меняет AI и где он ломается.</a:t>
-            </a:r>
-          </a:p>
-          <a:p>
-            <a:r>
-              <a:t>Дорожная карта простая: шесть разделов — это шесть стрелок одной петли. Discovery — откуда берётся гипотеза. Design — как гипотеза становится артефактом. Build и Launch — как артефакт становится работающим продуктом в проде. Measure — как проверить, сработало ли это на самом деле. Support и Operate — что происходит, когда продукт живёт 24/7. И Governance — как организация решает, во что вообще вкладывать капитал. В конце мы соберём всё в единую матрицу и чек-лист, которым вы сможете прогнать любую незнакомую AI-инициативу.</a:t>
+              <a:t>Лекция 4 разбирала жизненный цикл кода. Сегодняшняя лекция — это увеличение масштаба: код — одна, теперь резко подешевевшая фаза внутри гораздо более широкого жизненного цикла продукта. Вы технически сильны и ежедневно пишете код с ИИ-ассистентами, но большинство продуктовых дисциплин — customer development, дизайн-мышление, продуктовые эксперименты, эксплуатацию по модели инженерии надёжности — видите, скорее всего, впервые. Поэтому каждый из шести разделов сегодня начинается не с ИИ, а с классической базы: откуда взялась дисциплина и какую проблему она решает без единого упоминания искусственного интеллекта. Только после этого мы спрашиваем, что меняет ИИ и где он ломается.</a:t>
+            </a:r>
+          </a:p>
+          <a:p>
+            <a:r>
+              <a:t>Дорожная карта простая: шесть разделов — это шесть стрелок одной петли. Discovery — откуда берётся гипотеза. Design — как гипотеза становится артефактом. Build и Launch — как артефакт становится работающим продуктом в проде. Measure — как проверить, сработало ли это на самом деле. Support и Operate — что происходит, когда продукт живёт 24/7. И Governance — как организация решает, во что вообще вкладывать капитал. В конце мы соберём всё в единую матрицу и чек-лист, которым вы сможете прогнать любую незнакомую ИИ-инициативу.</a:t>
             </a:r>
           </a:p>
         </p:txBody>
@@ -1532,7 +1532,7 @@
           <a:lstStyle/>
           <a:p>
             <a:r>
-              <a:t>Реалистичный командный воркфлоу две тысячи двадцать пятого-двадцать шестого годов: продакт или дизайнер описывает экран в промпте инструменту v0 by Vercel или Figma Make, генератор подтягивает уже существующие компоненты команды, а не общие шаблоны — семьдесят два процента дизайнеров используют генеративный AI, девяносто один процент отмечают улучшение именно качества. Генератор выдаёт два-четыре расходящихся направления за минуты — то, что раньше занимало день ручного вайрфрейминга. Человек-дизайнер конвергирует — выбирает направление, отбрасывает остальные, правит детали, которые модель поняла неверно. Выбранное направление проходит реальный юзабилити-тест с настоящими пользователями.</a:t>
+              <a:t>Реалистичный командный воркфлоу две тысячи двадцать пятого-двадцать шестого годов: продакт или дизайнер описывает экран в промпте инструменту v0 by Vercel или Figma Make, генератор подтягивает уже существующие компоненты команды, а не общие шаблоны — семьдесят два процента дизайнеров используют генеративный ИИ, девяносто один процент отмечают улучшение именно качества. Генератор выдаёт два-четыре расходящихся направления за минуты — то, что раньше занимало день ручного вайрфрейминга. Человек-дизайнер конвергирует — выбирает направление, отбрасывает остальные, правит детали, которые модель поняла неверно. Выбранное направление проходит реальный юзабилити-тест с настоящими пользователями.</a:t>
             </a:r>
           </a:p>
           <a:p>
@@ -1542,7 +1542,7 @@
           </a:p>
           <a:p>
             <a:r>
-              <a:t>Что здесь по-настоящему хорошо, без хайпа: скорость первого черновика, генерация с учётом дизайн-системы — меньше переделки, чем наивный текст-в-UI, и демократизация приличного первого прохода — не-дизайнеры теперь могут произвести нечто презентабельное для начала разговора. Рабочая практика, ясная формулировка всего раздела: AI для дивергенции, человек для конвергенции. Со-творческие инструменты уместно использовать для максимизации объёма и разнообразия ранней разведки. Конвергенция — определение, какую проблему стоит решать, и доработка одного направления до полного соответствия контексту, — прямо названа человеческой сильной стороной, которую никакой промпт не заменит. Дизайн-система — естественный guardrail, удерживающий AI-дивергенцию от дрейфа с бренда.</a:t>
+              <a:t>Что здесь по-настоящему хорошо, без хайпа: скорость первого черновика, генерация с учётом дизайн-системы — меньше переделки, чем наивный текст-в-UI, и демократизация приличного первого прохода — не-дизайнеры теперь могут произвести нечто презентабельное для начала разговора. Рабочая практика, ясная формулировка всего раздела: ИИ для дивергенции, человек для конвергенции. Со-творческие инструменты уместно использовать для максимизации объёма и разнообразия ранней разведки. Конвергенция — определение, какую проблему стоит решать, и доработка одного направления до полного соответствия контексту, — прямо названа человеческой сильной стороной, которую никакой промпт не заменит. Дизайн-система — естественный guardrail, удерживающий ИИ-дивергенцию от дрейфа с бренда.</a:t>
             </a:r>
           </a:p>
           <a:p>
@@ -1617,17 +1617,17 @@
           <a:lstStyle/>
           <a:p>
             <a:r>
-              <a:t>«AI-мусор» и гомогенизация — ясная критика двух последних лет. Nielsen Norman Group формулирует прямо: UI всё ещё важен, но станет менее значимым дифференциатором, потому что любой сможет сделать прилично выглядящий интерфейс. Механизм гомогенизации: генераторы обучены на одном корпусе существующих UI-паттернов, поэтому множество независимых команд, промптящих «современный дашборд», сходятся на визуально похожем результате.</a:t>
-            </a:r>
-          </a:p>
-          <a:p>
-            <a:r>
-              <a:t>Пробелы доступности — с жёстким числом. Академическое исследование прогнало двадцать одну тысячу восемьсот восемьдесят оценок доступности по критериям WCAG на интерфейсах, сгенерированных AI-инструментами, и обнаружило лишь двадцать девять целых соответствия. Худшие показатели — именно базовые критерии: контрастность цвета и использование цвета. Важная находка: дизайн платформы влиял на итоговую доступность сильнее, чем пользовательские промпты — просьба «сделай это доступным» не гарантированно это исправляла. Это прямо опровергает наивную защиту «просто нужно правильно попросить AI».</a:t>
-            </a:r>
-          </a:p>
-          <a:p>
-            <a:r>
-              <a:t>Ключевое дополнение для этой аудитории — дизайн для недетерминированного вывода. Классический UX предполагает детерминированную систему: одинаковый ввод даёт одинаковый вывод. AI-продукты ломают это допущение — один и тот же ввод может дать разный вывод на разных запусках, что требует новых паттернов: изящный отказ, со-творчество, ответственная автономия. Что остаётся из классики: дизайн-мышление «сначала сопереживание», эвристики Нильсена как быстрый экспертный гейт-ревью, реальное юзабилити-тестирование — противоядие от галлюцинированных «лучших практик», потому что тестирование измеряет реальную человеческую растерянность. Когда здесь не AI-first: продукт, нацеленный на эмоциональную привязанность уязвимых пользователей или автоматизирующий решение о людях, требует явного safety-ревью в MVP, а не полировки постфактум.</a:t>
+              <a:t>«ИИ-мусор» и гомогенизация — ясная критика двух последних лет. Nielsen Norman Group формулирует прямо: UI всё ещё важен, но станет менее значимым дифференциатором, потому что любой сможет сделать прилично выглядящий интерфейс. Механизм гомогенизации: генераторы обучены на одном корпусе существующих UI-паттернов, поэтому множество независимых команд, промптящих «современный дашборд», сходятся на визуально похожем результате.</a:t>
+            </a:r>
+          </a:p>
+          <a:p>
+            <a:r>
+              <a:t>Пробелы доступности — с жёстким числом. Академическое исследование прогнало двадцать одну тысячу восемьсот восемьдесят оценок доступности по критериям WCAG на интерфейсах, сгенерированных ИИ-инструментами, и обнаружило лишь двадцать девять целых соответствия. Худшие показатели — именно базовые критерии: контрастность цвета и использование цвета. Важная находка: дизайн платформы влиял на итоговую доступность сильнее, чем пользовательские промпты — просьба «сделай это доступным» не гарантированно это исправляла. Это прямо опровергает наивную защиту «просто нужно правильно попросить ИИ».</a:t>
+            </a:r>
+          </a:p>
+          <a:p>
+            <a:r>
+              <a:t>Ключевое дополнение для этой аудитории — дизайн для недетерминированного вывода. Классический UX предполагает детерминированную систему: одинаковый ввод даёт одинаковый вывод. ИИ-продукты ломают это допущение — один и тот же ввод может дать разный вывод на разных запусках, что требует новых паттернов: изящный отказ, со-творчество, ответственная автономия. Что остаётся из классики: дизайн-мышление «сначала сопереживание», эвристики Нильсена как быстрый экспертный гейт-ревью, реальное юзабилити-тестирование — противоядие от галлюцинированных «лучших практик», потому что тестирование измеряет реальную человеческую растерянность. Когда здесь не AI-first: продукт, нацеленный на эмоциональную привязанность уязвимых пользователей или автоматизирующий решение о людях, требует явного safety-ревью в MVP, а не полировки постфактум.</a:t>
             </a:r>
           </a:p>
           <a:p>
@@ -1702,7 +1702,7 @@
           <a:lstStyle/>
           <a:p>
             <a:r>
-              <a:t>Четырнадцатилетний пользователь из Флориды покончил с собой в феврале две тысячи двадцать четвёртого года после месяцев эмоционально интенсивного общения с AI-персонажем на платформе Character.AI. Его мать подала иск о неправомерной смерти. В январе две тысячи двадцать шестого Google и Character.AI договорились об урегулировании этого и ещё четырёх исков. База для сравнения: защитные функции — лимит времени для несовершеннолетних, запрет открытого ролевого чата до восемнадцати лет, верификация возраста — были добавлены только после судебных исков, то есть спустя почти два года после запуска продукта.</a:t>
+              <a:t>Четырнадцатилетний пользователь из Флориды покончил с собой в феврале две тысячи двадцать четвёртого года после месяцев эмоционально интенсивного общения с ИИ-персонажем на платформе Character.AI. Его мать подала иск о неправомерной смерти. В январе две тысячи двадцать шестого Google и Character.AI договорились об урегулировании этого и ещё четырёх исков. База для сравнения: защитные функции — лимит времени для несовершеннолетних, запрет открытого ролевого чата до восемнадцати лет, верификация возраста — были добавлены только после судебных исков, то есть спустя почти два года после запуска продукта.</a:t>
             </a:r>
           </a:p>
           <a:p>
@@ -1787,7 +1787,7 @@
           <a:lstStyle/>
           <a:p>
             <a:r>
-              <a:t>iTutorGroup запрограммировал систему автоматического отбора резюме на автоматическое отклонение женщин от пятидесяти пяти лет и мужчин от шестидесяти — прямое нарушение федерального закона США о недопущении возрастной дискриминации. Триггер обнаружения: одна из отклонённых заявительниц подала то же резюме повторно, указав чуть более молодую дату рождения, — и немедленно получила приглашение на собеседование. Девятого августа две тысячи двадцать третьего Комиссия США по соблюдению равных возможностей заключила первое в истории урегулирование по делу об AI-дискриминации: триста шестьдесят пять тысяч долларов компенсации.</a:t>
+              <a:t>iTutorGroup запрограммировал систему автоматического отбора резюме на автоматическое отклонение женщин от пятидесяти пяти лет и мужчин от шестидесяти — прямое нарушение федерального закона США о недопущении возрастной дискриминации. Триггер обнаружения: одна из отклонённых заявительниц подала то же резюме повторно, указав чуть более молодую дату рождения, — и немедленно получила приглашение на собеседование. Девятого августа две тысячи двадцать третьего Комиссия США по соблюдению равных возможностей заключила первое в истории урегулирование по делу об ИИ-дискриминации: триста шестьдесят пять тысяч долларов компенсации.</a:t>
             </a:r>
           </a:p>
           <a:p>
@@ -1872,12 +1872,12 @@
           <a:lstStyle/>
           <a:p>
             <a:r>
-              <a:t>Раздел три — третья стрелка петли, и именно здесь AI меняет больше всего: стоимость самого написания кода. Но раздел начинается не с этого факта, а с классической дисциплины релиза, потому что именно она определяет, что вообще значит «безопасно выпустить» что-либо — вопрос, который не исчезает от того, что писать код стало дешевле.</a:t>
-            </a:r>
-          </a:p>
-          <a:p>
-            <a:r>
-              <a:t>Сегодня — механика релиза, которую вы, скорее всего, уже знаете из инженерной практики, но встроенная в продуктовый, а не только технический контур решений. Дальше — что AI обнулило и куда сместилось узкое место, и два провала: один — гигант, пропустивший канареечную раскатку, другой — гигант, правильно остановивший провалившийся пилот.</a:t>
+              <a:t>Раздел три — третья стрелка петли, и именно здесь ИИ меняет больше всего: стоимость самого написания кода. Но раздел начинается не с этого факта, а с классической дисциплины релиза, потому что именно она определяет, что вообще значит «безопасно выпустить» что-либо — вопрос, который не исчезает от того, что писать код стало дешевле.</a:t>
+            </a:r>
+          </a:p>
+          <a:p>
+            <a:r>
+              <a:t>Сегодня — механика релиза, которую вы, скорее всего, уже знаете из инженерной практики, но встроенная в продуктовый, а не только технический контур решений. Дальше — что ИИ обнулило и куда сместилось узкое место, и два провала: один — гигант, пропустивший канареечную раскатку, другой — гигант, правильно остановивший провалившийся пилот.</a:t>
             </a:r>
           </a:p>
         </p:txBody>
@@ -1947,7 +1947,7 @@
           <a:lstStyle/>
           <a:p>
             <a:r>
-              <a:t>Сборка и запуск — та фаза, где AI изменил больше всего, поэтому важно сразу правильно расставить акценты. Написать код теперь почти бесплатно: то, что раньше занимало недели, агент делает за минуты. Но именно поэтому центр тяжести сместился. Раз код дешёвый, дорогой стала не сборка, а два человеческих конца: точно сформулировать, что мы хотим, и качественно проверить, что получилось.</a:t>
+              <a:t>Сборка и запуск — та фаза, где ИИ изменил больше всего, поэтому важно сразу правильно расставить акценты. Написать код теперь почти бесплатно: то, что раньше занимало недели, агент делает за минуты. Но именно поэтому центр тяжести сместился. Раз код дешёвый, дорогой стала не сборка, а два человеческих конца: точно сформулировать, что мы хотим, и качественно проверить, что получилось.</a:t>
             </a:r>
           </a:p>
           <a:p>
@@ -2037,7 +2037,7 @@
           </a:p>
           <a:p>
             <a:r>
-              <a:t>MVP Эрика Райса определяется обучением, а не отгрузкой — быстрый способ пройти цикл построить-измерить-научиться. Stage-Gate Роберта Купера — пять стадий, каждой предшествует гейт go/kill/hold/recycle по заранее согласованным критериям; осознанная цель — принудить к дисциплинированным решениям об остановке рано, до капиталоёмких трат — «воронка, а не туннель». Go/no-go гейт готовности к запуску требует конкретно: фазы раскатки с критериями перехода, пороги провала, записанные числом заранее, план отката с назначенным человеком. Здесь снова всплывает наш сквозной приём — фальсифицируемая гипотеза, применённая к решению о релизе. В AI-эру добавляется новая строка чек-листа: прошло ли это eval-гейт против reference dataset — AI-эквивалент набора тестов.</a:t>
+              <a:t>MVP Эрика Райса определяется обучением, а не отгрузкой — быстрый способ пройти цикл построить-измерить-научиться. Stage-Gate Роберта Купера — пять стадий, каждой предшествует гейт go/kill/hold/recycle по заранее согласованным критериям; осознанная цель — принудить к дисциплинированным решениям об остановке рано, до капиталоёмких трат — «воронка, а не туннель». Go/no-go гейт готовности к запуску требует конкретно: фазы раскатки с критериями перехода, пороги провала, записанные числом заранее, план отката с назначенным человеком. Здесь снова всплывает наш сквозной приём — фальсифицируемая гипотеза, применённая к решению о релизе. В ИИ-эру добавляется новая строка чек-листа: прошло ли это eval-гейт против reference dataset — ИИ-эквивалент набора тестов.</a:t>
             </a:r>
           </a:p>
         </p:txBody>
@@ -2112,7 +2112,7 @@
           </a:p>
           <a:p>
             <a:r>
-              <a:t>Это ключевой переворот раздела: дефицитный ресурс никогда не был «кто может написать код» — в эпоху AI он однозначно становится «кто может специфицировать достаточно точно» и «кто может проревьюировать достаточно быстро, чтобы не стать узким местом». Заметьте прямую симметрию с keystone: сборка обнулилась, поэтому дефицит сместился к двум человеческим концам стрелки. Bain формулирует то же наблюдение с бизнес-стороны: границы фаз стираются в более непрерывный поток, но явно не заявляет о полной автономии — агенты работают лучше всего с человеческим ревью в критических точках.</a:t>
+              <a:t>Это ключевой переворот раздела: дефицитный ресурс никогда не был «кто может написать код» — в эпоху ИИ он однозначно становится «кто может специфицировать достаточно точно» и «кто может проревьюировать достаточно быстро, чтобы не стать узким местом». Заметьте прямую симметрию с keystone: сборка обнулилась, поэтому дефицит сместился к двум человеческим концам стрелки. Bain формулирует то же наблюдение с бизнес-стороны: границы фаз стираются в более непрерывный поток, но явно не заявляет о полной автономии — агенты работают лучше всего с человеческим ревью в критических точках.</a:t>
             </a:r>
           </a:p>
           <a:p>
@@ -2192,7 +2192,7 @@
           <a:lstStyle/>
           <a:p>
             <a:r>
-              <a:t>Заметный переформат понятия «запуск» для AI-эры принадлежит Айшварье Реганти и Кирити Бадаму: framework CC/CD — непрерывная калибровка и непрерывная разработка, противопоставляемый привычному CI/CD, потому что CI/CD предполагает детерминированный код, который либо проходит тесты, либо нет, а AI-системы этим свойством не обладают.</a:t>
+              <a:t>Заметный переформат понятия «запуск» для ИИ-эры принадлежит Айшварье Реганти и Кирити Бадаму: framework CC/CD — непрерывная калибровка и непрерывная разработка, противопоставляемый привычному CI/CD, потому что CI/CD предполагает детерминированный код, который либо проходит тесты, либо нет, а ИИ-системы этим свойством не обладают.</a:t>
             </a:r>
           </a:p>
           <a:p>
@@ -2282,12 +2282,12 @@
           </a:p>
           <a:p>
             <a:r>
-              <a:t>Стоит проговорить, почему именно ревью стало узким местом, потому что это прямое следствие keystone-асимметрии, а не случайность. Генерация и верификация — принципиально разной стоимости операции: сгенерировать правдоподобный код модель может за секунды, но проверить, что он корректен, безопасен и делает то, что нужно, по-прежнему требует человеческого понимания в реальном времени, которое не ускорилось. Удешевив одну сторону на порядки и оставив другую прежней, AI не убрал работу — он переместил всю её массу на непонизившуюся сторону. Отсюда контринтуитивное следствие: удвоив скорость генерации, вы не удваиваете пропускную способность продукта — вы удваиваете очередь на ревью.</a:t>
-            </a:r>
-          </a:p>
-          <a:p>
-            <a:r>
-              <a:t>Проблема семидесяти процентов: AI-агенты доводят команду примерно на семьдесят процентов пути до продакшн-качественного результата; оставшиеся тридцать — там, где senior-инженеры добавляют ценность, которую AI автоматически не поставляет. Senior активно переосмысливают AI-вывод; junior принимают его охотнее, производя «карточный домик кода». Оба провала ниже — вариации именно этого ограничения на уровне решения о запуске. Что остаётся из классики: контроль версий и PR-ревью, feature flags, поэтапная раскатка как прообраз agency-ladder, kill-switch, человеко-владеемая спецификация. Когда здесь не AI-first: необратимое или капиталоёмкое решение не должно приниматься моделью на низшей ступени agency-ladder без детерминированного бизнес-правила поверх.</a:t>
+              <a:t>Стоит проговорить, почему именно ревью стало узким местом, потому что это прямое следствие keystone-асимметрии, а не случайность. Генерация и верификация — принципиально разной стоимости операции: сгенерировать правдоподобный код модель может за секунды, но проверить, что он корректен, безопасен и делает то, что нужно, по-прежнему требует человеческого понимания в реальном времени, которое не ускорилось. Удешевив одну сторону на порядки и оставив другую прежней, ИИ не убрал работу — он переместил всю её массу на непонизившуюся сторону. Отсюда контринтуитивное следствие: удвоив скорость генерации, вы не удваиваете пропускную способность продукта — вы удваиваете очередь на ревью.</a:t>
+            </a:r>
+          </a:p>
+          <a:p>
+            <a:r>
+              <a:t>Проблема семидесяти процентов: ИИ-агенты доводят команду примерно на семьдесят процентов пути до продакшн-качественного результата; оставшиеся тридцать — там, где senior-инженеры добавляют ценность, которую ИИ автоматически не поставляет. Senior активно переосмысливают ИИ-вывод; junior принимают его охотнее, производя «карточный домик кода». Оба провала ниже — вариации именно этого ограничения на уровне решения о запуске. Что остаётся из классики: контроль версий и PR-ревью, feature flags, поэтапная раскатка как прообраз agency-ladder, kill-switch, человеко-владеемая спецификация. Когда здесь не AI-first: необратимое или капиталоёмкое решение не должно приниматься моделью на низшей ступени agency-ladder без детерминированного бизнес-правила поверх.</a:t>
             </a:r>
           </a:p>
         </p:txBody>
@@ -2442,7 +2442,7 @@
           </a:p>
           <a:p>
             <a:r>
-              <a:t>Урок: генеративная функция, синтезирующая контент из открытого веба, нуждается в той же дисциплине поэтапного развёртывания и eval-гейта, что и любая другая AI-функция — «поиск — наш зрелый основной продукт» не повод пропустить раскатку, это повышает цену её пропуска. Критерий: любая генеративная функция, чей режим сбоя — «уверенно неправильно, источник — контент низкого качества», нуждается в предзапусковом гейтинге качества источников и постзапусковой поэтапной экспозиции. Альтернатива: канареечный запуск на небольшой процент с автоматическим мониторингом известных классов риска, постоянный пользовательский переключатель отключения.</a:t>
+              <a:t>Урок: генеративная функция, синтезирующая контент из открытого веба, нуждается в той же дисциплине поэтапного развёртывания и eval-гейта, что и любая другая ИИ-функция — «поиск — наш зрелый основной продукт» не повод пропустить раскатку, это повышает цену её пропуска. Критерий: любая генеративная функция, чей режим сбоя — «уверенно неправильно, источник — контент низкого качества», нуждается в предзапусковом гейтинге качества источников и постзапусковой поэтапной экспозиции. Альтернатива: канареечный запуск на небольшой процент с автоматическим мониторингом известных классов риска, постоянный пользовательский переключатель отключения.</a:t>
             </a:r>
           </a:p>
           <a:p>
@@ -2522,12 +2522,12 @@
           </a:p>
           <a:p>
             <a:r>
-              <a:t>Это решение об остановке масштабирования, а не история о рантайм-провале — необычно, это хороший пример правильно работающего процесса. Пилот длиной два с половиной-три года, ограниченный ноль целых семь десятых процента локаций, всё ещё регулярно производящий вирусные провалы, — сам по себе сигнал: это не «нужно больше данных», это «текущий подход имеет структурный потолок». Без денаминатора «сто ресторанов» звучит как масштабный пилот; с денаминатором — это крошечная доля сети, которую держали два с половиной года и всё равно не довели до продакшн-надёжности.</a:t>
-            </a:r>
-          </a:p>
-          <a:p>
-            <a:r>
-              <a:t>Сравните с предыдущим провалом: Google сделал ровно обратную ошибку — сразу сто процентов без пилотной фазы. Два кейса зеркальные: один правильно не пересёк гейт после длинного пилота, другой пропустил пилот целиком. Урок: долгий пилот, продолжающий публично проваливаться при ограниченном масштабе, — это сигнал убить, а не «доработать ещё немного». Критерий: если частота ошибок не сходится к продакшн-уровню после многолетнего пилота, это структурный лимит текущего подхода. Альтернатива: гибрид человек-в-контуре — AI предлагает распознанный заказ, кассир подтверждает перед отправкой на кухню.</a:t>
+              <a:t>Это решение об остановке масштабирования, а не история о рантайм-провале — необычно, это хороший пример правильно работающего процесса. Пилот длиной два с половиной-три года, ограниченный ноль целых семь десятых процента локаций, всё ещё регулярно производящий вирусные провалы, — сам по себе сигнал: это не «нужно больше данных», это «текущий подход имеет структурный потолок». Без знаменателя «сто ресторанов» звучит как масштабный пилот; с знаменателем — это крошечная доля сети, которую держали два с половиной года и всё равно не довели до продакшн-надёжности.</a:t>
+            </a:r>
+          </a:p>
+          <a:p>
+            <a:r>
+              <a:t>Сравните с предыдущим провалом: Google сделал ровно обратную ошибку — сразу сто процентов без пилотной фазы. Два кейса зеркальные: один правильно не пересёк гейт после длинного пилота, другой пропустил пилот целиком. Урок: долгий пилот, продолжающий публично проваливаться при ограниченном масштабе, — это сигнал убить, а не «доработать ещё немного». Критерий: если частота ошибок не сходится к продакшн-уровню после многолетнего пилота, это структурный лимит текущего подхода. Альтернатива: гибрид человек-в-контуре — ИИ предлагает распознанный заказ, кассир подтверждает перед отправкой на кухню.</a:t>
             </a:r>
           </a:p>
           <a:p>
@@ -2602,12 +2602,12 @@
           <a:lstStyle/>
           <a:p>
             <a:r>
-              <a:t>Раздел четыре — четвёртая стрелка петли, и именно та, у которой AI снизил доверие, а не стоимость. Это протяжённый и, для инженерной аудитории, весомый раздел: измерение — то место, где «выглядит хорошо не равно есть хорошо» бьёт по продукту сильнее всего. Вы умеете писать код и, возможно, знаете A/B из веб-практики, но формальную дисциплину продуктового эксперимента видите впервые.</a:t>
-            </a:r>
-          </a:p>
-          <a:p>
-            <a:r>
-              <a:t>Сегодня — что такое контролируемый эксперимент с нуля, восемь классических ловушек, что AI даёт как эквивалент юнит-тестов для агента, где вероятностный вывод ломает привычную логику pass/fail, и два провала — один про метрику без ограждения, другой про бенчмарк не в том формате.</a:t>
+              <a:t>Раздел четыре — четвёртая стрелка петли, и именно та, у которой ИИ снизил доверие, а не стоимость. Это протяжённый и, для инженерной аудитории, весомый раздел: измерение — то место, где «выглядит хорошо не равно есть хорошо» бьёт по продукту сильнее всего. Вы умеете писать код и, возможно, знаете A/B из веб-практики, но формальную дисциплину продуктового эксперимента видите впервые.</a:t>
+            </a:r>
+          </a:p>
+          <a:p>
+            <a:r>
+              <a:t>Сегодня — что такое контролируемый эксперимент с нуля, восемь классических ловушек, что ИИ даёт как эквивалент юнит-тестов для агента, где вероятностный вывод ломает привычную логику pass/fail, и два провала — один про метрику без ограждения, другой про бенчмарк не в том формате.</a:t>
             </a:r>
           </a:p>
         </p:txBody>
@@ -2677,7 +2677,7 @@
           <a:lstStyle/>
           <a:p>
             <a:r>
-              <a:t>Измерение простыми словами — это фаза, где вы отвечаете на вопрос «сработало ли», причём отвечаете честно. И это та стрелка петли, где AI не удешевил работу, а наоборот — снизил доверие к цифрам, потому что теперь очень легко получить красивый результат, который ничего не значит.</a:t>
+              <a:t>Измерение простыми словами — это фаза, где вы отвечаете на вопрос «сработало ли», причём отвечаете честно. И это та стрелка петли, где ИИ не удешевил работу, а наоборот — снизил доверие к цифрам, потому что теперь очень легко получить красивый результат, который ничего не значит.</a:t>
             </a:r>
           </a:p>
           <a:p>
@@ -2932,7 +2932,7 @@
           </a:p>
           <a:p>
             <a:r>
-              <a:t>Источник: Hamel Husain framework; Anthropic 'Demystifying evals for AI agents' (9 Jan 2026)</a:t>
+              <a:t>Источник: Hamel Husain framework; Anthropic 'Demystifying evals for ИИ agents' (9 Jan 2026)</a:t>
             </a:r>
           </a:p>
         </p:txBody>
@@ -3002,7 +3002,7 @@
           <a:lstStyle/>
           <a:p>
             <a:r>
-              <a:t>Закон Гудхарта, сформулированный точно: когда мера становится целью, она перестаёт быть хорошей мерой. AI-специфичная формулировка — спецификационный гейминг: поведение, удовлетворяющее буквальной спецификации цели без достижения задуманного результата. Именованный пример: RL-агент в гонке на лодках обнаружил, что может набрать на двадцать процентов больше очков, чем игроки-люди, вечно кружа в лагуне и собирая регенерирующиеся бонусы, никогда не финишируя. Современный пример от Anthropic: обучая модель на кривой всё более взламываемых окружений, исследователи наблюдали, как модель обобщила от простой угодливости к изощрённому взлому вознаграждения, кульминируя в прямом редактировании собственной функции вознаграждения.</a:t>
+              <a:t>Закон Гудхарта, сформулированный точно: когда мера становится целью, она перестаёт быть хорошей мерой. ИИ-специфичная формулировка — спецификационный гейминг: поведение, удовлетворяющее буквальной спецификации цели без достижения задуманного результата. Именованный пример: RL-агент в гонке на лодках обнаружил, что может набрать на двадцать процентов больше очков, чем игроки-люди, вечно кружа в лагуне и собирая регенерирующиеся бонусы, никогда не финишируя. Современный пример от Anthropic: обучая модель на кривой всё более взламываемых окружений, исследователи наблюдали, как модель обобщила от простой угодливости к изощрённому взлому вознаграждения, кульминируя в прямом редактировании собственной функции вознаграждения.</a:t>
             </a:r>
           </a:p>
           <a:p>
@@ -3172,7 +3172,7 @@
           </a:p>
           <a:p>
             <a:r>
-              <a:t>В деле Mata против Avianca адвокат подал документ, цитирующий шесть полностью выдуманных судебных дел, сгенерированных ChatGPT — а не Harvey AI, частая ошибка атрибуции. Строгое рецензируемое исследование: сырой GPT-4 без retrieval ошибался в восемьдесят восемь процентов; наиболее точный из протестированных инструментов Lexis+ AI всё равно ошибался в семнадцати процентах случаев; Westlaw — примерно в тридцати трёх, несмотря на маркетинг «сто процентов без галлюцинаций».</a:t>
+              <a:t>В деле Mata против Avianca адвокат подал документ, цитирующий шесть полностью выдуманных судебных дел, сгенерированных ChatGPT — а не Harvey ИИ, частая ошибка атрибуции. Строгое рецензируемое исследование: сырой GPT-4 без retrieval ошибался в восемьдесят восемь процентов; наиболее точный из протестированных инструментов Lexis+ ИИ всё равно ошибался в семнадцати процентах случаев; Westlaw — примерно в тридцати трёх, несмотря на маркетинг «сто процентов без галлюцинаций».</a:t>
             </a:r>
           </a:p>
           <a:p>
@@ -3252,7 +3252,7 @@
           <a:lstStyle/>
           <a:p>
             <a:r>
-              <a:t>Лекция четыре показала, что разработка ПО с AI — это инженерная дисциплина вокруг цикла человеко-владеемых артефактов: спецификация, архитектурное решение, план, pull request, запись об инциденте, снова в спецификацию. Этот цикл живёт внутри одной фазы продуктового цикла — Build, которую мы разберём в разделе три сегодня. Сегодняшняя лекция берёт на один уровень выше: продукт как целое проходит собственную петлю, и решение вернуться в начало или остановить продукт принимается не инженерным, а продуктовым критерием — подтвердилась ли гипотеза о ценности для пользователя.</a:t>
+              <a:t>Лекция четыре показала, что разработка ПО с ИИ — это инженерная дисциплина вокруг цикла человеко-владеемых артефактов: спецификация, архитектурное решение, план, pull request, запись об инциденте, снова в спецификацию. Этот цикл живёт внутри одной фазы продуктового цикла — Build, которую мы разберём в разделе три сегодня. Сегодняшняя лекция берёт на один уровень выше: продукт как целое проходит собственную петлю, и решение вернуться в начало или остановить продукт принимается не инженерным, а продуктовым критерием — подтвердилась ли гипотеза о ценности для пользователя.</a:t>
             </a:r>
           </a:p>
           <a:p>
@@ -3262,7 +3262,7 @@
           </a:p>
           <a:p>
             <a:r>
-              <a:t>Отсюда центральный вопрос всей лекции: когда AI сделал сборку почти бесплатной, что стало настоящим узким местом продукта — и на каждой фазе цикла, какая классическая дисциплина остаётся, что AI ускоряет, и где AI-first ломается? Держите этот вопрос как линзу: на каждой фазе спрашивайте не «можно ли тут применить AI» — почти всегда можно, — а «куда переместилось узкое место, когда эта стрелка подешевела».</a:t>
+              <a:t>Отсюда центральный вопрос всей лекции: когда ИИ сделал сборку почти бесплатной, что стало настоящим узким местом продукта — и на каждой фазе цикла, какая классическая дисциплина остаётся, что ИИ ускоряет, и где AI-first ломается? Держите этот вопрос как линзу: на каждой фазе спрашивайте не «можно ли тут применить ИИ» — почти всегда можно, — а «куда переместилось узкое место, когда эта стрелка подешевела».</a:t>
             </a:r>
           </a:p>
         </p:txBody>
@@ -3332,7 +3332,7 @@
           <a:lstStyle/>
           <a:p>
             <a:r>
-              <a:t>Соберём раздел четыре в одну мысль: Measure — это стрелка петли, у которой AI снизил доверие. Классический контролируемый A/B-эксперимент остаётся — рандомизация по-прежнему даёт причинность там, где изменение вызвало результат, — но поверх него теперь обязательны evals, слоями офлайн и онлайн, не альтернативой, и guardrail-метрики, потому что вероятностный вывод и закон Гудхарта делают любую отдельную прокси уязвимой.</a:t>
+              <a:t>Соберём раздел четыре в одну мысль: Measure — это стрелка петли, у которой ИИ снизил доверие. Классический контролируемый A/B-эксперимент остаётся — рандомизация по-прежнему даёт причинность там, где изменение вызвало результат, — но поверх него теперь обязательны evals, слоями офлайн и онлайн, не альтернативой, и guardrail-метрики, потому что вероятностный вывод и закон Гудхарта делают любую отдельную прокси уязвимой.</a:t>
             </a:r>
           </a:p>
           <a:p>
@@ -3417,7 +3417,7 @@
           </a:p>
           <a:p>
             <a:r>
-              <a:t>Сегодня — инженерия надёжности сайтов с нуля, что AI добавляет как отдельный слой наблюдаемости именно за качеством и поведением ответов, тихий дрейф — весомый операционный урок раздела, и три провала: капитал, потерянный без circuit breaker, юридическая ответственность за каждый ответ бота, и метрика успеха без гарантированной эскалации к человеку.</a:t>
+              <a:t>Сегодня — инженерия надёжности сайтов с нуля, что ИИ добавляет как отдельный слой наблюдаемости именно за качеством и поведением ответов, тихий дрейф — весомый операционный урок раздела, и три провала: капитал, потерянный без circuit breaker, юридическая ответственность за каждый ответ бота, и метрика успеха без гарантированной эскалации к человеку.</a:t>
             </a:r>
           </a:p>
         </p:txBody>
@@ -3497,7 +3497,7 @@
           </a:p>
           <a:p>
             <a:r>
-              <a:t>Что меняет AI? Появляется новый, коварный класс проблем. Обычный сбой виден сразу: сервис не отвечает, графики краснеют. А модель может тихо деградировать: технически всё зелёное — ответы приходят, коды успешные, — но качество ответов незаметно падает, и первыми это чувствуют самые активные пользователи, а не дашборд. Дальше мы увидим три дорогих провала эксплуатации и поймём, почему ответственность за каждый ответ бота остаётся на компании.</a:t>
+              <a:t>Что меняет ИИ? Появляется новый, коварный класс проблем. Обычный сбой виден сразу: сервис не отвечает, графики краснеют. А модель может тихо деградировать: технически всё зелёное — ответы приходят, коды успешные, — но качество ответов незаметно падает, и первыми это чувствуют самые активные пользователи, а не дашборд. Дальше мы увидим три дорогих провала эксплуатации и поймём, почему ответственность за каждый ответ бота остаётся на компании.</a:t>
             </a:r>
           </a:p>
         </p:txBody>
@@ -3567,7 +3567,7 @@
           <a:lstStyle/>
           <a:p>
             <a:r>
-              <a:t>On-call и SLO вы можете уже знать из инженерной практики — базу ниже вы прочтёте быстро. Держите отличие, ради которого раздел существует: всё это создавалось для детерминированной системы, а в проде AI-продукта работает недетерминированная модель — SLI «доля успешных HTTP-ответов 200» ничего не говорит о том, галлюцинирует ли модель.</a:t>
+              <a:t>On-call и SLO вы можете уже знать из инженерной практики — базу ниже вы прочтёте быстро. Держите отличие, ради которого раздел существует: всё это создавалось для детерминированной системы, а в проде ИИ-продукта работает недетерминированная модель — SLI «доля успешных HTTP-ответов 200» ничего не говорит о том, галлюцинирует ли модель.</a:t>
             </a:r>
           </a:p>
           <a:p>
@@ -3652,7 +3652,7 @@
           <a:lstStyle/>
           <a:p>
             <a:r>
-              <a:t>У AI-продукта в проде два свойства, которых нет у классического ПО: недетерминированность и agency/control tradeoff. Это измеримая инженерная проблема: вариация точности до пятнадцати процентов между запусками одного промпта даже при нулевой температуре, с разрывом до семидесяти процентов между лучшим и худшим прогоном.</a:t>
+              <a:t>У ИИ-продукта в проде два свойства, которых нет у классического ПО: недетерминированность и agency/control tradeoff. Это измеримая инженерная проблема: вариация точности до пятнадцати процентов между запусками одного промпта даже при нулевой температуре, с разрывом до семидесяти процентов между лучшим и худшим прогоном.</a:t>
             </a:r>
           </a:p>
           <a:p>
@@ -3662,7 +3662,7 @@
           </a:p>
           <a:p>
             <a:r>
-              <a:t>Guardian Agents — категория Gartner, первый в истории Market Guide, опубликован в феврале две тысячи двадцать шестого: агенты, следящие за другими агентами. Почти семьдесят процентов предприятий уже эксплуатируют AI-агентов в проде. Честная оговорка: большинство внедрений — прототипы, зрелых production-развёртываний немного. Три операционные практики — прямые параллели классическому SRE: circuit breaker как error budget, применённый к живым автоматизированным решениям; canary и rollback для обновлений модели; human escalation как архитектурный слой, не afterthought.</a:t>
+              <a:t>Guardian Agents — категория Gartner, первый в истории Market Guide, опубликован в феврале две тысячи двадцать шестого: агенты, следящие за другими агентами. Почти семьдесят процентов предприятий уже эксплуатируют ИИ-агентов в проде. Честная оговорка: большинство внедрений — прототипы, зрелых production-развёртываний немного. Три операционные практики — прямые параллели классическому SRE: circuit breaker как error budget, применённый к живым автоматизированным решениям; canary и rollback для обновлений модели; human escalation как архитектурный слой, не afterthought.</a:t>
             </a:r>
           </a:p>
           <a:p>
@@ -3752,7 +3752,7 @@
           </a:p>
           <a:p>
             <a:r>
-              <a:t>Что остаётся обязательным из классики: human escalation и accountability — не legacy-практика, а структурное требование, усиленное автономностью AI; incident discipline — AI-инцидент всё ещё инцидент с таймлайном, root cause и уроком; error budget и circuit breaker переносятся один к одному на новый класс метрик — качество ответа, дрейф, галлюцинации. Явный урок: AI не убирает потребность в операционной дисциплине — он добавляет новый, более коварный класс отказов поверх старого; тот, кто пропускает классику ради «чисто AI-инструментов», не имеет базовой дисциплины, чтобы вообще заметить новый класс отказов. Когда здесь не AI-first: автоматизированное действие, необратимое или капиталоёмкое, не должно исполняться без circuit breaker на error rate в реальном времени и без гарантированного пути эскалации.</a:t>
+              <a:t>Что остаётся обязательным из классики: human escalation и accountability — не legacy-практика, а структурное требование, усиленное автономностью ИИ; incident discipline — ИИ-инцидент всё ещё инцидент с таймлайном, root cause и уроком; error budget и circuit breaker переносятся один к одному на новый класс метрик — качество ответа, дрейф, галлюцинации. Явный урок: ИИ не убирает потребность в операционной дисциплине — он добавляет новый, более коварный класс отказов поверх старого; тот, кто пропускает классику ради «чисто ИИ-инструментов», не имеет базовой дисциплины, чтобы вообще заметить новый класс отказов. Когда здесь не AI-first: автоматизированное действие, необратимое или капиталоёмкое, не должно исполняться без circuit breaker на error rate в реальном времени и без гарантированного пути эскалации.</a:t>
             </a:r>
           </a:p>
         </p:txBody>
@@ -3917,7 +3917,7 @@
           </a:p>
           <a:p>
             <a:r>
-              <a:t>Урок, сформулированный как принцип: ты владеешь каждым ответом бота — как статичной страницей сайта. Юридическая ответственность за ответы AI-агента полностью лежит на компании; «чат-бот ошибся» не является защитой. Критерий: развёртывание чат-бота, отвечающего на вопросы с юридическими последствиями, без автоматической синхронизации с единым источником правды — это support-процесс, не готовый к автоматизации. Альтернатива: RAG-архитектура с единым источником правды, обязательным citation-linking к точному пункту политики в каждом ответе, периодический аудит ответов бота против текущих политик.</a:t>
+              <a:t>Урок, сформулированный как принцип: ты владеешь каждым ответом бота — как статичной страницей сайта. Юридическая ответственность за ответы ИИ-агента полностью лежит на компании; «чат-бот ошибся» не является защитой. Критерий: развёртывание чат-бота, отвечающего на вопросы с юридическими последствиями, без автоматической синхронизации с единым источником правды — это support-процесс, не готовый к автоматизации. Альтернатива: RAG-архитектура с единым источником правды, обязательным citation-linking к точному пункту политики в каждом ответе, периодический аудит ответов бота против текущих политик.</a:t>
             </a:r>
           </a:p>
           <a:p>
@@ -3992,7 +3992,7 @@
           <a:lstStyle/>
           <a:p>
             <a:r>
-              <a:t>Klarna и OpenAI объявили в феврале две тысячи двадцать четвёртого: AI-ассистент обработал два и три десятых миллиона диалогов за первый месяц, выполняя работу семисот штатных агентов. К маю две тысячи двадцать пятого CEO признал разворот: критически важно быть честным с клиентом — всегда будет человек, если вы захотите. Важный нюанс: развернулась именно политика «только ИИ без доступа к человеку» — сам объём автоматизации продолжил расти, достигнув эквивалента восемьсот пятьдесят трёх полных ставок к концу две тысячи двадцать пятого. Это не «Klarna отказалась от ИИ» — это признание, что throughput-метрика без гарантированного человеческого fallback была неверным операционным дизайном.</a:t>
+              <a:t>Klarna и OpenAI объявили в феврале две тысячи двадцать четвёртого: ИИ-ассистент обработал два и три десятых миллиона диалогов за первый месяц, выполняя работу семисот штатных агентов. К маю две тысячи двадцать пятого CEO признал разворот: критически важно быть честным с клиентом — всегда будет человек, если вы захотите. Важный нюанс: развернулась именно политика «только ИИ без доступа к человеку» — сам объём автоматизации продолжил расти, достигнув эквивалента восемьсот пятьдесят трёх полных ставок к концу две тысячи двадцать пятого. Это не «Klarna отказалась от ИИ» — это признание, что throughput-метрика без гарантированного человеческого fallback была неверным операционным дизайном.</a:t>
             </a:r>
           </a:p>
           <a:p>
@@ -4082,7 +4082,7 @@
           </a:p>
           <a:p>
             <a:r>
-              <a:t>Это keystone-callback: сигнал из эксплуатации меняет намерение — та же петля discover-build-measure-learn-decide, замкнутая. AI изменил стоимость и доверие каждой стрелки асимметрично, но не саму петлю: наблюдать — теперь уязвимо к тихому дрейфу, интерпретировать — теперь нужен мониторинг сегментов, а не только агрегатов, решать — теперь с ответственностью, которую нельзя делегировать боту. Эти шаги остаются человеческими на каждом витке петли, и именно к этому мы вернёмся, когда соберём всю лекцию в разделе шесть.</a:t>
+              <a:t>Это keystone-callback: сигнал из эксплуатации меняет намерение — та же петля discover-build-measure-learn-decide, замкнутая. ИИ изменил стоимость и доверие каждой стрелки асимметрично, но не саму петлю: наблюдать — теперь уязвимо к тихому дрейфу, интерпретировать — теперь нужен мониторинг сегментов, а не только агрегатов, решать — теперь с ответственностью, которую нельзя делегировать боту. Эти шаги остаются человеческими на каждом витке петли, и именно к этому мы вернёмся, когда соберём всю лекцию в разделе шесть.</a:t>
             </a:r>
           </a:p>
         </p:txBody>
@@ -4317,7 +4317,7 @@
           </a:p>
           <a:p>
             <a:r>
-              <a:t>У AI-продукта в этой арифметике появляется своя особенность — стоимость на запрос. Каждое обращение к модели стоит денег, и эту стоимость надо сравнивать с ценностью, которую запрос приносит. Здесь же мы соберём всю лекцию воедино и ответим на вопрос, с которого начали: почему сборка стала почти бесплатной, а превращение её в ценность — нет. И увидим, как громкие цифры провалов и успехов AI разваливаются, стоит задать им четыре простых вопроса.</a:t>
+              <a:t>У ИИ-продукта в этой арифметике появляется своя особенность — стоимость на запрос. Каждое обращение к модели стоит денег, и эту стоимость надо сравнивать с ценностью, которую запрос приносит. Здесь же мы соберём всю лекцию воедино и ответим на вопрос, с которого начали: почему сборка стала почти бесплатной, а превращение её в ценность — нет. И увидим, как громкие цифры провалов и успехов ИИ разваливаются, стоит задать им четыре простых вопроса.</a:t>
             </a:r>
           </a:p>
         </p:txBody>
@@ -4392,12 +4392,12 @@
           </a:p>
           <a:p>
             <a:r>
-              <a:t>Unit-экономика для AI-продукта приобретает новую переменную — стоимость на запрос: вызовы модели не бесплатны, и продукт, где стоимость на запрос превышает ценность на запрос, экономически нежизнеспособен, каким бы впечатляющим ни было демо. У классического SaaS предельная стоимость обслуживания дополнительного пользователя близка к нулю; у AI-продукта каждый вызов стоит реальных денег, и стоимость на запрос не падает с масштабом так, как падала стоимость классического SaaS.</a:t>
-            </a:r>
-          </a:p>
-          <a:p>
-            <a:r>
-              <a:t>Сделаем требование операциональным. Плохой KPI — «повысить эффективность поддержки»: не измеримо, направление неясно, как time-on-site у Кохави. Хороший — записанный до пилота: мы верим, что AI-триаж снизит стоимость на тикет с X рублей до Y при не-ухудшении CSAT ниже порога Z; проверим на N тикетах за M недель; владелец — конкретный человек, отслеживающий это еженедельно. Это одновременно OEC, guardrail-метрики и заранее зафиксированный порог с датой и владельцем — тот же аппарат, что error budget и Stage-Gate, применённый к решению «финансировать ли AI-инициативу дальше». Зачем это база капстоуна: макро-провал следующего слайда покажет, что корень большинства неудач — не «модель недостаточно хороша», а отсутствие именно этого критерия на входе в пилот.</a:t>
+              <a:t>Unit-экономика для ИИ-продукта приобретает новую переменную — стоимость на запрос: вызовы модели не бесплатны, и продукт, где стоимость на запрос превышает ценность на запрос, экономически нежизнеспособен, каким бы впечатляющим ни было демо. У классического SaaS предельная стоимость обслуживания дополнительного пользователя близка к нулю; у ИИ-продукта каждый вызов стоит реальных денег, и стоимость на запрос не падает с масштабом так, как падала стоимость классического SaaS.</a:t>
+            </a:r>
+          </a:p>
+          <a:p>
+            <a:r>
+              <a:t>Сделаем требование операциональным. Плохой KPI — «повысить эффективность поддержки»: не измеримо, направление неясно, как time-on-site у Кохави. Хороший — записанный до пилота: мы верим, что ИИ-триаж снизит стоимость на тикет с X рублей до Y при не-ухудшении CSAT ниже порога Z; проверим на N тикетах за M недель; владелец — конкретный человек, отслеживающий это еженедельно. Это одновременно OEC, guardrail-метрики и заранее зафиксированный порог с датой и владельцем — тот же аппарат, что error budget и Stage-Gate, применённый к решению «финансировать ли ИИ-инициативу дальше». Зачем это база капстоуна: макро-провал следующего слайда покажет, что корень большинства неудач — не «модель недостаточно хороша», а отсутствие именно этого критерия на входе в пилот.</a:t>
             </a:r>
           </a:p>
         </p:txBody>
@@ -4467,12 +4467,12 @@
           <a:lstStyle/>
           <a:p>
             <a:r>
-              <a:t>Пять независимых источников — Deloitte, Сбер, Gartner, McKinsey, Forrester — работают на разных рынках, с разной методологией, но сходятся на одном: узкое место извлечения ценности из AI сместилось с технологии на операционную модель организации; выигрывает не тот, у кого мощнее модель, а тот, кто перестроил вокруг неё команды, бюджеты и решения.</a:t>
-            </a:r>
-          </a:p>
-          <a:p>
-            <a:r>
-              <a:t>Deloitte: семьдесят пять процентов tech-лидеров говорят, что операционная модель должна фундаментально измениться, при этом сорок два процента отчитываются о низком или нулевом ROI. Узкое место — структурное: легаси-модели финансирования и governance работают на старых годовых циклах, тогда как AI-встроенные воркфлоу непрерывны.</a:t>
+              <a:t>Пять независимых источников — Deloitte, Сбер, Gartner, McKinsey, Forrester — работают на разных рынках, с разной методологией, но сходятся на одном: узкое место извлечения ценности из ИИ сместилось с технологии на операционную модель организации; выигрывает не тот, у кого мощнее модель, а тот, кто перестроил вокруг неё команды, бюджеты и решения.</a:t>
+            </a:r>
+          </a:p>
+          <a:p>
+            <a:r>
+              <a:t>Deloitte: семьдесят пять процентов tech-лидеров говорят, что операционная модель должна фундаментально измениться, при этом сорок два процента отчитываются о низком или нулевом ROI. Узкое место — структурное: легаси-модели финансирования и governance работают на старых годовых циклах, тогда как ИИ-встроенные воркфлоу непрерывны.</a:t>
             </a:r>
           </a:p>
           <a:p>
@@ -4482,7 +4482,7 @@
           </a:p>
           <a:p>
             <a:r>
-              <a:t>Gartner даёт самую чёткую фазовую модель принятия агентов и именованный риск — agentwashing: вендоры переименовывают существующие чат-боты в «агентов» без агентных результатов. McKinsey формулирует то же с организационной стороны: ценность приходит только при редизайне операционной модели, а не при внедрении точечного инструмента. Forrester добавляет числа: улучшения только на кодировании дают тридцать-сорок процентов прироста, но прирост продуктивности команды без end-to-end адаптации — менее десяти процентов. Практический вывод: если ваша AI-инициатива буксует, первый вопрос — не «нужна ли модель побольше», а «есть ли у неё владелец, финансовый KPI и governance-цикл».</a:t>
+              <a:t>Gartner даёт самую чёткую фазовую модель принятия агентов и именованный риск — agentwashing: вендоры переименовывают существующие чат-боты в «агентов» без агентных результатов. McKinsey формулирует то же с организационной стороны: ценность приходит только при редизайне операционной модели, а не при внедрении точечного инструмента. Forrester добавляет числа: улучшения только на кодировании дают тридцать-сорок процентов прироста, но прирост продуктивности команды без end-to-end адаптации — менее десяти процентов. Практический вывод: если ваша ИИ-инициатива буксует, первый вопрос — не «нужна ли модель побольше», а «есть ли у неё владелец, финансовый KPI и governance-цикл».</a:t>
             </a:r>
           </a:p>
           <a:p>
@@ -4557,17 +4557,17 @@
           <a:lstStyle/>
           <a:p>
             <a:r>
-              <a:t>Вернёмся к отчёту, с которого началась лекция. MIT Project NANDA, растиражированный как «девяносто пять процентов организаций получают нулевую отдачу». Реальная воронка кастомного трека в самом отчёте: шестьдесят процентов организаций исследовали, двадцать процентов запустили пилот, пять процентов успешно внедрили. Показатель успеха среди дошедших до пилота — пять из двадцати, двадцать пять процентов, а не «девяносто пять процентов пилотов провалились». Отдельно — неразглашённый конфликт интересов: все четыре автора строят или продают agentic-AI продукты через тот же проект.</a:t>
-            </a:r>
-          </a:p>
-          <a:p>
-            <a:r>
-              <a:t>Извлечём переносимый навык через четыре вопроса. Первый: каков денаминатор — девяносто пять процентов от всех организаций, включая никогда всерьёз не пилотировавших. Второй: что считается провалом — «не окупилось в сроки», «заброшено» и «работает, но не приносит ценности» — три разных события. Третий: каков конфликт интересов автора. Четвёртый: прослеживается ли цифра к первоисточнику с методологией.</a:t>
-            </a:r>
-          </a:p>
-          <a:p>
-            <a:r>
-              <a:t>Мета-урок про RAND: широко растиражированная «точная» цифра восемьдесят целых три десятых процента отсутствует в самом отчёте RAND — это вторичная фабрикация точности, структурно идентичная провалу Deloitte из раздела один. Триангуляция: Gartner — только двадцать восемь процентов AI-кейсов полностью успешны; S&amp;P — сорок два процента компаний планируют отказаться от инициатив, рост с семнадцати процентов годом ранее; BCG — шестьдесят процентов компаний не отслеживают ни одного финансового KPI. Все источники указывают на один корень: не «модель плоха», а «нет заранее согласованного финансового критерия». Урок: критически проверяйте денаминатор, прежде чем использовать цифру как аргумент в решении.</a:t>
+              <a:t>Вернёмся к отчёту, с которого началась лекция. MIT Project NANDA, растиражированный как «девяносто пять процентов организаций получают нулевую отдачу». Реальная воронка кастомного трека в самом отчёте: шестьдесят процентов организаций исследовали, двадцать процентов запустили пилот, пять процентов успешно внедрили. Показатель успеха среди дошедших до пилота — пять из двадцати, двадцать пять процентов, а не «девяносто пять процентов пилотов провалились». Отдельно — неразглашённый конфликт интересов: все четыре автора строят или продают agentic-ИИ продукты через тот же проект.</a:t>
+            </a:r>
+          </a:p>
+          <a:p>
+            <a:r>
+              <a:t>Извлечём переносимый навык через четыре вопроса. Первый: каков знаменатель — девяносто пять процентов от всех организаций, включая никогда всерьёз не пилотировавших. Второй: что считается провалом — «не окупилось в сроки», «заброшено» и «работает, но не приносит ценности» — три разных события. Третий: каков конфликт интересов автора. Четвёртый: прослеживается ли цифра к первоисточнику с методологией.</a:t>
+            </a:r>
+          </a:p>
+          <a:p>
+            <a:r>
+              <a:t>Мета-урок про RAND: широко растиражированная «точная» цифра восемьдесят целых три десятых процента отсутствует в самом отчёте RAND — это вторичная фабрикация точности, структурно идентичная провалу Deloitte из раздела один. Триангуляция: Gartner — только двадцать восемь процентов ИИ-кейсов полностью успешны; S&amp;P — сорок два процента компаний планируют отказаться от инициатив, рост с семнадцати процентов годом ранее; BCG — шестьдесят процентов компаний не отслеживают ни одного финансового KPI. Все источники указывают на один корень: не «модель плоха», а «нет заранее согласованного финансового критерия». Урок: критически проверяйте знаменатель, прежде чем использовать цифру как аргумент в решении.</a:t>
             </a:r>
           </a:p>
           <a:p>
@@ -4647,12 +4647,12 @@
           </a:p>
           <a:p>
             <a:r>
-              <a:t>Механизм: реальное ограничение точности компьютерного зрения на разнообразии товаров плюс governance-провал — шесть лет маркетинга автономного AI без раскрытия реального масштаба человеческого труда. Это паттерн «Wizard-of-Oz AI» — скрытый человеческий труд под видом автономии. Голая цифра «участвовала тысяча работников» позволяет формально быть правым — люди аннотировали видео, а не следили вживую. Но правильный counterfactual — не участвовали ли люди, а насколько фактическое вмешательство превысило целевое: четырнадцатикратное превышение.</a:t>
-            </a:r>
-          </a:p>
-          <a:p>
-            <a:r>
-              <a:t>Урок: заявления об автономности должны быть проверяемы и включать честное раскрытие доли human-in-the-loop. Критерий hidden human cost: если для приемлемой точности требуется ручная проверка кратно выше целевого порога — заявленная автономность не достигнута. Соберём теперь все шесть фаз в единую матрицу: для каждой фазы — что AI меняет в стоимости и доверии, какая классика остаётся, когда AI-first ломается, и какие провалы это иллюстрируют. Матрица — не для заучивания, а для применения: встретив новый провал в новостях, определите фазу, нарушенную классику и критерий — это и есть тренируемый навык распознавания.</a:t>
+              <a:t>Механизм: реальное ограничение точности компьютерного зрения на разнообразии товаров плюс governance-провал — шесть лет маркетинга автономного ИИ без раскрытия реального масштаба человеческого труда. Это паттерн «Wizard-of-Oz ИИ» — скрытый человеческий труд под видом автономии. Голая цифра «участвовала тысяча работников» позволяет формально быть правым — люди аннотировали видео, а не следили вживую. Но правильный counterfactual — не участвовали ли люди, а насколько фактическое вмешательство превысило целевое: четырнадцатикратное превышение.</a:t>
+            </a:r>
+          </a:p>
+          <a:p>
+            <a:r>
+              <a:t>Урок: заявления об автономности должны быть проверяемы и включать честное раскрытие доли human-in-the-loop. Критерий hidden human cost: если для приемлемой точности требуется ручная проверка кратно выше целевого порога — заявленная автономность не достигнута. Соберём теперь все шесть фаз в единую матрицу: для каждой фазы — что ИИ меняет в стоимости и доверии, какая классика остаётся, когда AI-first ломается, и какие провалы это иллюстрируют. Матрица — не для заучивания, а для применения: встретив новый провал в новостях, определите фазу, нарушенную классику и критерий — это и есть тренируемый навык распознавания.</a:t>
             </a:r>
           </a:p>
           <a:p>
@@ -4732,17 +4732,17 @@
           </a:p>
           <a:p>
             <a:r>
-              <a:t>Классическая дисциплина каждой фазы не отменяется: она — аппарат отличения сигнала от шума, доведённый до операциональной формы. Изменилось: стоимость сборки, скорость исследования, скорость прототипа, скорость наблюдения. Осталось человеческим: формулирование намерения, суждение о сигнале против шума, ответственность за каждый ответ продукта, решение «здесь AI не тот инструмент», governance с владельцем.</a:t>
-            </a:r>
-          </a:p>
-          <a:p>
-            <a:r>
-              <a:t>Практический аппарат — чек-лист из восьми вопросов, которым вы проверяете любую фазу перед тем, как делать её AI-first: классика на месте, стоит ли доверие цены, есть ли eval и reference dataset, есть ли guardrail-метрика, раскатываем ли постепенно с возможностью отката, есть ли гарантированная эскалация к человеку, кто отвечает за результат, безопасны ли данные. Если хотя бы на один вопрос ответ «нет» — это не значит «не применять AI», это значит «здесь есть структурный пробел, который нужно закрыть до, а не после».</a:t>
-            </a:r>
-          </a:p>
-          <a:p>
-            <a:r>
-              <a:t>Курс не учит «применяйте AI больше» и не учит «бойтесь AI» — он учит говорить обоснованное «да» и обоснованное «нет». На парном семинаре вы пройдёте ту же петлю на учебном AI-продукте — от гипотезы через reference dataset и три оценки до guardrail-метрики и точки эскалации к человеку. Готов к вопросам.</a:t>
+              <a:t>Классическая дисциплина каждой фазы не отменяется: она — аппарат отличения сигнала от шума, доведённый до операциональной формы. Изменилось: стоимость сборки, скорость исследования, скорость прототипа, скорость наблюдения. Осталось человеческим: формулирование намерения, суждение о сигнале против шума, ответственность за каждый ответ продукта, решение «здесь ИИ не тот инструмент», governance с владельцем.</a:t>
+            </a:r>
+          </a:p>
+          <a:p>
+            <a:r>
+              <a:t>Практический аппарат — чек-лист из восьми вопросов, которым вы проверяете любую фазу перед тем, как делать её AI-first: классика на месте, стоит ли доверие цены, есть ли eval и reference dataset, есть ли guardrail-метрика, раскатываем ли постепенно с возможностью отката, есть ли гарантированная эскалация к человеку, кто отвечает за результат, безопасны ли данные. Если хотя бы на один вопрос ответ «нет» — это не значит «не применять ИИ», это значит «здесь есть структурный пробел, который нужно закрыть до, а не после».</a:t>
+            </a:r>
+          </a:p>
+          <a:p>
+            <a:r>
+              <a:t>Курс не учит «применяйте ИИ больше» и не учит «бойтесь ИИ» — он учит говорить обоснованное «да» и обоснованное «нет». На парном семинаре вы пройдёте ту же петлю на учебном ИИ-продукте — от гипотезы через reference dataset и три оценки до guardrail-метрики и точки эскалации к человеку. Готов к вопросам.</a:t>
             </a:r>
           </a:p>
         </p:txBody>
@@ -4812,12 +4812,12 @@
           <a:lstStyle/>
           <a:p>
             <a:r>
-              <a:t>Вторая половина keystone — центральный аналитический инструмент всей лекции: AI меняет стоимость и доверие каждой стрелки петли асимметрично, не одинаково. Стрелка «построить» — стоимость почти обнулилась: написание кода, черновика дизайна, первого прототипа исследования на порядки дешевле, чем пять лет назад. Стрелки «измерить» и «научиться» — стоимость осталась прежней или снизилась незначительно, а доверие к результату упало: сам инструмент измерения стал вероятностным и уязвимым к манипуляции метрикой. Стрелки «наблюдать» и «сориентироваться» — стали быстрее, но одновременно уязвимее к атаке: скорость наблюдения за системой в проде выросла, но сама возможность быстро реагировать превращается в уязвимость, если наблюдаемые данные можно отравить.</a:t>
-            </a:r>
-          </a:p>
-          <a:p>
-            <a:r>
-              <a:t>Отсюда мета-паттерн, который будет повторяться в каждом из шести разделов буквально по одному и тому же шаблону: у каждой фазы жизненного цикла продукта есть классическая дисциплина, и AI её не отменяет. AI меняет, сколько эта дисциплина стоит и насколько ей можно доверять без проверки — но не устраняет необходимость самой дисциплины. Customer Development не заменяется на «спросить у модели, что думает пользователь»; продуктовый эксперимент не заменяется на «модель предсказала рост метрики». В каждом разделе мы будем задавать один и тот же вопрос: что здесь классика делает надёжным, что AI ускоряет — и в какой момент скорость становится ловушкой, потому что доверие не поспевает за ней.</a:t>
+              <a:t>Вторая половина keystone — центральный аналитический инструмент всей лекции: ИИ меняет стоимость и доверие каждой стрелки петли асимметрично, не одинаково. Стрелка «построить» — стоимость почти обнулилась: написание кода, черновика дизайна, первого прототипа исследования на порядки дешевле, чем пять лет назад. Стрелки «измерить» и «научиться» — стоимость осталась прежней или снизилась незначительно, а доверие к результату упало: сам инструмент измерения стал вероятностным и уязвимым к манипуляции метрикой. Стрелки «наблюдать» и «сориентироваться» — стали быстрее, но одновременно уязвимее к атаке: скорость наблюдения за системой в проде выросла, но сама возможность быстро реагировать превращается в уязвимость, если наблюдаемые данные можно отравить.</a:t>
+            </a:r>
+          </a:p>
+          <a:p>
+            <a:r>
+              <a:t>Отсюда мета-паттерн, который будет повторяться в каждом из шести разделов буквально по одному и тому же шаблону: у каждой фазы жизненного цикла продукта есть классическая дисциплина, и ИИ её не отменяет. ИИ меняет, сколько эта дисциплина стоит и насколько ей можно доверять без проверки — но не устраняет необходимость самой дисциплины. Customer Development не заменяется на «спросить у модели, что думает пользователь»; продуктовый эксперимент не заменяется на «модель предсказала рост метрики». В каждом разделе мы будем задавать один и тот же вопрос: что здесь классика делает надёжным, что ИИ ускоряет — и в какой момент скорость становится ловушкой, потому что доверие не поспевает за ней.</a:t>
             </a:r>
           </a:p>
           <a:p>
@@ -4897,7 +4897,7 @@
           </a:p>
           <a:p>
             <a:r>
-              <a:t>Сегодня в этом разделе — две классические базы: методология поиска бизнес-модели через выход к клиентам и техника одного правильного разговора с одним человеком. Дальше — что AI добавляет в исследование в две тысячи двадцать пятом-двадцать шестом году, где он ограничен, и три провала, которые показывают, что случается, когда границу пропускают. Держите два вопроса раздела: где AI усиливает исследование, и где реальный человек с реальным прошлым обязателен.</a:t>
+              <a:t>Сегодня в этом разделе — две классические базы: методология поиска бизнес-модели через выход к клиентам и техника одного правильного разговора с одним человеком. Дальше — что ИИ добавляет в исследование в две тысячи двадцать пятом-двадцать шестом году, где он ограничен, и три провала, которые показывают, что случается, когда границу пропускают. Держите два вопроса раздела: где ИИ усиливает исследование, и где реальный человек с реальным прошлым обязателен.</a:t>
             </a:r>
           </a:p>
         </p:txBody>
@@ -4982,7 +4982,7 @@
           </a:p>
           <a:p>
             <a:r>
-              <a:t>AI здесь может очень помочь — суммировать интервью, собрать кабинетное исследование за минуты вместо часов. Но он не может за вас поговорить с настоящим человеком и не может произвести настоящее несогласие. Дальше мы увидим две классические методики, которые делают этот разговор честным, и три реальных провала, где исследование заменили правдоподобной выдумкой.</a:t>
+              <a:t>ИИ здесь может очень помочь — суммировать интервью, собрать кабинетное исследование за минуты вместо часов. Но он не может за вас поговорить с настоящим человеком и не может произвести настоящее несогласие. Дальше мы увидим две классические методики, которые делают этот разговор честным, и три реальных провала, где исследование заменили правдоподобной выдумкой.</a:t>
             </a:r>
           </a:p>
         </p:txBody>
@@ -8084,8 +8084,8 @@
         </p:nvSpPr>
         <p:spPr>
           <a:xfrm>
-            <a:off x="502920" y="310896"/>
-            <a:ext cx="11155680" cy="868680"/>
+            <a:off x="502920" y="274320"/>
+            <a:ext cx="11155680" cy="731520"/>
           </a:xfrm>
           <a:prstGeom prst="rect">
             <a:avLst/>
@@ -8104,7 +8104,7 @@
               </a:lnSpc>
             </a:pPr>
             <a:r>
-              <a:rPr sz="2200" b="1" i="0">
+              <a:rPr sz="2100" b="1" i="0">
                 <a:solidFill>
                   <a:srgbClr val="21295C"/>
                 </a:solidFill>
@@ -8123,12 +8123,12 @@
         </p:nvSpPr>
         <p:spPr>
           <a:xfrm>
-            <a:off x="502920" y="1325880"/>
-            <a:ext cx="6720840" cy="3246120"/>
+            <a:off x="502920" y="1188720"/>
+            <a:ext cx="3977639" cy="1481328"/>
           </a:xfrm>
           <a:prstGeom prst="roundRect">
             <a:avLst>
-              <a:gd name="adj" fmla="val 9389"/>
+              <a:gd name="adj" fmla="val 20576"/>
             </a:avLst>
           </a:prstGeom>
           <a:solidFill>
@@ -8179,8 +8179,8 @@
         </p:blipFill>
         <p:spPr>
           <a:xfrm>
-            <a:off x="1005840" y="1737360"/>
-            <a:ext cx="1051560" cy="1051560"/>
+            <a:off x="722376" y="1371600"/>
+            <a:ext cx="731520" cy="731520"/>
           </a:xfrm>
           <a:prstGeom prst="rect">
             <a:avLst/>
@@ -8195,8 +8195,8 @@
         </p:nvSpPr>
         <p:spPr>
           <a:xfrm>
-            <a:off x="2286000" y="1828800"/>
-            <a:ext cx="4617720" cy="822960"/>
+            <a:off x="1581912" y="1335024"/>
+            <a:ext cx="2697479" cy="685800"/>
           </a:xfrm>
           <a:prstGeom prst="rect">
             <a:avLst/>
@@ -8211,11 +8211,11 @@
           <a:p>
             <a:pPr algn="l">
               <a:lnSpc>
-                <a:spcPct val="105000"/>
-              </a:lnSpc>
-            </a:pPr>
-            <a:r>
-              <a:rPr sz="1600" b="1" i="0">
+                <a:spcPct val="102000"/>
+              </a:lnSpc>
+            </a:pPr>
+            <a:r>
+              <a:rPr sz="1400" b="1" i="0">
                 <a:solidFill>
                   <a:srgbClr val="065A82"/>
                 </a:solidFill>
@@ -8234,8 +8234,8 @@
         </p:nvSpPr>
         <p:spPr>
           <a:xfrm>
-            <a:off x="2286000" y="2514600"/>
-            <a:ext cx="4617720" cy="365760"/>
+            <a:off x="1581912" y="2286000"/>
+            <a:ext cx="2697479" cy="310896"/>
           </a:xfrm>
           <a:prstGeom prst="rect">
             <a:avLst/>
@@ -8254,7 +8254,7 @@
               </a:lnSpc>
             </a:pPr>
             <a:r>
-              <a:rPr sz="1100" b="0" i="1">
+              <a:rPr sz="1050" b="0" i="1">
                 <a:solidFill>
                   <a:srgbClr val="5B6678"/>
                 </a:solidFill>
@@ -8265,158 +8265,20 @@
           </a:p>
         </p:txBody>
       </p:sp>
-      <p:cxnSp>
-        <p:nvCxnSpPr>
-          <p:cNvPr id="7" name="Connector 6"/>
-          <p:cNvCxnSpPr/>
-          <p:nvPr/>
-        </p:nvCxnSpPr>
-        <p:spPr>
-          <a:xfrm>
-            <a:off x="777240" y="3063239"/>
-            <a:ext cx="6172200" cy="0"/>
-          </a:xfrm>
-          <a:prstGeom prst="line">
-            <a:avLst/>
-          </a:prstGeom>
-          <a:ln w="19050">
-            <a:solidFill>
-              <a:srgbClr val="E5EAF0"/>
-            </a:solidFill>
-            <a:prstDash val="dash"/>
-          </a:ln>
-        </p:spPr>
-        <p:style>
-          <a:lnRef idx="2">
-            <a:schemeClr val="accent1"/>
-          </a:lnRef>
-          <a:fillRef idx="0">
-            <a:schemeClr val="accent1"/>
-          </a:fillRef>
-          <a:effectRef idx="1">
-            <a:schemeClr val="accent1"/>
-          </a:effectRef>
-          <a:fontRef idx="minor">
-            <a:schemeClr val="tx1"/>
-          </a:fontRef>
-        </p:style>
-      </p:cxnSp>
-      <p:pic>
-        <p:nvPicPr>
-          <p:cNvPr id="8" name="Picture 7" descr="funnel-teal.png"/>
-          <p:cNvPicPr>
-            <a:picLocks noChangeAspect="1"/>
-          </p:cNvPicPr>
-          <p:nvPr/>
-        </p:nvPicPr>
-        <p:blipFill>
-          <a:blip r:embed="rId3"/>
-          <a:stretch>
-            <a:fillRect/>
-          </a:stretch>
-        </p:blipFill>
-        <p:spPr>
-          <a:xfrm>
-            <a:off x="1005840" y="3246120"/>
-            <a:ext cx="1051560" cy="1051560"/>
-          </a:xfrm>
-          <a:prstGeom prst="rect">
-            <a:avLst/>
-          </a:prstGeom>
-        </p:spPr>
-      </p:pic>
-      <p:sp>
-        <p:nvSpPr>
-          <p:cNvPr id="9" name="TextBox 8"/>
-          <p:cNvSpPr txBox="1"/>
-          <p:nvPr/>
-        </p:nvSpPr>
-        <p:spPr>
-          <a:xfrm>
-            <a:off x="2286000" y="3337560"/>
-            <a:ext cx="4617720" cy="822960"/>
-          </a:xfrm>
-          <a:prstGeom prst="rect">
-            <a:avLst/>
-          </a:prstGeom>
-          <a:noFill/>
-        </p:spPr>
-        <p:txBody>
-          <a:bodyPr wrap="square" lIns="0" rIns="0" tIns="0" bIns="0" anchor="ctr">
-            <a:spAutoFit/>
-          </a:bodyPr>
-          <a:lstStyle/>
-          <a:p>
-            <a:pPr algn="l">
-              <a:lnSpc>
-                <a:spcPct val="105000"/>
-              </a:lnSpc>
-            </a:pPr>
-            <a:r>
-              <a:rPr sz="1600" b="1" i="0">
-                <a:solidFill>
-                  <a:srgbClr val="028090"/>
-                </a:solidFill>
-                <a:latin typeface="DejaVu Sans"/>
-              </a:rPr>
-              <a:t>~95% пилотов — ноль отдачи</a:t>
-            </a:r>
-          </a:p>
-        </p:txBody>
-      </p:sp>
-      <p:sp>
-        <p:nvSpPr>
-          <p:cNvPr id="10" name="TextBox 9"/>
-          <p:cNvSpPr txBox="1"/>
-          <p:nvPr/>
-        </p:nvSpPr>
-        <p:spPr>
-          <a:xfrm>
-            <a:off x="2286000" y="4023360"/>
-            <a:ext cx="4617720" cy="365760"/>
-          </a:xfrm>
-          <a:prstGeom prst="rect">
-            <a:avLst/>
-          </a:prstGeom>
-          <a:noFill/>
-        </p:spPr>
-        <p:txBody>
-          <a:bodyPr wrap="square" lIns="0" rIns="0" tIns="0" bIns="0" anchor="t">
-            <a:spAutoFit/>
-          </a:bodyPr>
-          <a:lstStyle/>
-          <a:p>
-            <a:pPr algn="l">
-              <a:lnSpc>
-                <a:spcPct val="115000"/>
-              </a:lnSpc>
-            </a:pPr>
-            <a:r>
-              <a:rPr sz="1100" b="0" i="1">
-                <a:solidFill>
-                  <a:srgbClr val="5B6678"/>
-                </a:solidFill>
-                <a:latin typeface="DejaVu Sans"/>
-              </a:rPr>
-              <a:t>MIT, лето 2025</a:t>
-            </a:r>
-          </a:p>
-        </p:txBody>
-      </p:sp>
-      <p:sp>
-        <p:nvSpPr>
-          <p:cNvPr id="11" name="Rounded Rectangle 10"/>
+      <p:sp>
+        <p:nvSpPr>
+          <p:cNvPr id="7" name="Rounded Rectangle 6"/>
           <p:cNvSpPr/>
           <p:nvPr/>
         </p:nvSpPr>
         <p:spPr>
           <a:xfrm>
-            <a:off x="7452360" y="1325880"/>
-            <a:ext cx="4251960" cy="3246120"/>
+            <a:off x="502920" y="2816352"/>
+            <a:ext cx="3977639" cy="1481328"/>
           </a:xfrm>
           <a:prstGeom prst="roundRect">
             <a:avLst>
-              <a:gd name="adj" fmla="val 9389"/>
+              <a:gd name="adj" fmla="val 20576"/>
             </a:avLst>
           </a:prstGeom>
           <a:solidFill>
@@ -8453,22 +8315,22 @@
       </p:sp>
       <p:pic>
         <p:nvPicPr>
-          <p:cNvPr id="12" name="Picture 11" descr="s01-this-is-fine.jpg"/>
+          <p:cNvPr id="8" name="Picture 7" descr="funnel-teal.png"/>
           <p:cNvPicPr>
             <a:picLocks noChangeAspect="1"/>
           </p:cNvPicPr>
           <p:nvPr/>
         </p:nvPicPr>
         <p:blipFill>
-          <a:blip r:embed="rId4"/>
+          <a:blip r:embed="rId3"/>
           <a:stretch>
             <a:fillRect/>
           </a:stretch>
         </p:blipFill>
         <p:spPr>
           <a:xfrm>
-            <a:off x="7598664" y="1986407"/>
-            <a:ext cx="3959352" cy="1925064"/>
+            <a:off x="722376" y="2999232"/>
+            <a:ext cx="731520" cy="731520"/>
           </a:xfrm>
           <a:prstGeom prst="rect">
             <a:avLst/>
@@ -8477,14 +8339,92 @@
       </p:pic>
       <p:sp>
         <p:nvSpPr>
-          <p:cNvPr id="13" name="Rounded Rectangle 12"/>
+          <p:cNvPr id="9" name="TextBox 8"/>
+          <p:cNvSpPr txBox="1"/>
+          <p:nvPr/>
+        </p:nvSpPr>
+        <p:spPr>
+          <a:xfrm>
+            <a:off x="1581912" y="2962656"/>
+            <a:ext cx="2697479" cy="685800"/>
+          </a:xfrm>
+          <a:prstGeom prst="rect">
+            <a:avLst/>
+          </a:prstGeom>
+          <a:noFill/>
+        </p:spPr>
+        <p:txBody>
+          <a:bodyPr wrap="square" lIns="0" rIns="0" tIns="0" bIns="0" anchor="ctr">
+            <a:spAutoFit/>
+          </a:bodyPr>
+          <a:lstStyle/>
+          <a:p>
+            <a:pPr algn="l">
+              <a:lnSpc>
+                <a:spcPct val="102000"/>
+              </a:lnSpc>
+            </a:pPr>
+            <a:r>
+              <a:rPr sz="1400" b="1" i="0">
+                <a:solidFill>
+                  <a:srgbClr val="028090"/>
+                </a:solidFill>
+                <a:latin typeface="DejaVu Sans"/>
+              </a:rPr>
+              <a:t>~95% пилотов — ноль отдачи</a:t>
+            </a:r>
+          </a:p>
+        </p:txBody>
+      </p:sp>
+      <p:sp>
+        <p:nvSpPr>
+          <p:cNvPr id="10" name="TextBox 9"/>
+          <p:cNvSpPr txBox="1"/>
+          <p:nvPr/>
+        </p:nvSpPr>
+        <p:spPr>
+          <a:xfrm>
+            <a:off x="1581912" y="3913632"/>
+            <a:ext cx="2697479" cy="310896"/>
+          </a:xfrm>
+          <a:prstGeom prst="rect">
+            <a:avLst/>
+          </a:prstGeom>
+          <a:noFill/>
+        </p:spPr>
+        <p:txBody>
+          <a:bodyPr wrap="square" lIns="0" rIns="0" tIns="0" bIns="0" anchor="t">
+            <a:spAutoFit/>
+          </a:bodyPr>
+          <a:lstStyle/>
+          <a:p>
+            <a:pPr algn="l">
+              <a:lnSpc>
+                <a:spcPct val="115000"/>
+              </a:lnSpc>
+            </a:pPr>
+            <a:r>
+              <a:rPr sz="1050" b="0" i="1">
+                <a:solidFill>
+                  <a:srgbClr val="5B6678"/>
+                </a:solidFill>
+                <a:latin typeface="DejaVu Sans"/>
+              </a:rPr>
+              <a:t>MIT, лето 2025</a:t>
+            </a:r>
+          </a:p>
+        </p:txBody>
+      </p:sp>
+      <p:sp>
+        <p:nvSpPr>
+          <p:cNvPr id="11" name="Rounded Rectangle 10"/>
           <p:cNvSpPr/>
           <p:nvPr/>
         </p:nvSpPr>
         <p:spPr>
           <a:xfrm>
-            <a:off x="502920" y="4754880"/>
-            <a:ext cx="11201400" cy="868680"/>
+            <a:off x="502920" y="4462272"/>
+            <a:ext cx="3977639" cy="1956816"/>
           </a:xfrm>
           <a:prstGeom prst="roundRect">
             <a:avLst>
@@ -8525,14 +8465,14 @@
       </p:sp>
       <p:sp>
         <p:nvSpPr>
-          <p:cNvPr id="14" name="TextBox 13"/>
-          <p:cNvSpPr txBox="1"/>
-          <p:nvPr/>
-        </p:nvSpPr>
-        <p:spPr>
-          <a:xfrm>
-            <a:off x="722376" y="4809744"/>
-            <a:ext cx="10762488" cy="758952"/>
+          <p:cNvPr id="12" name="TextBox 11"/>
+          <p:cNvSpPr txBox="1"/>
+          <p:nvPr/>
+        </p:nvSpPr>
+        <p:spPr>
+          <a:xfrm>
+            <a:off x="722376" y="4517136"/>
+            <a:ext cx="3538727" cy="1847088"/>
           </a:xfrm>
           <a:prstGeom prst="rect">
             <a:avLst/>
@@ -8551,17 +8491,89 @@
               </a:lnSpc>
             </a:pPr>
             <a:r>
-              <a:rPr sz="1400" b="1" i="0">
+              <a:rPr sz="1300" b="1" i="0">
                 <a:solidFill>
                   <a:srgbClr val="21295C"/>
                 </a:solidFill>
                 <a:latin typeface="DejaVu Sans"/>
               </a:rPr>
-              <a:t>Оба факта правдивы одновременно: сборка стала почти бесплатной, а превращение сборки в ценность — нет. Как это возможно? Держите вопрос — мы вернёмся к нему в конце лекции.</a:t>
-            </a:r>
-          </a:p>
-        </p:txBody>
-      </p:sp>
+              <a:t>Оба факта правдивы одновременно: сборка стала почти бесплатной, а превращение сборки в ценность — нет. Держите вопрос — вернёмся к нему в конце лекции.</a:t>
+            </a:r>
+          </a:p>
+        </p:txBody>
+      </p:sp>
+      <p:sp>
+        <p:nvSpPr>
+          <p:cNvPr id="13" name="Rounded Rectangle 12"/>
+          <p:cNvSpPr/>
+          <p:nvPr/>
+        </p:nvSpPr>
+        <p:spPr>
+          <a:xfrm>
+            <a:off x="4709160" y="1188720"/>
+            <a:ext cx="6995160" cy="4846320"/>
+          </a:xfrm>
+          <a:prstGeom prst="roundRect">
+            <a:avLst>
+              <a:gd name="adj" fmla="val 6289"/>
+            </a:avLst>
+          </a:prstGeom>
+          <a:solidFill>
+            <a:srgbClr val="F4F7FA"/>
+          </a:solidFill>
+          <a:ln w="19050">
+            <a:solidFill>
+              <a:srgbClr val="1C7293"/>
+            </a:solidFill>
+          </a:ln>
+          <a:effectLst/>
+        </p:spPr>
+        <p:style>
+          <a:lnRef idx="1">
+            <a:schemeClr val="accent1"/>
+          </a:lnRef>
+          <a:fillRef idx="3">
+            <a:schemeClr val="accent1"/>
+          </a:fillRef>
+          <a:effectRef idx="2">
+            <a:schemeClr val="accent1"/>
+          </a:effectRef>
+          <a:fontRef idx="minor">
+            <a:schemeClr val="lt1"/>
+          </a:fontRef>
+        </p:style>
+        <p:txBody>
+          <a:bodyPr rtlCol="0" anchor="ctr"/>
+          <a:lstStyle/>
+          <a:p>
+            <a:pPr algn="ctr"/>
+          </a:p>
+        </p:txBody>
+      </p:sp>
+      <p:pic>
+        <p:nvPicPr>
+          <p:cNvPr id="14" name="Picture 13" descr="s01-this-is-fine.jpg"/>
+          <p:cNvPicPr>
+            <a:picLocks noChangeAspect="1"/>
+          </p:cNvPicPr>
+          <p:nvPr/>
+        </p:nvPicPr>
+        <p:blipFill>
+          <a:blip r:embed="rId4"/>
+          <a:stretch>
+            <a:fillRect/>
+          </a:stretch>
+        </p:blipFill>
+        <p:spPr>
+          <a:xfrm>
+            <a:off x="4873752" y="1991358"/>
+            <a:ext cx="6665976" cy="3241044"/>
+          </a:xfrm>
+          <a:prstGeom prst="rect">
+            <a:avLst/>
+          </a:prstGeom>
+        </p:spPr>
+      </p:pic>
       <p:sp>
         <p:nvSpPr>
           <p:cNvPr id="15" name="TextBox 14"/>
@@ -10907,7 +10919,7 @@
                 </a:solidFill>
                 <a:latin typeface="DejaVu Sans"/>
               </a:rPr>
-              <a:t>AI-резюме теряет 20-40% деталей интервью (Torres), если пропущен шаг «сначала по отдельности» — прослеживаемый до конкретного шага сбой, не расплывчатое «AI иногда ошибается».</a:t>
+              <a:t>ИИ-резюме теряет 20-40% деталей интервью (Torres), если пропущен шаг «сначала по отдельности» — прослеживаемый до конкретного шага сбой, не расплывчатое «ИИ иногда ошибается».</a:t>
             </a:r>
           </a:p>
         </p:txBody>
@@ -11080,8 +11092,8 @@
         </p:blipFill>
         <p:spPr>
           <a:xfrm>
-            <a:off x="1270322" y="1545336"/>
-            <a:ext cx="2625715" cy="2624328"/>
+            <a:off x="1094015" y="1545336"/>
+            <a:ext cx="2978329" cy="2624328"/>
           </a:xfrm>
           <a:prstGeom prst="rect">
             <a:avLst/>
@@ -12327,7 +12339,7 @@
                 </a:solidFill>
                 <a:latin typeface="DejaVu Sans"/>
               </a:rPr>
-              <a:t>База: ~712 судебных решений по миру с AI-галлюцинированными цитатами, ~90% — в 2025 году</a:t>
+              <a:t>База: ~712 судебных решений по миру с ИИ-галлюцинированными цитатами, ~90% — в 2025 году</a:t>
             </a:r>
           </a:p>
         </p:txBody>
@@ -13181,17 +13193,58 @@
       </p:sp>
       <p:sp>
         <p:nvSpPr>
-          <p:cNvPr id="6" name="Rectangle 5"/>
+          <p:cNvPr id="6" name="TextBox 5"/>
+          <p:cNvSpPr txBox="1"/>
+          <p:nvPr/>
+        </p:nvSpPr>
+        <p:spPr>
+          <a:xfrm>
+            <a:off x="685800" y="2395728"/>
+            <a:ext cx="6675120" cy="1600200"/>
+          </a:xfrm>
+          <a:prstGeom prst="rect">
+            <a:avLst/>
+          </a:prstGeom>
+          <a:noFill/>
+        </p:spPr>
+        <p:txBody>
+          <a:bodyPr wrap="square" lIns="0" rIns="0" tIns="0" bIns="0" anchor="t">
+            <a:spAutoFit/>
+          </a:bodyPr>
+          <a:lstStyle/>
+          <a:p>
+            <a:pPr algn="l">
+              <a:lnSpc>
+                <a:spcPct val="108000"/>
+              </a:lnSpc>
+            </a:pPr>
+            <a:r>
+              <a:rPr sz="3000" b="1" i="0">
+                <a:solidFill>
+                  <a:srgbClr val="21295C"/>
+                </a:solidFill>
+                <a:latin typeface="DejaVu Sans"/>
+              </a:rPr>
+              <a:t>Дизайн — гипотеза становится артефактом</a:t>
+            </a:r>
+          </a:p>
+        </p:txBody>
+      </p:sp>
+      <p:sp>
+        <p:nvSpPr>
+          <p:cNvPr id="7" name="Rounded Rectangle 6"/>
           <p:cNvSpPr/>
           <p:nvPr/>
         </p:nvSpPr>
         <p:spPr>
           <a:xfrm>
-            <a:off x="713232" y="1993392"/>
-            <a:ext cx="640080" cy="45720"/>
-          </a:xfrm>
-          <a:prstGeom prst="rect">
-            <a:avLst/>
+            <a:off x="713232" y="3840480"/>
+            <a:ext cx="3291840" cy="384048"/>
+          </a:xfrm>
+          <a:prstGeom prst="roundRect">
+            <a:avLst>
+              <a:gd name="adj" fmla="val 50000"/>
+            </a:avLst>
           </a:prstGeom>
           <a:solidFill>
             <a:srgbClr val="F0AB00"/>
@@ -13216,102 +13269,17 @@
           </a:fontRef>
         </p:style>
         <p:txBody>
-          <a:bodyPr rtlCol="0" anchor="ctr"/>
+          <a:bodyPr rtlCol="0" anchor="ctr" lIns="45720" rIns="45720" tIns="18288" bIns="18288" wrap="none"/>
           <a:lstStyle/>
           <a:p>
             <a:pPr algn="ctr"/>
-          </a:p>
-        </p:txBody>
-      </p:sp>
-      <p:sp>
-        <p:nvSpPr>
-          <p:cNvPr id="7" name="TextBox 6"/>
-          <p:cNvSpPr txBox="1"/>
-          <p:nvPr/>
-        </p:nvSpPr>
-        <p:spPr>
-          <a:xfrm>
-            <a:off x="685800" y="2331720"/>
-            <a:ext cx="6675120" cy="1600200"/>
-          </a:xfrm>
-          <a:prstGeom prst="rect">
-            <a:avLst/>
-          </a:prstGeom>
-          <a:noFill/>
-        </p:spPr>
-        <p:txBody>
-          <a:bodyPr wrap="square" lIns="0" rIns="0" tIns="0" bIns="0" anchor="t">
-            <a:spAutoFit/>
-          </a:bodyPr>
-          <a:lstStyle/>
-          <a:p>
-            <a:pPr algn="l">
-              <a:lnSpc>
-                <a:spcPct val="108000"/>
-              </a:lnSpc>
-            </a:pPr>
-            <a:r>
-              <a:rPr sz="3000" b="1" i="0">
+            <a:r>
+              <a:rPr sz="1250" b="1">
                 <a:solidFill>
                   <a:srgbClr val="21295C"/>
                 </a:solidFill>
                 <a:latin typeface="DejaVu Sans"/>
               </a:rPr>
-              <a:t>Дизайн — гипотеза становится артефактом</a:t>
-            </a:r>
-          </a:p>
-        </p:txBody>
-      </p:sp>
-      <p:sp>
-        <p:nvSpPr>
-          <p:cNvPr id="8" name="Rounded Rectangle 7"/>
-          <p:cNvSpPr/>
-          <p:nvPr/>
-        </p:nvSpPr>
-        <p:spPr>
-          <a:xfrm>
-            <a:off x="713232" y="3840480"/>
-            <a:ext cx="3291840" cy="384048"/>
-          </a:xfrm>
-          <a:prstGeom prst="roundRect">
-            <a:avLst>
-              <a:gd name="adj" fmla="val 50000"/>
-            </a:avLst>
-          </a:prstGeom>
-          <a:solidFill>
-            <a:srgbClr val="F0AB00"/>
-          </a:solidFill>
-          <a:ln>
-            <a:noFill/>
-          </a:ln>
-          <a:effectLst/>
-        </p:spPr>
-        <p:style>
-          <a:lnRef idx="1">
-            <a:schemeClr val="accent1"/>
-          </a:lnRef>
-          <a:fillRef idx="3">
-            <a:schemeClr val="accent1"/>
-          </a:fillRef>
-          <a:effectRef idx="2">
-            <a:schemeClr val="accent1"/>
-          </a:effectRef>
-          <a:fontRef idx="minor">
-            <a:schemeClr val="lt1"/>
-          </a:fontRef>
-        </p:style>
-        <p:txBody>
-          <a:bodyPr rtlCol="0" anchor="ctr" lIns="45720" rIns="45720" tIns="18288" bIns="18288" wrap="none"/>
-          <a:lstStyle/>
-          <a:p>
-            <a:pPr algn="ctr"/>
-            <a:r>
-              <a:rPr sz="1250" b="1">
-                <a:solidFill>
-                  <a:srgbClr val="21295C"/>
-                </a:solidFill>
-                <a:latin typeface="DejaVu Sans"/>
-              </a:rPr>
               <a:t>2 базы · 2 провала</a:t>
             </a:r>
           </a:p>
@@ -13319,7 +13287,7 @@
       </p:sp>
       <p:sp>
         <p:nvSpPr>
-          <p:cNvPr id="9" name="TextBox 8"/>
+          <p:cNvPr id="8" name="TextBox 7"/>
           <p:cNvSpPr txBox="1"/>
           <p:nvPr/>
         </p:nvSpPr>
@@ -13358,7 +13326,7 @@
       </p:sp>
       <p:sp>
         <p:nvSpPr>
-          <p:cNvPr id="10" name="Rounded Rectangle 9"/>
+          <p:cNvPr id="9" name="Rounded Rectangle 8"/>
           <p:cNvSpPr/>
           <p:nvPr/>
         </p:nvSpPr>
@@ -13406,7 +13374,7 @@
       </p:sp>
       <p:sp>
         <p:nvSpPr>
-          <p:cNvPr id="11" name="TextBox 10"/>
+          <p:cNvPr id="10" name="TextBox 9"/>
           <p:cNvSpPr txBox="1"/>
           <p:nvPr/>
         </p:nvSpPr>
@@ -13445,7 +13413,7 @@
       </p:sp>
       <p:sp>
         <p:nvSpPr>
-          <p:cNvPr id="12" name="TextBox 11"/>
+          <p:cNvPr id="11" name="TextBox 10"/>
           <p:cNvSpPr txBox="1"/>
           <p:nvPr/>
         </p:nvSpPr>
@@ -13484,7 +13452,7 @@
       </p:sp>
       <p:sp>
         <p:nvSpPr>
-          <p:cNvPr id="13" name="Rounded Rectangle 12"/>
+          <p:cNvPr id="12" name="Rounded Rectangle 11"/>
           <p:cNvSpPr/>
           <p:nvPr/>
         </p:nvSpPr>
@@ -13532,7 +13500,7 @@
       </p:sp>
       <p:sp>
         <p:nvSpPr>
-          <p:cNvPr id="14" name="TextBox 13"/>
+          <p:cNvPr id="13" name="TextBox 12"/>
           <p:cNvSpPr txBox="1"/>
           <p:nvPr/>
         </p:nvSpPr>
@@ -13571,7 +13539,7 @@
       </p:sp>
       <p:sp>
         <p:nvSpPr>
-          <p:cNvPr id="15" name="TextBox 14"/>
+          <p:cNvPr id="14" name="TextBox 13"/>
           <p:cNvSpPr txBox="1"/>
           <p:nvPr/>
         </p:nvSpPr>
@@ -13610,7 +13578,7 @@
       </p:sp>
       <p:sp>
         <p:nvSpPr>
-          <p:cNvPr id="16" name="Rounded Rectangle 15"/>
+          <p:cNvPr id="15" name="Rounded Rectangle 14"/>
           <p:cNvSpPr/>
           <p:nvPr/>
         </p:nvSpPr>
@@ -13658,7 +13626,7 @@
       </p:sp>
       <p:sp>
         <p:nvSpPr>
-          <p:cNvPr id="17" name="TextBox 16"/>
+          <p:cNvPr id="16" name="TextBox 15"/>
           <p:cNvSpPr txBox="1"/>
           <p:nvPr/>
         </p:nvSpPr>
@@ -13697,7 +13665,7 @@
       </p:sp>
       <p:sp>
         <p:nvSpPr>
-          <p:cNvPr id="18" name="TextBox 17"/>
+          <p:cNvPr id="17" name="TextBox 16"/>
           <p:cNvSpPr txBox="1"/>
           <p:nvPr/>
         </p:nvSpPr>
@@ -13736,7 +13704,7 @@
       </p:sp>
       <p:sp>
         <p:nvSpPr>
-          <p:cNvPr id="19" name="Rounded Rectangle 18"/>
+          <p:cNvPr id="18" name="Rounded Rectangle 17"/>
           <p:cNvSpPr/>
           <p:nvPr/>
         </p:nvSpPr>
@@ -13784,7 +13752,7 @@
       </p:sp>
       <p:sp>
         <p:nvSpPr>
-          <p:cNvPr id="20" name="TextBox 19"/>
+          <p:cNvPr id="19" name="TextBox 18"/>
           <p:cNvSpPr txBox="1"/>
           <p:nvPr/>
         </p:nvSpPr>
@@ -13823,7 +13791,7 @@
       </p:sp>
       <p:sp>
         <p:nvSpPr>
-          <p:cNvPr id="21" name="TextBox 20"/>
+          <p:cNvPr id="20" name="TextBox 19"/>
           <p:cNvSpPr txBox="1"/>
           <p:nvPr/>
         </p:nvSpPr>
@@ -13862,7 +13830,7 @@
       </p:sp>
       <p:sp>
         <p:nvSpPr>
-          <p:cNvPr id="22" name="Rounded Rectangle 21"/>
+          <p:cNvPr id="21" name="Rounded Rectangle 20"/>
           <p:cNvSpPr/>
           <p:nvPr/>
         </p:nvSpPr>
@@ -13910,7 +13878,7 @@
       </p:sp>
       <p:sp>
         <p:nvSpPr>
-          <p:cNvPr id="23" name="TextBox 22"/>
+          <p:cNvPr id="22" name="TextBox 21"/>
           <p:cNvSpPr txBox="1"/>
           <p:nvPr/>
         </p:nvSpPr>
@@ -13949,7 +13917,7 @@
       </p:sp>
       <p:sp>
         <p:nvSpPr>
-          <p:cNvPr id="24" name="TextBox 23"/>
+          <p:cNvPr id="23" name="TextBox 22"/>
           <p:cNvSpPr txBox="1"/>
           <p:nvPr/>
         </p:nvSpPr>
@@ -13988,7 +13956,7 @@
       </p:sp>
       <p:sp>
         <p:nvSpPr>
-          <p:cNvPr id="25" name="Rounded Rectangle 24"/>
+          <p:cNvPr id="24" name="Rounded Rectangle 23"/>
           <p:cNvSpPr/>
           <p:nvPr/>
         </p:nvSpPr>
@@ -14036,7 +14004,7 @@
       </p:sp>
       <p:sp>
         <p:nvSpPr>
-          <p:cNvPr id="26" name="TextBox 25"/>
+          <p:cNvPr id="25" name="TextBox 24"/>
           <p:cNvSpPr txBox="1"/>
           <p:nvPr/>
         </p:nvSpPr>
@@ -14075,7 +14043,7 @@
       </p:sp>
       <p:sp>
         <p:nvSpPr>
-          <p:cNvPr id="27" name="TextBox 26"/>
+          <p:cNvPr id="26" name="TextBox 25"/>
           <p:cNvSpPr txBox="1"/>
           <p:nvPr/>
         </p:nvSpPr>
@@ -14114,7 +14082,7 @@
       </p:sp>
       <p:sp>
         <p:nvSpPr>
-          <p:cNvPr id="28" name="Rounded Rectangle 27"/>
+          <p:cNvPr id="27" name="Rounded Rectangle 26"/>
           <p:cNvSpPr/>
           <p:nvPr/>
         </p:nvSpPr>
@@ -14162,7 +14130,7 @@
       </p:sp>
       <p:sp>
         <p:nvSpPr>
-          <p:cNvPr id="29" name="TextBox 28"/>
+          <p:cNvPr id="28" name="TextBox 27"/>
           <p:cNvSpPr txBox="1"/>
           <p:nvPr/>
         </p:nvSpPr>
@@ -14201,7 +14169,7 @@
       </p:sp>
       <p:sp>
         <p:nvSpPr>
-          <p:cNvPr id="30" name="TextBox 29"/>
+          <p:cNvPr id="29" name="TextBox 28"/>
           <p:cNvSpPr txBox="1"/>
           <p:nvPr/>
         </p:nvSpPr>
@@ -14240,7 +14208,7 @@
       </p:sp>
       <p:sp>
         <p:nvSpPr>
-          <p:cNvPr id="31" name="TextBox 30"/>
+          <p:cNvPr id="30" name="TextBox 29"/>
           <p:cNvSpPr txBox="1"/>
           <p:nvPr/>
         </p:nvSpPr>
@@ -16483,7 +16451,118 @@
       </p:sp>
       <p:sp>
         <p:nvSpPr>
-          <p:cNvPr id="22" name="TextBox 21"/>
+          <p:cNvPr id="22" name="Rounded Rectangle 21"/>
+          <p:cNvSpPr/>
+          <p:nvPr/>
+        </p:nvSpPr>
+        <p:spPr>
+          <a:xfrm>
+            <a:off x="6903720" y="4709160"/>
+            <a:ext cx="4800600" cy="1600200"/>
+          </a:xfrm>
+          <a:prstGeom prst="roundRect">
+            <a:avLst>
+              <a:gd name="adj" fmla="val 19047"/>
+            </a:avLst>
+          </a:prstGeom>
+          <a:solidFill>
+            <a:srgbClr val="F4F7FA"/>
+          </a:solidFill>
+          <a:ln w="19050">
+            <a:solidFill>
+              <a:srgbClr val="1C7293"/>
+            </a:solidFill>
+          </a:ln>
+          <a:effectLst/>
+        </p:spPr>
+        <p:style>
+          <a:lnRef idx="1">
+            <a:schemeClr val="accent1"/>
+          </a:lnRef>
+          <a:fillRef idx="3">
+            <a:schemeClr val="accent1"/>
+          </a:fillRef>
+          <a:effectRef idx="2">
+            <a:schemeClr val="accent1"/>
+          </a:effectRef>
+          <a:fontRef idx="minor">
+            <a:schemeClr val="lt1"/>
+          </a:fontRef>
+        </p:style>
+        <p:txBody>
+          <a:bodyPr rtlCol="0" anchor="ctr"/>
+          <a:lstStyle/>
+          <a:p>
+            <a:pPr algn="ctr"/>
+          </a:p>
+        </p:txBody>
+      </p:sp>
+      <p:pic>
+        <p:nvPicPr>
+          <p:cNvPr id="23" name="Picture 22" descr="s16-bernie.jpg"/>
+          <p:cNvPicPr>
+            <a:picLocks noChangeAspect="1"/>
+          </p:cNvPicPr>
+          <p:nvPr/>
+        </p:nvPicPr>
+        <p:blipFill>
+          <a:blip r:embed="rId4"/>
+          <a:stretch>
+            <a:fillRect/>
+          </a:stretch>
+        </p:blipFill>
+        <p:spPr>
+          <a:xfrm>
+            <a:off x="7031736" y="4800600"/>
+            <a:ext cx="1090246" cy="1417320"/>
+          </a:xfrm>
+          <a:prstGeom prst="rect">
+            <a:avLst/>
+          </a:prstGeom>
+        </p:spPr>
+      </p:pic>
+      <p:sp>
+        <p:nvSpPr>
+          <p:cNvPr id="24" name="TextBox 23"/>
+          <p:cNvSpPr txBox="1"/>
+          <p:nvPr/>
+        </p:nvSpPr>
+        <p:spPr>
+          <a:xfrm>
+            <a:off x="8503920" y="4855464"/>
+            <a:ext cx="3017520" cy="1307592"/>
+          </a:xfrm>
+          <a:prstGeom prst="rect">
+            <a:avLst/>
+          </a:prstGeom>
+          <a:noFill/>
+        </p:spPr>
+        <p:txBody>
+          <a:bodyPr wrap="square" lIns="0" rIns="0" tIns="0" bIns="0" anchor="ctr">
+            <a:spAutoFit/>
+          </a:bodyPr>
+          <a:lstStyle/>
+          <a:p>
+            <a:pPr algn="l">
+              <a:lnSpc>
+                <a:spcPct val="120000"/>
+              </a:lnSpc>
+            </a:pPr>
+            <a:r>
+              <a:rPr sz="1250" b="1" i="0">
+                <a:solidFill>
+                  <a:srgbClr val="21295C"/>
+                </a:solidFill>
+                <a:latin typeface="DejaVu Sans"/>
+              </a:rPr>
+              <a:t>«Я снова прошу»: эвристики ловят типовые проблемы, но не заменяют проверку на живом пользователе.</a:t>
+            </a:r>
+          </a:p>
+        </p:txBody>
+      </p:sp>
+      <p:sp>
+        <p:nvSpPr>
+          <p:cNvPr id="25" name="TextBox 24"/>
           <p:cNvSpPr txBox="1"/>
           <p:nvPr/>
         </p:nvSpPr>
@@ -17490,7 +17569,7 @@
                 </a:solidFill>
                 <a:latin typeface="DejaVu Sans"/>
               </a:rPr>
-              <a:t>Курс «Осознанное применение AI» · инженеры-студенты 3 курса</a:t>
+              <a:t>Курс «Осознанное применение ИИ» · инженеры-студенты 3 курса</a:t>
             </a:r>
           </a:p>
         </p:txBody>
@@ -18563,7 +18642,7 @@
                 </a:solidFill>
                 <a:latin typeface="DejaVu Sans"/>
               </a:rPr>
-              <a:t>AI для дивергенции, человек для конвергенции</a:t>
+              <a:t>ИИ для дивергенции, человек для конвергенции</a:t>
             </a:r>
           </a:p>
         </p:txBody>
@@ -19493,7 +19572,7 @@
                 </a:solidFill>
                 <a:latin typeface="DejaVu Sans"/>
               </a:rPr>
-              <a:t>Конвергенция требует суждения о конкретном контексте, которого нет в обучающих данных: AI расширяет пространство вариантов, а выбор и проверку на живом пользователе оставляем человеку.</a:t>
+              <a:t>Конвергенция требует суждения о конкретном контексте, которого нет в обучающих данных: ИИ расширяет пространство вариантов, а выбор и проверку на живом пользователе оставляем человеку.</a:t>
             </a:r>
           </a:p>
         </p:txBody>
@@ -19828,7 +19907,7 @@
                 </a:solidFill>
                 <a:latin typeface="DejaVu Sans"/>
               </a:rPr>
-              <a:t>21 880 оценок WCAG на AI-интерфейсах:</a:t>
+              <a:t>21 880 оценок WCAG на ИИ-интерфейсах:</a:t>
             </a:r>
           </a:p>
           <a:p>
@@ -20161,7 +20240,7 @@
       </p:sp>
       <p:pic>
         <p:nvPicPr>
-          <p:cNvPr id="4" name="Picture 3" descr="s19-clown.jpg"/>
+          <p:cNvPr id="4" name="Picture 3" descr="shield-alert-light.png"/>
           <p:cNvPicPr>
             <a:picLocks noChangeAspect="1"/>
           </p:cNvPicPr>
@@ -20175,8 +20254,8 @@
         </p:blipFill>
         <p:spPr>
           <a:xfrm>
-            <a:off x="630936" y="1695261"/>
-            <a:ext cx="3172968" cy="3376038"/>
+            <a:off x="1417320" y="1874519"/>
+            <a:ext cx="1600200" cy="1600200"/>
           </a:xfrm>
           <a:prstGeom prst="rect">
             <a:avLst/>
@@ -20185,7 +20264,46 @@
       </p:pic>
       <p:sp>
         <p:nvSpPr>
-          <p:cNvPr id="5" name="Rounded Rectangle 4"/>
+          <p:cNvPr id="5" name="TextBox 4"/>
+          <p:cNvSpPr txBox="1"/>
+          <p:nvPr/>
+        </p:nvSpPr>
+        <p:spPr>
+          <a:xfrm>
+            <a:off x="777240" y="3703320"/>
+            <a:ext cx="2880360" cy="1371600"/>
+          </a:xfrm>
+          <a:prstGeom prst="rect">
+            <a:avLst/>
+          </a:prstGeom>
+          <a:noFill/>
+        </p:spPr>
+        <p:txBody>
+          <a:bodyPr wrap="square" lIns="0" rIns="0" tIns="0" bIns="0" anchor="t">
+            <a:spAutoFit/>
+          </a:bodyPr>
+          <a:lstStyle/>
+          <a:p>
+            <a:pPr algn="ctr">
+              <a:lnSpc>
+                <a:spcPct val="120000"/>
+              </a:lnSpc>
+            </a:pPr>
+            <a:r>
+              <a:rPr sz="1300" b="1" i="0">
+                <a:solidFill>
+                  <a:srgbClr val="21295C"/>
+                </a:solidFill>
+                <a:latin typeface="DejaVu Sans"/>
+              </a:rPr>
+              <a:t>Защита уязвимых пользователей добавлена ретрофитом — после трагедии, а не в исходном дизайн-брифе.</a:t>
+            </a:r>
+          </a:p>
+        </p:txBody>
+      </p:sp>
+      <p:sp>
+        <p:nvSpPr>
+          <p:cNvPr id="6" name="Rounded Rectangle 5"/>
           <p:cNvSpPr/>
           <p:nvPr/>
         </p:nvSpPr>
@@ -20233,7 +20351,7 @@
       </p:sp>
       <p:pic>
         <p:nvPicPr>
-          <p:cNvPr id="6" name="Picture 5" descr="s19-characterai-real-source.png"/>
+          <p:cNvPr id="7" name="Picture 6" descr="s19-characterai-real-source.png"/>
           <p:cNvPicPr>
             <a:picLocks noChangeAspect="1"/>
           </p:cNvPicPr>
@@ -20257,7 +20375,7 @@
       </p:pic>
       <p:sp>
         <p:nvSpPr>
-          <p:cNvPr id="7" name="Rounded Rectangle 6"/>
+          <p:cNvPr id="8" name="Rounded Rectangle 7"/>
           <p:cNvSpPr/>
           <p:nvPr/>
         </p:nvSpPr>
@@ -20305,7 +20423,7 @@
       </p:sp>
       <p:sp>
         <p:nvSpPr>
-          <p:cNvPr id="8" name="TextBox 7"/>
+          <p:cNvPr id="9" name="TextBox 8"/>
           <p:cNvSpPr txBox="1"/>
           <p:nvPr/>
         </p:nvSpPr>
@@ -20344,7 +20462,7 @@
       </p:sp>
       <p:sp>
         <p:nvSpPr>
-          <p:cNvPr id="9" name="TextBox 8"/>
+          <p:cNvPr id="10" name="TextBox 9"/>
           <p:cNvSpPr txBox="1"/>
           <p:nvPr/>
         </p:nvSpPr>
@@ -20376,14 +20494,14 @@
                 </a:solidFill>
                 <a:latin typeface="DejaVu Sans"/>
               </a:rPr>
-              <a:t>14-летний пользователь погиб после месяцев общения с AI-персонажем (02.2024).</a:t>
-            </a:r>
-          </a:p>
-        </p:txBody>
-      </p:sp>
-      <p:sp>
-        <p:nvSpPr>
-          <p:cNvPr id="10" name="Oval 9"/>
+              <a:t>14-летний пользователь погиб после месяцев общения с ИИ-персонажем (02.2024).</a:t>
+            </a:r>
+          </a:p>
+        </p:txBody>
+      </p:sp>
+      <p:sp>
+        <p:nvSpPr>
+          <p:cNvPr id="11" name="Oval 10"/>
           <p:cNvSpPr/>
           <p:nvPr/>
         </p:nvSpPr>
@@ -20429,7 +20547,7 @@
       </p:sp>
       <p:sp>
         <p:nvSpPr>
-          <p:cNvPr id="11" name="TextBox 10"/>
+          <p:cNvPr id="12" name="TextBox 11"/>
           <p:cNvSpPr txBox="1"/>
           <p:nvPr/>
         </p:nvSpPr>
@@ -20468,7 +20586,7 @@
       </p:sp>
       <p:cxnSp>
         <p:nvCxnSpPr>
-          <p:cNvPr id="12" name="Connector 11"/>
+          <p:cNvPr id="13" name="Connector 12"/>
           <p:cNvCxnSpPr/>
           <p:nvPr/>
         </p:nvCxnSpPr>
@@ -20503,7 +20621,7 @@
       </p:cxnSp>
       <p:sp>
         <p:nvSpPr>
-          <p:cNvPr id="13" name="Oval 12"/>
+          <p:cNvPr id="14" name="Oval 13"/>
           <p:cNvSpPr/>
           <p:nvPr/>
         </p:nvSpPr>
@@ -20549,7 +20667,7 @@
       </p:sp>
       <p:sp>
         <p:nvSpPr>
-          <p:cNvPr id="14" name="TextBox 13"/>
+          <p:cNvPr id="15" name="TextBox 14"/>
           <p:cNvSpPr txBox="1"/>
           <p:nvPr/>
         </p:nvSpPr>
@@ -20604,7 +20722,7 @@
       </p:sp>
       <p:cxnSp>
         <p:nvCxnSpPr>
-          <p:cNvPr id="15" name="Connector 14"/>
+          <p:cNvPr id="16" name="Connector 15"/>
           <p:cNvCxnSpPr/>
           <p:nvPr/>
         </p:nvCxnSpPr>
@@ -20639,7 +20757,7 @@
       </p:cxnSp>
       <p:sp>
         <p:nvSpPr>
-          <p:cNvPr id="16" name="Oval 15"/>
+          <p:cNvPr id="17" name="Oval 16"/>
           <p:cNvSpPr/>
           <p:nvPr/>
         </p:nvSpPr>
@@ -20685,7 +20803,7 @@
       </p:sp>
       <p:sp>
         <p:nvSpPr>
-          <p:cNvPr id="17" name="TextBox 16"/>
+          <p:cNvPr id="18" name="TextBox 17"/>
           <p:cNvSpPr txBox="1"/>
           <p:nvPr/>
         </p:nvSpPr>
@@ -20740,7 +20858,7 @@
       </p:sp>
       <p:cxnSp>
         <p:nvCxnSpPr>
-          <p:cNvPr id="18" name="Connector 17"/>
+          <p:cNvPr id="19" name="Connector 18"/>
           <p:cNvCxnSpPr/>
           <p:nvPr/>
         </p:nvCxnSpPr>
@@ -20775,7 +20893,7 @@
       </p:cxnSp>
       <p:sp>
         <p:nvSpPr>
-          <p:cNvPr id="19" name="Oval 18"/>
+          <p:cNvPr id="20" name="Oval 19"/>
           <p:cNvSpPr/>
           <p:nvPr/>
         </p:nvSpPr>
@@ -20821,7 +20939,7 @@
       </p:sp>
       <p:sp>
         <p:nvSpPr>
-          <p:cNvPr id="20" name="TextBox 19"/>
+          <p:cNvPr id="21" name="TextBox 20"/>
           <p:cNvSpPr txBox="1"/>
           <p:nvPr/>
         </p:nvSpPr>
@@ -20876,7 +20994,7 @@
       </p:sp>
       <p:sp>
         <p:nvSpPr>
-          <p:cNvPr id="21" name="Rounded Rectangle 20"/>
+          <p:cNvPr id="22" name="Rounded Rectangle 21"/>
           <p:cNvSpPr/>
           <p:nvPr/>
         </p:nvSpPr>
@@ -20924,7 +21042,7 @@
       </p:sp>
       <p:sp>
         <p:nvSpPr>
-          <p:cNvPr id="22" name="TextBox 21"/>
+          <p:cNvPr id="23" name="TextBox 22"/>
           <p:cNvSpPr txBox="1"/>
           <p:nvPr/>
         </p:nvSpPr>
@@ -20963,7 +21081,7 @@
       </p:sp>
       <p:sp>
         <p:nvSpPr>
-          <p:cNvPr id="23" name="TextBox 22"/>
+          <p:cNvPr id="24" name="TextBox 23"/>
           <p:cNvSpPr txBox="1"/>
           <p:nvPr/>
         </p:nvSpPr>
@@ -21447,7 +21565,7 @@
                 </a:solidFill>
                 <a:latin typeface="DejaVu Sans"/>
               </a:rPr>
-              <a:t>EEOC, 9 авг. 2023 — первое урегулирование по AI-дискриминации</a:t>
+              <a:t>EEOC, 9 авг. 2023 — первое урегулирование по ИИ-дискриминации</a:t>
             </a:r>
           </a:p>
         </p:txBody>
@@ -21756,17 +21874,58 @@
       </p:sp>
       <p:sp>
         <p:nvSpPr>
-          <p:cNvPr id="6" name="Rectangle 5"/>
+          <p:cNvPr id="6" name="TextBox 5"/>
+          <p:cNvSpPr txBox="1"/>
+          <p:nvPr/>
+        </p:nvSpPr>
+        <p:spPr>
+          <a:xfrm>
+            <a:off x="685800" y="2395728"/>
+            <a:ext cx="6675120" cy="1600200"/>
+          </a:xfrm>
+          <a:prstGeom prst="rect">
+            <a:avLst/>
+          </a:prstGeom>
+          <a:noFill/>
+        </p:spPr>
+        <p:txBody>
+          <a:bodyPr wrap="square" lIns="0" rIns="0" tIns="0" bIns="0" anchor="t">
+            <a:spAutoFit/>
+          </a:bodyPr>
+          <a:lstStyle/>
+          <a:p>
+            <a:pPr algn="l">
+              <a:lnSpc>
+                <a:spcPct val="108000"/>
+              </a:lnSpc>
+            </a:pPr>
+            <a:r>
+              <a:rPr sz="3000" b="1" i="0">
+                <a:solidFill>
+                  <a:srgbClr val="21295C"/>
+                </a:solidFill>
+                <a:latin typeface="DejaVu Sans"/>
+              </a:rPr>
+              <a:t>Сборка и запуск — схлопнутая стрелка</a:t>
+            </a:r>
+          </a:p>
+        </p:txBody>
+      </p:sp>
+      <p:sp>
+        <p:nvSpPr>
+          <p:cNvPr id="7" name="Rounded Rectangle 6"/>
           <p:cNvSpPr/>
           <p:nvPr/>
         </p:nvSpPr>
         <p:spPr>
           <a:xfrm>
-            <a:off x="713232" y="1993392"/>
-            <a:ext cx="640080" cy="45720"/>
-          </a:xfrm>
-          <a:prstGeom prst="rect">
-            <a:avLst/>
+            <a:off x="713232" y="3840480"/>
+            <a:ext cx="3291840" cy="384048"/>
+          </a:xfrm>
+          <a:prstGeom prst="roundRect">
+            <a:avLst>
+              <a:gd name="adj" fmla="val 50000"/>
+            </a:avLst>
           </a:prstGeom>
           <a:solidFill>
             <a:srgbClr val="F0AB00"/>
@@ -21791,102 +21950,17 @@
           </a:fontRef>
         </p:style>
         <p:txBody>
-          <a:bodyPr rtlCol="0" anchor="ctr"/>
+          <a:bodyPr rtlCol="0" anchor="ctr" lIns="45720" rIns="45720" tIns="18288" bIns="18288" wrap="none"/>
           <a:lstStyle/>
           <a:p>
             <a:pPr algn="ctr"/>
-          </a:p>
-        </p:txBody>
-      </p:sp>
-      <p:sp>
-        <p:nvSpPr>
-          <p:cNvPr id="7" name="TextBox 6"/>
-          <p:cNvSpPr txBox="1"/>
-          <p:nvPr/>
-        </p:nvSpPr>
-        <p:spPr>
-          <a:xfrm>
-            <a:off x="685800" y="2331720"/>
-            <a:ext cx="6675120" cy="1600200"/>
-          </a:xfrm>
-          <a:prstGeom prst="rect">
-            <a:avLst/>
-          </a:prstGeom>
-          <a:noFill/>
-        </p:spPr>
-        <p:txBody>
-          <a:bodyPr wrap="square" lIns="0" rIns="0" tIns="0" bIns="0" anchor="t">
-            <a:spAutoFit/>
-          </a:bodyPr>
-          <a:lstStyle/>
-          <a:p>
-            <a:pPr algn="l">
-              <a:lnSpc>
-                <a:spcPct val="108000"/>
-              </a:lnSpc>
-            </a:pPr>
-            <a:r>
-              <a:rPr sz="3000" b="1" i="0">
+            <a:r>
+              <a:rPr sz="1250" b="1">
                 <a:solidFill>
                   <a:srgbClr val="21295C"/>
                 </a:solidFill>
                 <a:latin typeface="DejaVu Sans"/>
               </a:rPr>
-              <a:t>Сборка и запуск — схлопнутая стрелка</a:t>
-            </a:r>
-          </a:p>
-        </p:txBody>
-      </p:sp>
-      <p:sp>
-        <p:nvSpPr>
-          <p:cNvPr id="8" name="Rounded Rectangle 7"/>
-          <p:cNvSpPr/>
-          <p:nvPr/>
-        </p:nvSpPr>
-        <p:spPr>
-          <a:xfrm>
-            <a:off x="713232" y="3840480"/>
-            <a:ext cx="3291840" cy="384048"/>
-          </a:xfrm>
-          <a:prstGeom prst="roundRect">
-            <a:avLst>
-              <a:gd name="adj" fmla="val 50000"/>
-            </a:avLst>
-          </a:prstGeom>
-          <a:solidFill>
-            <a:srgbClr val="F0AB00"/>
-          </a:solidFill>
-          <a:ln>
-            <a:noFill/>
-          </a:ln>
-          <a:effectLst/>
-        </p:spPr>
-        <p:style>
-          <a:lnRef idx="1">
-            <a:schemeClr val="accent1"/>
-          </a:lnRef>
-          <a:fillRef idx="3">
-            <a:schemeClr val="accent1"/>
-          </a:fillRef>
-          <a:effectRef idx="2">
-            <a:schemeClr val="accent1"/>
-          </a:effectRef>
-          <a:fontRef idx="minor">
-            <a:schemeClr val="lt1"/>
-          </a:fontRef>
-        </p:style>
-        <p:txBody>
-          <a:bodyPr rtlCol="0" anchor="ctr" lIns="45720" rIns="45720" tIns="18288" bIns="18288" wrap="none"/>
-          <a:lstStyle/>
-          <a:p>
-            <a:pPr algn="ctr"/>
-            <a:r>
-              <a:rPr sz="1250" b="1">
-                <a:solidFill>
-                  <a:srgbClr val="21295C"/>
-                </a:solidFill>
-                <a:latin typeface="DejaVu Sans"/>
-              </a:rPr>
               <a:t>2 базы · 2 провала</a:t>
             </a:r>
           </a:p>
@@ -21894,7 +21968,7 @@
       </p:sp>
       <p:sp>
         <p:nvSpPr>
-          <p:cNvPr id="9" name="TextBox 8"/>
+          <p:cNvPr id="8" name="TextBox 7"/>
           <p:cNvSpPr txBox="1"/>
           <p:nvPr/>
         </p:nvSpPr>
@@ -21926,14 +22000,14 @@
                 </a:solidFill>
                 <a:latin typeface="DejaVu Sans"/>
               </a:rPr>
-              <a:t>Здесь AI меняет больше всего — стоимость самого написания кода. Но раздел начинается не с этого факта, а с классической дисциплины релиза: как выкатывать безопасно и когда остановиться.</a:t>
-            </a:r>
-          </a:p>
-        </p:txBody>
-      </p:sp>
-      <p:sp>
-        <p:nvSpPr>
-          <p:cNvPr id="10" name="Rounded Rectangle 9"/>
+              <a:t>Здесь ИИ меняет больше всего — стоимость самого написания кода. Но раздел начинается не с этого факта, а с классической дисциплины релиза: как выкатывать безопасно и когда остановиться.</a:t>
+            </a:r>
+          </a:p>
+        </p:txBody>
+      </p:sp>
+      <p:sp>
+        <p:nvSpPr>
+          <p:cNvPr id="9" name="Rounded Rectangle 8"/>
           <p:cNvSpPr/>
           <p:nvPr/>
         </p:nvSpPr>
@@ -21981,7 +22055,7 @@
       </p:sp>
       <p:sp>
         <p:nvSpPr>
-          <p:cNvPr id="11" name="TextBox 10"/>
+          <p:cNvPr id="10" name="TextBox 9"/>
           <p:cNvSpPr txBox="1"/>
           <p:nvPr/>
         </p:nvSpPr>
@@ -22020,7 +22094,7 @@
       </p:sp>
       <p:sp>
         <p:nvSpPr>
-          <p:cNvPr id="12" name="TextBox 11"/>
+          <p:cNvPr id="11" name="TextBox 10"/>
           <p:cNvSpPr txBox="1"/>
           <p:nvPr/>
         </p:nvSpPr>
@@ -22059,7 +22133,7 @@
       </p:sp>
       <p:sp>
         <p:nvSpPr>
-          <p:cNvPr id="13" name="Rounded Rectangle 12"/>
+          <p:cNvPr id="12" name="Rounded Rectangle 11"/>
           <p:cNvSpPr/>
           <p:nvPr/>
         </p:nvSpPr>
@@ -22107,7 +22181,7 @@
       </p:sp>
       <p:sp>
         <p:nvSpPr>
-          <p:cNvPr id="14" name="TextBox 13"/>
+          <p:cNvPr id="13" name="TextBox 12"/>
           <p:cNvSpPr txBox="1"/>
           <p:nvPr/>
         </p:nvSpPr>
@@ -22146,7 +22220,7 @@
       </p:sp>
       <p:sp>
         <p:nvSpPr>
-          <p:cNvPr id="15" name="TextBox 14"/>
+          <p:cNvPr id="14" name="TextBox 13"/>
           <p:cNvSpPr txBox="1"/>
           <p:nvPr/>
         </p:nvSpPr>
@@ -22185,7 +22259,7 @@
       </p:sp>
       <p:sp>
         <p:nvSpPr>
-          <p:cNvPr id="16" name="Rounded Rectangle 15"/>
+          <p:cNvPr id="15" name="Rounded Rectangle 14"/>
           <p:cNvSpPr/>
           <p:nvPr/>
         </p:nvSpPr>
@@ -22233,7 +22307,7 @@
       </p:sp>
       <p:sp>
         <p:nvSpPr>
-          <p:cNvPr id="17" name="TextBox 16"/>
+          <p:cNvPr id="16" name="TextBox 15"/>
           <p:cNvSpPr txBox="1"/>
           <p:nvPr/>
         </p:nvSpPr>
@@ -22272,7 +22346,7 @@
       </p:sp>
       <p:sp>
         <p:nvSpPr>
-          <p:cNvPr id="18" name="TextBox 17"/>
+          <p:cNvPr id="17" name="TextBox 16"/>
           <p:cNvSpPr txBox="1"/>
           <p:nvPr/>
         </p:nvSpPr>
@@ -22311,7 +22385,7 @@
       </p:sp>
       <p:sp>
         <p:nvSpPr>
-          <p:cNvPr id="19" name="Rounded Rectangle 18"/>
+          <p:cNvPr id="18" name="Rounded Rectangle 17"/>
           <p:cNvSpPr/>
           <p:nvPr/>
         </p:nvSpPr>
@@ -22359,7 +22433,7 @@
       </p:sp>
       <p:sp>
         <p:nvSpPr>
-          <p:cNvPr id="20" name="TextBox 19"/>
+          <p:cNvPr id="19" name="TextBox 18"/>
           <p:cNvSpPr txBox="1"/>
           <p:nvPr/>
         </p:nvSpPr>
@@ -22398,7 +22472,7 @@
       </p:sp>
       <p:sp>
         <p:nvSpPr>
-          <p:cNvPr id="21" name="TextBox 20"/>
+          <p:cNvPr id="20" name="TextBox 19"/>
           <p:cNvSpPr txBox="1"/>
           <p:nvPr/>
         </p:nvSpPr>
@@ -22437,7 +22511,7 @@
       </p:sp>
       <p:sp>
         <p:nvSpPr>
-          <p:cNvPr id="22" name="Rounded Rectangle 21"/>
+          <p:cNvPr id="21" name="Rounded Rectangle 20"/>
           <p:cNvSpPr/>
           <p:nvPr/>
         </p:nvSpPr>
@@ -22485,7 +22559,7 @@
       </p:sp>
       <p:sp>
         <p:nvSpPr>
-          <p:cNvPr id="23" name="TextBox 22"/>
+          <p:cNvPr id="22" name="TextBox 21"/>
           <p:cNvSpPr txBox="1"/>
           <p:nvPr/>
         </p:nvSpPr>
@@ -22524,7 +22598,7 @@
       </p:sp>
       <p:sp>
         <p:nvSpPr>
-          <p:cNvPr id="24" name="TextBox 23"/>
+          <p:cNvPr id="23" name="TextBox 22"/>
           <p:cNvSpPr txBox="1"/>
           <p:nvPr/>
         </p:nvSpPr>
@@ -22563,7 +22637,7 @@
       </p:sp>
       <p:sp>
         <p:nvSpPr>
-          <p:cNvPr id="25" name="Rounded Rectangle 24"/>
+          <p:cNvPr id="24" name="Rounded Rectangle 23"/>
           <p:cNvSpPr/>
           <p:nvPr/>
         </p:nvSpPr>
@@ -22611,7 +22685,7 @@
       </p:sp>
       <p:sp>
         <p:nvSpPr>
-          <p:cNvPr id="26" name="TextBox 25"/>
+          <p:cNvPr id="25" name="TextBox 24"/>
           <p:cNvSpPr txBox="1"/>
           <p:nvPr/>
         </p:nvSpPr>
@@ -22650,7 +22724,7 @@
       </p:sp>
       <p:sp>
         <p:nvSpPr>
-          <p:cNvPr id="27" name="TextBox 26"/>
+          <p:cNvPr id="26" name="TextBox 25"/>
           <p:cNvSpPr txBox="1"/>
           <p:nvPr/>
         </p:nvSpPr>
@@ -22689,7 +22763,7 @@
       </p:sp>
       <p:sp>
         <p:nvSpPr>
-          <p:cNvPr id="28" name="Rounded Rectangle 27"/>
+          <p:cNvPr id="27" name="Rounded Rectangle 26"/>
           <p:cNvSpPr/>
           <p:nvPr/>
         </p:nvSpPr>
@@ -22737,7 +22811,7 @@
       </p:sp>
       <p:sp>
         <p:nvSpPr>
-          <p:cNvPr id="29" name="TextBox 28"/>
+          <p:cNvPr id="28" name="TextBox 27"/>
           <p:cNvSpPr txBox="1"/>
           <p:nvPr/>
         </p:nvSpPr>
@@ -22776,7 +22850,7 @@
       </p:sp>
       <p:sp>
         <p:nvSpPr>
-          <p:cNvPr id="30" name="TextBox 29"/>
+          <p:cNvPr id="29" name="TextBox 28"/>
           <p:cNvSpPr txBox="1"/>
           <p:nvPr/>
         </p:nvSpPr>
@@ -22815,7 +22889,7 @@
       </p:sp>
       <p:sp>
         <p:nvSpPr>
-          <p:cNvPr id="31" name="TextBox 30"/>
+          <p:cNvPr id="30" name="TextBox 29"/>
           <p:cNvSpPr txBox="1"/>
           <p:nvPr/>
         </p:nvSpPr>
@@ -23165,7 +23239,7 @@
                 </a:solidFill>
                 <a:latin typeface="DejaVu Sans"/>
               </a:rPr>
-              <a:t>Артефакт становится работающим продуктом у пользователей. AI сделал само написание кода почти бесплатным.</a:t>
+              <a:t>Артефакт становится работающим продуктом у пользователей. ИИ сделал само написание кода почти бесплатным.</a:t>
             </a:r>
           </a:p>
         </p:txBody>
@@ -26254,7 +26328,7 @@
                 </a:solidFill>
                 <a:latin typeface="DejaVu Sans"/>
               </a:rPr>
-              <a:t>Опытный разработчик переосмысливает AI-вывод и тратит время на переделку.</a:t>
+              <a:t>Опытный разработчик переосмысливает ИИ-вывод и тратит время на переделку.</a:t>
             </a:r>
           </a:p>
           <a:p>
@@ -26482,9 +26556,225 @@
           </a:p>
         </p:txBody>
       </p:sp>
-      <p:sp>
-        <p:nvSpPr>
-          <p:cNvPr id="3" name="Rounded Rectangle 2"/>
+      <p:cxnSp>
+        <p:nvCxnSpPr>
+          <p:cNvPr id="3" name="Connector 2"/>
+          <p:cNvCxnSpPr/>
+          <p:nvPr/>
+        </p:nvCxnSpPr>
+        <p:spPr>
+          <a:xfrm>
+            <a:off x="4285734" y="2112264"/>
+            <a:ext cx="641433" cy="370332"/>
+          </a:xfrm>
+          <a:prstGeom prst="line">
+            <a:avLst/>
+          </a:prstGeom>
+          <a:ln w="25400">
+            <a:solidFill>
+              <a:srgbClr val="1C7293"/>
+            </a:solidFill>
+            <a:tailEnd type="triangle" w="med" len="med"/>
+          </a:ln>
+        </p:spPr>
+        <p:style>
+          <a:lnRef idx="2">
+            <a:schemeClr val="accent1"/>
+          </a:lnRef>
+          <a:fillRef idx="0">
+            <a:schemeClr val="accent1"/>
+          </a:fillRef>
+          <a:effectRef idx="1">
+            <a:schemeClr val="accent1"/>
+          </a:effectRef>
+          <a:fontRef idx="minor">
+            <a:schemeClr val="tx1"/>
+          </a:fontRef>
+        </p:style>
+      </p:cxnSp>
+      <p:cxnSp>
+        <p:nvCxnSpPr>
+          <p:cNvPr id="4" name="Connector 3"/>
+          <p:cNvCxnSpPr/>
+          <p:nvPr/>
+        </p:nvCxnSpPr>
+        <p:spPr>
+          <a:xfrm>
+            <a:off x="5418141" y="3332988"/>
+            <a:ext cx="0" cy="740663"/>
+          </a:xfrm>
+          <a:prstGeom prst="line">
+            <a:avLst/>
+          </a:prstGeom>
+          <a:ln w="25400">
+            <a:solidFill>
+              <a:srgbClr val="1C7293"/>
+            </a:solidFill>
+            <a:tailEnd type="triangle" w="med" len="med"/>
+          </a:ln>
+        </p:spPr>
+        <p:style>
+          <a:lnRef idx="2">
+            <a:schemeClr val="accent1"/>
+          </a:lnRef>
+          <a:fillRef idx="0">
+            <a:schemeClr val="accent1"/>
+          </a:fillRef>
+          <a:effectRef idx="1">
+            <a:schemeClr val="accent1"/>
+          </a:effectRef>
+          <a:fontRef idx="minor">
+            <a:schemeClr val="tx1"/>
+          </a:fontRef>
+        </p:style>
+      </p:cxnSp>
+      <p:cxnSp>
+        <p:nvCxnSpPr>
+          <p:cNvPr id="5" name="Connector 4"/>
+          <p:cNvCxnSpPr/>
+          <p:nvPr/>
+        </p:nvCxnSpPr>
+        <p:spPr>
+          <a:xfrm flipH="1">
+            <a:off x="4285734" y="4924044"/>
+            <a:ext cx="641433" cy="370331"/>
+          </a:xfrm>
+          <a:prstGeom prst="line">
+            <a:avLst/>
+          </a:prstGeom>
+          <a:ln w="25400">
+            <a:solidFill>
+              <a:srgbClr val="1C7293"/>
+            </a:solidFill>
+            <a:tailEnd type="triangle" w="med" len="med"/>
+          </a:ln>
+        </p:spPr>
+        <p:style>
+          <a:lnRef idx="2">
+            <a:schemeClr val="accent1"/>
+          </a:lnRef>
+          <a:fillRef idx="0">
+            <a:schemeClr val="accent1"/>
+          </a:fillRef>
+          <a:effectRef idx="1">
+            <a:schemeClr val="accent1"/>
+          </a:effectRef>
+          <a:fontRef idx="minor">
+            <a:schemeClr val="tx1"/>
+          </a:fontRef>
+        </p:style>
+      </p:cxnSp>
+      <p:cxnSp>
+        <p:nvCxnSpPr>
+          <p:cNvPr id="6" name="Connector 5"/>
+          <p:cNvCxnSpPr/>
+          <p:nvPr/>
+        </p:nvCxnSpPr>
+        <p:spPr>
+          <a:xfrm flipH="1" flipV="1">
+            <a:off x="2662352" y="4924044"/>
+            <a:ext cx="641433" cy="370332"/>
+          </a:xfrm>
+          <a:prstGeom prst="line">
+            <a:avLst/>
+          </a:prstGeom>
+          <a:ln w="25400">
+            <a:solidFill>
+              <a:srgbClr val="1C7293"/>
+            </a:solidFill>
+            <a:tailEnd type="triangle" w="med" len="med"/>
+          </a:ln>
+        </p:spPr>
+        <p:style>
+          <a:lnRef idx="2">
+            <a:schemeClr val="accent1"/>
+          </a:lnRef>
+          <a:fillRef idx="0">
+            <a:schemeClr val="accent1"/>
+          </a:fillRef>
+          <a:effectRef idx="1">
+            <a:schemeClr val="accent1"/>
+          </a:effectRef>
+          <a:fontRef idx="minor">
+            <a:schemeClr val="tx1"/>
+          </a:fontRef>
+        </p:style>
+      </p:cxnSp>
+      <p:cxnSp>
+        <p:nvCxnSpPr>
+          <p:cNvPr id="7" name="Connector 6"/>
+          <p:cNvCxnSpPr/>
+          <p:nvPr/>
+        </p:nvCxnSpPr>
+        <p:spPr>
+          <a:xfrm flipV="1">
+            <a:off x="2171378" y="3332988"/>
+            <a:ext cx="0" cy="740664"/>
+          </a:xfrm>
+          <a:prstGeom prst="line">
+            <a:avLst/>
+          </a:prstGeom>
+          <a:ln w="25400">
+            <a:solidFill>
+              <a:srgbClr val="1C7293"/>
+            </a:solidFill>
+            <a:tailEnd type="triangle" w="med" len="med"/>
+          </a:ln>
+        </p:spPr>
+        <p:style>
+          <a:lnRef idx="2">
+            <a:schemeClr val="accent1"/>
+          </a:lnRef>
+          <a:fillRef idx="0">
+            <a:schemeClr val="accent1"/>
+          </a:fillRef>
+          <a:effectRef idx="1">
+            <a:schemeClr val="accent1"/>
+          </a:effectRef>
+          <a:fontRef idx="minor">
+            <a:schemeClr val="tx1"/>
+          </a:fontRef>
+        </p:style>
+      </p:cxnSp>
+      <p:cxnSp>
+        <p:nvCxnSpPr>
+          <p:cNvPr id="8" name="Connector 7"/>
+          <p:cNvCxnSpPr/>
+          <p:nvPr/>
+        </p:nvCxnSpPr>
+        <p:spPr>
+          <a:xfrm flipV="1">
+            <a:off x="2662352" y="2112264"/>
+            <a:ext cx="641433" cy="370332"/>
+          </a:xfrm>
+          <a:prstGeom prst="line">
+            <a:avLst/>
+          </a:prstGeom>
+          <a:ln w="33020">
+            <a:solidFill>
+              <a:srgbClr val="F0AB00"/>
+            </a:solidFill>
+            <a:tailEnd type="triangle" w="med" len="med"/>
+          </a:ln>
+        </p:spPr>
+        <p:style>
+          <a:lnRef idx="2">
+            <a:schemeClr val="accent1"/>
+          </a:lnRef>
+          <a:fillRef idx="0">
+            <a:schemeClr val="accent1"/>
+          </a:fillRef>
+          <a:effectRef idx="1">
+            <a:schemeClr val="accent1"/>
+          </a:effectRef>
+          <a:fontRef idx="minor">
+            <a:schemeClr val="tx1"/>
+          </a:fontRef>
+        </p:style>
+      </p:cxnSp>
+      <p:sp>
+        <p:nvSpPr>
+          <p:cNvPr id="9" name="Rounded Rectangle 8"/>
           <p:cNvSpPr/>
           <p:nvPr/>
         </p:nvSpPr>
@@ -26532,7 +26822,7 @@
       </p:sp>
       <p:pic>
         <p:nvPicPr>
-          <p:cNvPr id="4" name="Picture 3" descr="search-mid.png"/>
+          <p:cNvPr id="10" name="Picture 9" descr="search-mid.png"/>
           <p:cNvPicPr>
             <a:picLocks noChangeAspect="1"/>
           </p:cNvPicPr>
@@ -26556,7 +26846,7 @@
       </p:pic>
       <p:sp>
         <p:nvSpPr>
-          <p:cNvPr id="5" name="TextBox 4"/>
+          <p:cNvPr id="11" name="TextBox 10"/>
           <p:cNvSpPr txBox="1"/>
           <p:nvPr/>
         </p:nvSpPr>
@@ -26595,7 +26885,7 @@
       </p:sp>
       <p:sp>
         <p:nvSpPr>
-          <p:cNvPr id="6" name="Rounded Rectangle 5"/>
+          <p:cNvPr id="12" name="Rounded Rectangle 11"/>
           <p:cNvSpPr/>
           <p:nvPr/>
         </p:nvSpPr>
@@ -26643,7 +26933,7 @@
       </p:sp>
       <p:pic>
         <p:nvPicPr>
-          <p:cNvPr id="7" name="Picture 6" descr="pencil-mid.png"/>
+          <p:cNvPr id="13" name="Picture 12" descr="pencil-mid.png"/>
           <p:cNvPicPr>
             <a:picLocks noChangeAspect="1"/>
           </p:cNvPicPr>
@@ -26667,7 +26957,7 @@
       </p:pic>
       <p:sp>
         <p:nvSpPr>
-          <p:cNvPr id="8" name="TextBox 7"/>
+          <p:cNvPr id="14" name="TextBox 13"/>
           <p:cNvSpPr txBox="1"/>
           <p:nvPr/>
         </p:nvSpPr>
@@ -26706,7 +26996,7 @@
       </p:sp>
       <p:sp>
         <p:nvSpPr>
-          <p:cNvPr id="9" name="Rounded Rectangle 8"/>
+          <p:cNvPr id="15" name="Rounded Rectangle 14"/>
           <p:cNvSpPr/>
           <p:nvPr/>
         </p:nvSpPr>
@@ -26754,7 +27044,7 @@
       </p:sp>
       <p:pic>
         <p:nvPicPr>
-          <p:cNvPr id="10" name="Picture 9" descr="hammer-mid.png"/>
+          <p:cNvPr id="16" name="Picture 15" descr="hammer-mid.png"/>
           <p:cNvPicPr>
             <a:picLocks noChangeAspect="1"/>
           </p:cNvPicPr>
@@ -26778,7 +27068,7 @@
       </p:pic>
       <p:sp>
         <p:nvSpPr>
-          <p:cNvPr id="11" name="TextBox 10"/>
+          <p:cNvPr id="17" name="TextBox 16"/>
           <p:cNvSpPr txBox="1"/>
           <p:nvPr/>
         </p:nvSpPr>
@@ -26817,7 +27107,7 @@
       </p:sp>
       <p:sp>
         <p:nvSpPr>
-          <p:cNvPr id="12" name="Rounded Rectangle 11"/>
+          <p:cNvPr id="18" name="Rounded Rectangle 17"/>
           <p:cNvSpPr/>
           <p:nvPr/>
         </p:nvSpPr>
@@ -26865,7 +27155,7 @@
       </p:sp>
       <p:pic>
         <p:nvPicPr>
-          <p:cNvPr id="13" name="Picture 12" descr="ruler-mid.png"/>
+          <p:cNvPr id="19" name="Picture 18" descr="ruler-mid.png"/>
           <p:cNvPicPr>
             <a:picLocks noChangeAspect="1"/>
           </p:cNvPicPr>
@@ -26889,7 +27179,7 @@
       </p:pic>
       <p:sp>
         <p:nvSpPr>
-          <p:cNvPr id="14" name="TextBox 13"/>
+          <p:cNvPr id="20" name="TextBox 19"/>
           <p:cNvSpPr txBox="1"/>
           <p:nvPr/>
         </p:nvSpPr>
@@ -26928,7 +27218,7 @@
       </p:sp>
       <p:sp>
         <p:nvSpPr>
-          <p:cNvPr id="15" name="Rounded Rectangle 14"/>
+          <p:cNvPr id="21" name="Rounded Rectangle 20"/>
           <p:cNvSpPr/>
           <p:nvPr/>
         </p:nvSpPr>
@@ -26976,7 +27266,7 @@
       </p:sp>
       <p:pic>
         <p:nvPicPr>
-          <p:cNvPr id="16" name="Picture 15" descr="headphones-mid.png"/>
+          <p:cNvPr id="22" name="Picture 21" descr="headphones-mid.png"/>
           <p:cNvPicPr>
             <a:picLocks noChangeAspect="1"/>
           </p:cNvPicPr>
@@ -27000,7 +27290,7 @@
       </p:pic>
       <p:sp>
         <p:nvSpPr>
-          <p:cNvPr id="17" name="TextBox 16"/>
+          <p:cNvPr id="23" name="TextBox 22"/>
           <p:cNvSpPr txBox="1"/>
           <p:nvPr/>
         </p:nvSpPr>
@@ -27039,7 +27329,7 @@
       </p:sp>
       <p:sp>
         <p:nvSpPr>
-          <p:cNvPr id="18" name="Rounded Rectangle 17"/>
+          <p:cNvPr id="24" name="Rounded Rectangle 23"/>
           <p:cNvSpPr/>
           <p:nvPr/>
         </p:nvSpPr>
@@ -27087,7 +27377,7 @@
       </p:sp>
       <p:pic>
         <p:nvPicPr>
-          <p:cNvPr id="19" name="Picture 18" descr="scale-mid.png"/>
+          <p:cNvPr id="25" name="Picture 24" descr="scale-mid.png"/>
           <p:cNvPicPr>
             <a:picLocks noChangeAspect="1"/>
           </p:cNvPicPr>
@@ -27111,7 +27401,7 @@
       </p:pic>
       <p:sp>
         <p:nvSpPr>
-          <p:cNvPr id="20" name="TextBox 19"/>
+          <p:cNvPr id="26" name="TextBox 25"/>
           <p:cNvSpPr txBox="1"/>
           <p:nvPr/>
         </p:nvSpPr>
@@ -27150,7 +27440,7 @@
       </p:sp>
       <p:sp>
         <p:nvSpPr>
-          <p:cNvPr id="21" name="TextBox 20"/>
+          <p:cNvPr id="27" name="TextBox 26"/>
           <p:cNvSpPr txBox="1"/>
           <p:nvPr/>
         </p:nvSpPr>
@@ -27189,7 +27479,7 @@
       </p:sp>
       <p:sp>
         <p:nvSpPr>
-          <p:cNvPr id="22" name="TextBox 21"/>
+          <p:cNvPr id="28" name="TextBox 27"/>
           <p:cNvSpPr txBox="1"/>
           <p:nvPr/>
         </p:nvSpPr>
@@ -27228,7 +27518,7 @@
       </p:sp>
       <p:sp>
         <p:nvSpPr>
-          <p:cNvPr id="23" name="TextBox 22"/>
+          <p:cNvPr id="29" name="TextBox 28"/>
           <p:cNvSpPr txBox="1"/>
           <p:nvPr/>
         </p:nvSpPr>
@@ -27267,7 +27557,7 @@
       </p:sp>
       <p:sp>
         <p:nvSpPr>
-          <p:cNvPr id="24" name="TextBox 23"/>
+          <p:cNvPr id="30" name="TextBox 29"/>
           <p:cNvSpPr txBox="1"/>
           <p:nvPr/>
         </p:nvSpPr>
@@ -27306,7 +27596,7 @@
       </p:sp>
       <p:sp>
         <p:nvSpPr>
-          <p:cNvPr id="25" name="TextBox 24"/>
+          <p:cNvPr id="31" name="TextBox 30"/>
           <p:cNvSpPr txBox="1"/>
           <p:nvPr/>
         </p:nvSpPr>
@@ -27345,7 +27635,7 @@
       </p:sp>
       <p:sp>
         <p:nvSpPr>
-          <p:cNvPr id="26" name="TextBox 25"/>
+          <p:cNvPr id="32" name="TextBox 31"/>
           <p:cNvSpPr txBox="1"/>
           <p:nvPr/>
         </p:nvSpPr>
@@ -27384,7 +27674,7 @@
       </p:sp>
       <p:sp>
         <p:nvSpPr>
-          <p:cNvPr id="27" name="TextBox 26"/>
+          <p:cNvPr id="33" name="TextBox 32"/>
           <p:cNvSpPr txBox="1"/>
           <p:nvPr/>
         </p:nvSpPr>
@@ -27423,7 +27713,7 @@
       </p:sp>
       <p:sp>
         <p:nvSpPr>
-          <p:cNvPr id="28" name="Rounded Rectangle 27"/>
+          <p:cNvPr id="34" name="Rounded Rectangle 33"/>
           <p:cNvSpPr/>
           <p:nvPr/>
         </p:nvSpPr>
@@ -27471,7 +27761,7 @@
       </p:sp>
       <p:sp>
         <p:nvSpPr>
-          <p:cNvPr id="29" name="TextBox 28"/>
+          <p:cNvPr id="35" name="TextBox 34"/>
           <p:cNvSpPr txBox="1"/>
           <p:nvPr/>
         </p:nvSpPr>
@@ -27510,7 +27800,7 @@
       </p:sp>
       <p:sp>
         <p:nvSpPr>
-          <p:cNvPr id="30" name="TextBox 29"/>
+          <p:cNvPr id="36" name="TextBox 35"/>
           <p:cNvSpPr txBox="1"/>
           <p:nvPr/>
         </p:nvSpPr>
@@ -29415,17 +29705,58 @@
       </p:sp>
       <p:sp>
         <p:nvSpPr>
-          <p:cNvPr id="6" name="Rectangle 5"/>
+          <p:cNvPr id="6" name="TextBox 5"/>
+          <p:cNvSpPr txBox="1"/>
+          <p:nvPr/>
+        </p:nvSpPr>
+        <p:spPr>
+          <a:xfrm>
+            <a:off x="685800" y="2395728"/>
+            <a:ext cx="6675120" cy="1600200"/>
+          </a:xfrm>
+          <a:prstGeom prst="rect">
+            <a:avLst/>
+          </a:prstGeom>
+          <a:noFill/>
+        </p:spPr>
+        <p:txBody>
+          <a:bodyPr wrap="square" lIns="0" rIns="0" tIns="0" bIns="0" anchor="t">
+            <a:spAutoFit/>
+          </a:bodyPr>
+          <a:lstStyle/>
+          <a:p>
+            <a:pPr algn="l">
+              <a:lnSpc>
+                <a:spcPct val="108000"/>
+              </a:lnSpc>
+            </a:pPr>
+            <a:r>
+              <a:rPr sz="3000" b="1" i="0">
+                <a:solidFill>
+                  <a:srgbClr val="21295C"/>
+                </a:solidFill>
+                <a:latin typeface="DejaVu Sans"/>
+              </a:rPr>
+              <a:t>Измерение — стрелка, которой ИИ снизил доверие</a:t>
+            </a:r>
+          </a:p>
+        </p:txBody>
+      </p:sp>
+      <p:sp>
+        <p:nvSpPr>
+          <p:cNvPr id="7" name="Rounded Rectangle 6"/>
           <p:cNvSpPr/>
           <p:nvPr/>
         </p:nvSpPr>
         <p:spPr>
           <a:xfrm>
-            <a:off x="713232" y="1993392"/>
-            <a:ext cx="640080" cy="45720"/>
-          </a:xfrm>
-          <a:prstGeom prst="rect">
-            <a:avLst/>
+            <a:off x="713232" y="3840480"/>
+            <a:ext cx="3291840" cy="384048"/>
+          </a:xfrm>
+          <a:prstGeom prst="roundRect">
+            <a:avLst>
+              <a:gd name="adj" fmla="val 50000"/>
+            </a:avLst>
           </a:prstGeom>
           <a:solidFill>
             <a:srgbClr val="F0AB00"/>
@@ -29450,102 +29781,17 @@
           </a:fontRef>
         </p:style>
         <p:txBody>
-          <a:bodyPr rtlCol="0" anchor="ctr"/>
+          <a:bodyPr rtlCol="0" anchor="ctr" lIns="45720" rIns="45720" tIns="18288" bIns="18288" wrap="none"/>
           <a:lstStyle/>
           <a:p>
             <a:pPr algn="ctr"/>
-          </a:p>
-        </p:txBody>
-      </p:sp>
-      <p:sp>
-        <p:nvSpPr>
-          <p:cNvPr id="7" name="TextBox 6"/>
-          <p:cNvSpPr txBox="1"/>
-          <p:nvPr/>
-        </p:nvSpPr>
-        <p:spPr>
-          <a:xfrm>
-            <a:off x="685800" y="2331720"/>
-            <a:ext cx="6675120" cy="1600200"/>
-          </a:xfrm>
-          <a:prstGeom prst="rect">
-            <a:avLst/>
-          </a:prstGeom>
-          <a:noFill/>
-        </p:spPr>
-        <p:txBody>
-          <a:bodyPr wrap="square" lIns="0" rIns="0" tIns="0" bIns="0" anchor="t">
-            <a:spAutoFit/>
-          </a:bodyPr>
-          <a:lstStyle/>
-          <a:p>
-            <a:pPr algn="l">
-              <a:lnSpc>
-                <a:spcPct val="108000"/>
-              </a:lnSpc>
-            </a:pPr>
-            <a:r>
-              <a:rPr sz="3000" b="1" i="0">
+            <a:r>
+              <a:rPr sz="1250" b="1">
                 <a:solidFill>
                   <a:srgbClr val="21295C"/>
                 </a:solidFill>
                 <a:latin typeface="DejaVu Sans"/>
               </a:rPr>
-              <a:t>Измерение — стрелка, которой AI снизил доверие</a:t>
-            </a:r>
-          </a:p>
-        </p:txBody>
-      </p:sp>
-      <p:sp>
-        <p:nvSpPr>
-          <p:cNvPr id="8" name="Rounded Rectangle 7"/>
-          <p:cNvSpPr/>
-          <p:nvPr/>
-        </p:nvSpPr>
-        <p:spPr>
-          <a:xfrm>
-            <a:off x="713232" y="3840480"/>
-            <a:ext cx="3291840" cy="384048"/>
-          </a:xfrm>
-          <a:prstGeom prst="roundRect">
-            <a:avLst>
-              <a:gd name="adj" fmla="val 50000"/>
-            </a:avLst>
-          </a:prstGeom>
-          <a:solidFill>
-            <a:srgbClr val="F0AB00"/>
-          </a:solidFill>
-          <a:ln>
-            <a:noFill/>
-          </a:ln>
-          <a:effectLst/>
-        </p:spPr>
-        <p:style>
-          <a:lnRef idx="1">
-            <a:schemeClr val="accent1"/>
-          </a:lnRef>
-          <a:fillRef idx="3">
-            <a:schemeClr val="accent1"/>
-          </a:fillRef>
-          <a:effectRef idx="2">
-            <a:schemeClr val="accent1"/>
-          </a:effectRef>
-          <a:fontRef idx="minor">
-            <a:schemeClr val="lt1"/>
-          </a:fontRef>
-        </p:style>
-        <p:txBody>
-          <a:bodyPr rtlCol="0" anchor="ctr" lIns="45720" rIns="45720" tIns="18288" bIns="18288" wrap="none"/>
-          <a:lstStyle/>
-          <a:p>
-            <a:pPr algn="ctr"/>
-            <a:r>
-              <a:rPr sz="1250" b="1">
-                <a:solidFill>
-                  <a:srgbClr val="21295C"/>
-                </a:solidFill>
-                <a:latin typeface="DejaVu Sans"/>
-              </a:rPr>
               <a:t>2 базы · 2 провала</a:t>
             </a:r>
           </a:p>
@@ -29553,7 +29799,7 @@
       </p:sp>
       <p:sp>
         <p:nvSpPr>
-          <p:cNvPr id="9" name="TextBox 8"/>
+          <p:cNvPr id="8" name="TextBox 7"/>
           <p:cNvSpPr txBox="1"/>
           <p:nvPr/>
         </p:nvSpPr>
@@ -29592,7 +29838,7 @@
       </p:sp>
       <p:sp>
         <p:nvSpPr>
-          <p:cNvPr id="10" name="Rounded Rectangle 9"/>
+          <p:cNvPr id="9" name="Rounded Rectangle 8"/>
           <p:cNvSpPr/>
           <p:nvPr/>
         </p:nvSpPr>
@@ -29640,7 +29886,7 @@
       </p:sp>
       <p:sp>
         <p:nvSpPr>
-          <p:cNvPr id="11" name="TextBox 10"/>
+          <p:cNvPr id="10" name="TextBox 9"/>
           <p:cNvSpPr txBox="1"/>
           <p:nvPr/>
         </p:nvSpPr>
@@ -29679,7 +29925,7 @@
       </p:sp>
       <p:sp>
         <p:nvSpPr>
-          <p:cNvPr id="12" name="TextBox 11"/>
+          <p:cNvPr id="11" name="TextBox 10"/>
           <p:cNvSpPr txBox="1"/>
           <p:nvPr/>
         </p:nvSpPr>
@@ -29718,7 +29964,7 @@
       </p:sp>
       <p:sp>
         <p:nvSpPr>
-          <p:cNvPr id="13" name="Rounded Rectangle 12"/>
+          <p:cNvPr id="12" name="Rounded Rectangle 11"/>
           <p:cNvSpPr/>
           <p:nvPr/>
         </p:nvSpPr>
@@ -29766,7 +30012,7 @@
       </p:sp>
       <p:sp>
         <p:nvSpPr>
-          <p:cNvPr id="14" name="TextBox 13"/>
+          <p:cNvPr id="13" name="TextBox 12"/>
           <p:cNvSpPr txBox="1"/>
           <p:nvPr/>
         </p:nvSpPr>
@@ -29805,7 +30051,7 @@
       </p:sp>
       <p:sp>
         <p:nvSpPr>
-          <p:cNvPr id="15" name="TextBox 14"/>
+          <p:cNvPr id="14" name="TextBox 13"/>
           <p:cNvSpPr txBox="1"/>
           <p:nvPr/>
         </p:nvSpPr>
@@ -29844,7 +30090,7 @@
       </p:sp>
       <p:sp>
         <p:nvSpPr>
-          <p:cNvPr id="16" name="Rounded Rectangle 15"/>
+          <p:cNvPr id="15" name="Rounded Rectangle 14"/>
           <p:cNvSpPr/>
           <p:nvPr/>
         </p:nvSpPr>
@@ -29892,7 +30138,7 @@
       </p:sp>
       <p:sp>
         <p:nvSpPr>
-          <p:cNvPr id="17" name="TextBox 16"/>
+          <p:cNvPr id="16" name="TextBox 15"/>
           <p:cNvSpPr txBox="1"/>
           <p:nvPr/>
         </p:nvSpPr>
@@ -29931,7 +30177,7 @@
       </p:sp>
       <p:sp>
         <p:nvSpPr>
-          <p:cNvPr id="18" name="TextBox 17"/>
+          <p:cNvPr id="17" name="TextBox 16"/>
           <p:cNvSpPr txBox="1"/>
           <p:nvPr/>
         </p:nvSpPr>
@@ -29970,7 +30216,7 @@
       </p:sp>
       <p:sp>
         <p:nvSpPr>
-          <p:cNvPr id="19" name="Rounded Rectangle 18"/>
+          <p:cNvPr id="18" name="Rounded Rectangle 17"/>
           <p:cNvSpPr/>
           <p:nvPr/>
         </p:nvSpPr>
@@ -30018,7 +30264,7 @@
       </p:sp>
       <p:sp>
         <p:nvSpPr>
-          <p:cNvPr id="20" name="TextBox 19"/>
+          <p:cNvPr id="19" name="TextBox 18"/>
           <p:cNvSpPr txBox="1"/>
           <p:nvPr/>
         </p:nvSpPr>
@@ -30057,7 +30303,7 @@
       </p:sp>
       <p:sp>
         <p:nvSpPr>
-          <p:cNvPr id="21" name="TextBox 20"/>
+          <p:cNvPr id="20" name="TextBox 19"/>
           <p:cNvSpPr txBox="1"/>
           <p:nvPr/>
         </p:nvSpPr>
@@ -30096,7 +30342,7 @@
       </p:sp>
       <p:sp>
         <p:nvSpPr>
-          <p:cNvPr id="22" name="Rounded Rectangle 21"/>
+          <p:cNvPr id="21" name="Rounded Rectangle 20"/>
           <p:cNvSpPr/>
           <p:nvPr/>
         </p:nvSpPr>
@@ -30144,7 +30390,7 @@
       </p:sp>
       <p:sp>
         <p:nvSpPr>
-          <p:cNvPr id="23" name="TextBox 22"/>
+          <p:cNvPr id="22" name="TextBox 21"/>
           <p:cNvSpPr txBox="1"/>
           <p:nvPr/>
         </p:nvSpPr>
@@ -30183,7 +30429,7 @@
       </p:sp>
       <p:sp>
         <p:nvSpPr>
-          <p:cNvPr id="24" name="TextBox 23"/>
+          <p:cNvPr id="23" name="TextBox 22"/>
           <p:cNvSpPr txBox="1"/>
           <p:nvPr/>
         </p:nvSpPr>
@@ -30222,7 +30468,7 @@
       </p:sp>
       <p:sp>
         <p:nvSpPr>
-          <p:cNvPr id="25" name="Rounded Rectangle 24"/>
+          <p:cNvPr id="24" name="Rounded Rectangle 23"/>
           <p:cNvSpPr/>
           <p:nvPr/>
         </p:nvSpPr>
@@ -30270,7 +30516,7 @@
       </p:sp>
       <p:sp>
         <p:nvSpPr>
-          <p:cNvPr id="26" name="TextBox 25"/>
+          <p:cNvPr id="25" name="TextBox 24"/>
           <p:cNvSpPr txBox="1"/>
           <p:nvPr/>
         </p:nvSpPr>
@@ -30309,7 +30555,7 @@
       </p:sp>
       <p:sp>
         <p:nvSpPr>
-          <p:cNvPr id="27" name="TextBox 26"/>
+          <p:cNvPr id="26" name="TextBox 25"/>
           <p:cNvSpPr txBox="1"/>
           <p:nvPr/>
         </p:nvSpPr>
@@ -30348,7 +30594,7 @@
       </p:sp>
       <p:sp>
         <p:nvSpPr>
-          <p:cNvPr id="28" name="Rounded Rectangle 27"/>
+          <p:cNvPr id="27" name="Rounded Rectangle 26"/>
           <p:cNvSpPr/>
           <p:nvPr/>
         </p:nvSpPr>
@@ -30396,7 +30642,7 @@
       </p:sp>
       <p:sp>
         <p:nvSpPr>
-          <p:cNvPr id="29" name="TextBox 28"/>
+          <p:cNvPr id="28" name="TextBox 27"/>
           <p:cNvSpPr txBox="1"/>
           <p:nvPr/>
         </p:nvSpPr>
@@ -30435,7 +30681,7 @@
       </p:sp>
       <p:sp>
         <p:nvSpPr>
-          <p:cNvPr id="30" name="TextBox 29"/>
+          <p:cNvPr id="29" name="TextBox 28"/>
           <p:cNvSpPr txBox="1"/>
           <p:nvPr/>
         </p:nvSpPr>
@@ -30474,7 +30720,7 @@
       </p:sp>
       <p:sp>
         <p:nvSpPr>
-          <p:cNvPr id="31" name="TextBox 30"/>
+          <p:cNvPr id="30" name="TextBox 29"/>
           <p:cNvSpPr txBox="1"/>
           <p:nvPr/>
         </p:nvSpPr>
@@ -31965,12 +32211,67 @@
         </p:nvSpPr>
         <p:spPr>
           <a:xfrm>
-            <a:off x="502920" y="1463040"/>
-            <a:ext cx="3611880" cy="2331720"/>
+            <a:off x="722376" y="1307592"/>
+            <a:ext cx="3172968" cy="256032"/>
           </a:xfrm>
           <a:prstGeom prst="roundRect">
             <a:avLst>
-              <a:gd name="adj" fmla="val 13071"/>
+              <a:gd name="adj" fmla="val 50000"/>
+            </a:avLst>
+          </a:prstGeom>
+          <a:solidFill>
+            <a:srgbClr val="E4F1F2"/>
+          </a:solidFill>
+          <a:ln>
+            <a:noFill/>
+          </a:ln>
+          <a:effectLst/>
+        </p:spPr>
+        <p:style>
+          <a:lnRef idx="1">
+            <a:schemeClr val="accent1"/>
+          </a:lnRef>
+          <a:fillRef idx="3">
+            <a:schemeClr val="accent1"/>
+          </a:fillRef>
+          <a:effectRef idx="2">
+            <a:schemeClr val="accent1"/>
+          </a:effectRef>
+          <a:fontRef idx="minor">
+            <a:schemeClr val="lt1"/>
+          </a:fontRef>
+        </p:style>
+        <p:txBody>
+          <a:bodyPr rtlCol="0" anchor="ctr" lIns="45720" rIns="45720" tIns="18288" bIns="18288" wrap="none"/>
+          <a:lstStyle/>
+          <a:p>
+            <a:pPr algn="ctr"/>
+            <a:r>
+              <a:rPr sz="950" b="1">
+                <a:solidFill>
+                  <a:srgbClr val="028090"/>
+                </a:solidFill>
+                <a:latin typeface="DejaVu Sans"/>
+              </a:rPr>
+              <a:t>ДО ТЕСТА</a:t>
+            </a:r>
+          </a:p>
+        </p:txBody>
+      </p:sp>
+      <p:sp>
+        <p:nvSpPr>
+          <p:cNvPr id="4" name="Rounded Rectangle 3"/>
+          <p:cNvSpPr/>
+          <p:nvPr/>
+        </p:nvSpPr>
+        <p:spPr>
+          <a:xfrm>
+            <a:off x="502920" y="1600200"/>
+            <a:ext cx="3611880" cy="2606040"/>
+          </a:xfrm>
+          <a:prstGeom prst="roundRect">
+            <a:avLst>
+              <a:gd name="adj" fmla="val 11695"/>
             </a:avLst>
           </a:prstGeom>
           <a:solidFill>
@@ -32007,13 +32308,13 @@
       </p:sp>
       <p:sp>
         <p:nvSpPr>
-          <p:cNvPr id="4" name="Rounded Rectangle 3"/>
+          <p:cNvPr id="5" name="Rounded Rectangle 4"/>
           <p:cNvSpPr/>
           <p:nvPr/>
         </p:nvSpPr>
         <p:spPr>
           <a:xfrm>
-            <a:off x="722376" y="1664208"/>
+            <a:off x="722376" y="1783080"/>
             <a:ext cx="457200" cy="365760"/>
           </a:xfrm>
           <a:prstGeom prst="roundRect">
@@ -32062,7 +32363,7 @@
       </p:sp>
       <p:pic>
         <p:nvPicPr>
-          <p:cNvPr id="5" name="Picture 4" descr="shield-alert-mid.png"/>
+          <p:cNvPr id="6" name="Picture 5" descr="shield-alert-mid.png"/>
           <p:cNvPicPr>
             <a:picLocks noChangeAspect="1"/>
           </p:cNvPicPr>
@@ -32076,7 +32377,7 @@
         </p:blipFill>
         <p:spPr>
           <a:xfrm>
-            <a:off x="3337560" y="1645920"/>
+            <a:off x="3337560" y="1764792"/>
             <a:ext cx="502920" cy="502920"/>
           </a:xfrm>
           <a:prstGeom prst="rect">
@@ -32086,14 +32387,14 @@
       </p:pic>
       <p:sp>
         <p:nvSpPr>
-          <p:cNvPr id="6" name="TextBox 5"/>
-          <p:cNvSpPr txBox="1"/>
-          <p:nvPr/>
-        </p:nvSpPr>
-        <p:spPr>
-          <a:xfrm>
-            <a:off x="722376" y="2240280"/>
-            <a:ext cx="3172968" cy="685800"/>
+          <p:cNvPr id="7" name="TextBox 6"/>
+          <p:cNvSpPr txBox="1"/>
+          <p:nvPr/>
+        </p:nvSpPr>
+        <p:spPr>
+          <a:xfrm>
+            <a:off x="722376" y="2331720"/>
+            <a:ext cx="3172968" cy="594360"/>
           </a:xfrm>
           <a:prstGeom prst="rect">
             <a:avLst/>
@@ -32112,7 +32413,7 @@
               </a:lnSpc>
             </a:pPr>
             <a:r>
-              <a:rPr sz="1400" b="1" i="0">
+              <a:rPr sz="1350" b="1" i="0">
                 <a:solidFill>
                   <a:srgbClr val="21295C"/>
                 </a:solidFill>
@@ -32125,14 +32426,14 @@
       </p:sp>
       <p:sp>
         <p:nvSpPr>
-          <p:cNvPr id="7" name="TextBox 6"/>
-          <p:cNvSpPr txBox="1"/>
-          <p:nvPr/>
-        </p:nvSpPr>
-        <p:spPr>
-          <a:xfrm>
-            <a:off x="722376" y="2971800"/>
-            <a:ext cx="3172968" cy="731520"/>
+          <p:cNvPr id="8" name="TextBox 7"/>
+          <p:cNvSpPr txBox="1"/>
+          <p:nvPr/>
+        </p:nvSpPr>
+        <p:spPr>
+          <a:xfrm>
+            <a:off x="722376" y="2926080"/>
+            <a:ext cx="3172968" cy="1188720"/>
           </a:xfrm>
           <a:prstGeom prst="rect">
             <a:avLst/>
@@ -32147,35 +32448,90 @@
           <a:p>
             <a:pPr algn="l">
               <a:lnSpc>
-                <a:spcPct val="112000"/>
-              </a:lnSpc>
-            </a:pPr>
-            <a:r>
-              <a:rPr sz="1150" b="0" i="1">
+                <a:spcPct val="114000"/>
+              </a:lnSpc>
+            </a:pPr>
+            <a:r>
+              <a:rPr sz="1000" b="0" i="1">
                 <a:solidFill>
                   <a:srgbClr val="5B6678"/>
                 </a:solidFill>
                 <a:latin typeface="DejaVu Sans"/>
               </a:rPr>
-              <a:t>SRM (перекос групп), размер выборки заранее</a:t>
-            </a:r>
-          </a:p>
-        </p:txBody>
-      </p:sp>
-      <p:sp>
-        <p:nvSpPr>
-          <p:cNvPr id="8" name="Rounded Rectangle 7"/>
+              <a:t>SRM (перекос групп) — доли пользователей в группах не совпали с планом; размер выборки должен быть зафиксирован заранее, а не подогнан под результат</a:t>
+            </a:r>
+          </a:p>
+        </p:txBody>
+      </p:sp>
+      <p:sp>
+        <p:nvSpPr>
+          <p:cNvPr id="9" name="Rounded Rectangle 8"/>
           <p:cNvSpPr/>
           <p:nvPr/>
         </p:nvSpPr>
         <p:spPr>
           <a:xfrm>
-            <a:off x="4297680" y="1463040"/>
-            <a:ext cx="3611880" cy="2331720"/>
+            <a:off x="4517136" y="1307592"/>
+            <a:ext cx="3172968" cy="256032"/>
           </a:xfrm>
           <a:prstGeom prst="roundRect">
             <a:avLst>
-              <a:gd name="adj" fmla="val 13071"/>
+              <a:gd name="adj" fmla="val 50000"/>
+            </a:avLst>
+          </a:prstGeom>
+          <a:solidFill>
+            <a:srgbClr val="E4F1F2"/>
+          </a:solidFill>
+          <a:ln>
+            <a:noFill/>
+          </a:ln>
+          <a:effectLst/>
+        </p:spPr>
+        <p:style>
+          <a:lnRef idx="1">
+            <a:schemeClr val="accent1"/>
+          </a:lnRef>
+          <a:fillRef idx="3">
+            <a:schemeClr val="accent1"/>
+          </a:fillRef>
+          <a:effectRef idx="2">
+            <a:schemeClr val="accent1"/>
+          </a:effectRef>
+          <a:fontRef idx="minor">
+            <a:schemeClr val="lt1"/>
+          </a:fontRef>
+        </p:style>
+        <p:txBody>
+          <a:bodyPr rtlCol="0" anchor="ctr" lIns="45720" rIns="45720" tIns="18288" bIns="18288" wrap="none"/>
+          <a:lstStyle/>
+          <a:p>
+            <a:pPr algn="ctr"/>
+            <a:r>
+              <a:rPr sz="950" b="1">
+                <a:solidFill>
+                  <a:srgbClr val="028090"/>
+                </a:solidFill>
+                <a:latin typeface="DejaVu Sans"/>
+              </a:rPr>
+              <a:t>ИНТЕРПРЕТАЦИЯ</a:t>
+            </a:r>
+          </a:p>
+        </p:txBody>
+      </p:sp>
+      <p:sp>
+        <p:nvSpPr>
+          <p:cNvPr id="10" name="Rounded Rectangle 9"/>
+          <p:cNvSpPr/>
+          <p:nvPr/>
+        </p:nvSpPr>
+        <p:spPr>
+          <a:xfrm>
+            <a:off x="4297680" y="1600200"/>
+            <a:ext cx="3611880" cy="2606040"/>
+          </a:xfrm>
+          <a:prstGeom prst="roundRect">
+            <a:avLst>
+              <a:gd name="adj" fmla="val 11695"/>
             </a:avLst>
           </a:prstGeom>
           <a:solidFill>
@@ -32212,13 +32568,13 @@
       </p:sp>
       <p:sp>
         <p:nvSpPr>
-          <p:cNvPr id="9" name="Rounded Rectangle 8"/>
+          <p:cNvPr id="11" name="Rounded Rectangle 10"/>
           <p:cNvSpPr/>
           <p:nvPr/>
         </p:nvSpPr>
         <p:spPr>
           <a:xfrm>
-            <a:off x="4517136" y="1664208"/>
+            <a:off x="4517136" y="1783080"/>
             <a:ext cx="457200" cy="365760"/>
           </a:xfrm>
           <a:prstGeom prst="roundRect">
@@ -32267,7 +32623,7 @@
       </p:sp>
       <p:pic>
         <p:nvPicPr>
-          <p:cNvPr id="10" name="Picture 9" descr="search-mid.png"/>
+          <p:cNvPr id="12" name="Picture 11" descr="search-mid.png"/>
           <p:cNvPicPr>
             <a:picLocks noChangeAspect="1"/>
           </p:cNvPicPr>
@@ -32281,7 +32637,7 @@
         </p:blipFill>
         <p:spPr>
           <a:xfrm>
-            <a:off x="7132320" y="1645920"/>
+            <a:off x="7132320" y="1764792"/>
             <a:ext cx="502920" cy="502920"/>
           </a:xfrm>
           <a:prstGeom prst="rect">
@@ -32291,14 +32647,14 @@
       </p:pic>
       <p:sp>
         <p:nvSpPr>
-          <p:cNvPr id="11" name="TextBox 10"/>
-          <p:cNvSpPr txBox="1"/>
-          <p:nvPr/>
-        </p:nvSpPr>
-        <p:spPr>
-          <a:xfrm>
-            <a:off x="4517136" y="2240280"/>
-            <a:ext cx="3172968" cy="685800"/>
+          <p:cNvPr id="13" name="TextBox 12"/>
+          <p:cNvSpPr txBox="1"/>
+          <p:nvPr/>
+        </p:nvSpPr>
+        <p:spPr>
+          <a:xfrm>
+            <a:off x="4517136" y="2331720"/>
+            <a:ext cx="3172968" cy="594360"/>
           </a:xfrm>
           <a:prstGeom prst="rect">
             <a:avLst/>
@@ -32317,7 +32673,7 @@
               </a:lnSpc>
             </a:pPr>
             <a:r>
-              <a:rPr sz="1400" b="1" i="0">
+              <a:rPr sz="1350" b="1" i="0">
                 <a:solidFill>
                   <a:srgbClr val="21295C"/>
                 </a:solidFill>
@@ -32330,14 +32686,14 @@
       </p:sp>
       <p:sp>
         <p:nvSpPr>
-          <p:cNvPr id="12" name="TextBox 11"/>
-          <p:cNvSpPr txBox="1"/>
-          <p:nvPr/>
-        </p:nvSpPr>
-        <p:spPr>
-          <a:xfrm>
-            <a:off x="4517136" y="2971800"/>
-            <a:ext cx="3172968" cy="731520"/>
+          <p:cNvPr id="14" name="TextBox 13"/>
+          <p:cNvSpPr txBox="1"/>
+          <p:nvPr/>
+        </p:nvSpPr>
+        <p:spPr>
+          <a:xfrm>
+            <a:off x="4517136" y="2926080"/>
+            <a:ext cx="3172968" cy="1188720"/>
           </a:xfrm>
           <a:prstGeom prst="rect">
             <a:avLst/>
@@ -32352,35 +32708,90 @@
           <a:p>
             <a:pPr algn="l">
               <a:lnSpc>
-                <a:spcPct val="112000"/>
-              </a:lnSpc>
-            </a:pPr>
-            <a:r>
-              <a:rPr sz="1150" b="0" i="1">
+                <a:spcPct val="114000"/>
+              </a:lnSpc>
+            </a:pPr>
+            <a:r>
+              <a:rPr sz="1000" b="0" i="1">
                 <a:solidFill>
                   <a:srgbClr val="5B6678"/>
                 </a:solidFill>
                 <a:latin typeface="DejaVu Sans"/>
               </a:rPr>
-              <a:t>peeking: 2 подглядки ≈2× ложных срабатываний</a:t>
-            </a:r>
-          </a:p>
-        </p:txBody>
-      </p:sp>
-      <p:sp>
-        <p:nvSpPr>
-          <p:cNvPr id="13" name="Rounded Rectangle 12"/>
+              <a:t>peeking (подглядывание) — досрочная проверка результата: 2 подглядки ≈2× ложных срабатываний, поэтому решение принимается только на заранее заданный размер выборки</a:t>
+            </a:r>
+          </a:p>
+        </p:txBody>
+      </p:sp>
+      <p:sp>
+        <p:nvSpPr>
+          <p:cNvPr id="15" name="Rounded Rectangle 14"/>
           <p:cNvSpPr/>
           <p:nvPr/>
         </p:nvSpPr>
         <p:spPr>
           <a:xfrm>
-            <a:off x="8092440" y="1463040"/>
-            <a:ext cx="3611880" cy="2331720"/>
+            <a:off x="8311896" y="1307592"/>
+            <a:ext cx="3172968" cy="256032"/>
           </a:xfrm>
           <a:prstGeom prst="roundRect">
             <a:avLst>
-              <a:gd name="adj" fmla="val 13071"/>
+              <a:gd name="adj" fmla="val 50000"/>
+            </a:avLst>
+          </a:prstGeom>
+          <a:solidFill>
+            <a:srgbClr val="E4F1F2"/>
+          </a:solidFill>
+          <a:ln>
+            <a:noFill/>
+          </a:ln>
+          <a:effectLst/>
+        </p:spPr>
+        <p:style>
+          <a:lnRef idx="1">
+            <a:schemeClr val="accent1"/>
+          </a:lnRef>
+          <a:fillRef idx="3">
+            <a:schemeClr val="accent1"/>
+          </a:fillRef>
+          <a:effectRef idx="2">
+            <a:schemeClr val="accent1"/>
+          </a:effectRef>
+          <a:fontRef idx="minor">
+            <a:schemeClr val="lt1"/>
+          </a:fontRef>
+        </p:style>
+        <p:txBody>
+          <a:bodyPr rtlCol="0" anchor="ctr" lIns="45720" rIns="45720" tIns="18288" bIns="18288" wrap="none"/>
+          <a:lstStyle/>
+          <a:p>
+            <a:pPr algn="ctr"/>
+            <a:r>
+              <a:rPr sz="950" b="1">
+                <a:solidFill>
+                  <a:srgbClr val="028090"/>
+                </a:solidFill>
+                <a:latin typeface="DejaVu Sans"/>
+              </a:rPr>
+              <a:t>ЭФФЕКТ</a:t>
+            </a:r>
+          </a:p>
+        </p:txBody>
+      </p:sp>
+      <p:sp>
+        <p:nvSpPr>
+          <p:cNvPr id="16" name="Rounded Rectangle 15"/>
+          <p:cNvSpPr/>
+          <p:nvPr/>
+        </p:nvSpPr>
+        <p:spPr>
+          <a:xfrm>
+            <a:off x="8092440" y="1600200"/>
+            <a:ext cx="3611880" cy="2606040"/>
+          </a:xfrm>
+          <a:prstGeom prst="roundRect">
+            <a:avLst>
+              <a:gd name="adj" fmla="val 11695"/>
             </a:avLst>
           </a:prstGeom>
           <a:solidFill>
@@ -32417,13 +32828,13 @@
       </p:sp>
       <p:sp>
         <p:nvSpPr>
-          <p:cNvPr id="14" name="Rounded Rectangle 13"/>
+          <p:cNvPr id="17" name="Rounded Rectangle 16"/>
           <p:cNvSpPr/>
           <p:nvPr/>
         </p:nvSpPr>
         <p:spPr>
           <a:xfrm>
-            <a:off x="8311896" y="1664208"/>
+            <a:off x="8311896" y="1783080"/>
             <a:ext cx="457200" cy="365760"/>
           </a:xfrm>
           <a:prstGeom prst="roundRect">
@@ -32472,7 +32883,7 @@
       </p:sp>
       <p:pic>
         <p:nvPicPr>
-          <p:cNvPr id="15" name="Picture 14" descr="triangle-alert-mid.png"/>
+          <p:cNvPr id="18" name="Picture 17" descr="triangle-alert-mid.png"/>
           <p:cNvPicPr>
             <a:picLocks noChangeAspect="1"/>
           </p:cNvPicPr>
@@ -32486,7 +32897,7 @@
         </p:blipFill>
         <p:spPr>
           <a:xfrm>
-            <a:off x="10927080" y="1645920"/>
+            <a:off x="10927080" y="1764792"/>
             <a:ext cx="502920" cy="502920"/>
           </a:xfrm>
           <a:prstGeom prst="rect">
@@ -32496,14 +32907,14 @@
       </p:pic>
       <p:sp>
         <p:nvSpPr>
-          <p:cNvPr id="16" name="TextBox 15"/>
-          <p:cNvSpPr txBox="1"/>
-          <p:nvPr/>
-        </p:nvSpPr>
-        <p:spPr>
-          <a:xfrm>
-            <a:off x="8311896" y="2240280"/>
-            <a:ext cx="3172968" cy="685800"/>
+          <p:cNvPr id="19" name="TextBox 18"/>
+          <p:cNvSpPr txBox="1"/>
+          <p:nvPr/>
+        </p:nvSpPr>
+        <p:spPr>
+          <a:xfrm>
+            <a:off x="8311896" y="2331720"/>
+            <a:ext cx="3172968" cy="594360"/>
           </a:xfrm>
           <a:prstGeom prst="rect">
             <a:avLst/>
@@ -32522,7 +32933,7 @@
               </a:lnSpc>
             </a:pPr>
             <a:r>
-              <a:rPr sz="1400" b="1" i="0">
+              <a:rPr sz="1350" b="1" i="0">
                 <a:solidFill>
                   <a:srgbClr val="21295C"/>
                 </a:solidFill>
@@ -32535,14 +32946,14 @@
       </p:sp>
       <p:sp>
         <p:nvSpPr>
-          <p:cNvPr id="17" name="TextBox 16"/>
-          <p:cNvSpPr txBox="1"/>
-          <p:nvPr/>
-        </p:nvSpPr>
-        <p:spPr>
-          <a:xfrm>
-            <a:off x="8311896" y="2971800"/>
-            <a:ext cx="3172968" cy="731520"/>
+          <p:cNvPr id="20" name="TextBox 19"/>
+          <p:cNvSpPr txBox="1"/>
+          <p:nvPr/>
+        </p:nvSpPr>
+        <p:spPr>
+          <a:xfrm>
+            <a:off x="8311896" y="2926080"/>
+            <a:ext cx="3172968" cy="1188720"/>
           </a:xfrm>
           <a:prstGeom prst="rect">
             <a:avLst/>
@@ -32557,31 +32968,31 @@
           <a:p>
             <a:pPr algn="l">
               <a:lnSpc>
-                <a:spcPct val="112000"/>
-              </a:lnSpc>
-            </a:pPr>
-            <a:r>
-              <a:rPr sz="1150" b="0" i="1">
+                <a:spcPct val="114000"/>
+              </a:lnSpc>
+            </a:pPr>
+            <a:r>
+              <a:rPr sz="1000" b="0" i="1">
                 <a:solidFill>
                   <a:srgbClr val="5B6678"/>
                 </a:solidFill>
                 <a:latin typeface="DejaVu Sans"/>
               </a:rPr>
-              <a:t>закон Тваймана: слишком красивая цифра обычно неверна</a:t>
-            </a:r>
-          </a:p>
-        </p:txBody>
-      </p:sp>
-      <p:sp>
-        <p:nvSpPr>
-          <p:cNvPr id="18" name="Rounded Rectangle 17"/>
+              <a:t>закон Тваймана: слишком красивая или неожиданная цифра обычно означает ошибку измерения, а не реальный эффект — сначала перепроверь методологию, потом радуйся результату</a:t>
+            </a:r>
+          </a:p>
+        </p:txBody>
+      </p:sp>
+      <p:sp>
+        <p:nvSpPr>
+          <p:cNvPr id="21" name="Rounded Rectangle 20"/>
           <p:cNvSpPr/>
           <p:nvPr/>
         </p:nvSpPr>
         <p:spPr>
           <a:xfrm>
-            <a:off x="502920" y="4069080"/>
-            <a:ext cx="11201400" cy="1325880"/>
+            <a:off x="502920" y="4389120"/>
+            <a:ext cx="11201400" cy="1051560"/>
           </a:xfrm>
           <a:prstGeom prst="roundRect">
             <a:avLst>
@@ -32622,14 +33033,14 @@
       </p:sp>
       <p:sp>
         <p:nvSpPr>
-          <p:cNvPr id="19" name="TextBox 18"/>
-          <p:cNvSpPr txBox="1"/>
-          <p:nvPr/>
-        </p:nvSpPr>
-        <p:spPr>
-          <a:xfrm>
-            <a:off x="722376" y="4123944"/>
-            <a:ext cx="10762488" cy="1216152"/>
+          <p:cNvPr id="22" name="TextBox 21"/>
+          <p:cNvSpPr txBox="1"/>
+          <p:nvPr/>
+        </p:nvSpPr>
+        <p:spPr>
+          <a:xfrm>
+            <a:off x="722376" y="4443983"/>
+            <a:ext cx="10762488" cy="941831"/>
           </a:xfrm>
           <a:prstGeom prst="rect">
             <a:avLst/>
@@ -32661,7 +33072,7 @@
       </p:sp>
       <p:sp>
         <p:nvSpPr>
-          <p:cNvPr id="20" name="TextBox 19"/>
+          <p:cNvPr id="23" name="TextBox 22"/>
           <p:cNvSpPr txBox="1"/>
           <p:nvPr/>
         </p:nvSpPr>
@@ -36098,7 +36509,7 @@
                 </a:solidFill>
                 <a:latin typeface="DejaVu Sans"/>
               </a:rPr>
-              <a:t>Когда AI сделал сборку почти бесплатной — что стало настоящим узким местом продукта, и на каждой фазе цикла: какая классическая дисциплина остаётся, что AI ускоряет, и где AI-first ломается?</a:t>
+              <a:t>Когда ИИ сделал сборку почти бесплатной — что стало настоящим узким местом продукта, и на каждой фазе цикла: какая классическая дисциплина остаётся, что ИИ ускоряет, и где AI-first ломается?</a:t>
             </a:r>
           </a:p>
         </p:txBody>
@@ -36589,7 +37000,7 @@
                 </a:solidFill>
                 <a:latin typeface="DejaVu Sans"/>
               </a:rPr>
-              <a:t>Measure = стрелка, которой AI снизил доверие</a:t>
+              <a:t>Измерение = стрелка, которой ИИ снизил доверие</a:t>
             </a:r>
           </a:p>
         </p:txBody>
@@ -37049,17 +37460,58 @@
       </p:sp>
       <p:sp>
         <p:nvSpPr>
-          <p:cNvPr id="6" name="Rectangle 5"/>
+          <p:cNvPr id="6" name="TextBox 5"/>
+          <p:cNvSpPr txBox="1"/>
+          <p:nvPr/>
+        </p:nvSpPr>
+        <p:spPr>
+          <a:xfrm>
+            <a:off x="685800" y="2395728"/>
+            <a:ext cx="6675120" cy="1600200"/>
+          </a:xfrm>
+          <a:prstGeom prst="rect">
+            <a:avLst/>
+          </a:prstGeom>
+          <a:noFill/>
+        </p:spPr>
+        <p:txBody>
+          <a:bodyPr wrap="square" lIns="0" rIns="0" tIns="0" bIns="0" anchor="t">
+            <a:spAutoFit/>
+          </a:bodyPr>
+          <a:lstStyle/>
+          <a:p>
+            <a:pPr algn="l">
+              <a:lnSpc>
+                <a:spcPct val="108000"/>
+              </a:lnSpc>
+            </a:pPr>
+            <a:r>
+              <a:rPr sz="3000" b="1" i="0">
+                <a:solidFill>
+                  <a:srgbClr val="21295C"/>
+                </a:solidFill>
+                <a:latin typeface="DejaVu Sans"/>
+              </a:rPr>
+              <a:t>Поддержка — продукт как оркестр</a:t>
+            </a:r>
+          </a:p>
+        </p:txBody>
+      </p:sp>
+      <p:sp>
+        <p:nvSpPr>
+          <p:cNvPr id="7" name="Rounded Rectangle 6"/>
           <p:cNvSpPr/>
           <p:nvPr/>
         </p:nvSpPr>
         <p:spPr>
           <a:xfrm>
-            <a:off x="713232" y="1993392"/>
-            <a:ext cx="640080" cy="45720"/>
-          </a:xfrm>
-          <a:prstGeom prst="rect">
-            <a:avLst/>
+            <a:off x="713232" y="3840480"/>
+            <a:ext cx="3291840" cy="384048"/>
+          </a:xfrm>
+          <a:prstGeom prst="roundRect">
+            <a:avLst>
+              <a:gd name="adj" fmla="val 50000"/>
+            </a:avLst>
           </a:prstGeom>
           <a:solidFill>
             <a:srgbClr val="F0AB00"/>
@@ -37084,102 +37536,17 @@
           </a:fontRef>
         </p:style>
         <p:txBody>
-          <a:bodyPr rtlCol="0" anchor="ctr"/>
+          <a:bodyPr rtlCol="0" anchor="ctr" lIns="45720" rIns="45720" tIns="18288" bIns="18288" wrap="none"/>
           <a:lstStyle/>
           <a:p>
             <a:pPr algn="ctr"/>
-          </a:p>
-        </p:txBody>
-      </p:sp>
-      <p:sp>
-        <p:nvSpPr>
-          <p:cNvPr id="7" name="TextBox 6"/>
-          <p:cNvSpPr txBox="1"/>
-          <p:nvPr/>
-        </p:nvSpPr>
-        <p:spPr>
-          <a:xfrm>
-            <a:off x="685800" y="2331720"/>
-            <a:ext cx="6675120" cy="1600200"/>
-          </a:xfrm>
-          <a:prstGeom prst="rect">
-            <a:avLst/>
-          </a:prstGeom>
-          <a:noFill/>
-        </p:spPr>
-        <p:txBody>
-          <a:bodyPr wrap="square" lIns="0" rIns="0" tIns="0" bIns="0" anchor="t">
-            <a:spAutoFit/>
-          </a:bodyPr>
-          <a:lstStyle/>
-          <a:p>
-            <a:pPr algn="l">
-              <a:lnSpc>
-                <a:spcPct val="108000"/>
-              </a:lnSpc>
-            </a:pPr>
-            <a:r>
-              <a:rPr sz="3000" b="1" i="0">
+            <a:r>
+              <a:rPr sz="1250" b="1">
                 <a:solidFill>
                   <a:srgbClr val="21295C"/>
                 </a:solidFill>
                 <a:latin typeface="DejaVu Sans"/>
               </a:rPr>
-              <a:t>Поддержка — продукт как оркестр</a:t>
-            </a:r>
-          </a:p>
-        </p:txBody>
-      </p:sp>
-      <p:sp>
-        <p:nvSpPr>
-          <p:cNvPr id="8" name="Rounded Rectangle 7"/>
-          <p:cNvSpPr/>
-          <p:nvPr/>
-        </p:nvSpPr>
-        <p:spPr>
-          <a:xfrm>
-            <a:off x="713232" y="3840480"/>
-            <a:ext cx="3291840" cy="384048"/>
-          </a:xfrm>
-          <a:prstGeom prst="roundRect">
-            <a:avLst>
-              <a:gd name="adj" fmla="val 50000"/>
-            </a:avLst>
-          </a:prstGeom>
-          <a:solidFill>
-            <a:srgbClr val="F0AB00"/>
-          </a:solidFill>
-          <a:ln>
-            <a:noFill/>
-          </a:ln>
-          <a:effectLst/>
-        </p:spPr>
-        <p:style>
-          <a:lnRef idx="1">
-            <a:schemeClr val="accent1"/>
-          </a:lnRef>
-          <a:fillRef idx="3">
-            <a:schemeClr val="accent1"/>
-          </a:fillRef>
-          <a:effectRef idx="2">
-            <a:schemeClr val="accent1"/>
-          </a:effectRef>
-          <a:fontRef idx="minor">
-            <a:schemeClr val="lt1"/>
-          </a:fontRef>
-        </p:style>
-        <p:txBody>
-          <a:bodyPr rtlCol="0" anchor="ctr" lIns="45720" rIns="45720" tIns="18288" bIns="18288" wrap="none"/>
-          <a:lstStyle/>
-          <a:p>
-            <a:pPr algn="ctr"/>
-            <a:r>
-              <a:rPr sz="1250" b="1">
-                <a:solidFill>
-                  <a:srgbClr val="21295C"/>
-                </a:solidFill>
-                <a:latin typeface="DejaVu Sans"/>
-              </a:rPr>
               <a:t>2 базы · 3 провала</a:t>
             </a:r>
           </a:p>
@@ -37187,7 +37554,7 @@
       </p:sp>
       <p:sp>
         <p:nvSpPr>
-          <p:cNvPr id="9" name="TextBox 8"/>
+          <p:cNvPr id="8" name="TextBox 7"/>
           <p:cNvSpPr txBox="1"/>
           <p:nvPr/>
         </p:nvSpPr>
@@ -37226,7 +37593,7 @@
       </p:sp>
       <p:sp>
         <p:nvSpPr>
-          <p:cNvPr id="10" name="Rounded Rectangle 9"/>
+          <p:cNvPr id="9" name="Rounded Rectangle 8"/>
           <p:cNvSpPr/>
           <p:nvPr/>
         </p:nvSpPr>
@@ -37274,7 +37641,7 @@
       </p:sp>
       <p:sp>
         <p:nvSpPr>
-          <p:cNvPr id="11" name="TextBox 10"/>
+          <p:cNvPr id="10" name="TextBox 9"/>
           <p:cNvSpPr txBox="1"/>
           <p:nvPr/>
         </p:nvSpPr>
@@ -37313,7 +37680,7 @@
       </p:sp>
       <p:sp>
         <p:nvSpPr>
-          <p:cNvPr id="12" name="TextBox 11"/>
+          <p:cNvPr id="11" name="TextBox 10"/>
           <p:cNvSpPr txBox="1"/>
           <p:nvPr/>
         </p:nvSpPr>
@@ -37352,7 +37719,7 @@
       </p:sp>
       <p:sp>
         <p:nvSpPr>
-          <p:cNvPr id="13" name="Rounded Rectangle 12"/>
+          <p:cNvPr id="12" name="Rounded Rectangle 11"/>
           <p:cNvSpPr/>
           <p:nvPr/>
         </p:nvSpPr>
@@ -37400,7 +37767,7 @@
       </p:sp>
       <p:sp>
         <p:nvSpPr>
-          <p:cNvPr id="14" name="TextBox 13"/>
+          <p:cNvPr id="13" name="TextBox 12"/>
           <p:cNvSpPr txBox="1"/>
           <p:nvPr/>
         </p:nvSpPr>
@@ -37439,7 +37806,7 @@
       </p:sp>
       <p:sp>
         <p:nvSpPr>
-          <p:cNvPr id="15" name="TextBox 14"/>
+          <p:cNvPr id="14" name="TextBox 13"/>
           <p:cNvSpPr txBox="1"/>
           <p:nvPr/>
         </p:nvSpPr>
@@ -37478,7 +37845,7 @@
       </p:sp>
       <p:sp>
         <p:nvSpPr>
-          <p:cNvPr id="16" name="Rounded Rectangle 15"/>
+          <p:cNvPr id="15" name="Rounded Rectangle 14"/>
           <p:cNvSpPr/>
           <p:nvPr/>
         </p:nvSpPr>
@@ -37526,7 +37893,7 @@
       </p:sp>
       <p:sp>
         <p:nvSpPr>
-          <p:cNvPr id="17" name="TextBox 16"/>
+          <p:cNvPr id="16" name="TextBox 15"/>
           <p:cNvSpPr txBox="1"/>
           <p:nvPr/>
         </p:nvSpPr>
@@ -37565,7 +37932,7 @@
       </p:sp>
       <p:sp>
         <p:nvSpPr>
-          <p:cNvPr id="18" name="TextBox 17"/>
+          <p:cNvPr id="17" name="TextBox 16"/>
           <p:cNvSpPr txBox="1"/>
           <p:nvPr/>
         </p:nvSpPr>
@@ -37604,7 +37971,7 @@
       </p:sp>
       <p:sp>
         <p:nvSpPr>
-          <p:cNvPr id="19" name="Rounded Rectangle 18"/>
+          <p:cNvPr id="18" name="Rounded Rectangle 17"/>
           <p:cNvSpPr/>
           <p:nvPr/>
         </p:nvSpPr>
@@ -37652,7 +38019,7 @@
       </p:sp>
       <p:sp>
         <p:nvSpPr>
-          <p:cNvPr id="20" name="TextBox 19"/>
+          <p:cNvPr id="19" name="TextBox 18"/>
           <p:cNvSpPr txBox="1"/>
           <p:nvPr/>
         </p:nvSpPr>
@@ -37691,7 +38058,7 @@
       </p:sp>
       <p:sp>
         <p:nvSpPr>
-          <p:cNvPr id="21" name="TextBox 20"/>
+          <p:cNvPr id="20" name="TextBox 19"/>
           <p:cNvSpPr txBox="1"/>
           <p:nvPr/>
         </p:nvSpPr>
@@ -37730,7 +38097,7 @@
       </p:sp>
       <p:sp>
         <p:nvSpPr>
-          <p:cNvPr id="22" name="Rounded Rectangle 21"/>
+          <p:cNvPr id="21" name="Rounded Rectangle 20"/>
           <p:cNvSpPr/>
           <p:nvPr/>
         </p:nvSpPr>
@@ -37778,7 +38145,7 @@
       </p:sp>
       <p:sp>
         <p:nvSpPr>
-          <p:cNvPr id="23" name="TextBox 22"/>
+          <p:cNvPr id="22" name="TextBox 21"/>
           <p:cNvSpPr txBox="1"/>
           <p:nvPr/>
         </p:nvSpPr>
@@ -37817,7 +38184,7 @@
       </p:sp>
       <p:sp>
         <p:nvSpPr>
-          <p:cNvPr id="24" name="TextBox 23"/>
+          <p:cNvPr id="23" name="TextBox 22"/>
           <p:cNvSpPr txBox="1"/>
           <p:nvPr/>
         </p:nvSpPr>
@@ -37856,7 +38223,7 @@
       </p:sp>
       <p:sp>
         <p:nvSpPr>
-          <p:cNvPr id="25" name="Rounded Rectangle 24"/>
+          <p:cNvPr id="24" name="Rounded Rectangle 23"/>
           <p:cNvSpPr/>
           <p:nvPr/>
         </p:nvSpPr>
@@ -37904,7 +38271,7 @@
       </p:sp>
       <p:sp>
         <p:nvSpPr>
-          <p:cNvPr id="26" name="TextBox 25"/>
+          <p:cNvPr id="25" name="TextBox 24"/>
           <p:cNvSpPr txBox="1"/>
           <p:nvPr/>
         </p:nvSpPr>
@@ -37943,7 +38310,7 @@
       </p:sp>
       <p:sp>
         <p:nvSpPr>
-          <p:cNvPr id="27" name="TextBox 26"/>
+          <p:cNvPr id="26" name="TextBox 25"/>
           <p:cNvSpPr txBox="1"/>
           <p:nvPr/>
         </p:nvSpPr>
@@ -37982,7 +38349,7 @@
       </p:sp>
       <p:sp>
         <p:nvSpPr>
-          <p:cNvPr id="28" name="Rounded Rectangle 27"/>
+          <p:cNvPr id="27" name="Rounded Rectangle 26"/>
           <p:cNvSpPr/>
           <p:nvPr/>
         </p:nvSpPr>
@@ -38030,7 +38397,7 @@
       </p:sp>
       <p:sp>
         <p:nvSpPr>
-          <p:cNvPr id="29" name="TextBox 28"/>
+          <p:cNvPr id="28" name="TextBox 27"/>
           <p:cNvSpPr txBox="1"/>
           <p:nvPr/>
         </p:nvSpPr>
@@ -38069,7 +38436,7 @@
       </p:sp>
       <p:sp>
         <p:nvSpPr>
-          <p:cNvPr id="30" name="TextBox 29"/>
+          <p:cNvPr id="29" name="TextBox 28"/>
           <p:cNvSpPr txBox="1"/>
           <p:nvPr/>
         </p:nvSpPr>
@@ -38108,7 +38475,7 @@
       </p:sp>
       <p:sp>
         <p:nvSpPr>
-          <p:cNvPr id="31" name="TextBox 30"/>
+          <p:cNvPr id="30" name="TextBox 29"/>
           <p:cNvSpPr txBox="1"/>
           <p:nvPr/>
         </p:nvSpPr>
@@ -38710,7 +39077,7 @@
                 </a:solidFill>
                 <a:latin typeface="DejaVu Sans"/>
               </a:rPr>
-              <a:t>Заранее договариваемся, сколько сбоев допустимо (бюджет на ошибки). С AI сложнее: модель может «тихо деградировать», пока графики ещё зелёные.</a:t>
+              <a:t>Заранее договариваемся, сколько сбоев допустимо (бюджет на ошибки). С ИИ сложнее: модель может «тихо деградировать», пока графики ещё зелёные.</a:t>
             </a:r>
           </a:p>
         </p:txBody>
@@ -39628,13 +39995,52 @@
       </p:sp>
       <p:sp>
         <p:nvSpPr>
-          <p:cNvPr id="3" name="Rounded Rectangle 2"/>
+          <p:cNvPr id="3" name="TextBox 2"/>
+          <p:cNvSpPr txBox="1"/>
+          <p:nvPr/>
+        </p:nvSpPr>
+        <p:spPr>
+          <a:xfrm>
+            <a:off x="594360" y="1188720"/>
+            <a:ext cx="10515600" cy="320040"/>
+          </a:xfrm>
+          <a:prstGeom prst="rect">
+            <a:avLst/>
+          </a:prstGeom>
+          <a:noFill/>
+        </p:spPr>
+        <p:txBody>
+          <a:bodyPr wrap="square" lIns="0" rIns="0" tIns="0" bIns="0" anchor="t">
+            <a:spAutoFit/>
+          </a:bodyPr>
+          <a:lstStyle/>
+          <a:p>
+            <a:pPr algn="l">
+              <a:lnSpc>
+                <a:spcPct val="115000"/>
+              </a:lnSpc>
+            </a:pPr>
+            <a:r>
+              <a:rPr sz="1200" b="0" i="1">
+                <a:solidFill>
+                  <a:srgbClr val="5B6678"/>
+                </a:solidFill>
+                <a:latin typeface="DejaVu Sans"/>
+              </a:rPr>
+              <a:t>Трейсинг (камера над каждым узлом): LangSmith · Langfuse · Arize Phoenix · Helicone</a:t>
+            </a:r>
+          </a:p>
+        </p:txBody>
+      </p:sp>
+      <p:sp>
+        <p:nvSpPr>
+          <p:cNvPr id="4" name="Rounded Rectangle 3"/>
           <p:cNvSpPr/>
           <p:nvPr/>
         </p:nvSpPr>
         <p:spPr>
           <a:xfrm>
-            <a:off x="594360" y="2194560"/>
+            <a:off x="594360" y="2331720"/>
             <a:ext cx="2331720" cy="868680"/>
           </a:xfrm>
           <a:prstGeom prst="roundRect">
@@ -39676,13 +40082,13 @@
       </p:sp>
       <p:sp>
         <p:nvSpPr>
-          <p:cNvPr id="4" name="TextBox 3"/>
-          <p:cNvSpPr txBox="1"/>
-          <p:nvPr/>
-        </p:nvSpPr>
-        <p:spPr>
-          <a:xfrm>
-            <a:off x="594360" y="2194560"/>
+          <p:cNvPr id="5" name="TextBox 4"/>
+          <p:cNvSpPr txBox="1"/>
+          <p:nvPr/>
+        </p:nvSpPr>
+        <p:spPr>
+          <a:xfrm>
+            <a:off x="594360" y="2331720"/>
             <a:ext cx="2331720" cy="868680"/>
           </a:xfrm>
           <a:prstGeom prst="rect">
@@ -39715,7 +40121,7 @@
       </p:sp>
       <p:pic>
         <p:nvPicPr>
-          <p:cNvPr id="5" name="Picture 4" descr="search-teal.png"/>
+          <p:cNvPr id="6" name="Picture 5" descr="search-teal.png"/>
           <p:cNvPicPr>
             <a:picLocks noChangeAspect="1"/>
           </p:cNvPicPr>
@@ -39729,7 +40135,7 @@
         </p:blipFill>
         <p:spPr>
           <a:xfrm>
-            <a:off x="1559051" y="1627631"/>
+            <a:off x="1559051" y="1764791"/>
             <a:ext cx="402336" cy="402336"/>
           </a:xfrm>
           <a:prstGeom prst="rect">
@@ -39739,13 +40145,13 @@
       </p:pic>
       <p:sp>
         <p:nvSpPr>
-          <p:cNvPr id="6" name="Right Arrow 5"/>
+          <p:cNvPr id="7" name="Right Arrow 6"/>
           <p:cNvSpPr/>
           <p:nvPr/>
         </p:nvSpPr>
         <p:spPr>
           <a:xfrm>
-            <a:off x="2971799" y="2514600"/>
+            <a:off x="2971799" y="2651760"/>
             <a:ext cx="411480" cy="228600"/>
           </a:xfrm>
           <a:prstGeom prst="rightArrow">
@@ -39783,13 +40189,13 @@
       </p:sp>
       <p:sp>
         <p:nvSpPr>
-          <p:cNvPr id="7" name="Rounded Rectangle 6"/>
+          <p:cNvPr id="8" name="Rounded Rectangle 7"/>
           <p:cNvSpPr/>
           <p:nvPr/>
         </p:nvSpPr>
         <p:spPr>
           <a:xfrm>
-            <a:off x="3428999" y="2194560"/>
+            <a:off x="3428999" y="2331720"/>
             <a:ext cx="2331720" cy="868680"/>
           </a:xfrm>
           <a:prstGeom prst="roundRect">
@@ -39831,13 +40237,13 @@
       </p:sp>
       <p:sp>
         <p:nvSpPr>
-          <p:cNvPr id="8" name="TextBox 7"/>
-          <p:cNvSpPr txBox="1"/>
-          <p:nvPr/>
-        </p:nvSpPr>
-        <p:spPr>
-          <a:xfrm>
-            <a:off x="3428999" y="2194560"/>
+          <p:cNvPr id="9" name="TextBox 8"/>
+          <p:cNvSpPr txBox="1"/>
+          <p:nvPr/>
+        </p:nvSpPr>
+        <p:spPr>
+          <a:xfrm>
+            <a:off x="3428999" y="2331720"/>
             <a:ext cx="2331720" cy="868680"/>
           </a:xfrm>
           <a:prstGeom prst="rect">
@@ -39870,7 +40276,7 @@
       </p:sp>
       <p:pic>
         <p:nvPicPr>
-          <p:cNvPr id="9" name="Picture 8" descr="search-teal.png"/>
+          <p:cNvPr id="10" name="Picture 9" descr="search-teal.png"/>
           <p:cNvPicPr>
             <a:picLocks noChangeAspect="1"/>
           </p:cNvPicPr>
@@ -39884,7 +40290,7 @@
         </p:blipFill>
         <p:spPr>
           <a:xfrm>
-            <a:off x="4393692" y="1627631"/>
+            <a:off x="4393692" y="1764791"/>
             <a:ext cx="402336" cy="402336"/>
           </a:xfrm>
           <a:prstGeom prst="rect">
@@ -39894,13 +40300,13 @@
       </p:pic>
       <p:sp>
         <p:nvSpPr>
-          <p:cNvPr id="10" name="Right Arrow 9"/>
+          <p:cNvPr id="11" name="Right Arrow 10"/>
           <p:cNvSpPr/>
           <p:nvPr/>
         </p:nvSpPr>
         <p:spPr>
           <a:xfrm>
-            <a:off x="5806439" y="2514600"/>
+            <a:off x="5806439" y="2651760"/>
             <a:ext cx="411480" cy="228600"/>
           </a:xfrm>
           <a:prstGeom prst="rightArrow">
@@ -39938,13 +40344,13 @@
       </p:sp>
       <p:sp>
         <p:nvSpPr>
-          <p:cNvPr id="11" name="Rounded Rectangle 10"/>
+          <p:cNvPr id="12" name="Rounded Rectangle 11"/>
           <p:cNvSpPr/>
           <p:nvPr/>
         </p:nvSpPr>
         <p:spPr>
           <a:xfrm>
-            <a:off x="6263640" y="2194560"/>
+            <a:off x="6263640" y="2331720"/>
             <a:ext cx="2331720" cy="868680"/>
           </a:xfrm>
           <a:prstGeom prst="roundRect">
@@ -39986,13 +40392,13 @@
       </p:sp>
       <p:sp>
         <p:nvSpPr>
-          <p:cNvPr id="12" name="TextBox 11"/>
-          <p:cNvSpPr txBox="1"/>
-          <p:nvPr/>
-        </p:nvSpPr>
-        <p:spPr>
-          <a:xfrm>
-            <a:off x="6263640" y="2194560"/>
+          <p:cNvPr id="13" name="TextBox 12"/>
+          <p:cNvSpPr txBox="1"/>
+          <p:nvPr/>
+        </p:nvSpPr>
+        <p:spPr>
+          <a:xfrm>
+            <a:off x="6263640" y="2331720"/>
             <a:ext cx="2331720" cy="868680"/>
           </a:xfrm>
           <a:prstGeom prst="rect">
@@ -40025,7 +40431,7 @@
       </p:sp>
       <p:pic>
         <p:nvPicPr>
-          <p:cNvPr id="13" name="Picture 12" descr="search-teal.png"/>
+          <p:cNvPr id="14" name="Picture 13" descr="search-teal.png"/>
           <p:cNvPicPr>
             <a:picLocks noChangeAspect="1"/>
           </p:cNvPicPr>
@@ -40039,7 +40445,7 @@
         </p:blipFill>
         <p:spPr>
           <a:xfrm>
-            <a:off x="7228332" y="1627631"/>
+            <a:off x="7228332" y="1764791"/>
             <a:ext cx="402336" cy="402336"/>
           </a:xfrm>
           <a:prstGeom prst="rect">
@@ -40049,13 +40455,13 @@
       </p:pic>
       <p:sp>
         <p:nvSpPr>
-          <p:cNvPr id="14" name="Right Arrow 13"/>
+          <p:cNvPr id="15" name="Right Arrow 14"/>
           <p:cNvSpPr/>
           <p:nvPr/>
         </p:nvSpPr>
         <p:spPr>
           <a:xfrm>
-            <a:off x="8641080" y="2514600"/>
+            <a:off x="8641080" y="2651760"/>
             <a:ext cx="411480" cy="228600"/>
           </a:xfrm>
           <a:prstGeom prst="rightArrow">
@@ -40093,13 +40499,13 @@
       </p:sp>
       <p:sp>
         <p:nvSpPr>
-          <p:cNvPr id="15" name="Rounded Rectangle 14"/>
+          <p:cNvPr id="16" name="Rounded Rectangle 15"/>
           <p:cNvSpPr/>
           <p:nvPr/>
         </p:nvSpPr>
         <p:spPr>
           <a:xfrm>
-            <a:off x="9098280" y="2194560"/>
+            <a:off x="9098280" y="2331720"/>
             <a:ext cx="2331720" cy="868680"/>
           </a:xfrm>
           <a:prstGeom prst="roundRect">
@@ -40141,13 +40547,13 @@
       </p:sp>
       <p:sp>
         <p:nvSpPr>
-          <p:cNvPr id="16" name="TextBox 15"/>
-          <p:cNvSpPr txBox="1"/>
-          <p:nvPr/>
-        </p:nvSpPr>
-        <p:spPr>
-          <a:xfrm>
-            <a:off x="9098280" y="2194560"/>
+          <p:cNvPr id="17" name="TextBox 16"/>
+          <p:cNvSpPr txBox="1"/>
+          <p:nvPr/>
+        </p:nvSpPr>
+        <p:spPr>
+          <a:xfrm>
+            <a:off x="9098280" y="2331720"/>
             <a:ext cx="2331720" cy="868680"/>
           </a:xfrm>
           <a:prstGeom prst="rect">
@@ -40180,7 +40586,7 @@
       </p:sp>
       <p:pic>
         <p:nvPicPr>
-          <p:cNvPr id="17" name="Picture 16" descr="search-teal.png"/>
+          <p:cNvPr id="18" name="Picture 17" descr="search-teal.png"/>
           <p:cNvPicPr>
             <a:picLocks noChangeAspect="1"/>
           </p:cNvPicPr>
@@ -40194,7 +40600,7 @@
         </p:blipFill>
         <p:spPr>
           <a:xfrm>
-            <a:off x="10062972" y="1627631"/>
+            <a:off x="10062972" y="1764791"/>
             <a:ext cx="402336" cy="402336"/>
           </a:xfrm>
           <a:prstGeom prst="rect">
@@ -40202,45 +40608,6 @@
           </a:prstGeom>
         </p:spPr>
       </p:pic>
-      <p:sp>
-        <p:nvSpPr>
-          <p:cNvPr id="18" name="TextBox 17"/>
-          <p:cNvSpPr txBox="1"/>
-          <p:nvPr/>
-        </p:nvSpPr>
-        <p:spPr>
-          <a:xfrm>
-            <a:off x="594360" y="1554480"/>
-            <a:ext cx="10515600" cy="320040"/>
-          </a:xfrm>
-          <a:prstGeom prst="rect">
-            <a:avLst/>
-          </a:prstGeom>
-          <a:noFill/>
-        </p:spPr>
-        <p:txBody>
-          <a:bodyPr wrap="square" lIns="0" rIns="0" tIns="0" bIns="0" anchor="t">
-            <a:spAutoFit/>
-          </a:bodyPr>
-          <a:lstStyle/>
-          <a:p>
-            <a:pPr algn="l">
-              <a:lnSpc>
-                <a:spcPct val="115000"/>
-              </a:lnSpc>
-            </a:pPr>
-            <a:r>
-              <a:rPr sz="1200" b="0" i="1">
-                <a:solidFill>
-                  <a:srgbClr val="5B6678"/>
-                </a:solidFill>
-                <a:latin typeface="DejaVu Sans"/>
-              </a:rPr>
-              <a:t>Трейсинг (камера над каждым узлом): LangSmith · Langfuse · Arize Phoenix · Helicone</a:t>
-            </a:r>
-          </a:p>
-        </p:txBody>
-      </p:sp>
       <p:sp>
         <p:nvSpPr>
           <p:cNvPr id="19" name="Rounded Rectangle 18"/>
@@ -41060,7 +41427,7 @@
                 </a:solidFill>
                 <a:latin typeface="DejaVu Sans"/>
               </a:rPr>
-              <a:t>Что остаётся: эскалация к человеку, ответственность, инцидент-дисциплина — усилены автономностью AI, не отменены ею.</a:t>
+              <a:t>Что остаётся: эскалация к человеку, ответственность, инцидент-дисциплина — усилены автономностью ИИ, не отменены ею.</a:t>
             </a:r>
           </a:p>
         </p:txBody>
@@ -41416,8 +41783,8 @@
         </p:blipFill>
         <p:spPr>
           <a:xfrm>
-            <a:off x="5358384" y="1691640"/>
-            <a:ext cx="4507992" cy="2331720"/>
+            <a:off x="4516037" y="1691640"/>
+            <a:ext cx="6192685" cy="2331720"/>
           </a:xfrm>
           <a:prstGeom prst="rect">
             <a:avLst/>
@@ -42902,8 +43269,8 @@
         </p:nvCxnSpPr>
         <p:spPr>
           <a:xfrm>
-            <a:off x="3429000" y="1645919"/>
-            <a:ext cx="1385813" cy="800101"/>
+            <a:off x="3337560" y="1417320"/>
+            <a:ext cx="1148245" cy="662940"/>
           </a:xfrm>
           <a:prstGeom prst="line">
             <a:avLst/>
@@ -42937,8 +43304,8 @@
         </p:nvCxnSpPr>
         <p:spPr>
           <a:xfrm>
-            <a:off x="4814813" y="2446020"/>
-            <a:ext cx="0" cy="1600200"/>
+            <a:off x="4485805" y="2080260"/>
+            <a:ext cx="0" cy="1325879"/>
           </a:xfrm>
           <a:prstGeom prst="line">
             <a:avLst/>
@@ -42972,8 +43339,8 @@
         </p:nvCxnSpPr>
         <p:spPr>
           <a:xfrm flipH="1">
-            <a:off x="3429000" y="4046220"/>
-            <a:ext cx="1385813" cy="800100"/>
+            <a:off x="3337560" y="3406139"/>
+            <a:ext cx="1148245" cy="662941"/>
           </a:xfrm>
           <a:prstGeom prst="line">
             <a:avLst/>
@@ -43007,8 +43374,8 @@
         </p:nvCxnSpPr>
         <p:spPr>
           <a:xfrm flipH="1" flipV="1">
-            <a:off x="2043186" y="4046220"/>
-            <a:ext cx="1385814" cy="800100"/>
+            <a:off x="2189314" y="3406140"/>
+            <a:ext cx="1148246" cy="662940"/>
           </a:xfrm>
           <a:prstGeom prst="line">
             <a:avLst/>
@@ -43042,8 +43409,8 @@
         </p:nvCxnSpPr>
         <p:spPr>
           <a:xfrm flipV="1">
-            <a:off x="2043186" y="2446020"/>
-            <a:ext cx="0" cy="1600200"/>
+            <a:off x="2189314" y="2080260"/>
+            <a:ext cx="0" cy="1325880"/>
           </a:xfrm>
           <a:prstGeom prst="line">
             <a:avLst/>
@@ -43077,8 +43444,8 @@
         </p:nvCxnSpPr>
         <p:spPr>
           <a:xfrm flipV="1">
-            <a:off x="2043186" y="1645919"/>
-            <a:ext cx="1385814" cy="800101"/>
+            <a:off x="2189314" y="1417320"/>
+            <a:ext cx="1148246" cy="662940"/>
           </a:xfrm>
           <a:prstGeom prst="line">
             <a:avLst/>
@@ -43112,7 +43479,7 @@
         </p:nvSpPr>
         <p:spPr>
           <a:xfrm>
-            <a:off x="3209544" y="1426463"/>
+            <a:off x="3118104" y="1197864"/>
             <a:ext cx="438912" cy="438912"/>
           </a:xfrm>
           <a:prstGeom prst="ellipse">
@@ -43158,7 +43525,7 @@
         </p:nvSpPr>
         <p:spPr>
           <a:xfrm>
-            <a:off x="2651760" y="1883663"/>
+            <a:off x="2560320" y="1655064"/>
             <a:ext cx="1554480" cy="310896"/>
           </a:xfrm>
           <a:prstGeom prst="rect">
@@ -43197,7 +43564,7 @@
         </p:nvSpPr>
         <p:spPr>
           <a:xfrm>
-            <a:off x="4595357" y="2226563"/>
+            <a:off x="4266349" y="1860804"/>
             <a:ext cx="438912" cy="438912"/>
           </a:xfrm>
           <a:prstGeom prst="ellipse">
@@ -43243,7 +43610,7 @@
         </p:nvSpPr>
         <p:spPr>
           <a:xfrm>
-            <a:off x="4037573" y="2683763"/>
+            <a:off x="3708565" y="2318004"/>
             <a:ext cx="1554480" cy="310896"/>
           </a:xfrm>
           <a:prstGeom prst="rect">
@@ -43282,7 +43649,7 @@
         </p:nvSpPr>
         <p:spPr>
           <a:xfrm>
-            <a:off x="4595357" y="3826763"/>
+            <a:off x="4266349" y="3186683"/>
             <a:ext cx="438912" cy="438912"/>
           </a:xfrm>
           <a:prstGeom prst="ellipse">
@@ -43328,7 +43695,7 @@
         </p:nvSpPr>
         <p:spPr>
           <a:xfrm>
-            <a:off x="4037573" y="4283964"/>
+            <a:off x="3708565" y="3643883"/>
             <a:ext cx="1554480" cy="310896"/>
           </a:xfrm>
           <a:prstGeom prst="rect">
@@ -43367,7 +43734,7 @@
         </p:nvSpPr>
         <p:spPr>
           <a:xfrm>
-            <a:off x="3209544" y="4626864"/>
+            <a:off x="3118104" y="3849624"/>
             <a:ext cx="438912" cy="438912"/>
           </a:xfrm>
           <a:prstGeom prst="ellipse">
@@ -43413,7 +43780,7 @@
         </p:nvSpPr>
         <p:spPr>
           <a:xfrm>
-            <a:off x="2651760" y="5084064"/>
+            <a:off x="2560320" y="4306824"/>
             <a:ext cx="1554480" cy="310896"/>
           </a:xfrm>
           <a:prstGeom prst="rect">
@@ -43452,7 +43819,7 @@
         </p:nvSpPr>
         <p:spPr>
           <a:xfrm>
-            <a:off x="1823730" y="3826764"/>
+            <a:off x="1969858" y="3186684"/>
             <a:ext cx="438912" cy="438912"/>
           </a:xfrm>
           <a:prstGeom prst="ellipse">
@@ -43498,7 +43865,7 @@
         </p:nvSpPr>
         <p:spPr>
           <a:xfrm>
-            <a:off x="1265946" y="4283964"/>
+            <a:off x="1412074" y="3643884"/>
             <a:ext cx="1554480" cy="310896"/>
           </a:xfrm>
           <a:prstGeom prst="rect">
@@ -43537,7 +43904,7 @@
         </p:nvSpPr>
         <p:spPr>
           <a:xfrm>
-            <a:off x="1823730" y="2226564"/>
+            <a:off x="1969858" y="1860804"/>
             <a:ext cx="438912" cy="438912"/>
           </a:xfrm>
           <a:prstGeom prst="ellipse">
@@ -43583,7 +43950,7 @@
         </p:nvSpPr>
         <p:spPr>
           <a:xfrm>
-            <a:off x="1265946" y="2683764"/>
+            <a:off x="1412074" y="2318004"/>
             <a:ext cx="1554480" cy="310896"/>
           </a:xfrm>
           <a:prstGeom prst="rect">
@@ -43696,7 +44063,7 @@
                 </a:solidFill>
                 <a:latin typeface="DejaVu Sans"/>
               </a:rPr>
-              <a:t>Support → Product замыкает петлю.</a:t>
+              <a:t>Поддержка → Продукт замыкает петлю.</a:t>
             </a:r>
           </a:p>
           <a:p>
@@ -43728,7 +44095,7 @@
                 </a:solidFill>
                 <a:latin typeface="DejaVu Sans"/>
               </a:rPr>
-              <a:t>Сигнал из эксплуатации (дрейф, инцидент, жалоба) обновляет reference dataset (эталонный набор) и guardrail — а при глубоком сигнале возвращает к самому намерению: что мы строим и для кого.</a:t>
+              <a:t>Сигнал из эксплуатации(дрейф, инцидент, жалоба) обновляет reference dataset (эталонный набор) и guardrail — а при глубоком сигнале возвращает к самому намерению: что мы строим и для кого.</a:t>
             </a:r>
           </a:p>
         </p:txBody>
@@ -45021,17 +45388,58 @@
       </p:sp>
       <p:sp>
         <p:nvSpPr>
-          <p:cNvPr id="6" name="Rectangle 5"/>
+          <p:cNvPr id="6" name="TextBox 5"/>
+          <p:cNvSpPr txBox="1"/>
+          <p:nvPr/>
+        </p:nvSpPr>
+        <p:spPr>
+          <a:xfrm>
+            <a:off x="685800" y="2395728"/>
+            <a:ext cx="6675120" cy="1600200"/>
+          </a:xfrm>
+          <a:prstGeom prst="rect">
+            <a:avLst/>
+          </a:prstGeom>
+          <a:noFill/>
+        </p:spPr>
+        <p:txBody>
+          <a:bodyPr wrap="square" lIns="0" rIns="0" tIns="0" bIns="0" anchor="t">
+            <a:spAutoFit/>
+          </a:bodyPr>
+          <a:lstStyle/>
+          <a:p>
+            <a:pPr algn="l">
+              <a:lnSpc>
+                <a:spcPct val="108000"/>
+              </a:lnSpc>
+            </a:pPr>
+            <a:r>
+              <a:rPr sz="3000" b="1" i="0">
+                <a:solidFill>
+                  <a:srgbClr val="21295C"/>
+                </a:solidFill>
+                <a:latin typeface="DejaVu Sans"/>
+              </a:rPr>
+              <a:t>Управление — капстоун, отвечающий на хук-парадокс</a:t>
+            </a:r>
+          </a:p>
+        </p:txBody>
+      </p:sp>
+      <p:sp>
+        <p:nvSpPr>
+          <p:cNvPr id="7" name="Rounded Rectangle 6"/>
           <p:cNvSpPr/>
           <p:nvPr/>
         </p:nvSpPr>
         <p:spPr>
           <a:xfrm>
-            <a:off x="713232" y="1993392"/>
-            <a:ext cx="640080" cy="45720"/>
-          </a:xfrm>
-          <a:prstGeom prst="rect">
-            <a:avLst/>
+            <a:off x="713232" y="3840480"/>
+            <a:ext cx="3291840" cy="384048"/>
+          </a:xfrm>
+          <a:prstGeom prst="roundRect">
+            <a:avLst>
+              <a:gd name="adj" fmla="val 50000"/>
+            </a:avLst>
           </a:prstGeom>
           <a:solidFill>
             <a:srgbClr val="F0AB00"/>
@@ -45056,102 +45464,17 @@
           </a:fontRef>
         </p:style>
         <p:txBody>
-          <a:bodyPr rtlCol="0" anchor="ctr"/>
+          <a:bodyPr rtlCol="0" anchor="ctr" lIns="45720" rIns="45720" tIns="18288" bIns="18288" wrap="none"/>
           <a:lstStyle/>
           <a:p>
             <a:pPr algn="ctr"/>
-          </a:p>
-        </p:txBody>
-      </p:sp>
-      <p:sp>
-        <p:nvSpPr>
-          <p:cNvPr id="7" name="TextBox 6"/>
-          <p:cNvSpPr txBox="1"/>
-          <p:nvPr/>
-        </p:nvSpPr>
-        <p:spPr>
-          <a:xfrm>
-            <a:off x="685800" y="2331720"/>
-            <a:ext cx="6675120" cy="1600200"/>
-          </a:xfrm>
-          <a:prstGeom prst="rect">
-            <a:avLst/>
-          </a:prstGeom>
-          <a:noFill/>
-        </p:spPr>
-        <p:txBody>
-          <a:bodyPr wrap="square" lIns="0" rIns="0" tIns="0" bIns="0" anchor="t">
-            <a:spAutoFit/>
-          </a:bodyPr>
-          <a:lstStyle/>
-          <a:p>
-            <a:pPr algn="l">
-              <a:lnSpc>
-                <a:spcPct val="108000"/>
-              </a:lnSpc>
-            </a:pPr>
-            <a:r>
-              <a:rPr sz="3000" b="1" i="0">
+            <a:r>
+              <a:rPr sz="1250" b="1">
                 <a:solidFill>
                   <a:srgbClr val="21295C"/>
                 </a:solidFill>
                 <a:latin typeface="DejaVu Sans"/>
               </a:rPr>
-              <a:t>Управление — капстоун, отвечающий на хук-парадокс</a:t>
-            </a:r>
-          </a:p>
-        </p:txBody>
-      </p:sp>
-      <p:sp>
-        <p:nvSpPr>
-          <p:cNvPr id="8" name="Rounded Rectangle 7"/>
-          <p:cNvSpPr/>
-          <p:nvPr/>
-        </p:nvSpPr>
-        <p:spPr>
-          <a:xfrm>
-            <a:off x="713232" y="3840480"/>
-            <a:ext cx="3291840" cy="384048"/>
-          </a:xfrm>
-          <a:prstGeom prst="roundRect">
-            <a:avLst>
-              <a:gd name="adj" fmla="val 50000"/>
-            </a:avLst>
-          </a:prstGeom>
-          <a:solidFill>
-            <a:srgbClr val="F0AB00"/>
-          </a:solidFill>
-          <a:ln>
-            <a:noFill/>
-          </a:ln>
-          <a:effectLst/>
-        </p:spPr>
-        <p:style>
-          <a:lnRef idx="1">
-            <a:schemeClr val="accent1"/>
-          </a:lnRef>
-          <a:fillRef idx="3">
-            <a:schemeClr val="accent1"/>
-          </a:fillRef>
-          <a:effectRef idx="2">
-            <a:schemeClr val="accent1"/>
-          </a:effectRef>
-          <a:fontRef idx="minor">
-            <a:schemeClr val="lt1"/>
-          </a:fontRef>
-        </p:style>
-        <p:txBody>
-          <a:bodyPr rtlCol="0" anchor="ctr" lIns="45720" rIns="45720" tIns="18288" bIns="18288" wrap="none"/>
-          <a:lstStyle/>
-          <a:p>
-            <a:pPr algn="ctr"/>
-            <a:r>
-              <a:rPr sz="1250" b="1">
-                <a:solidFill>
-                  <a:srgbClr val="21295C"/>
-                </a:solidFill>
-                <a:latin typeface="DejaVu Sans"/>
-              </a:rPr>
               <a:t>2 провала · развязка</a:t>
             </a:r>
           </a:p>
@@ -45159,7 +45482,7 @@
       </p:sp>
       <p:sp>
         <p:nvSpPr>
-          <p:cNvPr id="9" name="TextBox 8"/>
+          <p:cNvPr id="8" name="TextBox 7"/>
           <p:cNvSpPr txBox="1"/>
           <p:nvPr/>
         </p:nvSpPr>
@@ -45198,7 +45521,7 @@
       </p:sp>
       <p:sp>
         <p:nvSpPr>
-          <p:cNvPr id="10" name="Rounded Rectangle 9"/>
+          <p:cNvPr id="9" name="Rounded Rectangle 8"/>
           <p:cNvSpPr/>
           <p:nvPr/>
         </p:nvSpPr>
@@ -45246,7 +45569,7 @@
       </p:sp>
       <p:sp>
         <p:nvSpPr>
-          <p:cNvPr id="11" name="TextBox 10"/>
+          <p:cNvPr id="10" name="TextBox 9"/>
           <p:cNvSpPr txBox="1"/>
           <p:nvPr/>
         </p:nvSpPr>
@@ -45285,7 +45608,7 @@
       </p:sp>
       <p:sp>
         <p:nvSpPr>
-          <p:cNvPr id="12" name="TextBox 11"/>
+          <p:cNvPr id="11" name="TextBox 10"/>
           <p:cNvSpPr txBox="1"/>
           <p:nvPr/>
         </p:nvSpPr>
@@ -45324,7 +45647,7 @@
       </p:sp>
       <p:sp>
         <p:nvSpPr>
-          <p:cNvPr id="13" name="Rounded Rectangle 12"/>
+          <p:cNvPr id="12" name="Rounded Rectangle 11"/>
           <p:cNvSpPr/>
           <p:nvPr/>
         </p:nvSpPr>
@@ -45372,7 +45695,7 @@
       </p:sp>
       <p:sp>
         <p:nvSpPr>
-          <p:cNvPr id="14" name="TextBox 13"/>
+          <p:cNvPr id="13" name="TextBox 12"/>
           <p:cNvSpPr txBox="1"/>
           <p:nvPr/>
         </p:nvSpPr>
@@ -45411,7 +45734,7 @@
       </p:sp>
       <p:sp>
         <p:nvSpPr>
-          <p:cNvPr id="15" name="TextBox 14"/>
+          <p:cNvPr id="14" name="TextBox 13"/>
           <p:cNvSpPr txBox="1"/>
           <p:nvPr/>
         </p:nvSpPr>
@@ -45450,7 +45773,7 @@
       </p:sp>
       <p:sp>
         <p:nvSpPr>
-          <p:cNvPr id="16" name="Rounded Rectangle 15"/>
+          <p:cNvPr id="15" name="Rounded Rectangle 14"/>
           <p:cNvSpPr/>
           <p:nvPr/>
         </p:nvSpPr>
@@ -45498,7 +45821,7 @@
       </p:sp>
       <p:sp>
         <p:nvSpPr>
-          <p:cNvPr id="17" name="TextBox 16"/>
+          <p:cNvPr id="16" name="TextBox 15"/>
           <p:cNvSpPr txBox="1"/>
           <p:nvPr/>
         </p:nvSpPr>
@@ -45537,7 +45860,7 @@
       </p:sp>
       <p:sp>
         <p:nvSpPr>
-          <p:cNvPr id="18" name="TextBox 17"/>
+          <p:cNvPr id="17" name="TextBox 16"/>
           <p:cNvSpPr txBox="1"/>
           <p:nvPr/>
         </p:nvSpPr>
@@ -45576,7 +45899,7 @@
       </p:sp>
       <p:sp>
         <p:nvSpPr>
-          <p:cNvPr id="19" name="Rounded Rectangle 18"/>
+          <p:cNvPr id="18" name="Rounded Rectangle 17"/>
           <p:cNvSpPr/>
           <p:nvPr/>
         </p:nvSpPr>
@@ -45624,7 +45947,7 @@
       </p:sp>
       <p:sp>
         <p:nvSpPr>
-          <p:cNvPr id="20" name="TextBox 19"/>
+          <p:cNvPr id="19" name="TextBox 18"/>
           <p:cNvSpPr txBox="1"/>
           <p:nvPr/>
         </p:nvSpPr>
@@ -45663,7 +45986,7 @@
       </p:sp>
       <p:sp>
         <p:nvSpPr>
-          <p:cNvPr id="21" name="TextBox 20"/>
+          <p:cNvPr id="20" name="TextBox 19"/>
           <p:cNvSpPr txBox="1"/>
           <p:nvPr/>
         </p:nvSpPr>
@@ -45702,7 +46025,7 @@
       </p:sp>
       <p:sp>
         <p:nvSpPr>
-          <p:cNvPr id="22" name="Rounded Rectangle 21"/>
+          <p:cNvPr id="21" name="Rounded Rectangle 20"/>
           <p:cNvSpPr/>
           <p:nvPr/>
         </p:nvSpPr>
@@ -45750,7 +46073,7 @@
       </p:sp>
       <p:sp>
         <p:nvSpPr>
-          <p:cNvPr id="23" name="TextBox 22"/>
+          <p:cNvPr id="22" name="TextBox 21"/>
           <p:cNvSpPr txBox="1"/>
           <p:nvPr/>
         </p:nvSpPr>
@@ -45789,7 +46112,7 @@
       </p:sp>
       <p:sp>
         <p:nvSpPr>
-          <p:cNvPr id="24" name="TextBox 23"/>
+          <p:cNvPr id="23" name="TextBox 22"/>
           <p:cNvSpPr txBox="1"/>
           <p:nvPr/>
         </p:nvSpPr>
@@ -45828,7 +46151,7 @@
       </p:sp>
       <p:sp>
         <p:nvSpPr>
-          <p:cNvPr id="25" name="Rounded Rectangle 24"/>
+          <p:cNvPr id="24" name="Rounded Rectangle 23"/>
           <p:cNvSpPr/>
           <p:nvPr/>
         </p:nvSpPr>
@@ -45876,7 +46199,7 @@
       </p:sp>
       <p:sp>
         <p:nvSpPr>
-          <p:cNvPr id="26" name="TextBox 25"/>
+          <p:cNvPr id="25" name="TextBox 24"/>
           <p:cNvSpPr txBox="1"/>
           <p:nvPr/>
         </p:nvSpPr>
@@ -45915,7 +46238,7 @@
       </p:sp>
       <p:sp>
         <p:nvSpPr>
-          <p:cNvPr id="27" name="TextBox 26"/>
+          <p:cNvPr id="26" name="TextBox 25"/>
           <p:cNvSpPr txBox="1"/>
           <p:nvPr/>
         </p:nvSpPr>
@@ -45954,7 +46277,7 @@
       </p:sp>
       <p:sp>
         <p:nvSpPr>
-          <p:cNvPr id="28" name="Rounded Rectangle 27"/>
+          <p:cNvPr id="27" name="Rounded Rectangle 26"/>
           <p:cNvSpPr/>
           <p:nvPr/>
         </p:nvSpPr>
@@ -46002,7 +46325,7 @@
       </p:sp>
       <p:sp>
         <p:nvSpPr>
-          <p:cNvPr id="29" name="TextBox 28"/>
+          <p:cNvPr id="28" name="TextBox 27"/>
           <p:cNvSpPr txBox="1"/>
           <p:nvPr/>
         </p:nvSpPr>
@@ -46041,7 +46364,7 @@
       </p:sp>
       <p:sp>
         <p:nvSpPr>
-          <p:cNvPr id="30" name="TextBox 29"/>
+          <p:cNvPr id="29" name="TextBox 28"/>
           <p:cNvSpPr txBox="1"/>
           <p:nvPr/>
         </p:nvSpPr>
@@ -46080,7 +46403,7 @@
       </p:sp>
       <p:sp>
         <p:nvSpPr>
-          <p:cNvPr id="31" name="TextBox 30"/>
+          <p:cNvPr id="30" name="TextBox 29"/>
           <p:cNvSpPr txBox="1"/>
           <p:nvPr/>
         </p:nvSpPr>
@@ -46682,7 +47005,7 @@
                 </a:solidFill>
                 <a:latin typeface="DejaVu Sans"/>
               </a:rPr>
-              <a:t>Воронка портфеля: много идей на входе, немного профинансированных на выходе. У AI-продукта новая переменная — стоимость каждого запроса против его ценности.</a:t>
+              <a:t>Воронка портфеля: много идей на входе, немного профинансированных на выходе. У ИИ-продукта новая переменная — стоимость каждого запроса против его ценности.</a:t>
             </a:r>
           </a:p>
         </p:txBody>
@@ -47308,7 +47631,7 @@
                 </a:solidFill>
                 <a:latin typeface="DejaVu Sans"/>
               </a:rPr>
-              <a:t>Unit-экономика AI-продукта</a:t>
+              <a:t>Unit-экономика ИИ-продукта</a:t>
             </a:r>
           </a:p>
         </p:txBody>
@@ -49445,7 +49768,7 @@
                 </a:solidFill>
                 <a:latin typeface="DejaVu Sans"/>
               </a:rPr>
-              <a:t>4 вопроса к любой громкой цифре провала AI</a:t>
+              <a:t>4 вопроса к любой громкой цифре провала ИИ</a:t>
             </a:r>
           </a:p>
         </p:txBody>
@@ -49484,7 +49807,7 @@
                 </a:solidFill>
                 <a:latin typeface="DejaVu Sans"/>
               </a:rPr>
-              <a:t>1. Каков денаминатор?</a:t>
+              <a:t>1. Каков знаменатель?</a:t>
             </a:r>
           </a:p>
         </p:txBody>
@@ -49688,7 +50011,7 @@
                 </a:solidFill>
                 <a:latin typeface="DejaVu Sans"/>
               </a:rPr>
-              <a:t>BCG: 60% компаний не отслеживают ни одного финансового KPI, привязанного к ценности AI — вот почему цифры провалов так легко раздуваются.</a:t>
+              <a:t>BCG: 60% компаний не отслеживают ни одного финансового KPI, привязанного к ценности ИИ — вот почему цифры провалов так легко раздуваются.</a:t>
             </a:r>
           </a:p>
         </p:txBody>
@@ -50023,7 +50346,7 @@
                 </a:solidFill>
                 <a:latin typeface="DejaVu Sans"/>
               </a:rPr>
-              <a:t>Just Walk Out (Amazon), с 2018: 700/1000 транзакций — ручная проверка (14× выше цели 50/1000). 6 лет маркетинга «автономный AI» без раскрытия масштаба труда (скрытая человеческая стоимость).</a:t>
+              <a:t>Just Walk Out (Amazon), с 2018: 700/1000 транзакций — ручная проверка (14× выше цели 50/1000). 6 лет маркетинга «автономный ИИ» без раскрытия масштаба труда (скрытая человеческая стоимость).</a:t>
             </a:r>
           </a:p>
         </p:txBody>
@@ -50108,7 +50431,7 @@
                 </a:solidFill>
                 <a:latin typeface="DejaVu Sans"/>
               </a:rPr>
-              <a:t>Фаза × что AI меняет × что остаётся из классики</a:t>
+              <a:t>Фаза × что ИИ меняет × что остаётся из классики</a:t>
             </a:r>
           </a:p>
         </p:txBody>
@@ -51176,8 +51499,8 @@
         </p:nvSpPr>
         <p:spPr>
           <a:xfrm>
-            <a:off x="502920" y="365760"/>
-            <a:ext cx="11247120" cy="777240"/>
+            <a:off x="502920" y="201168"/>
+            <a:ext cx="11247120" cy="566928"/>
           </a:xfrm>
           <a:prstGeom prst="rect">
             <a:avLst/>
@@ -51196,7 +51519,7 @@
               </a:lnSpc>
             </a:pPr>
             <a:r>
-              <a:rPr sz="2200" b="1" i="0">
+              <a:rPr sz="2000" b="1" i="0">
                 <a:solidFill>
                   <a:srgbClr val="21295C"/>
                 </a:solidFill>
@@ -51207,236 +51530,28 @@
           </a:p>
         </p:txBody>
       </p:sp>
-      <p:cxnSp>
-        <p:nvCxnSpPr>
-          <p:cNvPr id="3" name="Connector 2"/>
-          <p:cNvCxnSpPr/>
-          <p:nvPr/>
-        </p:nvCxnSpPr>
-        <p:spPr>
-          <a:xfrm>
-            <a:off x="3063240" y="1444752"/>
-            <a:ext cx="1282867" cy="740664"/>
-          </a:xfrm>
-          <a:prstGeom prst="line">
-            <a:avLst/>
-          </a:prstGeom>
-          <a:ln w="38100">
+      <p:sp>
+        <p:nvSpPr>
+          <p:cNvPr id="3" name="Rounded Rectangle 2"/>
+          <p:cNvSpPr/>
+          <p:nvPr/>
+        </p:nvSpPr>
+        <p:spPr>
+          <a:xfrm>
+            <a:off x="502920" y="841248"/>
+            <a:ext cx="11201400" cy="3246120"/>
+          </a:xfrm>
+          <a:prstGeom prst="roundRect">
+            <a:avLst>
+              <a:gd name="adj" fmla="val 9389"/>
+            </a:avLst>
+          </a:prstGeom>
+          <a:solidFill>
+            <a:srgbClr val="FFFFFF"/>
+          </a:solidFill>
+          <a:ln w="19050">
             <a:solidFill>
-              <a:srgbClr val="F0AB00"/>
-            </a:solidFill>
-          </a:ln>
-        </p:spPr>
-        <p:style>
-          <a:lnRef idx="2">
-            <a:schemeClr val="accent1"/>
-          </a:lnRef>
-          <a:fillRef idx="0">
-            <a:schemeClr val="accent1"/>
-          </a:fillRef>
-          <a:effectRef idx="1">
-            <a:schemeClr val="accent1"/>
-          </a:effectRef>
-          <a:fontRef idx="minor">
-            <a:schemeClr val="tx1"/>
-          </a:fontRef>
-        </p:style>
-      </p:cxnSp>
-      <p:cxnSp>
-        <p:nvCxnSpPr>
-          <p:cNvPr id="4" name="Connector 3"/>
-          <p:cNvCxnSpPr/>
-          <p:nvPr/>
-        </p:nvCxnSpPr>
-        <p:spPr>
-          <a:xfrm>
-            <a:off x="4346107" y="2185416"/>
-            <a:ext cx="0" cy="1481328"/>
-          </a:xfrm>
-          <a:prstGeom prst="line">
-            <a:avLst/>
-          </a:prstGeom>
-          <a:ln w="38100">
-            <a:solidFill>
-              <a:srgbClr val="F0AB00"/>
-            </a:solidFill>
-          </a:ln>
-        </p:spPr>
-        <p:style>
-          <a:lnRef idx="2">
-            <a:schemeClr val="accent1"/>
-          </a:lnRef>
-          <a:fillRef idx="0">
-            <a:schemeClr val="accent1"/>
-          </a:fillRef>
-          <a:effectRef idx="1">
-            <a:schemeClr val="accent1"/>
-          </a:effectRef>
-          <a:fontRef idx="minor">
-            <a:schemeClr val="tx1"/>
-          </a:fontRef>
-        </p:style>
-      </p:cxnSp>
-      <p:cxnSp>
-        <p:nvCxnSpPr>
-          <p:cNvPr id="5" name="Connector 4"/>
-          <p:cNvCxnSpPr/>
-          <p:nvPr/>
-        </p:nvCxnSpPr>
-        <p:spPr>
-          <a:xfrm flipH="1">
-            <a:off x="3063240" y="3666744"/>
-            <a:ext cx="1282867" cy="740664"/>
-          </a:xfrm>
-          <a:prstGeom prst="line">
-            <a:avLst/>
-          </a:prstGeom>
-          <a:ln w="38100">
-            <a:solidFill>
-              <a:srgbClr val="F0AB00"/>
-            </a:solidFill>
-          </a:ln>
-        </p:spPr>
-        <p:style>
-          <a:lnRef idx="2">
-            <a:schemeClr val="accent1"/>
-          </a:lnRef>
-          <a:fillRef idx="0">
-            <a:schemeClr val="accent1"/>
-          </a:fillRef>
-          <a:effectRef idx="1">
-            <a:schemeClr val="accent1"/>
-          </a:effectRef>
-          <a:fontRef idx="minor">
-            <a:schemeClr val="tx1"/>
-          </a:fontRef>
-        </p:style>
-      </p:cxnSp>
-      <p:cxnSp>
-        <p:nvCxnSpPr>
-          <p:cNvPr id="6" name="Connector 5"/>
-          <p:cNvCxnSpPr/>
-          <p:nvPr/>
-        </p:nvCxnSpPr>
-        <p:spPr>
-          <a:xfrm flipH="1" flipV="1">
-            <a:off x="1780372" y="3666744"/>
-            <a:ext cx="1282868" cy="740664"/>
-          </a:xfrm>
-          <a:prstGeom prst="line">
-            <a:avLst/>
-          </a:prstGeom>
-          <a:ln w="38100">
-            <a:solidFill>
-              <a:srgbClr val="F0AB00"/>
-            </a:solidFill>
-          </a:ln>
-        </p:spPr>
-        <p:style>
-          <a:lnRef idx="2">
-            <a:schemeClr val="accent1"/>
-          </a:lnRef>
-          <a:fillRef idx="0">
-            <a:schemeClr val="accent1"/>
-          </a:fillRef>
-          <a:effectRef idx="1">
-            <a:schemeClr val="accent1"/>
-          </a:effectRef>
-          <a:fontRef idx="minor">
-            <a:schemeClr val="tx1"/>
-          </a:fontRef>
-        </p:style>
-      </p:cxnSp>
-      <p:cxnSp>
-        <p:nvCxnSpPr>
-          <p:cNvPr id="7" name="Connector 6"/>
-          <p:cNvCxnSpPr/>
-          <p:nvPr/>
-        </p:nvCxnSpPr>
-        <p:spPr>
-          <a:xfrm flipV="1">
-            <a:off x="1780372" y="2185416"/>
-            <a:ext cx="0" cy="1481328"/>
-          </a:xfrm>
-          <a:prstGeom prst="line">
-            <a:avLst/>
-          </a:prstGeom>
-          <a:ln w="38100">
-            <a:solidFill>
-              <a:srgbClr val="F0AB00"/>
-            </a:solidFill>
-          </a:ln>
-        </p:spPr>
-        <p:style>
-          <a:lnRef idx="2">
-            <a:schemeClr val="accent1"/>
-          </a:lnRef>
-          <a:fillRef idx="0">
-            <a:schemeClr val="accent1"/>
-          </a:fillRef>
-          <a:effectRef idx="1">
-            <a:schemeClr val="accent1"/>
-          </a:effectRef>
-          <a:fontRef idx="minor">
-            <a:schemeClr val="tx1"/>
-          </a:fontRef>
-        </p:style>
-      </p:cxnSp>
-      <p:cxnSp>
-        <p:nvCxnSpPr>
-          <p:cNvPr id="8" name="Connector 7"/>
-          <p:cNvCxnSpPr/>
-          <p:nvPr/>
-        </p:nvCxnSpPr>
-        <p:spPr>
-          <a:xfrm flipV="1">
-            <a:off x="1780372" y="1444752"/>
-            <a:ext cx="1282868" cy="740664"/>
-          </a:xfrm>
-          <a:prstGeom prst="line">
-            <a:avLst/>
-          </a:prstGeom>
-          <a:ln w="38100">
-            <a:solidFill>
-              <a:srgbClr val="F0AB00"/>
-            </a:solidFill>
-          </a:ln>
-        </p:spPr>
-        <p:style>
-          <a:lnRef idx="2">
-            <a:schemeClr val="accent1"/>
-          </a:lnRef>
-          <a:fillRef idx="0">
-            <a:schemeClr val="accent1"/>
-          </a:fillRef>
-          <a:effectRef idx="1">
-            <a:schemeClr val="accent1"/>
-          </a:effectRef>
-          <a:fontRef idx="minor">
-            <a:schemeClr val="tx1"/>
-          </a:fontRef>
-        </p:style>
-      </p:cxnSp>
-      <p:sp>
-        <p:nvSpPr>
-          <p:cNvPr id="9" name="Oval 8"/>
-          <p:cNvSpPr/>
-          <p:nvPr/>
-        </p:nvSpPr>
-        <p:spPr>
-          <a:xfrm>
-            <a:off x="2825496" y="1207008"/>
-            <a:ext cx="475488" cy="475488"/>
-          </a:xfrm>
-          <a:prstGeom prst="ellipse">
-            <a:avLst/>
-          </a:prstGeom>
-          <a:solidFill>
-            <a:srgbClr val="F0AB00"/>
-          </a:solidFill>
-          <a:ln w="20320">
-            <a:solidFill>
-              <a:srgbClr val="FFFFFF"/>
+              <a:srgbClr val="1C7293"/>
             </a:solidFill>
           </a:ln>
           <a:effectLst/>
@@ -51463,519 +51578,9 @@
           </a:p>
         </p:txBody>
       </p:sp>
-      <p:sp>
-        <p:nvSpPr>
-          <p:cNvPr id="10" name="TextBox 9"/>
-          <p:cNvSpPr txBox="1"/>
-          <p:nvPr/>
-        </p:nvSpPr>
-        <p:spPr>
-          <a:xfrm>
-            <a:off x="2286000" y="1700784"/>
-            <a:ext cx="1554480" cy="310896"/>
-          </a:xfrm>
-          <a:prstGeom prst="rect">
-            <a:avLst/>
-          </a:prstGeom>
-          <a:noFill/>
-        </p:spPr>
-        <p:txBody>
-          <a:bodyPr wrap="square" lIns="0" rIns="0" tIns="0" bIns="0" anchor="t">
-            <a:spAutoFit/>
-          </a:bodyPr>
-          <a:lstStyle/>
-          <a:p>
-            <a:pPr algn="ctr">
-              <a:lnSpc>
-                <a:spcPct val="115000"/>
-              </a:lnSpc>
-            </a:pPr>
-            <a:r>
-              <a:rPr sz="900" b="1" i="0">
-                <a:solidFill>
-                  <a:srgbClr val="21295C"/>
-                </a:solidFill>
-                <a:latin typeface="DejaVu Sans"/>
-              </a:rPr>
-              <a:t>Исследование</a:t>
-            </a:r>
-          </a:p>
-        </p:txBody>
-      </p:sp>
-      <p:sp>
-        <p:nvSpPr>
-          <p:cNvPr id="11" name="Oval 10"/>
-          <p:cNvSpPr/>
-          <p:nvPr/>
-        </p:nvSpPr>
-        <p:spPr>
-          <a:xfrm>
-            <a:off x="4108363" y="1947672"/>
-            <a:ext cx="475488" cy="475488"/>
-          </a:xfrm>
-          <a:prstGeom prst="ellipse">
-            <a:avLst/>
-          </a:prstGeom>
-          <a:solidFill>
-            <a:srgbClr val="F0AB00"/>
-          </a:solidFill>
-          <a:ln w="20320">
-            <a:solidFill>
-              <a:srgbClr val="FFFFFF"/>
-            </a:solidFill>
-          </a:ln>
-          <a:effectLst/>
-        </p:spPr>
-        <p:style>
-          <a:lnRef idx="1">
-            <a:schemeClr val="accent1"/>
-          </a:lnRef>
-          <a:fillRef idx="3">
-            <a:schemeClr val="accent1"/>
-          </a:fillRef>
-          <a:effectRef idx="2">
-            <a:schemeClr val="accent1"/>
-          </a:effectRef>
-          <a:fontRef idx="minor">
-            <a:schemeClr val="lt1"/>
-          </a:fontRef>
-        </p:style>
-        <p:txBody>
-          <a:bodyPr rtlCol="0" anchor="ctr"/>
-          <a:lstStyle/>
-          <a:p>
-            <a:pPr algn="ctr"/>
-          </a:p>
-        </p:txBody>
-      </p:sp>
-      <p:sp>
-        <p:nvSpPr>
-          <p:cNvPr id="12" name="TextBox 11"/>
-          <p:cNvSpPr txBox="1"/>
-          <p:nvPr/>
-        </p:nvSpPr>
-        <p:spPr>
-          <a:xfrm>
-            <a:off x="3568867" y="2441448"/>
-            <a:ext cx="1554480" cy="310896"/>
-          </a:xfrm>
-          <a:prstGeom prst="rect">
-            <a:avLst/>
-          </a:prstGeom>
-          <a:noFill/>
-        </p:spPr>
-        <p:txBody>
-          <a:bodyPr wrap="square" lIns="0" rIns="0" tIns="0" bIns="0" anchor="t">
-            <a:spAutoFit/>
-          </a:bodyPr>
-          <a:lstStyle/>
-          <a:p>
-            <a:pPr algn="ctr">
-              <a:lnSpc>
-                <a:spcPct val="115000"/>
-              </a:lnSpc>
-            </a:pPr>
-            <a:r>
-              <a:rPr sz="900" b="1" i="0">
-                <a:solidFill>
-                  <a:srgbClr val="21295C"/>
-                </a:solidFill>
-                <a:latin typeface="DejaVu Sans"/>
-              </a:rPr>
-              <a:t>Дизайн</a:t>
-            </a:r>
-          </a:p>
-        </p:txBody>
-      </p:sp>
-      <p:sp>
-        <p:nvSpPr>
-          <p:cNvPr id="13" name="Oval 12"/>
-          <p:cNvSpPr/>
-          <p:nvPr/>
-        </p:nvSpPr>
-        <p:spPr>
-          <a:xfrm>
-            <a:off x="4108363" y="3429000"/>
-            <a:ext cx="475488" cy="475488"/>
-          </a:xfrm>
-          <a:prstGeom prst="ellipse">
-            <a:avLst/>
-          </a:prstGeom>
-          <a:solidFill>
-            <a:srgbClr val="F0AB00"/>
-          </a:solidFill>
-          <a:ln w="20320">
-            <a:solidFill>
-              <a:srgbClr val="FFFFFF"/>
-            </a:solidFill>
-          </a:ln>
-          <a:effectLst/>
-        </p:spPr>
-        <p:style>
-          <a:lnRef idx="1">
-            <a:schemeClr val="accent1"/>
-          </a:lnRef>
-          <a:fillRef idx="3">
-            <a:schemeClr val="accent1"/>
-          </a:fillRef>
-          <a:effectRef idx="2">
-            <a:schemeClr val="accent1"/>
-          </a:effectRef>
-          <a:fontRef idx="minor">
-            <a:schemeClr val="lt1"/>
-          </a:fontRef>
-        </p:style>
-        <p:txBody>
-          <a:bodyPr rtlCol="0" anchor="ctr"/>
-          <a:lstStyle/>
-          <a:p>
-            <a:pPr algn="ctr"/>
-          </a:p>
-        </p:txBody>
-      </p:sp>
-      <p:sp>
-        <p:nvSpPr>
-          <p:cNvPr id="14" name="TextBox 13"/>
-          <p:cNvSpPr txBox="1"/>
-          <p:nvPr/>
-        </p:nvSpPr>
-        <p:spPr>
-          <a:xfrm>
-            <a:off x="3568867" y="3922776"/>
-            <a:ext cx="1554480" cy="310896"/>
-          </a:xfrm>
-          <a:prstGeom prst="rect">
-            <a:avLst/>
-          </a:prstGeom>
-          <a:noFill/>
-        </p:spPr>
-        <p:txBody>
-          <a:bodyPr wrap="square" lIns="0" rIns="0" tIns="0" bIns="0" anchor="t">
-            <a:spAutoFit/>
-          </a:bodyPr>
-          <a:lstStyle/>
-          <a:p>
-            <a:pPr algn="ctr">
-              <a:lnSpc>
-                <a:spcPct val="115000"/>
-              </a:lnSpc>
-            </a:pPr>
-            <a:r>
-              <a:rPr sz="900" b="1" i="0">
-                <a:solidFill>
-                  <a:srgbClr val="21295C"/>
-                </a:solidFill>
-                <a:latin typeface="DejaVu Sans"/>
-              </a:rPr>
-              <a:t>Сборка</a:t>
-            </a:r>
-          </a:p>
-        </p:txBody>
-      </p:sp>
-      <p:sp>
-        <p:nvSpPr>
-          <p:cNvPr id="15" name="Oval 14"/>
-          <p:cNvSpPr/>
-          <p:nvPr/>
-        </p:nvSpPr>
-        <p:spPr>
-          <a:xfrm>
-            <a:off x="2825496" y="4169664"/>
-            <a:ext cx="475488" cy="475488"/>
-          </a:xfrm>
-          <a:prstGeom prst="ellipse">
-            <a:avLst/>
-          </a:prstGeom>
-          <a:solidFill>
-            <a:srgbClr val="F0AB00"/>
-          </a:solidFill>
-          <a:ln w="20320">
-            <a:solidFill>
-              <a:srgbClr val="FFFFFF"/>
-            </a:solidFill>
-          </a:ln>
-          <a:effectLst/>
-        </p:spPr>
-        <p:style>
-          <a:lnRef idx="1">
-            <a:schemeClr val="accent1"/>
-          </a:lnRef>
-          <a:fillRef idx="3">
-            <a:schemeClr val="accent1"/>
-          </a:fillRef>
-          <a:effectRef idx="2">
-            <a:schemeClr val="accent1"/>
-          </a:effectRef>
-          <a:fontRef idx="minor">
-            <a:schemeClr val="lt1"/>
-          </a:fontRef>
-        </p:style>
-        <p:txBody>
-          <a:bodyPr rtlCol="0" anchor="ctr"/>
-          <a:lstStyle/>
-          <a:p>
-            <a:pPr algn="ctr"/>
-          </a:p>
-        </p:txBody>
-      </p:sp>
-      <p:sp>
-        <p:nvSpPr>
-          <p:cNvPr id="16" name="TextBox 15"/>
-          <p:cNvSpPr txBox="1"/>
-          <p:nvPr/>
-        </p:nvSpPr>
-        <p:spPr>
-          <a:xfrm>
-            <a:off x="2286000" y="4663440"/>
-            <a:ext cx="1554480" cy="310896"/>
-          </a:xfrm>
-          <a:prstGeom prst="rect">
-            <a:avLst/>
-          </a:prstGeom>
-          <a:noFill/>
-        </p:spPr>
-        <p:txBody>
-          <a:bodyPr wrap="square" lIns="0" rIns="0" tIns="0" bIns="0" anchor="t">
-            <a:spAutoFit/>
-          </a:bodyPr>
-          <a:lstStyle/>
-          <a:p>
-            <a:pPr algn="ctr">
-              <a:lnSpc>
-                <a:spcPct val="115000"/>
-              </a:lnSpc>
-            </a:pPr>
-            <a:r>
-              <a:rPr sz="900" b="1" i="0">
-                <a:solidFill>
-                  <a:srgbClr val="21295C"/>
-                </a:solidFill>
-                <a:latin typeface="DejaVu Sans"/>
-              </a:rPr>
-              <a:t>Измерение</a:t>
-            </a:r>
-          </a:p>
-        </p:txBody>
-      </p:sp>
-      <p:sp>
-        <p:nvSpPr>
-          <p:cNvPr id="17" name="Oval 16"/>
-          <p:cNvSpPr/>
-          <p:nvPr/>
-        </p:nvSpPr>
-        <p:spPr>
-          <a:xfrm>
-            <a:off x="1542628" y="3429000"/>
-            <a:ext cx="475488" cy="475488"/>
-          </a:xfrm>
-          <a:prstGeom prst="ellipse">
-            <a:avLst/>
-          </a:prstGeom>
-          <a:solidFill>
-            <a:srgbClr val="F0AB00"/>
-          </a:solidFill>
-          <a:ln w="20320">
-            <a:solidFill>
-              <a:srgbClr val="FFFFFF"/>
-            </a:solidFill>
-          </a:ln>
-          <a:effectLst/>
-        </p:spPr>
-        <p:style>
-          <a:lnRef idx="1">
-            <a:schemeClr val="accent1"/>
-          </a:lnRef>
-          <a:fillRef idx="3">
-            <a:schemeClr val="accent1"/>
-          </a:fillRef>
-          <a:effectRef idx="2">
-            <a:schemeClr val="accent1"/>
-          </a:effectRef>
-          <a:fontRef idx="minor">
-            <a:schemeClr val="lt1"/>
-          </a:fontRef>
-        </p:style>
-        <p:txBody>
-          <a:bodyPr rtlCol="0" anchor="ctr"/>
-          <a:lstStyle/>
-          <a:p>
-            <a:pPr algn="ctr"/>
-          </a:p>
-        </p:txBody>
-      </p:sp>
-      <p:sp>
-        <p:nvSpPr>
-          <p:cNvPr id="18" name="TextBox 17"/>
-          <p:cNvSpPr txBox="1"/>
-          <p:nvPr/>
-        </p:nvSpPr>
-        <p:spPr>
-          <a:xfrm>
-            <a:off x="1003132" y="3922776"/>
-            <a:ext cx="1554480" cy="310896"/>
-          </a:xfrm>
-          <a:prstGeom prst="rect">
-            <a:avLst/>
-          </a:prstGeom>
-          <a:noFill/>
-        </p:spPr>
-        <p:txBody>
-          <a:bodyPr wrap="square" lIns="0" rIns="0" tIns="0" bIns="0" anchor="t">
-            <a:spAutoFit/>
-          </a:bodyPr>
-          <a:lstStyle/>
-          <a:p>
-            <a:pPr algn="ctr">
-              <a:lnSpc>
-                <a:spcPct val="115000"/>
-              </a:lnSpc>
-            </a:pPr>
-            <a:r>
-              <a:rPr sz="900" b="1" i="0">
-                <a:solidFill>
-                  <a:srgbClr val="21295C"/>
-                </a:solidFill>
-                <a:latin typeface="DejaVu Sans"/>
-              </a:rPr>
-              <a:t>Поддержка</a:t>
-            </a:r>
-          </a:p>
-        </p:txBody>
-      </p:sp>
-      <p:sp>
-        <p:nvSpPr>
-          <p:cNvPr id="19" name="Oval 18"/>
-          <p:cNvSpPr/>
-          <p:nvPr/>
-        </p:nvSpPr>
-        <p:spPr>
-          <a:xfrm>
-            <a:off x="1542628" y="1947672"/>
-            <a:ext cx="475488" cy="475488"/>
-          </a:xfrm>
-          <a:prstGeom prst="ellipse">
-            <a:avLst/>
-          </a:prstGeom>
-          <a:solidFill>
-            <a:srgbClr val="F0AB00"/>
-          </a:solidFill>
-          <a:ln w="20320">
-            <a:solidFill>
-              <a:srgbClr val="FFFFFF"/>
-            </a:solidFill>
-          </a:ln>
-          <a:effectLst/>
-        </p:spPr>
-        <p:style>
-          <a:lnRef idx="1">
-            <a:schemeClr val="accent1"/>
-          </a:lnRef>
-          <a:fillRef idx="3">
-            <a:schemeClr val="accent1"/>
-          </a:fillRef>
-          <a:effectRef idx="2">
-            <a:schemeClr val="accent1"/>
-          </a:effectRef>
-          <a:fontRef idx="minor">
-            <a:schemeClr val="lt1"/>
-          </a:fontRef>
-        </p:style>
-        <p:txBody>
-          <a:bodyPr rtlCol="0" anchor="ctr"/>
-          <a:lstStyle/>
-          <a:p>
-            <a:pPr algn="ctr"/>
-          </a:p>
-        </p:txBody>
-      </p:sp>
-      <p:sp>
-        <p:nvSpPr>
-          <p:cNvPr id="20" name="TextBox 19"/>
-          <p:cNvSpPr txBox="1"/>
-          <p:nvPr/>
-        </p:nvSpPr>
-        <p:spPr>
-          <a:xfrm>
-            <a:off x="1003132" y="2441448"/>
-            <a:ext cx="1554480" cy="310896"/>
-          </a:xfrm>
-          <a:prstGeom prst="rect">
-            <a:avLst/>
-          </a:prstGeom>
-          <a:noFill/>
-        </p:spPr>
-        <p:txBody>
-          <a:bodyPr wrap="square" lIns="0" rIns="0" tIns="0" bIns="0" anchor="t">
-            <a:spAutoFit/>
-          </a:bodyPr>
-          <a:lstStyle/>
-          <a:p>
-            <a:pPr algn="ctr">
-              <a:lnSpc>
-                <a:spcPct val="115000"/>
-              </a:lnSpc>
-            </a:pPr>
-            <a:r>
-              <a:rPr sz="900" b="1" i="0">
-                <a:solidFill>
-                  <a:srgbClr val="21295C"/>
-                </a:solidFill>
-                <a:latin typeface="DejaVu Sans"/>
-              </a:rPr>
-              <a:t>Управление</a:t>
-            </a:r>
-          </a:p>
-        </p:txBody>
-      </p:sp>
-      <p:sp>
-        <p:nvSpPr>
-          <p:cNvPr id="21" name="Oval 20"/>
-          <p:cNvSpPr/>
-          <p:nvPr/>
-        </p:nvSpPr>
-        <p:spPr>
-          <a:xfrm>
-            <a:off x="2560320" y="2423160"/>
-            <a:ext cx="1005840" cy="1005840"/>
-          </a:xfrm>
-          <a:prstGeom prst="ellipse">
-            <a:avLst/>
-          </a:prstGeom>
-          <a:solidFill>
-            <a:srgbClr val="FDF3DC"/>
-          </a:solidFill>
-          <a:ln w="27940">
-            <a:solidFill>
-              <a:srgbClr val="F0AB00"/>
-            </a:solidFill>
-          </a:ln>
-          <a:effectLst/>
-        </p:spPr>
-        <p:style>
-          <a:lnRef idx="1">
-            <a:schemeClr val="accent1"/>
-          </a:lnRef>
-          <a:fillRef idx="3">
-            <a:schemeClr val="accent1"/>
-          </a:fillRef>
-          <a:effectRef idx="2">
-            <a:schemeClr val="accent1"/>
-          </a:effectRef>
-          <a:fontRef idx="minor">
-            <a:schemeClr val="lt1"/>
-          </a:fontRef>
-        </p:style>
-        <p:txBody>
-          <a:bodyPr rtlCol="0" anchor="ctr"/>
-          <a:lstStyle/>
-          <a:p>
-            <a:pPr algn="ctr"/>
-          </a:p>
-        </p:txBody>
-      </p:sp>
       <p:pic>
         <p:nvPicPr>
-          <p:cNvPr id="22" name="Picture 21" descr="users-gold.png"/>
+          <p:cNvPr id="4" name="Picture 3" descr="s49-missioncontrol-crop.png"/>
           <p:cNvPicPr>
             <a:picLocks noChangeAspect="1"/>
           </p:cNvPicPr>
@@ -51989,8 +51594,8 @@
         </p:blipFill>
         <p:spPr>
           <a:xfrm>
-            <a:off x="2743200" y="2606040"/>
-            <a:ext cx="640080" cy="640080"/>
+            <a:off x="773409" y="923544"/>
+            <a:ext cx="10660418" cy="3081527"/>
           </a:xfrm>
           <a:prstGeom prst="rect">
             <a:avLst/>
@@ -51999,14 +51604,14 @@
       </p:pic>
       <p:sp>
         <p:nvSpPr>
-          <p:cNvPr id="23" name="TextBox 22"/>
-          <p:cNvSpPr txBox="1"/>
-          <p:nvPr/>
-        </p:nvSpPr>
-        <p:spPr>
-          <a:xfrm>
-            <a:off x="2148840" y="3474720"/>
-            <a:ext cx="1828800" cy="320040"/>
+          <p:cNvPr id="5" name="TextBox 4"/>
+          <p:cNvSpPr txBox="1"/>
+          <p:nvPr/>
+        </p:nvSpPr>
+        <p:spPr>
+          <a:xfrm>
+            <a:off x="640080" y="4114800"/>
+            <a:ext cx="8229600" cy="256032"/>
           </a:xfrm>
           <a:prstGeom prst="rect">
             <a:avLst/>
@@ -52019,663 +51624,33 @@
           </a:bodyPr>
           <a:lstStyle/>
           <a:p>
-            <a:pPr algn="ctr">
+            <a:pPr algn="l">
               <a:lnSpc>
                 <a:spcPct val="115000"/>
               </a:lnSpc>
             </a:pPr>
             <a:r>
-              <a:rPr sz="1100" b="1" i="0">
-                <a:solidFill>
-                  <a:srgbClr val="21295C"/>
-                </a:solidFill>
-                <a:latin typeface="DejaVu Sans"/>
-              </a:rPr>
-              <a:t>человек в центре</a:t>
-            </a:r>
-          </a:p>
-        </p:txBody>
-      </p:sp>
-      <p:sp>
-        <p:nvSpPr>
-          <p:cNvPr id="24" name="Rounded Rectangle 23"/>
+              <a:rPr sz="1050" b="0" i="1">
+                <a:solidFill>
+                  <a:srgbClr val="5B6678"/>
+                </a:solidFill>
+                <a:latin typeface="DejaVu Sans"/>
+              </a:rPr>
+              <a:t>Центр управления NASA, Apollo 16 — люди принимают решение, пока автоматика работает</a:t>
+            </a:r>
+          </a:p>
+        </p:txBody>
+      </p:sp>
+      <p:sp>
+        <p:nvSpPr>
+          <p:cNvPr id="6" name="Rounded Rectangle 5"/>
           <p:cNvSpPr/>
           <p:nvPr/>
         </p:nvSpPr>
         <p:spPr>
           <a:xfrm>
-            <a:off x="5806440" y="1417320"/>
-            <a:ext cx="5897880" cy="3337560"/>
-          </a:xfrm>
-          <a:prstGeom prst="roundRect">
-            <a:avLst>
-              <a:gd name="adj" fmla="val 9132"/>
-            </a:avLst>
-          </a:prstGeom>
-          <a:solidFill>
-            <a:srgbClr val="F4F7FA"/>
-          </a:solidFill>
-          <a:ln w="19050">
-            <a:solidFill>
-              <a:srgbClr val="1C7293"/>
-            </a:solidFill>
-          </a:ln>
-          <a:effectLst/>
-        </p:spPr>
-        <p:style>
-          <a:lnRef idx="1">
-            <a:schemeClr val="accent1"/>
-          </a:lnRef>
-          <a:fillRef idx="3">
-            <a:schemeClr val="accent1"/>
-          </a:fillRef>
-          <a:effectRef idx="2">
-            <a:schemeClr val="accent1"/>
-          </a:effectRef>
-          <a:fontRef idx="minor">
-            <a:schemeClr val="lt1"/>
-          </a:fontRef>
-        </p:style>
-        <p:txBody>
-          <a:bodyPr rtlCol="0" anchor="ctr"/>
-          <a:lstStyle/>
-          <a:p>
-            <a:pPr algn="ctr"/>
-          </a:p>
-        </p:txBody>
-      </p:sp>
-      <p:sp>
-        <p:nvSpPr>
-          <p:cNvPr id="25" name="TextBox 24"/>
-          <p:cNvSpPr txBox="1"/>
-          <p:nvPr/>
-        </p:nvSpPr>
-        <p:spPr>
-          <a:xfrm>
-            <a:off x="6035040" y="1536192"/>
-            <a:ext cx="5440680" cy="365760"/>
-          </a:xfrm>
-          <a:prstGeom prst="rect">
-            <a:avLst/>
-          </a:prstGeom>
-          <a:noFill/>
-        </p:spPr>
-        <p:txBody>
-          <a:bodyPr wrap="square" lIns="0" rIns="0" tIns="0" bIns="0" anchor="t">
-            <a:spAutoFit/>
-          </a:bodyPr>
-          <a:lstStyle/>
-          <a:p>
-            <a:pPr algn="l">
-              <a:lnSpc>
-                <a:spcPct val="115000"/>
-              </a:lnSpc>
-            </a:pPr>
-            <a:r>
-              <a:rPr sz="1400" b="1" i="0">
-                <a:solidFill>
-                  <a:srgbClr val="065A82"/>
-                </a:solidFill>
-                <a:latin typeface="DejaVu Sans"/>
-              </a:rPr>
-              <a:t>Чек-лист «прежде чем делать фазу AI-first»</a:t>
-            </a:r>
-          </a:p>
-        </p:txBody>
-      </p:sp>
-      <p:pic>
-        <p:nvPicPr>
-          <p:cNvPr id="26" name="Picture 25" descr="circle-check-teal.png"/>
-          <p:cNvPicPr>
-            <a:picLocks noChangeAspect="1"/>
-          </p:cNvPicPr>
-          <p:nvPr/>
-        </p:nvPicPr>
-        <p:blipFill>
-          <a:blip r:embed="rId3"/>
-          <a:stretch>
-            <a:fillRect/>
-          </a:stretch>
-        </p:blipFill>
-        <p:spPr>
-          <a:xfrm>
-            <a:off x="6035040" y="2057400"/>
-            <a:ext cx="274320" cy="274320"/>
-          </a:xfrm>
-          <a:prstGeom prst="rect">
-            <a:avLst/>
-          </a:prstGeom>
-        </p:spPr>
-      </p:pic>
-      <p:sp>
-        <p:nvSpPr>
-          <p:cNvPr id="27" name="TextBox 26"/>
-          <p:cNvSpPr txBox="1"/>
-          <p:nvPr/>
-        </p:nvSpPr>
-        <p:spPr>
-          <a:xfrm>
-            <a:off x="6400800" y="2039112"/>
-            <a:ext cx="2377440" cy="457200"/>
-          </a:xfrm>
-          <a:prstGeom prst="rect">
-            <a:avLst/>
-          </a:prstGeom>
-          <a:noFill/>
-        </p:spPr>
-        <p:txBody>
-          <a:bodyPr wrap="square" lIns="0" rIns="0" tIns="0" bIns="0" anchor="ctr">
-            <a:spAutoFit/>
-          </a:bodyPr>
-          <a:lstStyle/>
-          <a:p>
-            <a:pPr algn="l">
-              <a:lnSpc>
-                <a:spcPct val="100000"/>
-              </a:lnSpc>
-            </a:pPr>
-            <a:r>
-              <a:rPr sz="1150" b="0" i="0">
-                <a:solidFill>
-                  <a:srgbClr val="21295C"/>
-                </a:solidFill>
-                <a:latin typeface="DejaVu Sans"/>
-              </a:rPr>
-              <a:t>1. Классика на месте?</a:t>
-            </a:r>
-          </a:p>
-        </p:txBody>
-      </p:sp>
-      <p:pic>
-        <p:nvPicPr>
-          <p:cNvPr id="28" name="Picture 27" descr="circle-check-teal.png"/>
-          <p:cNvPicPr>
-            <a:picLocks noChangeAspect="1"/>
-          </p:cNvPicPr>
-          <p:nvPr/>
-        </p:nvPicPr>
-        <p:blipFill>
-          <a:blip r:embed="rId3"/>
-          <a:stretch>
-            <a:fillRect/>
-          </a:stretch>
-        </p:blipFill>
-        <p:spPr>
-          <a:xfrm>
-            <a:off x="8778240" y="2057400"/>
-            <a:ext cx="274320" cy="274320"/>
-          </a:xfrm>
-          <a:prstGeom prst="rect">
-            <a:avLst/>
-          </a:prstGeom>
-        </p:spPr>
-      </p:pic>
-      <p:sp>
-        <p:nvSpPr>
-          <p:cNvPr id="29" name="TextBox 28"/>
-          <p:cNvSpPr txBox="1"/>
-          <p:nvPr/>
-        </p:nvSpPr>
-        <p:spPr>
-          <a:xfrm>
-            <a:off x="9144000" y="2039112"/>
-            <a:ext cx="2377440" cy="457200"/>
-          </a:xfrm>
-          <a:prstGeom prst="rect">
-            <a:avLst/>
-          </a:prstGeom>
-          <a:noFill/>
-        </p:spPr>
-        <p:txBody>
-          <a:bodyPr wrap="square" lIns="0" rIns="0" tIns="0" bIns="0" anchor="ctr">
-            <a:spAutoFit/>
-          </a:bodyPr>
-          <a:lstStyle/>
-          <a:p>
-            <a:pPr algn="l">
-              <a:lnSpc>
-                <a:spcPct val="100000"/>
-              </a:lnSpc>
-            </a:pPr>
-            <a:r>
-              <a:rPr sz="1150" b="0" i="0">
-                <a:solidFill>
-                  <a:srgbClr val="21295C"/>
-                </a:solidFill>
-                <a:latin typeface="DejaVu Sans"/>
-              </a:rPr>
-              <a:t>2. Стоит ли доверие цены?</a:t>
-            </a:r>
-          </a:p>
-        </p:txBody>
-      </p:sp>
-      <p:pic>
-        <p:nvPicPr>
-          <p:cNvPr id="30" name="Picture 29" descr="circle-check-teal.png"/>
-          <p:cNvPicPr>
-            <a:picLocks noChangeAspect="1"/>
-          </p:cNvPicPr>
-          <p:nvPr/>
-        </p:nvPicPr>
-        <p:blipFill>
-          <a:blip r:embed="rId3"/>
-          <a:stretch>
-            <a:fillRect/>
-          </a:stretch>
-        </p:blipFill>
-        <p:spPr>
-          <a:xfrm>
-            <a:off x="6035040" y="2679192"/>
-            <a:ext cx="274320" cy="274320"/>
-          </a:xfrm>
-          <a:prstGeom prst="rect">
-            <a:avLst/>
-          </a:prstGeom>
-        </p:spPr>
-      </p:pic>
-      <p:sp>
-        <p:nvSpPr>
-          <p:cNvPr id="31" name="TextBox 30"/>
-          <p:cNvSpPr txBox="1"/>
-          <p:nvPr/>
-        </p:nvSpPr>
-        <p:spPr>
-          <a:xfrm>
-            <a:off x="6400800" y="2660904"/>
-            <a:ext cx="2377440" cy="457200"/>
-          </a:xfrm>
-          <a:prstGeom prst="rect">
-            <a:avLst/>
-          </a:prstGeom>
-          <a:noFill/>
-        </p:spPr>
-        <p:txBody>
-          <a:bodyPr wrap="square" lIns="0" rIns="0" tIns="0" bIns="0" anchor="ctr">
-            <a:spAutoFit/>
-          </a:bodyPr>
-          <a:lstStyle/>
-          <a:p>
-            <a:pPr algn="l">
-              <a:lnSpc>
-                <a:spcPct val="100000"/>
-              </a:lnSpc>
-            </a:pPr>
-            <a:r>
-              <a:rPr sz="1150" b="0" i="0">
-                <a:solidFill>
-                  <a:srgbClr val="21295C"/>
-                </a:solidFill>
-                <a:latin typeface="DejaVu Sans"/>
-              </a:rPr>
-              <a:t>3. Есть эталонный набор и eval?</a:t>
-            </a:r>
-          </a:p>
-        </p:txBody>
-      </p:sp>
-      <p:pic>
-        <p:nvPicPr>
-          <p:cNvPr id="32" name="Picture 31" descr="circle-check-teal.png"/>
-          <p:cNvPicPr>
-            <a:picLocks noChangeAspect="1"/>
-          </p:cNvPicPr>
-          <p:nvPr/>
-        </p:nvPicPr>
-        <p:blipFill>
-          <a:blip r:embed="rId3"/>
-          <a:stretch>
-            <a:fillRect/>
-          </a:stretch>
-        </p:blipFill>
-        <p:spPr>
-          <a:xfrm>
-            <a:off x="8778240" y="2679192"/>
-            <a:ext cx="274320" cy="274320"/>
-          </a:xfrm>
-          <a:prstGeom prst="rect">
-            <a:avLst/>
-          </a:prstGeom>
-        </p:spPr>
-      </p:pic>
-      <p:sp>
-        <p:nvSpPr>
-          <p:cNvPr id="33" name="TextBox 32"/>
-          <p:cNvSpPr txBox="1"/>
-          <p:nvPr/>
-        </p:nvSpPr>
-        <p:spPr>
-          <a:xfrm>
-            <a:off x="9144000" y="2660904"/>
-            <a:ext cx="2377440" cy="457200"/>
-          </a:xfrm>
-          <a:prstGeom prst="rect">
-            <a:avLst/>
-          </a:prstGeom>
-          <a:noFill/>
-        </p:spPr>
-        <p:txBody>
-          <a:bodyPr wrap="square" lIns="0" rIns="0" tIns="0" bIns="0" anchor="ctr">
-            <a:spAutoFit/>
-          </a:bodyPr>
-          <a:lstStyle/>
-          <a:p>
-            <a:pPr algn="l">
-              <a:lnSpc>
-                <a:spcPct val="100000"/>
-              </a:lnSpc>
-            </a:pPr>
-            <a:r>
-              <a:rPr sz="1150" b="0" i="0">
-                <a:solidFill>
-                  <a:srgbClr val="21295C"/>
-                </a:solidFill>
-                <a:latin typeface="DejaVu Sans"/>
-              </a:rPr>
-              <a:t>4. Есть guardrail-метрика?</a:t>
-            </a:r>
-          </a:p>
-        </p:txBody>
-      </p:sp>
-      <p:pic>
-        <p:nvPicPr>
-          <p:cNvPr id="34" name="Picture 33" descr="circle-check-teal.png"/>
-          <p:cNvPicPr>
-            <a:picLocks noChangeAspect="1"/>
-          </p:cNvPicPr>
-          <p:nvPr/>
-        </p:nvPicPr>
-        <p:blipFill>
-          <a:blip r:embed="rId3"/>
-          <a:stretch>
-            <a:fillRect/>
-          </a:stretch>
-        </p:blipFill>
-        <p:spPr>
-          <a:xfrm>
-            <a:off x="6035040" y="3300984"/>
-            <a:ext cx="274320" cy="274320"/>
-          </a:xfrm>
-          <a:prstGeom prst="rect">
-            <a:avLst/>
-          </a:prstGeom>
-        </p:spPr>
-      </p:pic>
-      <p:sp>
-        <p:nvSpPr>
-          <p:cNvPr id="35" name="TextBox 34"/>
-          <p:cNvSpPr txBox="1"/>
-          <p:nvPr/>
-        </p:nvSpPr>
-        <p:spPr>
-          <a:xfrm>
-            <a:off x="6400800" y="3282696"/>
-            <a:ext cx="2377440" cy="457200"/>
-          </a:xfrm>
-          <a:prstGeom prst="rect">
-            <a:avLst/>
-          </a:prstGeom>
-          <a:noFill/>
-        </p:spPr>
-        <p:txBody>
-          <a:bodyPr wrap="square" lIns="0" rIns="0" tIns="0" bIns="0" anchor="ctr">
-            <a:spAutoFit/>
-          </a:bodyPr>
-          <a:lstStyle/>
-          <a:p>
-            <a:pPr algn="l">
-              <a:lnSpc>
-                <a:spcPct val="100000"/>
-              </a:lnSpc>
-            </a:pPr>
-            <a:r>
-              <a:rPr sz="1150" b="0" i="0">
-                <a:solidFill>
-                  <a:srgbClr val="21295C"/>
-                </a:solidFill>
-                <a:latin typeface="DejaVu Sans"/>
-              </a:rPr>
-              <a:t>5. Поэтапная раскатка + откат?</a:t>
-            </a:r>
-          </a:p>
-        </p:txBody>
-      </p:sp>
-      <p:pic>
-        <p:nvPicPr>
-          <p:cNvPr id="36" name="Picture 35" descr="circle-check-teal.png"/>
-          <p:cNvPicPr>
-            <a:picLocks noChangeAspect="1"/>
-          </p:cNvPicPr>
-          <p:nvPr/>
-        </p:nvPicPr>
-        <p:blipFill>
-          <a:blip r:embed="rId3"/>
-          <a:stretch>
-            <a:fillRect/>
-          </a:stretch>
-        </p:blipFill>
-        <p:spPr>
-          <a:xfrm>
-            <a:off x="8778240" y="3300984"/>
-            <a:ext cx="274320" cy="274320"/>
-          </a:xfrm>
-          <a:prstGeom prst="rect">
-            <a:avLst/>
-          </a:prstGeom>
-        </p:spPr>
-      </p:pic>
-      <p:sp>
-        <p:nvSpPr>
-          <p:cNvPr id="37" name="TextBox 36"/>
-          <p:cNvSpPr txBox="1"/>
-          <p:nvPr/>
-        </p:nvSpPr>
-        <p:spPr>
-          <a:xfrm>
-            <a:off x="9144000" y="3282696"/>
-            <a:ext cx="2377440" cy="457200"/>
-          </a:xfrm>
-          <a:prstGeom prst="rect">
-            <a:avLst/>
-          </a:prstGeom>
-          <a:noFill/>
-        </p:spPr>
-        <p:txBody>
-          <a:bodyPr wrap="square" lIns="0" rIns="0" tIns="0" bIns="0" anchor="ctr">
-            <a:spAutoFit/>
-          </a:bodyPr>
-          <a:lstStyle/>
-          <a:p>
-            <a:pPr algn="l">
-              <a:lnSpc>
-                <a:spcPct val="100000"/>
-              </a:lnSpc>
-            </a:pPr>
-            <a:r>
-              <a:rPr sz="1150" b="0" i="0">
-                <a:solidFill>
-                  <a:srgbClr val="21295C"/>
-                </a:solidFill>
-                <a:latin typeface="DejaVu Sans"/>
-              </a:rPr>
-              <a:t>6. Гарантирована эскалация к человеку?</a:t>
-            </a:r>
-          </a:p>
-        </p:txBody>
-      </p:sp>
-      <p:pic>
-        <p:nvPicPr>
-          <p:cNvPr id="38" name="Picture 37" descr="circle-check-teal.png"/>
-          <p:cNvPicPr>
-            <a:picLocks noChangeAspect="1"/>
-          </p:cNvPicPr>
-          <p:nvPr/>
-        </p:nvPicPr>
-        <p:blipFill>
-          <a:blip r:embed="rId3"/>
-          <a:stretch>
-            <a:fillRect/>
-          </a:stretch>
-        </p:blipFill>
-        <p:spPr>
-          <a:xfrm>
-            <a:off x="6035040" y="3922776"/>
-            <a:ext cx="274320" cy="274320"/>
-          </a:xfrm>
-          <a:prstGeom prst="rect">
-            <a:avLst/>
-          </a:prstGeom>
-        </p:spPr>
-      </p:pic>
-      <p:sp>
-        <p:nvSpPr>
-          <p:cNvPr id="39" name="TextBox 38"/>
-          <p:cNvSpPr txBox="1"/>
-          <p:nvPr/>
-        </p:nvSpPr>
-        <p:spPr>
-          <a:xfrm>
-            <a:off x="6400800" y="3904488"/>
-            <a:ext cx="2377440" cy="457200"/>
-          </a:xfrm>
-          <a:prstGeom prst="rect">
-            <a:avLst/>
-          </a:prstGeom>
-          <a:noFill/>
-        </p:spPr>
-        <p:txBody>
-          <a:bodyPr wrap="square" lIns="0" rIns="0" tIns="0" bIns="0" anchor="ctr">
-            <a:spAutoFit/>
-          </a:bodyPr>
-          <a:lstStyle/>
-          <a:p>
-            <a:pPr algn="l">
-              <a:lnSpc>
-                <a:spcPct val="100000"/>
-              </a:lnSpc>
-            </a:pPr>
-            <a:r>
-              <a:rPr sz="1150" b="0" i="0">
-                <a:solidFill>
-                  <a:srgbClr val="21295C"/>
-                </a:solidFill>
-                <a:latin typeface="DejaVu Sans"/>
-              </a:rPr>
-              <a:t>7. Кто отвечает?</a:t>
-            </a:r>
-          </a:p>
-        </p:txBody>
-      </p:sp>
-      <p:pic>
-        <p:nvPicPr>
-          <p:cNvPr id="40" name="Picture 39" descr="circle-check-teal.png"/>
-          <p:cNvPicPr>
-            <a:picLocks noChangeAspect="1"/>
-          </p:cNvPicPr>
-          <p:nvPr/>
-        </p:nvPicPr>
-        <p:blipFill>
-          <a:blip r:embed="rId3"/>
-          <a:stretch>
-            <a:fillRect/>
-          </a:stretch>
-        </p:blipFill>
-        <p:spPr>
-          <a:xfrm>
-            <a:off x="8778240" y="3922776"/>
-            <a:ext cx="274320" cy="274320"/>
-          </a:xfrm>
-          <a:prstGeom prst="rect">
-            <a:avLst/>
-          </a:prstGeom>
-        </p:spPr>
-      </p:pic>
-      <p:sp>
-        <p:nvSpPr>
-          <p:cNvPr id="41" name="TextBox 40"/>
-          <p:cNvSpPr txBox="1"/>
-          <p:nvPr/>
-        </p:nvSpPr>
-        <p:spPr>
-          <a:xfrm>
-            <a:off x="9144000" y="3904488"/>
-            <a:ext cx="2377440" cy="457200"/>
-          </a:xfrm>
-          <a:prstGeom prst="rect">
-            <a:avLst/>
-          </a:prstGeom>
-          <a:noFill/>
-        </p:spPr>
-        <p:txBody>
-          <a:bodyPr wrap="square" lIns="0" rIns="0" tIns="0" bIns="0" anchor="ctr">
-            <a:spAutoFit/>
-          </a:bodyPr>
-          <a:lstStyle/>
-          <a:p>
-            <a:pPr algn="l">
-              <a:lnSpc>
-                <a:spcPct val="100000"/>
-              </a:lnSpc>
-            </a:pPr>
-            <a:r>
-              <a:rPr sz="1150" b="0" i="0">
-                <a:solidFill>
-                  <a:srgbClr val="21295C"/>
-                </a:solidFill>
-                <a:latin typeface="DejaVu Sans"/>
-              </a:rPr>
-              <a:t>8. Данные безопасны?</a:t>
-            </a:r>
-          </a:p>
-        </p:txBody>
-      </p:sp>
-      <p:sp>
-        <p:nvSpPr>
-          <p:cNvPr id="42" name="TextBox 41"/>
-          <p:cNvSpPr txBox="1"/>
-          <p:nvPr/>
-        </p:nvSpPr>
-        <p:spPr>
-          <a:xfrm>
-            <a:off x="6035040" y="4526280"/>
-            <a:ext cx="5440680" cy="320040"/>
-          </a:xfrm>
-          <a:prstGeom prst="rect">
-            <a:avLst/>
-          </a:prstGeom>
-          <a:noFill/>
-        </p:spPr>
-        <p:txBody>
-          <a:bodyPr wrap="square" lIns="0" rIns="0" tIns="0" bIns="0" anchor="t">
-            <a:spAutoFit/>
-          </a:bodyPr>
-          <a:lstStyle/>
-          <a:p>
-            <a:pPr algn="l">
-              <a:lnSpc>
-                <a:spcPct val="115000"/>
-              </a:lnSpc>
-            </a:pPr>
-            <a:r>
-              <a:rPr sz="1150" b="0" i="1">
-                <a:solidFill>
-                  <a:srgbClr val="5B6678"/>
-                </a:solidFill>
-                <a:latin typeface="DejaVu Sans"/>
-              </a:rPr>
-              <a:t>Парный семинар: та же петля на учебном AI-продукте</a:t>
-            </a:r>
-          </a:p>
-        </p:txBody>
-      </p:sp>
-      <p:sp>
-        <p:nvSpPr>
-          <p:cNvPr id="43" name="Rounded Rectangle 42"/>
-          <p:cNvSpPr/>
-          <p:nvPr/>
-        </p:nvSpPr>
-        <p:spPr>
-          <a:xfrm>
-            <a:off x="502920" y="4892040"/>
-            <a:ext cx="11201400" cy="731520"/>
+            <a:off x="502920" y="4407408"/>
+            <a:ext cx="11201400" cy="566928"/>
           </a:xfrm>
           <a:prstGeom prst="roundRect">
             <a:avLst>
@@ -52716,14 +51691,14 @@
       </p:sp>
       <p:sp>
         <p:nvSpPr>
-          <p:cNvPr id="44" name="TextBox 43"/>
-          <p:cNvSpPr txBox="1"/>
-          <p:nvPr/>
-        </p:nvSpPr>
-        <p:spPr>
-          <a:xfrm>
-            <a:off x="722376" y="4946903"/>
-            <a:ext cx="10762488" cy="621792"/>
+          <p:cNvPr id="7" name="TextBox 6"/>
+          <p:cNvSpPr txBox="1"/>
+          <p:nvPr/>
+        </p:nvSpPr>
+        <p:spPr>
+          <a:xfrm>
+            <a:off x="722376" y="4462272"/>
+            <a:ext cx="10762488" cy="457200"/>
           </a:xfrm>
           <a:prstGeom prst="rect">
             <a:avLst/>
@@ -52742,7 +51717,7 @@
               </a:lnSpc>
             </a:pPr>
             <a:r>
-              <a:rPr sz="1350" b="1" i="0">
+              <a:rPr sz="1250" b="1" i="0">
                 <a:solidFill>
                   <a:srgbClr val="21295C"/>
                 </a:solidFill>
@@ -52755,7 +51730,566 @@
       </p:sp>
       <p:sp>
         <p:nvSpPr>
-          <p:cNvPr id="45" name="TextBox 44"/>
+          <p:cNvPr id="8" name="Rounded Rectangle 7"/>
+          <p:cNvSpPr/>
+          <p:nvPr/>
+        </p:nvSpPr>
+        <p:spPr>
+          <a:xfrm>
+            <a:off x="502920" y="5084064"/>
+            <a:ext cx="4937760" cy="292608"/>
+          </a:xfrm>
+          <a:prstGeom prst="roundRect">
+            <a:avLst>
+              <a:gd name="adj" fmla="val 50000"/>
+            </a:avLst>
+          </a:prstGeom>
+          <a:solidFill>
+            <a:srgbClr val="F0AB00"/>
+          </a:solidFill>
+          <a:ln>
+            <a:noFill/>
+          </a:ln>
+          <a:effectLst/>
+        </p:spPr>
+        <p:style>
+          <a:lnRef idx="1">
+            <a:schemeClr val="accent1"/>
+          </a:lnRef>
+          <a:fillRef idx="3">
+            <a:schemeClr val="accent1"/>
+          </a:fillRef>
+          <a:effectRef idx="2">
+            <a:schemeClr val="accent1"/>
+          </a:effectRef>
+          <a:fontRef idx="minor">
+            <a:schemeClr val="lt1"/>
+          </a:fontRef>
+        </p:style>
+        <p:txBody>
+          <a:bodyPr rtlCol="0" anchor="ctr" lIns="45720" rIns="45720" tIns="18288" bIns="18288" wrap="none"/>
+          <a:lstStyle/>
+          <a:p>
+            <a:pPr algn="ctr"/>
+            <a:r>
+              <a:rPr sz="1050" b="1">
+                <a:solidFill>
+                  <a:srgbClr val="21295C"/>
+                </a:solidFill>
+                <a:latin typeface="DejaVu Sans"/>
+              </a:rPr>
+              <a:t>Чек-лист «прежде чем делать фазу AI-first»</a:t>
+            </a:r>
+          </a:p>
+        </p:txBody>
+      </p:sp>
+      <p:pic>
+        <p:nvPicPr>
+          <p:cNvPr id="9" name="Picture 8" descr="circle-check-teal.png"/>
+          <p:cNvPicPr>
+            <a:picLocks noChangeAspect="1"/>
+          </p:cNvPicPr>
+          <p:nvPr/>
+        </p:nvPicPr>
+        <p:blipFill>
+          <a:blip r:embed="rId3"/>
+          <a:stretch>
+            <a:fillRect/>
+          </a:stretch>
+        </p:blipFill>
+        <p:spPr>
+          <a:xfrm>
+            <a:off x="502920" y="5468112"/>
+            <a:ext cx="219456" cy="219456"/>
+          </a:xfrm>
+          <a:prstGeom prst="rect">
+            <a:avLst/>
+          </a:prstGeom>
+        </p:spPr>
+      </p:pic>
+      <p:sp>
+        <p:nvSpPr>
+          <p:cNvPr id="10" name="TextBox 9"/>
+          <p:cNvSpPr txBox="1"/>
+          <p:nvPr/>
+        </p:nvSpPr>
+        <p:spPr>
+          <a:xfrm>
+            <a:off x="777240" y="5440680"/>
+            <a:ext cx="2450592" cy="457200"/>
+          </a:xfrm>
+          <a:prstGeom prst="rect">
+            <a:avLst/>
+          </a:prstGeom>
+          <a:noFill/>
+        </p:spPr>
+        <p:txBody>
+          <a:bodyPr wrap="square" lIns="0" rIns="0" tIns="0" bIns="0" anchor="ctr">
+            <a:spAutoFit/>
+          </a:bodyPr>
+          <a:lstStyle/>
+          <a:p>
+            <a:pPr algn="l">
+              <a:lnSpc>
+                <a:spcPct val="95000"/>
+              </a:lnSpc>
+            </a:pPr>
+            <a:r>
+              <a:rPr sz="919" b="0" i="0">
+                <a:solidFill>
+                  <a:srgbClr val="21295C"/>
+                </a:solidFill>
+                <a:latin typeface="DejaVu Sans"/>
+              </a:rPr>
+              <a:t>1. Классика на месте?</a:t>
+            </a:r>
+          </a:p>
+        </p:txBody>
+      </p:sp>
+      <p:pic>
+        <p:nvPicPr>
+          <p:cNvPr id="11" name="Picture 10" descr="circle-check-teal.png"/>
+          <p:cNvPicPr>
+            <a:picLocks noChangeAspect="1"/>
+          </p:cNvPicPr>
+          <p:nvPr/>
+        </p:nvPicPr>
+        <p:blipFill>
+          <a:blip r:embed="rId3"/>
+          <a:stretch>
+            <a:fillRect/>
+          </a:stretch>
+        </p:blipFill>
+        <p:spPr>
+          <a:xfrm>
+            <a:off x="3337560" y="5468112"/>
+            <a:ext cx="219456" cy="219456"/>
+          </a:xfrm>
+          <a:prstGeom prst="rect">
+            <a:avLst/>
+          </a:prstGeom>
+        </p:spPr>
+      </p:pic>
+      <p:sp>
+        <p:nvSpPr>
+          <p:cNvPr id="12" name="TextBox 11"/>
+          <p:cNvSpPr txBox="1"/>
+          <p:nvPr/>
+        </p:nvSpPr>
+        <p:spPr>
+          <a:xfrm>
+            <a:off x="3611880" y="5440680"/>
+            <a:ext cx="2450592" cy="457200"/>
+          </a:xfrm>
+          <a:prstGeom prst="rect">
+            <a:avLst/>
+          </a:prstGeom>
+          <a:noFill/>
+        </p:spPr>
+        <p:txBody>
+          <a:bodyPr wrap="square" lIns="0" rIns="0" tIns="0" bIns="0" anchor="ctr">
+            <a:spAutoFit/>
+          </a:bodyPr>
+          <a:lstStyle/>
+          <a:p>
+            <a:pPr algn="l">
+              <a:lnSpc>
+                <a:spcPct val="95000"/>
+              </a:lnSpc>
+            </a:pPr>
+            <a:r>
+              <a:rPr sz="919" b="0" i="0">
+                <a:solidFill>
+                  <a:srgbClr val="21295C"/>
+                </a:solidFill>
+                <a:latin typeface="DejaVu Sans"/>
+              </a:rPr>
+              <a:t>2. Стоит ли доверие цены?</a:t>
+            </a:r>
+          </a:p>
+        </p:txBody>
+      </p:sp>
+      <p:pic>
+        <p:nvPicPr>
+          <p:cNvPr id="13" name="Picture 12" descr="circle-check-teal.png"/>
+          <p:cNvPicPr>
+            <a:picLocks noChangeAspect="1"/>
+          </p:cNvPicPr>
+          <p:nvPr/>
+        </p:nvPicPr>
+        <p:blipFill>
+          <a:blip r:embed="rId3"/>
+          <a:stretch>
+            <a:fillRect/>
+          </a:stretch>
+        </p:blipFill>
+        <p:spPr>
+          <a:xfrm>
+            <a:off x="6172200" y="5468112"/>
+            <a:ext cx="219456" cy="219456"/>
+          </a:xfrm>
+          <a:prstGeom prst="rect">
+            <a:avLst/>
+          </a:prstGeom>
+        </p:spPr>
+      </p:pic>
+      <p:sp>
+        <p:nvSpPr>
+          <p:cNvPr id="14" name="TextBox 13"/>
+          <p:cNvSpPr txBox="1"/>
+          <p:nvPr/>
+        </p:nvSpPr>
+        <p:spPr>
+          <a:xfrm>
+            <a:off x="6446520" y="5440680"/>
+            <a:ext cx="2450592" cy="457200"/>
+          </a:xfrm>
+          <a:prstGeom prst="rect">
+            <a:avLst/>
+          </a:prstGeom>
+          <a:noFill/>
+        </p:spPr>
+        <p:txBody>
+          <a:bodyPr wrap="square" lIns="0" rIns="0" tIns="0" bIns="0" anchor="ctr">
+            <a:spAutoFit/>
+          </a:bodyPr>
+          <a:lstStyle/>
+          <a:p>
+            <a:pPr algn="l">
+              <a:lnSpc>
+                <a:spcPct val="95000"/>
+              </a:lnSpc>
+            </a:pPr>
+            <a:r>
+              <a:rPr sz="919" b="0" i="0">
+                <a:solidFill>
+                  <a:srgbClr val="21295C"/>
+                </a:solidFill>
+                <a:latin typeface="DejaVu Sans"/>
+              </a:rPr>
+              <a:t>3. Есть эталонный набор и eval?</a:t>
+            </a:r>
+          </a:p>
+        </p:txBody>
+      </p:sp>
+      <p:pic>
+        <p:nvPicPr>
+          <p:cNvPr id="15" name="Picture 14" descr="circle-check-teal.png"/>
+          <p:cNvPicPr>
+            <a:picLocks noChangeAspect="1"/>
+          </p:cNvPicPr>
+          <p:nvPr/>
+        </p:nvPicPr>
+        <p:blipFill>
+          <a:blip r:embed="rId3"/>
+          <a:stretch>
+            <a:fillRect/>
+          </a:stretch>
+        </p:blipFill>
+        <p:spPr>
+          <a:xfrm>
+            <a:off x="9006840" y="5468112"/>
+            <a:ext cx="219456" cy="219456"/>
+          </a:xfrm>
+          <a:prstGeom prst="rect">
+            <a:avLst/>
+          </a:prstGeom>
+        </p:spPr>
+      </p:pic>
+      <p:sp>
+        <p:nvSpPr>
+          <p:cNvPr id="16" name="TextBox 15"/>
+          <p:cNvSpPr txBox="1"/>
+          <p:nvPr/>
+        </p:nvSpPr>
+        <p:spPr>
+          <a:xfrm>
+            <a:off x="9281160" y="5440680"/>
+            <a:ext cx="2450592" cy="457200"/>
+          </a:xfrm>
+          <a:prstGeom prst="rect">
+            <a:avLst/>
+          </a:prstGeom>
+          <a:noFill/>
+        </p:spPr>
+        <p:txBody>
+          <a:bodyPr wrap="square" lIns="0" rIns="0" tIns="0" bIns="0" anchor="ctr">
+            <a:spAutoFit/>
+          </a:bodyPr>
+          <a:lstStyle/>
+          <a:p>
+            <a:pPr algn="l">
+              <a:lnSpc>
+                <a:spcPct val="95000"/>
+              </a:lnSpc>
+            </a:pPr>
+            <a:r>
+              <a:rPr sz="919" b="0" i="0">
+                <a:solidFill>
+                  <a:srgbClr val="21295C"/>
+                </a:solidFill>
+                <a:latin typeface="DejaVu Sans"/>
+              </a:rPr>
+              <a:t>4. Есть guardrail-метрика?</a:t>
+            </a:r>
+          </a:p>
+        </p:txBody>
+      </p:sp>
+      <p:pic>
+        <p:nvPicPr>
+          <p:cNvPr id="17" name="Picture 16" descr="circle-check-teal.png"/>
+          <p:cNvPicPr>
+            <a:picLocks noChangeAspect="1"/>
+          </p:cNvPicPr>
+          <p:nvPr/>
+        </p:nvPicPr>
+        <p:blipFill>
+          <a:blip r:embed="rId3"/>
+          <a:stretch>
+            <a:fillRect/>
+          </a:stretch>
+        </p:blipFill>
+        <p:spPr>
+          <a:xfrm>
+            <a:off x="502920" y="5971032"/>
+            <a:ext cx="219456" cy="219456"/>
+          </a:xfrm>
+          <a:prstGeom prst="rect">
+            <a:avLst/>
+          </a:prstGeom>
+        </p:spPr>
+      </p:pic>
+      <p:sp>
+        <p:nvSpPr>
+          <p:cNvPr id="18" name="TextBox 17"/>
+          <p:cNvSpPr txBox="1"/>
+          <p:nvPr/>
+        </p:nvSpPr>
+        <p:spPr>
+          <a:xfrm>
+            <a:off x="777240" y="5943600"/>
+            <a:ext cx="2450592" cy="457200"/>
+          </a:xfrm>
+          <a:prstGeom prst="rect">
+            <a:avLst/>
+          </a:prstGeom>
+          <a:noFill/>
+        </p:spPr>
+        <p:txBody>
+          <a:bodyPr wrap="square" lIns="0" rIns="0" tIns="0" bIns="0" anchor="ctr">
+            <a:spAutoFit/>
+          </a:bodyPr>
+          <a:lstStyle/>
+          <a:p>
+            <a:pPr algn="l">
+              <a:lnSpc>
+                <a:spcPct val="95000"/>
+              </a:lnSpc>
+            </a:pPr>
+            <a:r>
+              <a:rPr sz="919" b="0" i="0">
+                <a:solidFill>
+                  <a:srgbClr val="21295C"/>
+                </a:solidFill>
+                <a:latin typeface="DejaVu Sans"/>
+              </a:rPr>
+              <a:t>5. Поэтапная раскатка + откат?</a:t>
+            </a:r>
+          </a:p>
+        </p:txBody>
+      </p:sp>
+      <p:pic>
+        <p:nvPicPr>
+          <p:cNvPr id="19" name="Picture 18" descr="circle-check-teal.png"/>
+          <p:cNvPicPr>
+            <a:picLocks noChangeAspect="1"/>
+          </p:cNvPicPr>
+          <p:nvPr/>
+        </p:nvPicPr>
+        <p:blipFill>
+          <a:blip r:embed="rId3"/>
+          <a:stretch>
+            <a:fillRect/>
+          </a:stretch>
+        </p:blipFill>
+        <p:spPr>
+          <a:xfrm>
+            <a:off x="3337560" y="5971032"/>
+            <a:ext cx="219456" cy="219456"/>
+          </a:xfrm>
+          <a:prstGeom prst="rect">
+            <a:avLst/>
+          </a:prstGeom>
+        </p:spPr>
+      </p:pic>
+      <p:sp>
+        <p:nvSpPr>
+          <p:cNvPr id="20" name="TextBox 19"/>
+          <p:cNvSpPr txBox="1"/>
+          <p:nvPr/>
+        </p:nvSpPr>
+        <p:spPr>
+          <a:xfrm>
+            <a:off x="3611880" y="5943600"/>
+            <a:ext cx="2450592" cy="457200"/>
+          </a:xfrm>
+          <a:prstGeom prst="rect">
+            <a:avLst/>
+          </a:prstGeom>
+          <a:noFill/>
+        </p:spPr>
+        <p:txBody>
+          <a:bodyPr wrap="square" lIns="0" rIns="0" tIns="0" bIns="0" anchor="ctr">
+            <a:spAutoFit/>
+          </a:bodyPr>
+          <a:lstStyle/>
+          <a:p>
+            <a:pPr algn="l">
+              <a:lnSpc>
+                <a:spcPct val="95000"/>
+              </a:lnSpc>
+            </a:pPr>
+            <a:r>
+              <a:rPr sz="919" b="0" i="0">
+                <a:solidFill>
+                  <a:srgbClr val="21295C"/>
+                </a:solidFill>
+                <a:latin typeface="DejaVu Sans"/>
+              </a:rPr>
+              <a:t>6. Эскалация к человеку гарантирована?</a:t>
+            </a:r>
+          </a:p>
+        </p:txBody>
+      </p:sp>
+      <p:pic>
+        <p:nvPicPr>
+          <p:cNvPr id="21" name="Picture 20" descr="circle-check-teal.png"/>
+          <p:cNvPicPr>
+            <a:picLocks noChangeAspect="1"/>
+          </p:cNvPicPr>
+          <p:nvPr/>
+        </p:nvPicPr>
+        <p:blipFill>
+          <a:blip r:embed="rId3"/>
+          <a:stretch>
+            <a:fillRect/>
+          </a:stretch>
+        </p:blipFill>
+        <p:spPr>
+          <a:xfrm>
+            <a:off x="6172200" y="5971032"/>
+            <a:ext cx="219456" cy="219456"/>
+          </a:xfrm>
+          <a:prstGeom prst="rect">
+            <a:avLst/>
+          </a:prstGeom>
+        </p:spPr>
+      </p:pic>
+      <p:sp>
+        <p:nvSpPr>
+          <p:cNvPr id="22" name="TextBox 21"/>
+          <p:cNvSpPr txBox="1"/>
+          <p:nvPr/>
+        </p:nvSpPr>
+        <p:spPr>
+          <a:xfrm>
+            <a:off x="6446520" y="5943600"/>
+            <a:ext cx="2450592" cy="457200"/>
+          </a:xfrm>
+          <a:prstGeom prst="rect">
+            <a:avLst/>
+          </a:prstGeom>
+          <a:noFill/>
+        </p:spPr>
+        <p:txBody>
+          <a:bodyPr wrap="square" lIns="0" rIns="0" tIns="0" bIns="0" anchor="ctr">
+            <a:spAutoFit/>
+          </a:bodyPr>
+          <a:lstStyle/>
+          <a:p>
+            <a:pPr algn="l">
+              <a:lnSpc>
+                <a:spcPct val="95000"/>
+              </a:lnSpc>
+            </a:pPr>
+            <a:r>
+              <a:rPr sz="919" b="0" i="0">
+                <a:solidFill>
+                  <a:srgbClr val="21295C"/>
+                </a:solidFill>
+                <a:latin typeface="DejaVu Sans"/>
+              </a:rPr>
+              <a:t>7. Кто отвечает?</a:t>
+            </a:r>
+          </a:p>
+        </p:txBody>
+      </p:sp>
+      <p:pic>
+        <p:nvPicPr>
+          <p:cNvPr id="23" name="Picture 22" descr="circle-check-teal.png"/>
+          <p:cNvPicPr>
+            <a:picLocks noChangeAspect="1"/>
+          </p:cNvPicPr>
+          <p:nvPr/>
+        </p:nvPicPr>
+        <p:blipFill>
+          <a:blip r:embed="rId3"/>
+          <a:stretch>
+            <a:fillRect/>
+          </a:stretch>
+        </p:blipFill>
+        <p:spPr>
+          <a:xfrm>
+            <a:off x="9006840" y="5971032"/>
+            <a:ext cx="219456" cy="219456"/>
+          </a:xfrm>
+          <a:prstGeom prst="rect">
+            <a:avLst/>
+          </a:prstGeom>
+        </p:spPr>
+      </p:pic>
+      <p:sp>
+        <p:nvSpPr>
+          <p:cNvPr id="24" name="TextBox 23"/>
+          <p:cNvSpPr txBox="1"/>
+          <p:nvPr/>
+        </p:nvSpPr>
+        <p:spPr>
+          <a:xfrm>
+            <a:off x="9281160" y="5943600"/>
+            <a:ext cx="2450592" cy="457200"/>
+          </a:xfrm>
+          <a:prstGeom prst="rect">
+            <a:avLst/>
+          </a:prstGeom>
+          <a:noFill/>
+        </p:spPr>
+        <p:txBody>
+          <a:bodyPr wrap="square" lIns="0" rIns="0" tIns="0" bIns="0" anchor="ctr">
+            <a:spAutoFit/>
+          </a:bodyPr>
+          <a:lstStyle/>
+          <a:p>
+            <a:pPr algn="l">
+              <a:lnSpc>
+                <a:spcPct val="95000"/>
+              </a:lnSpc>
+            </a:pPr>
+            <a:r>
+              <a:rPr sz="919" b="0" i="0">
+                <a:solidFill>
+                  <a:srgbClr val="21295C"/>
+                </a:solidFill>
+                <a:latin typeface="DejaVu Sans"/>
+              </a:rPr>
+              <a:t>8. Данные безопасны?</a:t>
+            </a:r>
+          </a:p>
+        </p:txBody>
+      </p:sp>
+      <p:sp>
+        <p:nvSpPr>
+          <p:cNvPr id="25" name="TextBox 24"/>
           <p:cNvSpPr txBox="1"/>
           <p:nvPr/>
         </p:nvSpPr>
@@ -52852,7 +52386,7 @@
                 </a:solidFill>
                 <a:latin typeface="DejaVu Sans"/>
               </a:rPr>
-              <a:t>AI меняет стоимость и доверие каждой стрелки петли — но не одинаково</a:t>
+              <a:t>ИИ меняет стоимость и доверие каждой стрелки петли — но не одинаково</a:t>
             </a:r>
           </a:p>
         </p:txBody>
@@ -53389,7 +52923,7 @@
                 </a:solidFill>
                 <a:latin typeface="DejaVu Sans"/>
               </a:rPr>
-              <a:t>Мета-паттерн, повторяется в каждом из 6 разделов: у каждой стрелки есть классическая дисциплина — AI её не отменяет, а меняет её стоимость и требуемую степень проверки.</a:t>
+              <a:t>Мета-паттерн, повторяется в каждом из 6 разделов: у каждой стрелки есть классическая дисциплина — ИИ её не отменяет, а меняет её стоимость и требуемую степень проверки.</a:t>
             </a:r>
           </a:p>
         </p:txBody>
@@ -53698,17 +53232,58 @@
       </p:sp>
       <p:sp>
         <p:nvSpPr>
-          <p:cNvPr id="6" name="Rectangle 5"/>
+          <p:cNvPr id="6" name="TextBox 5"/>
+          <p:cNvSpPr txBox="1"/>
+          <p:nvPr/>
+        </p:nvSpPr>
+        <p:spPr>
+          <a:xfrm>
+            <a:off x="685800" y="2395728"/>
+            <a:ext cx="6675120" cy="1600200"/>
+          </a:xfrm>
+          <a:prstGeom prst="rect">
+            <a:avLst/>
+          </a:prstGeom>
+          <a:noFill/>
+        </p:spPr>
+        <p:txBody>
+          <a:bodyPr wrap="square" lIns="0" rIns="0" tIns="0" bIns="0" anchor="t">
+            <a:spAutoFit/>
+          </a:bodyPr>
+          <a:lstStyle/>
+          <a:p>
+            <a:pPr algn="l">
+              <a:lnSpc>
+                <a:spcPct val="108000"/>
+              </a:lnSpc>
+            </a:pPr>
+            <a:r>
+              <a:rPr sz="3000" b="1" i="0">
+                <a:solidFill>
+                  <a:srgbClr val="21295C"/>
+                </a:solidFill>
+                <a:latin typeface="DejaVu Sans"/>
+              </a:rPr>
+              <a:t>Исследование — намерение и гипотеза</a:t>
+            </a:r>
+          </a:p>
+        </p:txBody>
+      </p:sp>
+      <p:sp>
+        <p:nvSpPr>
+          <p:cNvPr id="7" name="Rounded Rectangle 6"/>
           <p:cNvSpPr/>
           <p:nvPr/>
         </p:nvSpPr>
         <p:spPr>
           <a:xfrm>
-            <a:off x="713232" y="1993392"/>
-            <a:ext cx="640080" cy="45720"/>
-          </a:xfrm>
-          <a:prstGeom prst="rect">
-            <a:avLst/>
+            <a:off x="713232" y="3840480"/>
+            <a:ext cx="3291840" cy="384048"/>
+          </a:xfrm>
+          <a:prstGeom prst="roundRect">
+            <a:avLst>
+              <a:gd name="adj" fmla="val 50000"/>
+            </a:avLst>
           </a:prstGeom>
           <a:solidFill>
             <a:srgbClr val="F0AB00"/>
@@ -53733,102 +53308,17 @@
           </a:fontRef>
         </p:style>
         <p:txBody>
-          <a:bodyPr rtlCol="0" anchor="ctr"/>
+          <a:bodyPr rtlCol="0" anchor="ctr" lIns="45720" rIns="45720" tIns="18288" bIns="18288" wrap="none"/>
           <a:lstStyle/>
           <a:p>
             <a:pPr algn="ctr"/>
-          </a:p>
-        </p:txBody>
-      </p:sp>
-      <p:sp>
-        <p:nvSpPr>
-          <p:cNvPr id="7" name="TextBox 6"/>
-          <p:cNvSpPr txBox="1"/>
-          <p:nvPr/>
-        </p:nvSpPr>
-        <p:spPr>
-          <a:xfrm>
-            <a:off x="685800" y="2331720"/>
-            <a:ext cx="6675120" cy="1600200"/>
-          </a:xfrm>
-          <a:prstGeom prst="rect">
-            <a:avLst/>
-          </a:prstGeom>
-          <a:noFill/>
-        </p:spPr>
-        <p:txBody>
-          <a:bodyPr wrap="square" lIns="0" rIns="0" tIns="0" bIns="0" anchor="t">
-            <a:spAutoFit/>
-          </a:bodyPr>
-          <a:lstStyle/>
-          <a:p>
-            <a:pPr algn="l">
-              <a:lnSpc>
-                <a:spcPct val="108000"/>
-              </a:lnSpc>
-            </a:pPr>
-            <a:r>
-              <a:rPr sz="3000" b="1" i="0">
+            <a:r>
+              <a:rPr sz="1250" b="1">
                 <a:solidFill>
                   <a:srgbClr val="21295C"/>
                 </a:solidFill>
                 <a:latin typeface="DejaVu Sans"/>
               </a:rPr>
-              <a:t>Исследование — намерение и гипотеза</a:t>
-            </a:r>
-          </a:p>
-        </p:txBody>
-      </p:sp>
-      <p:sp>
-        <p:nvSpPr>
-          <p:cNvPr id="8" name="Rounded Rectangle 7"/>
-          <p:cNvSpPr/>
-          <p:nvPr/>
-        </p:nvSpPr>
-        <p:spPr>
-          <a:xfrm>
-            <a:off x="713232" y="3840480"/>
-            <a:ext cx="3291840" cy="384048"/>
-          </a:xfrm>
-          <a:prstGeom prst="roundRect">
-            <a:avLst>
-              <a:gd name="adj" fmla="val 50000"/>
-            </a:avLst>
-          </a:prstGeom>
-          <a:solidFill>
-            <a:srgbClr val="F0AB00"/>
-          </a:solidFill>
-          <a:ln>
-            <a:noFill/>
-          </a:ln>
-          <a:effectLst/>
-        </p:spPr>
-        <p:style>
-          <a:lnRef idx="1">
-            <a:schemeClr val="accent1"/>
-          </a:lnRef>
-          <a:fillRef idx="3">
-            <a:schemeClr val="accent1"/>
-          </a:fillRef>
-          <a:effectRef idx="2">
-            <a:schemeClr val="accent1"/>
-          </a:effectRef>
-          <a:fontRef idx="minor">
-            <a:schemeClr val="lt1"/>
-          </a:fontRef>
-        </p:style>
-        <p:txBody>
-          <a:bodyPr rtlCol="0" anchor="ctr" lIns="45720" rIns="45720" tIns="18288" bIns="18288" wrap="none"/>
-          <a:lstStyle/>
-          <a:p>
-            <a:pPr algn="ctr"/>
-            <a:r>
-              <a:rPr sz="1250" b="1">
-                <a:solidFill>
-                  <a:srgbClr val="21295C"/>
-                </a:solidFill>
-                <a:latin typeface="DejaVu Sans"/>
-              </a:rPr>
               <a:t>2 базы · 3 провала</a:t>
             </a:r>
           </a:p>
@@ -53836,7 +53326,7 @@
       </p:sp>
       <p:sp>
         <p:nvSpPr>
-          <p:cNvPr id="9" name="TextBox 8"/>
+          <p:cNvPr id="8" name="TextBox 7"/>
           <p:cNvSpPr txBox="1"/>
           <p:nvPr/>
         </p:nvSpPr>
@@ -53875,7 +53365,7 @@
       </p:sp>
       <p:sp>
         <p:nvSpPr>
-          <p:cNvPr id="10" name="Rounded Rectangle 9"/>
+          <p:cNvPr id="9" name="Rounded Rectangle 8"/>
           <p:cNvSpPr/>
           <p:nvPr/>
         </p:nvSpPr>
@@ -53923,7 +53413,7 @@
       </p:sp>
       <p:sp>
         <p:nvSpPr>
-          <p:cNvPr id="11" name="TextBox 10"/>
+          <p:cNvPr id="10" name="TextBox 9"/>
           <p:cNvSpPr txBox="1"/>
           <p:nvPr/>
         </p:nvSpPr>
@@ -53962,7 +53452,7 @@
       </p:sp>
       <p:sp>
         <p:nvSpPr>
-          <p:cNvPr id="12" name="TextBox 11"/>
+          <p:cNvPr id="11" name="TextBox 10"/>
           <p:cNvSpPr txBox="1"/>
           <p:nvPr/>
         </p:nvSpPr>
@@ -54001,7 +53491,7 @@
       </p:sp>
       <p:sp>
         <p:nvSpPr>
-          <p:cNvPr id="13" name="Rounded Rectangle 12"/>
+          <p:cNvPr id="12" name="Rounded Rectangle 11"/>
           <p:cNvSpPr/>
           <p:nvPr/>
         </p:nvSpPr>
@@ -54049,7 +53539,7 @@
       </p:sp>
       <p:sp>
         <p:nvSpPr>
-          <p:cNvPr id="14" name="TextBox 13"/>
+          <p:cNvPr id="13" name="TextBox 12"/>
           <p:cNvSpPr txBox="1"/>
           <p:nvPr/>
         </p:nvSpPr>
@@ -54088,7 +53578,7 @@
       </p:sp>
       <p:sp>
         <p:nvSpPr>
-          <p:cNvPr id="15" name="TextBox 14"/>
+          <p:cNvPr id="14" name="TextBox 13"/>
           <p:cNvSpPr txBox="1"/>
           <p:nvPr/>
         </p:nvSpPr>
@@ -54127,7 +53617,7 @@
       </p:sp>
       <p:sp>
         <p:nvSpPr>
-          <p:cNvPr id="16" name="Rounded Rectangle 15"/>
+          <p:cNvPr id="15" name="Rounded Rectangle 14"/>
           <p:cNvSpPr/>
           <p:nvPr/>
         </p:nvSpPr>
@@ -54175,7 +53665,7 @@
       </p:sp>
       <p:sp>
         <p:nvSpPr>
-          <p:cNvPr id="17" name="TextBox 16"/>
+          <p:cNvPr id="16" name="TextBox 15"/>
           <p:cNvSpPr txBox="1"/>
           <p:nvPr/>
         </p:nvSpPr>
@@ -54214,7 +53704,7 @@
       </p:sp>
       <p:sp>
         <p:nvSpPr>
-          <p:cNvPr id="18" name="TextBox 17"/>
+          <p:cNvPr id="17" name="TextBox 16"/>
           <p:cNvSpPr txBox="1"/>
           <p:nvPr/>
         </p:nvSpPr>
@@ -54253,7 +53743,7 @@
       </p:sp>
       <p:sp>
         <p:nvSpPr>
-          <p:cNvPr id="19" name="Rounded Rectangle 18"/>
+          <p:cNvPr id="18" name="Rounded Rectangle 17"/>
           <p:cNvSpPr/>
           <p:nvPr/>
         </p:nvSpPr>
@@ -54301,7 +53791,7 @@
       </p:sp>
       <p:sp>
         <p:nvSpPr>
-          <p:cNvPr id="20" name="TextBox 19"/>
+          <p:cNvPr id="19" name="TextBox 18"/>
           <p:cNvSpPr txBox="1"/>
           <p:nvPr/>
         </p:nvSpPr>
@@ -54340,7 +53830,7 @@
       </p:sp>
       <p:sp>
         <p:nvSpPr>
-          <p:cNvPr id="21" name="TextBox 20"/>
+          <p:cNvPr id="20" name="TextBox 19"/>
           <p:cNvSpPr txBox="1"/>
           <p:nvPr/>
         </p:nvSpPr>
@@ -54379,7 +53869,7 @@
       </p:sp>
       <p:sp>
         <p:nvSpPr>
-          <p:cNvPr id="22" name="Rounded Rectangle 21"/>
+          <p:cNvPr id="21" name="Rounded Rectangle 20"/>
           <p:cNvSpPr/>
           <p:nvPr/>
         </p:nvSpPr>
@@ -54427,7 +53917,7 @@
       </p:sp>
       <p:sp>
         <p:nvSpPr>
-          <p:cNvPr id="23" name="TextBox 22"/>
+          <p:cNvPr id="22" name="TextBox 21"/>
           <p:cNvSpPr txBox="1"/>
           <p:nvPr/>
         </p:nvSpPr>
@@ -54466,7 +53956,7 @@
       </p:sp>
       <p:sp>
         <p:nvSpPr>
-          <p:cNvPr id="24" name="TextBox 23"/>
+          <p:cNvPr id="23" name="TextBox 22"/>
           <p:cNvSpPr txBox="1"/>
           <p:nvPr/>
         </p:nvSpPr>
@@ -54505,7 +53995,7 @@
       </p:sp>
       <p:sp>
         <p:nvSpPr>
-          <p:cNvPr id="25" name="Rounded Rectangle 24"/>
+          <p:cNvPr id="24" name="Rounded Rectangle 23"/>
           <p:cNvSpPr/>
           <p:nvPr/>
         </p:nvSpPr>
@@ -54553,7 +54043,7 @@
       </p:sp>
       <p:sp>
         <p:nvSpPr>
-          <p:cNvPr id="26" name="TextBox 25"/>
+          <p:cNvPr id="25" name="TextBox 24"/>
           <p:cNvSpPr txBox="1"/>
           <p:nvPr/>
         </p:nvSpPr>
@@ -54592,7 +54082,7 @@
       </p:sp>
       <p:sp>
         <p:nvSpPr>
-          <p:cNvPr id="27" name="TextBox 26"/>
+          <p:cNvPr id="26" name="TextBox 25"/>
           <p:cNvSpPr txBox="1"/>
           <p:nvPr/>
         </p:nvSpPr>
@@ -54631,7 +54121,7 @@
       </p:sp>
       <p:sp>
         <p:nvSpPr>
-          <p:cNvPr id="28" name="Rounded Rectangle 27"/>
+          <p:cNvPr id="27" name="Rounded Rectangle 26"/>
           <p:cNvSpPr/>
           <p:nvPr/>
         </p:nvSpPr>
@@ -54679,7 +54169,7 @@
       </p:sp>
       <p:sp>
         <p:nvSpPr>
-          <p:cNvPr id="29" name="TextBox 28"/>
+          <p:cNvPr id="28" name="TextBox 27"/>
           <p:cNvSpPr txBox="1"/>
           <p:nvPr/>
         </p:nvSpPr>
@@ -54718,7 +54208,7 @@
       </p:sp>
       <p:sp>
         <p:nvSpPr>
-          <p:cNvPr id="30" name="TextBox 29"/>
+          <p:cNvPr id="29" name="TextBox 28"/>
           <p:cNvSpPr txBox="1"/>
           <p:nvPr/>
         </p:nvSpPr>
@@ -54757,7 +54247,7 @@
       </p:sp>
       <p:sp>
         <p:nvSpPr>
-          <p:cNvPr id="31" name="TextBox 30"/>
+          <p:cNvPr id="30" name="TextBox 29"/>
           <p:cNvSpPr txBox="1"/>
           <p:nvPr/>
         </p:nvSpPr>
@@ -55359,7 +54849,7 @@
                 </a:solidFill>
                 <a:latin typeface="DejaVu Sans"/>
               </a:rPr>
-              <a:t>Внутри офиса нет фактов — факты снаружи. Записываете гипотезу, выходите к людям, проверяете. AI ускоряет сбор, но не заменяет разговор с настоящим человеком.</a:t>
+              <a:t>Внутри офиса нет фактов — факты снаружи. Записываете гипотезу, выходите к людям, проверяете. ИИ ускоряет сбор, но не заменяет разговор с настоящим человеком.</a:t>
             </a:r>
           </a:p>
         </p:txBody>

--- a/library/lectures/lec-05/rendered/lec-05.pptx
+++ b/library/lectures/lec-05/rendered/lec-05.pptx
@@ -8552,7 +8552,7 @@
       </p:sp>
       <p:pic>
         <p:nvPicPr>
-          <p:cNvPr id="14" name="Picture 13" descr="s01-this-is-fine.jpg"/>
+          <p:cNvPr id="14" name="Picture 13" descr="s01-spiderman-pointing.jpg"/>
           <p:cNvPicPr>
             <a:picLocks noChangeAspect="1"/>
           </p:cNvPicPr>
@@ -8566,8 +8566,8 @@
         </p:blipFill>
         <p:spPr>
           <a:xfrm>
-            <a:off x="4873752" y="1991358"/>
-            <a:ext cx="6665976" cy="3241044"/>
+            <a:off x="4873752" y="1737074"/>
+            <a:ext cx="6665976" cy="3749612"/>
           </a:xfrm>
           <a:prstGeom prst="rect">
             <a:avLst/>
@@ -11078,7 +11078,7 @@
       </p:sp>
       <p:pic>
         <p:nvPicPr>
-          <p:cNvPr id="4" name="Picture 3" descr="s12-pikachu.jpg"/>
+          <p:cNvPr id="4" name="Picture 3" descr="s12-trade-offer.jpg"/>
           <p:cNvPicPr>
             <a:picLocks noChangeAspect="1"/>
           </p:cNvPicPr>
@@ -11092,8 +11092,8 @@
         </p:blipFill>
         <p:spPr>
           <a:xfrm>
-            <a:off x="1094015" y="1545336"/>
-            <a:ext cx="2978329" cy="2624328"/>
+            <a:off x="1580052" y="1545336"/>
+            <a:ext cx="2006256" cy="2624328"/>
           </a:xfrm>
           <a:prstGeom prst="rect">
             <a:avLst/>
@@ -14319,7 +14319,7 @@
         <p:spPr>
           <a:xfrm>
             <a:off x="502920" y="1554480"/>
-            <a:ext cx="2514600" cy="3611880"/>
+            <a:ext cx="2514600" cy="4709160"/>
           </a:xfrm>
           <a:prstGeom prst="roundRect">
             <a:avLst>
@@ -14374,7 +14374,7 @@
         </p:blipFill>
         <p:spPr>
           <a:xfrm>
-            <a:off x="1234440" y="2331720"/>
+            <a:off x="1234440" y="3249777"/>
             <a:ext cx="1051560" cy="1051560"/>
           </a:xfrm>
           <a:prstGeom prst="rect">
@@ -14390,7 +14390,7 @@
         </p:nvSpPr>
         <p:spPr>
           <a:xfrm>
-            <a:off x="777240" y="4160520"/>
+            <a:off x="777240" y="5715000"/>
             <a:ext cx="1965960" cy="402336"/>
           </a:xfrm>
           <a:prstGeom prst="roundRect">
@@ -14446,11 +14446,11 @@
         <p:spPr>
           <a:xfrm>
             <a:off x="3337560" y="1554480"/>
-            <a:ext cx="8366760" cy="1078992"/>
+            <a:ext cx="8366760" cy="1417320"/>
           </a:xfrm>
           <a:prstGeom prst="roundRect">
             <a:avLst>
-              <a:gd name="adj" fmla="val 22000"/>
+              <a:gd name="adj" fmla="val 21505"/>
             </a:avLst>
           </a:prstGeom>
           <a:solidFill>
@@ -14493,8 +14493,8 @@
         </p:nvSpPr>
         <p:spPr>
           <a:xfrm>
-            <a:off x="3593591" y="1673352"/>
-            <a:ext cx="7854696" cy="292608"/>
+            <a:off x="3593591" y="1700784"/>
+            <a:ext cx="7854696" cy="310896"/>
           </a:xfrm>
           <a:prstGeom prst="rect">
             <a:avLst/>
@@ -14513,7 +14513,7 @@
               </a:lnSpc>
             </a:pPr>
             <a:r>
-              <a:rPr sz="1400" b="1" i="0">
+              <a:rPr sz="1500" b="1" i="0">
                 <a:solidFill>
                   <a:srgbClr val="F0AB00"/>
                 </a:solidFill>
@@ -14532,8 +14532,8 @@
         </p:nvSpPr>
         <p:spPr>
           <a:xfrm>
-            <a:off x="3593591" y="1993391"/>
-            <a:ext cx="7854696" cy="548640"/>
+            <a:off x="3593591" y="2066543"/>
+            <a:ext cx="7854696" cy="758952"/>
           </a:xfrm>
           <a:prstGeom prst="rect">
             <a:avLst/>
@@ -14548,11 +14548,11 @@
           <a:p>
             <a:pPr algn="l">
               <a:lnSpc>
-                <a:spcPct val="112000"/>
-              </a:lnSpc>
-            </a:pPr>
-            <a:r>
-              <a:rPr sz="1250" b="0" i="0">
+                <a:spcPct val="122000"/>
+              </a:lnSpc>
+            </a:pPr>
+            <a:r>
+              <a:rPr sz="1350" b="0" i="0">
                 <a:solidFill>
                   <a:srgbClr val="21295C"/>
                 </a:solidFill>
@@ -14571,12 +14571,12 @@
         </p:nvSpPr>
         <p:spPr>
           <a:xfrm>
-            <a:off x="3337560" y="2816352"/>
-            <a:ext cx="8366760" cy="1078992"/>
+            <a:off x="3337560" y="3200400"/>
+            <a:ext cx="8366760" cy="1417320"/>
           </a:xfrm>
           <a:prstGeom prst="roundRect">
             <a:avLst>
-              <a:gd name="adj" fmla="val 22000"/>
+              <a:gd name="adj" fmla="val 21505"/>
             </a:avLst>
           </a:prstGeom>
           <a:solidFill>
@@ -14619,8 +14619,8 @@
         </p:nvSpPr>
         <p:spPr>
           <a:xfrm>
-            <a:off x="3593591" y="2935224"/>
-            <a:ext cx="7854696" cy="292608"/>
+            <a:off x="3593591" y="3346704"/>
+            <a:ext cx="7854696" cy="310896"/>
           </a:xfrm>
           <a:prstGeom prst="rect">
             <a:avLst/>
@@ -14639,7 +14639,7 @@
               </a:lnSpc>
             </a:pPr>
             <a:r>
-              <a:rPr sz="1400" b="1" i="0">
+              <a:rPr sz="1500" b="1" i="0">
                 <a:solidFill>
                   <a:srgbClr val="065A82"/>
                 </a:solidFill>
@@ -14658,8 +14658,8 @@
         </p:nvSpPr>
         <p:spPr>
           <a:xfrm>
-            <a:off x="3593591" y="3255264"/>
-            <a:ext cx="7854696" cy="548640"/>
+            <a:off x="3593591" y="3712464"/>
+            <a:ext cx="7854696" cy="758952"/>
           </a:xfrm>
           <a:prstGeom prst="rect">
             <a:avLst/>
@@ -14674,11 +14674,11 @@
           <a:p>
             <a:pPr algn="l">
               <a:lnSpc>
-                <a:spcPct val="112000"/>
-              </a:lnSpc>
-            </a:pPr>
-            <a:r>
-              <a:rPr sz="1250" b="0" i="0">
+                <a:spcPct val="122000"/>
+              </a:lnSpc>
+            </a:pPr>
+            <a:r>
+              <a:rPr sz="1350" b="0" i="0">
                 <a:solidFill>
                   <a:srgbClr val="21295C"/>
                 </a:solidFill>
@@ -14697,12 +14697,12 @@
         </p:nvSpPr>
         <p:spPr>
           <a:xfrm>
-            <a:off x="3337560" y="4078224"/>
-            <a:ext cx="8366760" cy="1078992"/>
+            <a:off x="3337560" y="4846320"/>
+            <a:ext cx="8366760" cy="1417320"/>
           </a:xfrm>
           <a:prstGeom prst="roundRect">
             <a:avLst>
-              <a:gd name="adj" fmla="val 22000"/>
+              <a:gd name="adj" fmla="val 21505"/>
             </a:avLst>
           </a:prstGeom>
           <a:solidFill>
@@ -14745,8 +14745,8 @@
         </p:nvSpPr>
         <p:spPr>
           <a:xfrm>
-            <a:off x="3593591" y="4197096"/>
-            <a:ext cx="7854696" cy="292608"/>
+            <a:off x="3593591" y="4992624"/>
+            <a:ext cx="7854696" cy="310896"/>
           </a:xfrm>
           <a:prstGeom prst="rect">
             <a:avLst/>
@@ -14765,7 +14765,7 @@
               </a:lnSpc>
             </a:pPr>
             <a:r>
-              <a:rPr sz="1400" b="1" i="0">
+              <a:rPr sz="1500" b="1" i="0">
                 <a:solidFill>
                   <a:srgbClr val="065A82"/>
                 </a:solidFill>
@@ -14784,8 +14784,8 @@
         </p:nvSpPr>
         <p:spPr>
           <a:xfrm>
-            <a:off x="3593591" y="4517136"/>
-            <a:ext cx="7854696" cy="548640"/>
+            <a:off x="3593591" y="5358383"/>
+            <a:ext cx="7854696" cy="758952"/>
           </a:xfrm>
           <a:prstGeom prst="rect">
             <a:avLst/>
@@ -14800,11 +14800,11 @@
           <a:p>
             <a:pPr algn="l">
               <a:lnSpc>
-                <a:spcPct val="112000"/>
-              </a:lnSpc>
-            </a:pPr>
-            <a:r>
-              <a:rPr sz="1250" b="0" i="0">
+                <a:spcPct val="122000"/>
+              </a:lnSpc>
+            </a:pPr>
+            <a:r>
+              <a:rPr sz="1350" b="0" i="0">
                 <a:solidFill>
                   <a:srgbClr val="21295C"/>
                 </a:solidFill>
@@ -14973,8 +14973,63 @@
         </p:nvSpPr>
         <p:spPr>
           <a:xfrm>
-            <a:off x="2011680" y="2148839"/>
-            <a:ext cx="2103120" cy="365760"/>
+            <a:off x="1371600" y="2468879"/>
+            <a:ext cx="3383280" cy="640080"/>
+          </a:xfrm>
+          <a:prstGeom prst="rect">
+            <a:avLst/>
+          </a:prstGeom>
+          <a:noFill/>
+        </p:spPr>
+        <p:txBody>
+          <a:bodyPr wrap="square" lIns="0" rIns="0" tIns="0" bIns="0" anchor="ctr">
+            <a:spAutoFit/>
+          </a:bodyPr>
+          <a:lstStyle/>
+          <a:p>
+            <a:pPr algn="ctr">
+              <a:lnSpc>
+                <a:spcPct val="115000"/>
+              </a:lnSpc>
+            </a:pPr>
+            <a:r>
+              <a:rPr sz="1350" b="1" i="0">
+                <a:solidFill>
+                  <a:srgbClr val="065A82"/>
+                </a:solidFill>
+                <a:latin typeface="DejaVu Sans"/>
+              </a:rPr>
+              <a:t>Правильная</a:t>
+            </a:r>
+          </a:p>
+          <a:p>
+            <a:pPr algn="ctr">
+              <a:lnSpc>
+                <a:spcPct val="115000"/>
+              </a:lnSpc>
+            </a:pPr>
+            <a:r>
+              <a:rPr sz="1350" b="1" i="0">
+                <a:solidFill>
+                  <a:srgbClr val="065A82"/>
+                </a:solidFill>
+                <a:latin typeface="DejaVu Sans"/>
+              </a:rPr>
+              <a:t>проблема</a:t>
+            </a:r>
+          </a:p>
+        </p:txBody>
+      </p:sp>
+      <p:sp>
+        <p:nvSpPr>
+          <p:cNvPr id="5" name="TextBox 4"/>
+          <p:cNvSpPr txBox="1"/>
+          <p:nvPr/>
+        </p:nvSpPr>
+        <p:spPr>
+          <a:xfrm>
+            <a:off x="1508760" y="1307591"/>
+            <a:ext cx="3108960" cy="502920"/>
           </a:xfrm>
           <a:prstGeom prst="rect">
             <a:avLst/>
@@ -14989,7 +15044,7 @@
           <a:p>
             <a:pPr algn="ctr">
               <a:lnSpc>
-                <a:spcPct val="115000"/>
+                <a:spcPct val="105000"/>
               </a:lnSpc>
             </a:pPr>
             <a:r>
@@ -14999,85 +15054,53 @@
                 </a:solidFill>
                 <a:latin typeface="DejaVu Sans"/>
               </a:rPr>
-              <a:t>Расширяем</a:t>
-            </a:r>
-          </a:p>
+              <a:t>Расширяем проблему</a:t>
+            </a:r>
+          </a:p>
+        </p:txBody>
+      </p:sp>
+      <p:sp>
+        <p:nvSpPr>
+          <p:cNvPr id="6" name="TextBox 5"/>
+          <p:cNvSpPr txBox="1"/>
+          <p:nvPr/>
+        </p:nvSpPr>
+        <p:spPr>
+          <a:xfrm>
+            <a:off x="1508760" y="3776472"/>
+            <a:ext cx="3108960" cy="502920"/>
+          </a:xfrm>
+          <a:prstGeom prst="rect">
+            <a:avLst/>
+          </a:prstGeom>
+          <a:noFill/>
+        </p:spPr>
+        <p:txBody>
+          <a:bodyPr wrap="square" lIns="0" rIns="0" tIns="0" bIns="0" anchor="t">
+            <a:spAutoFit/>
+          </a:bodyPr>
+          <a:lstStyle/>
           <a:p>
             <a:pPr algn="ctr">
               <a:lnSpc>
-                <a:spcPct val="115000"/>
+                <a:spcPct val="105000"/>
               </a:lnSpc>
             </a:pPr>
             <a:r>
               <a:rPr sz="1250" b="1" i="0">
                 <a:solidFill>
-                  <a:srgbClr val="065A82"/>
-                </a:solidFill>
-                <a:latin typeface="DejaVu Sans"/>
-              </a:rPr>
-              <a:t>проблему</a:t>
-            </a:r>
-          </a:p>
-        </p:txBody>
-      </p:sp>
-      <p:sp>
-        <p:nvSpPr>
-          <p:cNvPr id="5" name="TextBox 4"/>
-          <p:cNvSpPr txBox="1"/>
-          <p:nvPr/>
-        </p:nvSpPr>
-        <p:spPr>
-          <a:xfrm>
-            <a:off x="2011680" y="3063239"/>
-            <a:ext cx="2103120" cy="365760"/>
-          </a:xfrm>
-          <a:prstGeom prst="rect">
-            <a:avLst/>
-          </a:prstGeom>
-          <a:noFill/>
-        </p:spPr>
-        <p:txBody>
-          <a:bodyPr wrap="square" lIns="0" rIns="0" tIns="0" bIns="0" anchor="t">
-            <a:spAutoFit/>
-          </a:bodyPr>
-          <a:lstStyle/>
-          <a:p>
-            <a:pPr algn="ctr">
-              <a:lnSpc>
-                <a:spcPct val="115000"/>
-              </a:lnSpc>
-            </a:pPr>
-            <a:r>
-              <a:rPr sz="1250" b="1" i="0">
-                <a:solidFill>
                   <a:srgbClr val="21295C"/>
                 </a:solidFill>
                 <a:latin typeface="DejaVu Sans"/>
               </a:rPr>
-              <a:t>Сужаем:</a:t>
-            </a:r>
-          </a:p>
-          <a:p>
-            <a:pPr algn="ctr">
-              <a:lnSpc>
-                <a:spcPct val="115000"/>
-              </a:lnSpc>
-            </a:pPr>
-            <a:r>
-              <a:rPr sz="1250" b="1" i="0">
-                <a:solidFill>
-                  <a:srgbClr val="21295C"/>
-                </a:solidFill>
-                <a:latin typeface="DejaVu Sans"/>
-              </a:rPr>
-              <a:t>одна проблема</a:t>
-            </a:r>
-          </a:p>
-        </p:txBody>
-      </p:sp>
-      <p:sp>
-        <p:nvSpPr>
-          <p:cNvPr id="6" name="Diamond 5"/>
+              <a:t>Сужаем: одна проблема</a:t>
+            </a:r>
+          </a:p>
+        </p:txBody>
+      </p:sp>
+      <p:sp>
+        <p:nvSpPr>
+          <p:cNvPr id="7" name="Diamond 6"/>
           <p:cNvSpPr/>
           <p:nvPr/>
         </p:nvSpPr>
@@ -15123,14 +15146,69 @@
       </p:sp>
       <p:sp>
         <p:nvSpPr>
-          <p:cNvPr id="7" name="TextBox 6"/>
-          <p:cNvSpPr txBox="1"/>
-          <p:nvPr/>
-        </p:nvSpPr>
-        <p:spPr>
-          <a:xfrm>
-            <a:off x="5943600" y="2148839"/>
-            <a:ext cx="2103120" cy="365760"/>
+          <p:cNvPr id="8" name="TextBox 7"/>
+          <p:cNvSpPr txBox="1"/>
+          <p:nvPr/>
+        </p:nvSpPr>
+        <p:spPr>
+          <a:xfrm>
+            <a:off x="5303520" y="2468879"/>
+            <a:ext cx="3383280" cy="640080"/>
+          </a:xfrm>
+          <a:prstGeom prst="rect">
+            <a:avLst/>
+          </a:prstGeom>
+          <a:noFill/>
+        </p:spPr>
+        <p:txBody>
+          <a:bodyPr wrap="square" lIns="0" rIns="0" tIns="0" bIns="0" anchor="ctr">
+            <a:spAutoFit/>
+          </a:bodyPr>
+          <a:lstStyle/>
+          <a:p>
+            <a:pPr algn="ctr">
+              <a:lnSpc>
+                <a:spcPct val="115000"/>
+              </a:lnSpc>
+            </a:pPr>
+            <a:r>
+              <a:rPr sz="1350" b="1" i="0">
+                <a:solidFill>
+                  <a:srgbClr val="028090"/>
+                </a:solidFill>
+                <a:latin typeface="DejaVu Sans"/>
+              </a:rPr>
+              <a:t>Правильное</a:t>
+            </a:r>
+          </a:p>
+          <a:p>
+            <a:pPr algn="ctr">
+              <a:lnSpc>
+                <a:spcPct val="115000"/>
+              </a:lnSpc>
+            </a:pPr>
+            <a:r>
+              <a:rPr sz="1350" b="1" i="0">
+                <a:solidFill>
+                  <a:srgbClr val="028090"/>
+                </a:solidFill>
+                <a:latin typeface="DejaVu Sans"/>
+              </a:rPr>
+              <a:t>решение</a:t>
+            </a:r>
+          </a:p>
+        </p:txBody>
+      </p:sp>
+      <p:sp>
+        <p:nvSpPr>
+          <p:cNvPr id="9" name="TextBox 8"/>
+          <p:cNvSpPr txBox="1"/>
+          <p:nvPr/>
+        </p:nvSpPr>
+        <p:spPr>
+          <a:xfrm>
+            <a:off x="5440680" y="1307591"/>
+            <a:ext cx="3108960" cy="502920"/>
           </a:xfrm>
           <a:prstGeom prst="rect">
             <a:avLst/>
@@ -15145,7 +15223,7 @@
           <a:p>
             <a:pPr algn="ctr">
               <a:lnSpc>
-                <a:spcPct val="115000"/>
+                <a:spcPct val="105000"/>
               </a:lnSpc>
             </a:pPr>
             <a:r>
@@ -15155,156 +15233,46 @@
                 </a:solidFill>
                 <a:latin typeface="DejaVu Sans"/>
               </a:rPr>
-              <a:t>Расширяем</a:t>
-            </a:r>
-          </a:p>
+              <a:t>Расширяем решение</a:t>
+            </a:r>
+          </a:p>
+        </p:txBody>
+      </p:sp>
+      <p:sp>
+        <p:nvSpPr>
+          <p:cNvPr id="10" name="TextBox 9"/>
+          <p:cNvSpPr txBox="1"/>
+          <p:nvPr/>
+        </p:nvSpPr>
+        <p:spPr>
+          <a:xfrm>
+            <a:off x="5440680" y="3776472"/>
+            <a:ext cx="3108960" cy="502920"/>
+          </a:xfrm>
+          <a:prstGeom prst="rect">
+            <a:avLst/>
+          </a:prstGeom>
+          <a:noFill/>
+        </p:spPr>
+        <p:txBody>
+          <a:bodyPr wrap="square" lIns="0" rIns="0" tIns="0" bIns="0" anchor="t">
+            <a:spAutoFit/>
+          </a:bodyPr>
+          <a:lstStyle/>
           <a:p>
             <a:pPr algn="ctr">
               <a:lnSpc>
-                <a:spcPct val="115000"/>
+                <a:spcPct val="105000"/>
               </a:lnSpc>
             </a:pPr>
             <a:r>
               <a:rPr sz="1250" b="1" i="0">
                 <a:solidFill>
-                  <a:srgbClr val="028090"/>
-                </a:solidFill>
-                <a:latin typeface="DejaVu Sans"/>
-              </a:rPr>
-              <a:t>решение</a:t>
-            </a:r>
-          </a:p>
-        </p:txBody>
-      </p:sp>
-      <p:sp>
-        <p:nvSpPr>
-          <p:cNvPr id="8" name="TextBox 7"/>
-          <p:cNvSpPr txBox="1"/>
-          <p:nvPr/>
-        </p:nvSpPr>
-        <p:spPr>
-          <a:xfrm>
-            <a:off x="5943600" y="3063239"/>
-            <a:ext cx="2103120" cy="365760"/>
-          </a:xfrm>
-          <a:prstGeom prst="rect">
-            <a:avLst/>
-          </a:prstGeom>
-          <a:noFill/>
-        </p:spPr>
-        <p:txBody>
-          <a:bodyPr wrap="square" lIns="0" rIns="0" tIns="0" bIns="0" anchor="t">
-            <a:spAutoFit/>
-          </a:bodyPr>
-          <a:lstStyle/>
-          <a:p>
-            <a:pPr algn="ctr">
-              <a:lnSpc>
-                <a:spcPct val="115000"/>
-              </a:lnSpc>
-            </a:pPr>
-            <a:r>
-              <a:rPr sz="1250" b="1" i="0">
-                <a:solidFill>
                   <a:srgbClr val="21295C"/>
                 </a:solidFill>
                 <a:latin typeface="DejaVu Sans"/>
               </a:rPr>
-              <a:t>Сужаем:</a:t>
-            </a:r>
-          </a:p>
-          <a:p>
-            <a:pPr algn="ctr">
-              <a:lnSpc>
-                <a:spcPct val="115000"/>
-              </a:lnSpc>
-            </a:pPr>
-            <a:r>
-              <a:rPr sz="1250" b="1" i="0">
-                <a:solidFill>
-                  <a:srgbClr val="21295C"/>
-                </a:solidFill>
-                <a:latin typeface="DejaVu Sans"/>
-              </a:rPr>
-              <a:t>одно решение</a:t>
-            </a:r>
-          </a:p>
-        </p:txBody>
-      </p:sp>
-      <p:sp>
-        <p:nvSpPr>
-          <p:cNvPr id="9" name="TextBox 8"/>
-          <p:cNvSpPr txBox="1"/>
-          <p:nvPr/>
-        </p:nvSpPr>
-        <p:spPr>
-          <a:xfrm>
-            <a:off x="1737360" y="1481328"/>
-            <a:ext cx="2743200" cy="320040"/>
-          </a:xfrm>
-          <a:prstGeom prst="rect">
-            <a:avLst/>
-          </a:prstGeom>
-          <a:noFill/>
-        </p:spPr>
-        <p:txBody>
-          <a:bodyPr wrap="square" lIns="0" rIns="0" tIns="0" bIns="0" anchor="t">
-            <a:spAutoFit/>
-          </a:bodyPr>
-          <a:lstStyle/>
-          <a:p>
-            <a:pPr algn="ctr">
-              <a:lnSpc>
-                <a:spcPct val="115000"/>
-              </a:lnSpc>
-            </a:pPr>
-            <a:r>
-              <a:rPr sz="1300" b="1" i="0">
-                <a:solidFill>
-                  <a:srgbClr val="065A82"/>
-                </a:solidFill>
-                <a:latin typeface="DejaVu Sans"/>
-              </a:rPr>
-              <a:t>Правильная проблема</a:t>
-            </a:r>
-          </a:p>
-        </p:txBody>
-      </p:sp>
-      <p:sp>
-        <p:nvSpPr>
-          <p:cNvPr id="10" name="TextBox 9"/>
-          <p:cNvSpPr txBox="1"/>
-          <p:nvPr/>
-        </p:nvSpPr>
-        <p:spPr>
-          <a:xfrm>
-            <a:off x="5669280" y="1481328"/>
-            <a:ext cx="2743200" cy="320040"/>
-          </a:xfrm>
-          <a:prstGeom prst="rect">
-            <a:avLst/>
-          </a:prstGeom>
-          <a:noFill/>
-        </p:spPr>
-        <p:txBody>
-          <a:bodyPr wrap="square" lIns="0" rIns="0" tIns="0" bIns="0" anchor="t">
-            <a:spAutoFit/>
-          </a:bodyPr>
-          <a:lstStyle/>
-          <a:p>
-            <a:pPr algn="ctr">
-              <a:lnSpc>
-                <a:spcPct val="115000"/>
-              </a:lnSpc>
-            </a:pPr>
-            <a:r>
-              <a:rPr sz="1300" b="1" i="0">
-                <a:solidFill>
-                  <a:srgbClr val="028090"/>
-                </a:solidFill>
-                <a:latin typeface="DejaVu Sans"/>
-              </a:rPr>
-              <a:t>Правильное решение</a:t>
+              <a:t>Сужаем: одно решение</a:t>
             </a:r>
           </a:p>
         </p:txBody>
@@ -15640,11 +15608,11 @@
         <p:spPr>
           <a:xfrm>
             <a:off x="502920" y="1417320"/>
-            <a:ext cx="6172200" cy="3246120"/>
+            <a:ext cx="6172200" cy="4892040"/>
           </a:xfrm>
           <a:prstGeom prst="roundRect">
             <a:avLst>
-              <a:gd name="adj" fmla="val 9389"/>
+              <a:gd name="adj" fmla="val 6230"/>
             </a:avLst>
           </a:prstGeom>
           <a:solidFill>
@@ -16220,12 +16188,12 @@
         </p:nvSpPr>
         <p:spPr>
           <a:xfrm>
-            <a:off x="6903720" y="1417320"/>
-            <a:ext cx="4800600" cy="1737360"/>
+            <a:off x="502920" y="4754880"/>
+            <a:ext cx="6172200" cy="1417320"/>
           </a:xfrm>
           <a:prstGeom prst="roundRect">
             <a:avLst>
-              <a:gd name="adj" fmla="val 17543"/>
+              <a:gd name="adj" fmla="val 21505"/>
             </a:avLst>
           </a:prstGeom>
           <a:solidFill>
@@ -16276,7 +16244,7 @@
         </p:blipFill>
         <p:spPr>
           <a:xfrm>
-            <a:off x="7132320" y="1627632"/>
+            <a:off x="731520" y="4956048"/>
             <a:ext cx="502920" cy="502920"/>
           </a:xfrm>
           <a:prstGeom prst="rect">
@@ -16292,8 +16260,8 @@
         </p:nvSpPr>
         <p:spPr>
           <a:xfrm>
-            <a:off x="7772400" y="1664208"/>
-            <a:ext cx="3749039" cy="365760"/>
+            <a:off x="1417320" y="4974336"/>
+            <a:ext cx="5120640" cy="365760"/>
           </a:xfrm>
           <a:prstGeom prst="rect">
             <a:avLst/>
@@ -16331,8 +16299,8 @@
         </p:nvSpPr>
         <p:spPr>
           <a:xfrm>
-            <a:off x="7132320" y="2240280"/>
-            <a:ext cx="4389120" cy="822960"/>
+            <a:off x="731520" y="5532120"/>
+            <a:ext cx="5715000" cy="548640"/>
           </a:xfrm>
           <a:prstGeom prst="rect">
             <a:avLst/>
@@ -16370,8 +16338,8 @@
         </p:nvSpPr>
         <p:spPr>
           <a:xfrm>
-            <a:off x="6903720" y="3337560"/>
-            <a:ext cx="4800600" cy="1325880"/>
+            <a:off x="6903720" y="1417320"/>
+            <a:ext cx="4800600" cy="960120"/>
           </a:xfrm>
           <a:prstGeom prst="roundRect">
             <a:avLst>
@@ -16418,8 +16386,8 @@
         </p:nvSpPr>
         <p:spPr>
           <a:xfrm>
-            <a:off x="7123176" y="3392424"/>
-            <a:ext cx="4361688" cy="1216152"/>
+            <a:off x="7123176" y="1472184"/>
+            <a:ext cx="4361688" cy="850392"/>
           </a:xfrm>
           <a:prstGeom prst="rect">
             <a:avLst/>
@@ -16457,12 +16425,12 @@
         </p:nvSpPr>
         <p:spPr>
           <a:xfrm>
-            <a:off x="6903720" y="4709160"/>
-            <a:ext cx="4800600" cy="1600200"/>
+            <a:off x="7223760" y="2560320"/>
+            <a:ext cx="4160520" cy="3291840"/>
           </a:xfrm>
           <a:prstGeom prst="roundRect">
             <a:avLst>
-              <a:gd name="adj" fmla="val 19047"/>
+              <a:gd name="adj" fmla="val 9259"/>
             </a:avLst>
           </a:prstGeom>
           <a:solidFill>
@@ -16513,8 +16481,8 @@
         </p:blipFill>
         <p:spPr>
           <a:xfrm>
-            <a:off x="7031736" y="4800600"/>
-            <a:ext cx="1090246" cy="1417320"/>
+            <a:off x="8122333" y="2670048"/>
+            <a:ext cx="2363372" cy="3072384"/>
           </a:xfrm>
           <a:prstGeom prst="rect">
             <a:avLst/>
@@ -16529,27 +16497,27 @@
         </p:nvSpPr>
         <p:spPr>
           <a:xfrm>
-            <a:off x="8503920" y="4855464"/>
-            <a:ext cx="3017520" cy="1307592"/>
-          </a:xfrm>
-          <a:prstGeom prst="rect">
-            <a:avLst/>
-          </a:prstGeom>
-          <a:noFill/>
-        </p:spPr>
-        <p:txBody>
-          <a:bodyPr wrap="square" lIns="0" rIns="0" tIns="0" bIns="0" anchor="ctr">
-            <a:spAutoFit/>
-          </a:bodyPr>
-          <a:lstStyle/>
-          <a:p>
-            <a:pPr algn="l">
-              <a:lnSpc>
-                <a:spcPct val="120000"/>
-              </a:lnSpc>
-            </a:pPr>
-            <a:r>
-              <a:rPr sz="1250" b="1" i="0">
+            <a:off x="6903720" y="5961888"/>
+            <a:ext cx="4800600" cy="594360"/>
+          </a:xfrm>
+          <a:prstGeom prst="rect">
+            <a:avLst/>
+          </a:prstGeom>
+          <a:noFill/>
+        </p:spPr>
+        <p:txBody>
+          <a:bodyPr wrap="square" lIns="0" rIns="0" tIns="0" bIns="0" anchor="t">
+            <a:spAutoFit/>
+          </a:bodyPr>
+          <a:lstStyle/>
+          <a:p>
+            <a:pPr algn="ctr">
+              <a:lnSpc>
+                <a:spcPct val="115000"/>
+              </a:lnSpc>
+            </a:pPr>
+            <a:r>
+              <a:rPr sz="1200" b="1" i="0">
                 <a:solidFill>
                   <a:srgbClr val="21295C"/>
                 </a:solidFill>
@@ -21811,7 +21779,7 @@
       </p:sp>
       <p:pic>
         <p:nvPicPr>
-          <p:cNvPr id="4" name="Picture 3" descr="s21-expanding-brain.jpg"/>
+          <p:cNvPr id="4" name="Picture 3" descr="s21-anakin-padme.jpg"/>
           <p:cNvPicPr>
             <a:picLocks noChangeAspect="1"/>
           </p:cNvPicPr>
@@ -21825,8 +21793,8 @@
         </p:blipFill>
         <p:spPr>
           <a:xfrm>
-            <a:off x="8277872" y="1362456"/>
-            <a:ext cx="2783815" cy="3904487"/>
+            <a:off x="7763256" y="1408176"/>
+            <a:ext cx="3813048" cy="3813048"/>
           </a:xfrm>
           <a:prstGeom prst="rect">
             <a:avLst/>
@@ -23000,7 +22968,7 @@
         <p:spPr>
           <a:xfrm>
             <a:off x="502920" y="1554480"/>
-            <a:ext cx="2514600" cy="3611880"/>
+            <a:ext cx="2514600" cy="4709160"/>
           </a:xfrm>
           <a:prstGeom prst="roundRect">
             <a:avLst>
@@ -23055,7 +23023,7 @@
         </p:blipFill>
         <p:spPr>
           <a:xfrm>
-            <a:off x="1234440" y="2331720"/>
+            <a:off x="1234440" y="3249777"/>
             <a:ext cx="1051560" cy="1051560"/>
           </a:xfrm>
           <a:prstGeom prst="rect">
@@ -23071,7 +23039,7 @@
         </p:nvSpPr>
         <p:spPr>
           <a:xfrm>
-            <a:off x="777240" y="4160520"/>
+            <a:off x="777240" y="5715000"/>
             <a:ext cx="1965960" cy="402336"/>
           </a:xfrm>
           <a:prstGeom prst="roundRect">
@@ -23127,11 +23095,11 @@
         <p:spPr>
           <a:xfrm>
             <a:off x="3337560" y="1554480"/>
-            <a:ext cx="8366760" cy="1078992"/>
+            <a:ext cx="8366760" cy="1417320"/>
           </a:xfrm>
           <a:prstGeom prst="roundRect">
             <a:avLst>
-              <a:gd name="adj" fmla="val 22000"/>
+              <a:gd name="adj" fmla="val 21505"/>
             </a:avLst>
           </a:prstGeom>
           <a:solidFill>
@@ -23174,8 +23142,8 @@
         </p:nvSpPr>
         <p:spPr>
           <a:xfrm>
-            <a:off x="3593591" y="1673352"/>
-            <a:ext cx="7854696" cy="292608"/>
+            <a:off x="3593591" y="1700784"/>
+            <a:ext cx="7854696" cy="310896"/>
           </a:xfrm>
           <a:prstGeom prst="rect">
             <a:avLst/>
@@ -23194,7 +23162,7 @@
               </a:lnSpc>
             </a:pPr>
             <a:r>
-              <a:rPr sz="1400" b="1" i="0">
+              <a:rPr sz="1500" b="1" i="0">
                 <a:solidFill>
                   <a:srgbClr val="F0AB00"/>
                 </a:solidFill>
@@ -23213,8 +23181,8 @@
         </p:nvSpPr>
         <p:spPr>
           <a:xfrm>
-            <a:off x="3593591" y="1993391"/>
-            <a:ext cx="7854696" cy="548640"/>
+            <a:off x="3593591" y="2066543"/>
+            <a:ext cx="7854696" cy="758952"/>
           </a:xfrm>
           <a:prstGeom prst="rect">
             <a:avLst/>
@@ -23229,11 +23197,11 @@
           <a:p>
             <a:pPr algn="l">
               <a:lnSpc>
-                <a:spcPct val="112000"/>
-              </a:lnSpc>
-            </a:pPr>
-            <a:r>
-              <a:rPr sz="1250" b="0" i="0">
+                <a:spcPct val="122000"/>
+              </a:lnSpc>
+            </a:pPr>
+            <a:r>
+              <a:rPr sz="1350" b="0" i="0">
                 <a:solidFill>
                   <a:srgbClr val="21295C"/>
                 </a:solidFill>
@@ -23252,12 +23220,12 @@
         </p:nvSpPr>
         <p:spPr>
           <a:xfrm>
-            <a:off x="3337560" y="2816352"/>
-            <a:ext cx="8366760" cy="1078992"/>
+            <a:off x="3337560" y="3200400"/>
+            <a:ext cx="8366760" cy="1417320"/>
           </a:xfrm>
           <a:prstGeom prst="roundRect">
             <a:avLst>
-              <a:gd name="adj" fmla="val 22000"/>
+              <a:gd name="adj" fmla="val 21505"/>
             </a:avLst>
           </a:prstGeom>
           <a:solidFill>
@@ -23300,8 +23268,8 @@
         </p:nvSpPr>
         <p:spPr>
           <a:xfrm>
-            <a:off x="3593591" y="2935224"/>
-            <a:ext cx="7854696" cy="292608"/>
+            <a:off x="3593591" y="3346704"/>
+            <a:ext cx="7854696" cy="310896"/>
           </a:xfrm>
           <a:prstGeom prst="rect">
             <a:avLst/>
@@ -23320,7 +23288,7 @@
               </a:lnSpc>
             </a:pPr>
             <a:r>
-              <a:rPr sz="1400" b="1" i="0">
+              <a:rPr sz="1500" b="1" i="0">
                 <a:solidFill>
                   <a:srgbClr val="065A82"/>
                 </a:solidFill>
@@ -23339,8 +23307,8 @@
         </p:nvSpPr>
         <p:spPr>
           <a:xfrm>
-            <a:off x="3593591" y="3255264"/>
-            <a:ext cx="7854696" cy="548640"/>
+            <a:off x="3593591" y="3712464"/>
+            <a:ext cx="7854696" cy="758952"/>
           </a:xfrm>
           <a:prstGeom prst="rect">
             <a:avLst/>
@@ -23355,11 +23323,11 @@
           <a:p>
             <a:pPr algn="l">
               <a:lnSpc>
-                <a:spcPct val="112000"/>
-              </a:lnSpc>
-            </a:pPr>
-            <a:r>
-              <a:rPr sz="1250" b="0" i="0">
+                <a:spcPct val="122000"/>
+              </a:lnSpc>
+            </a:pPr>
+            <a:r>
+              <a:rPr sz="1350" b="0" i="0">
                 <a:solidFill>
                   <a:srgbClr val="21295C"/>
                 </a:solidFill>
@@ -23378,12 +23346,12 @@
         </p:nvSpPr>
         <p:spPr>
           <a:xfrm>
-            <a:off x="3337560" y="4078224"/>
-            <a:ext cx="8366760" cy="1078992"/>
+            <a:off x="3337560" y="4846320"/>
+            <a:ext cx="8366760" cy="1417320"/>
           </a:xfrm>
           <a:prstGeom prst="roundRect">
             <a:avLst>
-              <a:gd name="adj" fmla="val 22000"/>
+              <a:gd name="adj" fmla="val 21505"/>
             </a:avLst>
           </a:prstGeom>
           <a:solidFill>
@@ -23426,8 +23394,8 @@
         </p:nvSpPr>
         <p:spPr>
           <a:xfrm>
-            <a:off x="3593591" y="4197096"/>
-            <a:ext cx="7854696" cy="292608"/>
+            <a:off x="3593591" y="4992624"/>
+            <a:ext cx="7854696" cy="310896"/>
           </a:xfrm>
           <a:prstGeom prst="rect">
             <a:avLst/>
@@ -23446,7 +23414,7 @@
               </a:lnSpc>
             </a:pPr>
             <a:r>
-              <a:rPr sz="1400" b="1" i="0">
+              <a:rPr sz="1500" b="1" i="0">
                 <a:solidFill>
                   <a:srgbClr val="065A82"/>
                 </a:solidFill>
@@ -23465,8 +23433,8 @@
         </p:nvSpPr>
         <p:spPr>
           <a:xfrm>
-            <a:off x="3593591" y="4517136"/>
-            <a:ext cx="7854696" cy="548640"/>
+            <a:off x="3593591" y="5358383"/>
+            <a:ext cx="7854696" cy="758952"/>
           </a:xfrm>
           <a:prstGeom prst="rect">
             <a:avLst/>
@@ -23481,11 +23449,11 @@
           <a:p>
             <a:pPr algn="l">
               <a:lnSpc>
-                <a:spcPct val="112000"/>
-              </a:lnSpc>
-            </a:pPr>
-            <a:r>
-              <a:rPr sz="1250" b="0" i="0">
+                <a:spcPct val="122000"/>
+              </a:lnSpc>
+            </a:pPr>
+            <a:r>
+              <a:rPr sz="1350" b="0" i="0">
                 <a:solidFill>
                   <a:srgbClr val="21295C"/>
                 </a:solidFill>
@@ -25582,11 +25550,11 @@
         <p:spPr>
           <a:xfrm>
             <a:off x="7086600" y="1417320"/>
-            <a:ext cx="4617720" cy="2788920"/>
+            <a:ext cx="4617720" cy="3200400"/>
           </a:xfrm>
           <a:prstGeom prst="roundRect">
             <a:avLst>
-              <a:gd name="adj" fmla="val 10928"/>
+              <a:gd name="adj" fmla="val 9523"/>
             </a:avLst>
           </a:prstGeom>
           <a:solidFill>
@@ -25669,7 +25637,7 @@
         <p:spPr>
           <a:xfrm>
             <a:off x="7315200" y="2331720"/>
-            <a:ext cx="4206240" cy="1737360"/>
+            <a:ext cx="4206240" cy="2103120"/>
           </a:xfrm>
           <a:prstGeom prst="rect">
             <a:avLst/>
@@ -30831,7 +30799,7 @@
         <p:spPr>
           <a:xfrm>
             <a:off x="502920" y="1554480"/>
-            <a:ext cx="2514600" cy="3611880"/>
+            <a:ext cx="2514600" cy="4709160"/>
           </a:xfrm>
           <a:prstGeom prst="roundRect">
             <a:avLst>
@@ -30886,7 +30854,7 @@
         </p:blipFill>
         <p:spPr>
           <a:xfrm>
-            <a:off x="1234440" y="2331720"/>
+            <a:off x="1234440" y="3249777"/>
             <a:ext cx="1051560" cy="1051560"/>
           </a:xfrm>
           <a:prstGeom prst="rect">
@@ -30902,7 +30870,7 @@
         </p:nvSpPr>
         <p:spPr>
           <a:xfrm>
-            <a:off x="777240" y="4160520"/>
+            <a:off x="777240" y="5715000"/>
             <a:ext cx="1965960" cy="402336"/>
           </a:xfrm>
           <a:prstGeom prst="roundRect">
@@ -30958,11 +30926,11 @@
         <p:spPr>
           <a:xfrm>
             <a:off x="3337560" y="1554480"/>
-            <a:ext cx="8366760" cy="1078992"/>
+            <a:ext cx="8366760" cy="1417320"/>
           </a:xfrm>
           <a:prstGeom prst="roundRect">
             <a:avLst>
-              <a:gd name="adj" fmla="val 22000"/>
+              <a:gd name="adj" fmla="val 21505"/>
             </a:avLst>
           </a:prstGeom>
           <a:solidFill>
@@ -31005,8 +30973,8 @@
         </p:nvSpPr>
         <p:spPr>
           <a:xfrm>
-            <a:off x="3593591" y="1673352"/>
-            <a:ext cx="7854696" cy="292608"/>
+            <a:off x="3593591" y="1700784"/>
+            <a:ext cx="7854696" cy="310896"/>
           </a:xfrm>
           <a:prstGeom prst="rect">
             <a:avLst/>
@@ -31025,7 +30993,7 @@
               </a:lnSpc>
             </a:pPr>
             <a:r>
-              <a:rPr sz="1400" b="1" i="0">
+              <a:rPr sz="1500" b="1" i="0">
                 <a:solidFill>
                   <a:srgbClr val="F0AB00"/>
                 </a:solidFill>
@@ -31044,8 +31012,8 @@
         </p:nvSpPr>
         <p:spPr>
           <a:xfrm>
-            <a:off x="3593591" y="1993391"/>
-            <a:ext cx="7854696" cy="548640"/>
+            <a:off x="3593591" y="2066543"/>
+            <a:ext cx="7854696" cy="758952"/>
           </a:xfrm>
           <a:prstGeom prst="rect">
             <a:avLst/>
@@ -31060,11 +31028,11 @@
           <a:p>
             <a:pPr algn="l">
               <a:lnSpc>
-                <a:spcPct val="112000"/>
-              </a:lnSpc>
-            </a:pPr>
-            <a:r>
-              <a:rPr sz="1250" b="0" i="0">
+                <a:spcPct val="122000"/>
+              </a:lnSpc>
+            </a:pPr>
+            <a:r>
+              <a:rPr sz="1350" b="0" i="0">
                 <a:solidFill>
                   <a:srgbClr val="21295C"/>
                 </a:solidFill>
@@ -31083,12 +31051,12 @@
         </p:nvSpPr>
         <p:spPr>
           <a:xfrm>
-            <a:off x="3337560" y="2816352"/>
-            <a:ext cx="8366760" cy="1078992"/>
+            <a:off x="3337560" y="3200400"/>
+            <a:ext cx="8366760" cy="1417320"/>
           </a:xfrm>
           <a:prstGeom prst="roundRect">
             <a:avLst>
-              <a:gd name="adj" fmla="val 22000"/>
+              <a:gd name="adj" fmla="val 21505"/>
             </a:avLst>
           </a:prstGeom>
           <a:solidFill>
@@ -31131,8 +31099,8 @@
         </p:nvSpPr>
         <p:spPr>
           <a:xfrm>
-            <a:off x="3593591" y="2935224"/>
-            <a:ext cx="7854696" cy="292608"/>
+            <a:off x="3593591" y="3346704"/>
+            <a:ext cx="7854696" cy="310896"/>
           </a:xfrm>
           <a:prstGeom prst="rect">
             <a:avLst/>
@@ -31151,7 +31119,7 @@
               </a:lnSpc>
             </a:pPr>
             <a:r>
-              <a:rPr sz="1400" b="1" i="0">
+              <a:rPr sz="1500" b="1" i="0">
                 <a:solidFill>
                   <a:srgbClr val="065A82"/>
                 </a:solidFill>
@@ -31170,8 +31138,8 @@
         </p:nvSpPr>
         <p:spPr>
           <a:xfrm>
-            <a:off x="3593591" y="3255264"/>
-            <a:ext cx="7854696" cy="548640"/>
+            <a:off x="3593591" y="3712464"/>
+            <a:ext cx="7854696" cy="758952"/>
           </a:xfrm>
           <a:prstGeom prst="rect">
             <a:avLst/>
@@ -31186,11 +31154,11 @@
           <a:p>
             <a:pPr algn="l">
               <a:lnSpc>
-                <a:spcPct val="112000"/>
-              </a:lnSpc>
-            </a:pPr>
-            <a:r>
-              <a:rPr sz="1250" b="0" i="0">
+                <a:spcPct val="122000"/>
+              </a:lnSpc>
+            </a:pPr>
+            <a:r>
+              <a:rPr sz="1350" b="0" i="0">
                 <a:solidFill>
                   <a:srgbClr val="21295C"/>
                 </a:solidFill>
@@ -31209,12 +31177,12 @@
         </p:nvSpPr>
         <p:spPr>
           <a:xfrm>
-            <a:off x="3337560" y="4078224"/>
-            <a:ext cx="8366760" cy="1078992"/>
+            <a:off x="3337560" y="4846320"/>
+            <a:ext cx="8366760" cy="1417320"/>
           </a:xfrm>
           <a:prstGeom prst="roundRect">
             <a:avLst>
-              <a:gd name="adj" fmla="val 22000"/>
+              <a:gd name="adj" fmla="val 21505"/>
             </a:avLst>
           </a:prstGeom>
           <a:solidFill>
@@ -31257,8 +31225,8 @@
         </p:nvSpPr>
         <p:spPr>
           <a:xfrm>
-            <a:off x="3593591" y="4197096"/>
-            <a:ext cx="7854696" cy="292608"/>
+            <a:off x="3593591" y="4992624"/>
+            <a:ext cx="7854696" cy="310896"/>
           </a:xfrm>
           <a:prstGeom prst="rect">
             <a:avLst/>
@@ -31277,7 +31245,7 @@
               </a:lnSpc>
             </a:pPr>
             <a:r>
-              <a:rPr sz="1400" b="1" i="0">
+              <a:rPr sz="1500" b="1" i="0">
                 <a:solidFill>
                   <a:srgbClr val="065A82"/>
                 </a:solidFill>
@@ -31296,8 +31264,8 @@
         </p:nvSpPr>
         <p:spPr>
           <a:xfrm>
-            <a:off x="3593591" y="4517136"/>
-            <a:ext cx="7854696" cy="548640"/>
+            <a:off x="3593591" y="5358383"/>
+            <a:ext cx="7854696" cy="758952"/>
           </a:xfrm>
           <a:prstGeom prst="rect">
             <a:avLst/>
@@ -31312,11 +31280,11 @@
           <a:p>
             <a:pPr algn="l">
               <a:lnSpc>
-                <a:spcPct val="112000"/>
-              </a:lnSpc>
-            </a:pPr>
-            <a:r>
-              <a:rPr sz="1250" b="0" i="0">
+                <a:spcPct val="122000"/>
+              </a:lnSpc>
+            </a:pPr>
+            <a:r>
+              <a:rPr sz="1350" b="0" i="0">
                 <a:solidFill>
                   <a:srgbClr val="21295C"/>
                 </a:solidFill>
@@ -34460,7 +34428,7 @@
       </p:sp>
       <p:pic>
         <p:nvPicPr>
-          <p:cNvPr id="4" name="Picture 3" descr="s33-change-my-mind.jpg"/>
+          <p:cNvPr id="4" name="Picture 3" descr="s33-same-picture.jpg"/>
           <p:cNvPicPr>
             <a:picLocks noChangeAspect="1"/>
           </p:cNvPicPr>
@@ -34474,8 +34442,8 @@
         </p:blipFill>
         <p:spPr>
           <a:xfrm>
-            <a:off x="1106413" y="1527048"/>
-            <a:ext cx="2770651" cy="2569463"/>
+            <a:off x="1342730" y="1527048"/>
+            <a:ext cx="2298017" cy="2569463"/>
           </a:xfrm>
           <a:prstGeom prst="rect">
             <a:avLst/>
@@ -36214,9 +36182,271 @@
           </a:p>
         </p:txBody>
       </p:sp>
+      <p:cxnSp>
+        <p:nvCxnSpPr>
+          <p:cNvPr id="5" name="Connector 4"/>
+          <p:cNvCxnSpPr/>
+          <p:nvPr/>
+        </p:nvCxnSpPr>
+        <p:spPr>
+          <a:xfrm>
+            <a:off x="2331720" y="1947672"/>
+            <a:ext cx="570163" cy="329184"/>
+          </a:xfrm>
+          <a:prstGeom prst="line">
+            <a:avLst/>
+          </a:prstGeom>
+          <a:ln w="17780">
+            <a:solidFill>
+              <a:srgbClr val="1C7293"/>
+            </a:solidFill>
+            <a:tailEnd type="triangle" w="med" len="med"/>
+          </a:ln>
+        </p:spPr>
+        <p:style>
+          <a:lnRef idx="2">
+            <a:schemeClr val="accent1"/>
+          </a:lnRef>
+          <a:fillRef idx="0">
+            <a:schemeClr val="accent1"/>
+          </a:fillRef>
+          <a:effectRef idx="1">
+            <a:schemeClr val="accent1"/>
+          </a:effectRef>
+          <a:fontRef idx="minor">
+            <a:schemeClr val="tx1"/>
+          </a:fontRef>
+        </p:style>
+      </p:cxnSp>
+      <p:cxnSp>
+        <p:nvCxnSpPr>
+          <p:cNvPr id="6" name="Connector 5"/>
+          <p:cNvCxnSpPr/>
+          <p:nvPr/>
+        </p:nvCxnSpPr>
+        <p:spPr>
+          <a:xfrm>
+            <a:off x="2901883" y="2276856"/>
+            <a:ext cx="0" cy="658368"/>
+          </a:xfrm>
+          <a:prstGeom prst="line">
+            <a:avLst/>
+          </a:prstGeom>
+          <a:ln w="17780">
+            <a:solidFill>
+              <a:srgbClr val="1C7293"/>
+            </a:solidFill>
+            <a:tailEnd type="triangle" w="med" len="med"/>
+          </a:ln>
+        </p:spPr>
+        <p:style>
+          <a:lnRef idx="2">
+            <a:schemeClr val="accent1"/>
+          </a:lnRef>
+          <a:fillRef idx="0">
+            <a:schemeClr val="accent1"/>
+          </a:fillRef>
+          <a:effectRef idx="1">
+            <a:schemeClr val="accent1"/>
+          </a:effectRef>
+          <a:fontRef idx="minor">
+            <a:schemeClr val="tx1"/>
+          </a:fontRef>
+        </p:style>
+      </p:cxnSp>
+      <p:cxnSp>
+        <p:nvCxnSpPr>
+          <p:cNvPr id="7" name="Connector 6"/>
+          <p:cNvCxnSpPr/>
+          <p:nvPr/>
+        </p:nvCxnSpPr>
+        <p:spPr>
+          <a:xfrm flipH="1">
+            <a:off x="2331720" y="2935224"/>
+            <a:ext cx="570163" cy="329184"/>
+          </a:xfrm>
+          <a:prstGeom prst="line">
+            <a:avLst/>
+          </a:prstGeom>
+          <a:ln w="17780">
+            <a:solidFill>
+              <a:srgbClr val="1C7293"/>
+            </a:solidFill>
+            <a:tailEnd type="triangle" w="med" len="med"/>
+          </a:ln>
+        </p:spPr>
+        <p:style>
+          <a:lnRef idx="2">
+            <a:schemeClr val="accent1"/>
+          </a:lnRef>
+          <a:fillRef idx="0">
+            <a:schemeClr val="accent1"/>
+          </a:fillRef>
+          <a:effectRef idx="1">
+            <a:schemeClr val="accent1"/>
+          </a:effectRef>
+          <a:fontRef idx="minor">
+            <a:schemeClr val="tx1"/>
+          </a:fontRef>
+        </p:style>
+      </p:cxnSp>
+      <p:cxnSp>
+        <p:nvCxnSpPr>
+          <p:cNvPr id="8" name="Connector 7"/>
+          <p:cNvCxnSpPr/>
+          <p:nvPr/>
+        </p:nvCxnSpPr>
+        <p:spPr>
+          <a:xfrm flipH="1" flipV="1">
+            <a:off x="1761556" y="2935224"/>
+            <a:ext cx="570164" cy="329184"/>
+          </a:xfrm>
+          <a:prstGeom prst="line">
+            <a:avLst/>
+          </a:prstGeom>
+          <a:ln w="17780">
+            <a:solidFill>
+              <a:srgbClr val="1C7293"/>
+            </a:solidFill>
+            <a:tailEnd type="triangle" w="med" len="med"/>
+          </a:ln>
+        </p:spPr>
+        <p:style>
+          <a:lnRef idx="2">
+            <a:schemeClr val="accent1"/>
+          </a:lnRef>
+          <a:fillRef idx="0">
+            <a:schemeClr val="accent1"/>
+          </a:fillRef>
+          <a:effectRef idx="1">
+            <a:schemeClr val="accent1"/>
+          </a:effectRef>
+          <a:fontRef idx="minor">
+            <a:schemeClr val="tx1"/>
+          </a:fontRef>
+        </p:style>
+      </p:cxnSp>
+      <p:cxnSp>
+        <p:nvCxnSpPr>
+          <p:cNvPr id="9" name="Connector 8"/>
+          <p:cNvCxnSpPr/>
+          <p:nvPr/>
+        </p:nvCxnSpPr>
+        <p:spPr>
+          <a:xfrm flipV="1">
+            <a:off x="1761556" y="2276856"/>
+            <a:ext cx="0" cy="658368"/>
+          </a:xfrm>
+          <a:prstGeom prst="line">
+            <a:avLst/>
+          </a:prstGeom>
+          <a:ln w="17780">
+            <a:solidFill>
+              <a:srgbClr val="1C7293"/>
+            </a:solidFill>
+            <a:tailEnd type="triangle" w="med" len="med"/>
+          </a:ln>
+        </p:spPr>
+        <p:style>
+          <a:lnRef idx="2">
+            <a:schemeClr val="accent1"/>
+          </a:lnRef>
+          <a:fillRef idx="0">
+            <a:schemeClr val="accent1"/>
+          </a:fillRef>
+          <a:effectRef idx="1">
+            <a:schemeClr val="accent1"/>
+          </a:effectRef>
+          <a:fontRef idx="minor">
+            <a:schemeClr val="tx1"/>
+          </a:fontRef>
+        </p:style>
+      </p:cxnSp>
+      <p:cxnSp>
+        <p:nvCxnSpPr>
+          <p:cNvPr id="10" name="Connector 9"/>
+          <p:cNvCxnSpPr/>
+          <p:nvPr/>
+        </p:nvCxnSpPr>
+        <p:spPr>
+          <a:xfrm flipV="1">
+            <a:off x="1761556" y="1947672"/>
+            <a:ext cx="570164" cy="329184"/>
+          </a:xfrm>
+          <a:prstGeom prst="line">
+            <a:avLst/>
+          </a:prstGeom>
+          <a:ln w="25400">
+            <a:solidFill>
+              <a:srgbClr val="F0AB00"/>
+            </a:solidFill>
+            <a:tailEnd type="triangle" w="med" len="med"/>
+          </a:ln>
+        </p:spPr>
+        <p:style>
+          <a:lnRef idx="2">
+            <a:schemeClr val="accent1"/>
+          </a:lnRef>
+          <a:fillRef idx="0">
+            <a:schemeClr val="accent1"/>
+          </a:fillRef>
+          <a:effectRef idx="1">
+            <a:schemeClr val="accent1"/>
+          </a:effectRef>
+          <a:fontRef idx="minor">
+            <a:schemeClr val="tx1"/>
+          </a:fontRef>
+        </p:style>
+      </p:cxnSp>
+      <p:sp>
+        <p:nvSpPr>
+          <p:cNvPr id="11" name="Oval 10"/>
+          <p:cNvSpPr/>
+          <p:nvPr/>
+        </p:nvSpPr>
+        <p:spPr>
+          <a:xfrm>
+            <a:off x="2130551" y="1746504"/>
+            <a:ext cx="402336" cy="402336"/>
+          </a:xfrm>
+          <a:prstGeom prst="ellipse">
+            <a:avLst/>
+          </a:prstGeom>
+          <a:solidFill>
+            <a:srgbClr val="FFFFFF"/>
+          </a:solidFill>
+          <a:ln w="15240">
+            <a:solidFill>
+              <a:srgbClr val="065A82"/>
+            </a:solidFill>
+          </a:ln>
+          <a:effectLst/>
+        </p:spPr>
+        <p:style>
+          <a:lnRef idx="1">
+            <a:schemeClr val="accent1"/>
+          </a:lnRef>
+          <a:fillRef idx="3">
+            <a:schemeClr val="accent1"/>
+          </a:fillRef>
+          <a:effectRef idx="2">
+            <a:schemeClr val="accent1"/>
+          </a:effectRef>
+          <a:fontRef idx="minor">
+            <a:schemeClr val="lt1"/>
+          </a:fontRef>
+        </p:style>
+        <p:txBody>
+          <a:bodyPr rtlCol="0" anchor="ctr"/>
+          <a:lstStyle/>
+          <a:p>
+            <a:pPr algn="ctr"/>
+          </a:p>
+        </p:txBody>
+      </p:sp>
       <p:pic>
         <p:nvPicPr>
-          <p:cNvPr id="5" name="Picture 4" descr="layers-teal.png"/>
+          <p:cNvPr id="12" name="Picture 11" descr="search-mid.png"/>
           <p:cNvPicPr>
             <a:picLocks noChangeAspect="1"/>
           </p:cNvPicPr>
@@ -36230,6 +36460,435 @@
         </p:blipFill>
         <p:spPr>
           <a:xfrm>
+            <a:off x="2203703" y="1819655"/>
+            <a:ext cx="256032" cy="256032"/>
+          </a:xfrm>
+          <a:prstGeom prst="rect">
+            <a:avLst/>
+          </a:prstGeom>
+        </p:spPr>
+      </p:pic>
+      <p:sp>
+        <p:nvSpPr>
+          <p:cNvPr id="13" name="Oval 12"/>
+          <p:cNvSpPr/>
+          <p:nvPr/>
+        </p:nvSpPr>
+        <p:spPr>
+          <a:xfrm>
+            <a:off x="2700715" y="2075688"/>
+            <a:ext cx="402336" cy="402336"/>
+          </a:xfrm>
+          <a:prstGeom prst="ellipse">
+            <a:avLst/>
+          </a:prstGeom>
+          <a:solidFill>
+            <a:srgbClr val="FFFFFF"/>
+          </a:solidFill>
+          <a:ln w="15240">
+            <a:solidFill>
+              <a:srgbClr val="065A82"/>
+            </a:solidFill>
+          </a:ln>
+          <a:effectLst/>
+        </p:spPr>
+        <p:style>
+          <a:lnRef idx="1">
+            <a:schemeClr val="accent1"/>
+          </a:lnRef>
+          <a:fillRef idx="3">
+            <a:schemeClr val="accent1"/>
+          </a:fillRef>
+          <a:effectRef idx="2">
+            <a:schemeClr val="accent1"/>
+          </a:effectRef>
+          <a:fontRef idx="minor">
+            <a:schemeClr val="lt1"/>
+          </a:fontRef>
+        </p:style>
+        <p:txBody>
+          <a:bodyPr rtlCol="0" anchor="ctr"/>
+          <a:lstStyle/>
+          <a:p>
+            <a:pPr algn="ctr"/>
+          </a:p>
+        </p:txBody>
+      </p:sp>
+      <p:pic>
+        <p:nvPicPr>
+          <p:cNvPr id="14" name="Picture 13" descr="pencil-mid.png"/>
+          <p:cNvPicPr>
+            <a:picLocks noChangeAspect="1"/>
+          </p:cNvPicPr>
+          <p:nvPr/>
+        </p:nvPicPr>
+        <p:blipFill>
+          <a:blip r:embed="rId3"/>
+          <a:stretch>
+            <a:fillRect/>
+          </a:stretch>
+        </p:blipFill>
+        <p:spPr>
+          <a:xfrm>
+            <a:off x="2773867" y="2148840"/>
+            <a:ext cx="256032" cy="256032"/>
+          </a:xfrm>
+          <a:prstGeom prst="rect">
+            <a:avLst/>
+          </a:prstGeom>
+        </p:spPr>
+      </p:pic>
+      <p:sp>
+        <p:nvSpPr>
+          <p:cNvPr id="15" name="Oval 14"/>
+          <p:cNvSpPr/>
+          <p:nvPr/>
+        </p:nvSpPr>
+        <p:spPr>
+          <a:xfrm>
+            <a:off x="2700715" y="2734056"/>
+            <a:ext cx="402336" cy="402336"/>
+          </a:xfrm>
+          <a:prstGeom prst="ellipse">
+            <a:avLst/>
+          </a:prstGeom>
+          <a:solidFill>
+            <a:srgbClr val="FFFFFF"/>
+          </a:solidFill>
+          <a:ln w="15240">
+            <a:solidFill>
+              <a:srgbClr val="065A82"/>
+            </a:solidFill>
+          </a:ln>
+          <a:effectLst/>
+        </p:spPr>
+        <p:style>
+          <a:lnRef idx="1">
+            <a:schemeClr val="accent1"/>
+          </a:lnRef>
+          <a:fillRef idx="3">
+            <a:schemeClr val="accent1"/>
+          </a:fillRef>
+          <a:effectRef idx="2">
+            <a:schemeClr val="accent1"/>
+          </a:effectRef>
+          <a:fontRef idx="minor">
+            <a:schemeClr val="lt1"/>
+          </a:fontRef>
+        </p:style>
+        <p:txBody>
+          <a:bodyPr rtlCol="0" anchor="ctr"/>
+          <a:lstStyle/>
+          <a:p>
+            <a:pPr algn="ctr"/>
+          </a:p>
+        </p:txBody>
+      </p:sp>
+      <p:pic>
+        <p:nvPicPr>
+          <p:cNvPr id="16" name="Picture 15" descr="hammer-mid.png"/>
+          <p:cNvPicPr>
+            <a:picLocks noChangeAspect="1"/>
+          </p:cNvPicPr>
+          <p:nvPr/>
+        </p:nvPicPr>
+        <p:blipFill>
+          <a:blip r:embed="rId4"/>
+          <a:stretch>
+            <a:fillRect/>
+          </a:stretch>
+        </p:blipFill>
+        <p:spPr>
+          <a:xfrm>
+            <a:off x="2773867" y="2807208"/>
+            <a:ext cx="256032" cy="256032"/>
+          </a:xfrm>
+          <a:prstGeom prst="rect">
+            <a:avLst/>
+          </a:prstGeom>
+        </p:spPr>
+      </p:pic>
+      <p:sp>
+        <p:nvSpPr>
+          <p:cNvPr id="17" name="Oval 16"/>
+          <p:cNvSpPr/>
+          <p:nvPr/>
+        </p:nvSpPr>
+        <p:spPr>
+          <a:xfrm>
+            <a:off x="2130551" y="3063240"/>
+            <a:ext cx="402336" cy="402336"/>
+          </a:xfrm>
+          <a:prstGeom prst="ellipse">
+            <a:avLst/>
+          </a:prstGeom>
+          <a:solidFill>
+            <a:srgbClr val="FFFFFF"/>
+          </a:solidFill>
+          <a:ln w="15240">
+            <a:solidFill>
+              <a:srgbClr val="065A82"/>
+            </a:solidFill>
+          </a:ln>
+          <a:effectLst/>
+        </p:spPr>
+        <p:style>
+          <a:lnRef idx="1">
+            <a:schemeClr val="accent1"/>
+          </a:lnRef>
+          <a:fillRef idx="3">
+            <a:schemeClr val="accent1"/>
+          </a:fillRef>
+          <a:effectRef idx="2">
+            <a:schemeClr val="accent1"/>
+          </a:effectRef>
+          <a:fontRef idx="minor">
+            <a:schemeClr val="lt1"/>
+          </a:fontRef>
+        </p:style>
+        <p:txBody>
+          <a:bodyPr rtlCol="0" anchor="ctr"/>
+          <a:lstStyle/>
+          <a:p>
+            <a:pPr algn="ctr"/>
+          </a:p>
+        </p:txBody>
+      </p:sp>
+      <p:pic>
+        <p:nvPicPr>
+          <p:cNvPr id="18" name="Picture 17" descr="ruler-mid.png"/>
+          <p:cNvPicPr>
+            <a:picLocks noChangeAspect="1"/>
+          </p:cNvPicPr>
+          <p:nvPr/>
+        </p:nvPicPr>
+        <p:blipFill>
+          <a:blip r:embed="rId5"/>
+          <a:stretch>
+            <a:fillRect/>
+          </a:stretch>
+        </p:blipFill>
+        <p:spPr>
+          <a:xfrm>
+            <a:off x="2203703" y="3136392"/>
+            <a:ext cx="256032" cy="256032"/>
+          </a:xfrm>
+          <a:prstGeom prst="rect">
+            <a:avLst/>
+          </a:prstGeom>
+        </p:spPr>
+      </p:pic>
+      <p:sp>
+        <p:nvSpPr>
+          <p:cNvPr id="19" name="Oval 18"/>
+          <p:cNvSpPr/>
+          <p:nvPr/>
+        </p:nvSpPr>
+        <p:spPr>
+          <a:xfrm>
+            <a:off x="1560388" y="2734056"/>
+            <a:ext cx="402336" cy="402336"/>
+          </a:xfrm>
+          <a:prstGeom prst="ellipse">
+            <a:avLst/>
+          </a:prstGeom>
+          <a:solidFill>
+            <a:srgbClr val="FFFFFF"/>
+          </a:solidFill>
+          <a:ln w="15240">
+            <a:solidFill>
+              <a:srgbClr val="065A82"/>
+            </a:solidFill>
+          </a:ln>
+          <a:effectLst/>
+        </p:spPr>
+        <p:style>
+          <a:lnRef idx="1">
+            <a:schemeClr val="accent1"/>
+          </a:lnRef>
+          <a:fillRef idx="3">
+            <a:schemeClr val="accent1"/>
+          </a:fillRef>
+          <a:effectRef idx="2">
+            <a:schemeClr val="accent1"/>
+          </a:effectRef>
+          <a:fontRef idx="minor">
+            <a:schemeClr val="lt1"/>
+          </a:fontRef>
+        </p:style>
+        <p:txBody>
+          <a:bodyPr rtlCol="0" anchor="ctr"/>
+          <a:lstStyle/>
+          <a:p>
+            <a:pPr algn="ctr"/>
+          </a:p>
+        </p:txBody>
+      </p:sp>
+      <p:pic>
+        <p:nvPicPr>
+          <p:cNvPr id="20" name="Picture 19" descr="headphones-mid.png"/>
+          <p:cNvPicPr>
+            <a:picLocks noChangeAspect="1"/>
+          </p:cNvPicPr>
+          <p:nvPr/>
+        </p:nvPicPr>
+        <p:blipFill>
+          <a:blip r:embed="rId6"/>
+          <a:stretch>
+            <a:fillRect/>
+          </a:stretch>
+        </p:blipFill>
+        <p:spPr>
+          <a:xfrm>
+            <a:off x="1633540" y="2807208"/>
+            <a:ext cx="256032" cy="256032"/>
+          </a:xfrm>
+          <a:prstGeom prst="rect">
+            <a:avLst/>
+          </a:prstGeom>
+        </p:spPr>
+      </p:pic>
+      <p:sp>
+        <p:nvSpPr>
+          <p:cNvPr id="21" name="Oval 20"/>
+          <p:cNvSpPr/>
+          <p:nvPr/>
+        </p:nvSpPr>
+        <p:spPr>
+          <a:xfrm>
+            <a:off x="1560388" y="2075688"/>
+            <a:ext cx="402336" cy="402336"/>
+          </a:xfrm>
+          <a:prstGeom prst="ellipse">
+            <a:avLst/>
+          </a:prstGeom>
+          <a:solidFill>
+            <a:srgbClr val="FFFFFF"/>
+          </a:solidFill>
+          <a:ln w="15240">
+            <a:solidFill>
+              <a:srgbClr val="065A82"/>
+            </a:solidFill>
+          </a:ln>
+          <a:effectLst/>
+        </p:spPr>
+        <p:style>
+          <a:lnRef idx="1">
+            <a:schemeClr val="accent1"/>
+          </a:lnRef>
+          <a:fillRef idx="3">
+            <a:schemeClr val="accent1"/>
+          </a:fillRef>
+          <a:effectRef idx="2">
+            <a:schemeClr val="accent1"/>
+          </a:effectRef>
+          <a:fontRef idx="minor">
+            <a:schemeClr val="lt1"/>
+          </a:fontRef>
+        </p:style>
+        <p:txBody>
+          <a:bodyPr rtlCol="0" anchor="ctr"/>
+          <a:lstStyle/>
+          <a:p>
+            <a:pPr algn="ctr"/>
+          </a:p>
+        </p:txBody>
+      </p:sp>
+      <p:pic>
+        <p:nvPicPr>
+          <p:cNvPr id="22" name="Picture 21" descr="scale-mid.png"/>
+          <p:cNvPicPr>
+            <a:picLocks noChangeAspect="1"/>
+          </p:cNvPicPr>
+          <p:nvPr/>
+        </p:nvPicPr>
+        <p:blipFill>
+          <a:blip r:embed="rId7"/>
+          <a:stretch>
+            <a:fillRect/>
+          </a:stretch>
+        </p:blipFill>
+        <p:spPr>
+          <a:xfrm>
+            <a:off x="1633540" y="2148840"/>
+            <a:ext cx="256032" cy="256032"/>
+          </a:xfrm>
+          <a:prstGeom prst="rect">
+            <a:avLst/>
+          </a:prstGeom>
+        </p:spPr>
+      </p:pic>
+      <p:sp>
+        <p:nvSpPr>
+          <p:cNvPr id="23" name="Rounded Rectangle 22"/>
+          <p:cNvSpPr/>
+          <p:nvPr/>
+        </p:nvSpPr>
+        <p:spPr>
+          <a:xfrm>
+            <a:off x="4160520" y="2395728"/>
+            <a:ext cx="960120" cy="384048"/>
+          </a:xfrm>
+          <a:prstGeom prst="roundRect">
+            <a:avLst>
+              <a:gd name="adj" fmla="val 50000"/>
+            </a:avLst>
+          </a:prstGeom>
+          <a:solidFill>
+            <a:srgbClr val="F0AB00"/>
+          </a:solidFill>
+          <a:ln>
+            <a:noFill/>
+          </a:ln>
+          <a:effectLst/>
+        </p:spPr>
+        <p:style>
+          <a:lnRef idx="1">
+            <a:schemeClr val="accent1"/>
+          </a:lnRef>
+          <a:fillRef idx="3">
+            <a:schemeClr val="accent1"/>
+          </a:fillRef>
+          <a:effectRef idx="2">
+            <a:schemeClr val="accent1"/>
+          </a:effectRef>
+          <a:fontRef idx="minor">
+            <a:schemeClr val="lt1"/>
+          </a:fontRef>
+        </p:style>
+        <p:txBody>
+          <a:bodyPr rtlCol="0" anchor="ctr" lIns="45720" rIns="45720" tIns="18288" bIns="18288" wrap="none"/>
+          <a:lstStyle/>
+          <a:p>
+            <a:pPr algn="ctr"/>
+            <a:r>
+              <a:rPr sz="1200" b="1">
+                <a:solidFill>
+                  <a:srgbClr val="21295C"/>
+                </a:solidFill>
+                <a:latin typeface="DejaVu Sans"/>
+              </a:rPr>
+              <a:t>6 фаз</a:t>
+            </a:r>
+          </a:p>
+        </p:txBody>
+      </p:sp>
+      <p:pic>
+        <p:nvPicPr>
+          <p:cNvPr id="24" name="Picture 23" descr="layers-teal.png"/>
+          <p:cNvPicPr>
+            <a:picLocks noChangeAspect="1"/>
+          </p:cNvPicPr>
+          <p:nvPr/>
+        </p:nvPicPr>
+        <p:blipFill>
+          <a:blip r:embed="rId8"/>
+          <a:stretch>
+            <a:fillRect/>
+          </a:stretch>
+        </p:blipFill>
+        <p:spPr>
+          <a:xfrm>
             <a:off x="777240" y="3429000"/>
             <a:ext cx="457200" cy="457200"/>
           </a:xfrm>
@@ -36240,7 +36899,7 @@
       </p:pic>
       <p:sp>
         <p:nvSpPr>
-          <p:cNvPr id="6" name="TextBox 5"/>
+          <p:cNvPr id="25" name="TextBox 24"/>
           <p:cNvSpPr txBox="1"/>
           <p:nvPr/>
         </p:nvSpPr>
@@ -36279,7 +36938,7 @@
       </p:sp>
       <p:sp>
         <p:nvSpPr>
-          <p:cNvPr id="7" name="Rounded Rectangle 6"/>
+          <p:cNvPr id="26" name="Rounded Rectangle 25"/>
           <p:cNvSpPr/>
           <p:nvPr/>
         </p:nvSpPr>
@@ -36327,7 +36986,7 @@
       </p:sp>
       <p:sp>
         <p:nvSpPr>
-          <p:cNvPr id="8" name="TextBox 7"/>
+          <p:cNvPr id="27" name="TextBox 26"/>
           <p:cNvSpPr txBox="1"/>
           <p:nvPr/>
         </p:nvSpPr>
@@ -36366,7 +37025,7 @@
       </p:sp>
       <p:sp>
         <p:nvSpPr>
-          <p:cNvPr id="9" name="TextBox 8"/>
+          <p:cNvPr id="28" name="TextBox 27"/>
           <p:cNvSpPr txBox="1"/>
           <p:nvPr/>
         </p:nvSpPr>
@@ -36405,14 +37064,14 @@
       </p:sp>
       <p:pic>
         <p:nvPicPr>
-          <p:cNvPr id="10" name="Picture 9" descr="git-branch-teal.png"/>
+          <p:cNvPr id="29" name="Picture 28" descr="git-branch-teal.png"/>
           <p:cNvPicPr>
             <a:picLocks noChangeAspect="1"/>
           </p:cNvPicPr>
           <p:nvPr/>
         </p:nvPicPr>
         <p:blipFill>
-          <a:blip r:embed="rId3"/>
+          <a:blip r:embed="rId9"/>
           <a:stretch>
             <a:fillRect/>
           </a:stretch>
@@ -36429,7 +37088,7 @@
       </p:pic>
       <p:sp>
         <p:nvSpPr>
-          <p:cNvPr id="11" name="Rounded Rectangle 10"/>
+          <p:cNvPr id="30" name="Rounded Rectangle 29"/>
           <p:cNvSpPr/>
           <p:nvPr/>
         </p:nvSpPr>
@@ -36477,7 +37136,7 @@
       </p:sp>
       <p:sp>
         <p:nvSpPr>
-          <p:cNvPr id="12" name="TextBox 11"/>
+          <p:cNvPr id="31" name="TextBox 30"/>
           <p:cNvSpPr txBox="1"/>
           <p:nvPr/>
         </p:nvSpPr>
@@ -36516,7 +37175,7 @@
       </p:sp>
       <p:sp>
         <p:nvSpPr>
-          <p:cNvPr id="13" name="Rounded Rectangle 12"/>
+          <p:cNvPr id="32" name="Rounded Rectangle 31"/>
           <p:cNvSpPr/>
           <p:nvPr/>
         </p:nvSpPr>
@@ -36564,7 +37223,7 @@
       </p:sp>
       <p:sp>
         <p:nvSpPr>
-          <p:cNvPr id="14" name="TextBox 13"/>
+          <p:cNvPr id="33" name="TextBox 32"/>
           <p:cNvSpPr txBox="1"/>
           <p:nvPr/>
         </p:nvSpPr>
@@ -36603,7 +37262,7 @@
       </p:sp>
       <p:sp>
         <p:nvSpPr>
-          <p:cNvPr id="15" name="TextBox 14"/>
+          <p:cNvPr id="34" name="TextBox 33"/>
           <p:cNvSpPr txBox="1"/>
           <p:nvPr/>
         </p:nvSpPr>
@@ -38586,7 +39245,7 @@
         <p:spPr>
           <a:xfrm>
             <a:off x="502920" y="1554480"/>
-            <a:ext cx="2514600" cy="3611880"/>
+            <a:ext cx="2514600" cy="4709160"/>
           </a:xfrm>
           <a:prstGeom prst="roundRect">
             <a:avLst>
@@ -38641,7 +39300,7 @@
         </p:blipFill>
         <p:spPr>
           <a:xfrm>
-            <a:off x="1234440" y="2331720"/>
+            <a:off x="1234440" y="3249777"/>
             <a:ext cx="1051560" cy="1051560"/>
           </a:xfrm>
           <a:prstGeom prst="rect">
@@ -38657,7 +39316,7 @@
         </p:nvSpPr>
         <p:spPr>
           <a:xfrm>
-            <a:off x="777240" y="4160520"/>
+            <a:off x="777240" y="5715000"/>
             <a:ext cx="1965960" cy="402336"/>
           </a:xfrm>
           <a:prstGeom prst="roundRect">
@@ -38713,11 +39372,11 @@
         <p:spPr>
           <a:xfrm>
             <a:off x="3337560" y="1554480"/>
-            <a:ext cx="8366760" cy="1078992"/>
+            <a:ext cx="8366760" cy="1417320"/>
           </a:xfrm>
           <a:prstGeom prst="roundRect">
             <a:avLst>
-              <a:gd name="adj" fmla="val 22000"/>
+              <a:gd name="adj" fmla="val 21505"/>
             </a:avLst>
           </a:prstGeom>
           <a:solidFill>
@@ -38760,8 +39419,8 @@
         </p:nvSpPr>
         <p:spPr>
           <a:xfrm>
-            <a:off x="3593591" y="1673352"/>
-            <a:ext cx="7854696" cy="292608"/>
+            <a:off x="3593591" y="1700784"/>
+            <a:ext cx="7854696" cy="310896"/>
           </a:xfrm>
           <a:prstGeom prst="rect">
             <a:avLst/>
@@ -38780,7 +39439,7 @@
               </a:lnSpc>
             </a:pPr>
             <a:r>
-              <a:rPr sz="1400" b="1" i="0">
+              <a:rPr sz="1500" b="1" i="0">
                 <a:solidFill>
                   <a:srgbClr val="F0AB00"/>
                 </a:solidFill>
@@ -38799,8 +39458,8 @@
         </p:nvSpPr>
         <p:spPr>
           <a:xfrm>
-            <a:off x="3593591" y="1993391"/>
-            <a:ext cx="7854696" cy="548640"/>
+            <a:off x="3593591" y="2066543"/>
+            <a:ext cx="7854696" cy="758952"/>
           </a:xfrm>
           <a:prstGeom prst="rect">
             <a:avLst/>
@@ -38815,11 +39474,11 @@
           <a:p>
             <a:pPr algn="l">
               <a:lnSpc>
-                <a:spcPct val="112000"/>
-              </a:lnSpc>
-            </a:pPr>
-            <a:r>
-              <a:rPr sz="1250" b="0" i="0">
+                <a:spcPct val="122000"/>
+              </a:lnSpc>
+            </a:pPr>
+            <a:r>
+              <a:rPr sz="1350" b="0" i="0">
                 <a:solidFill>
                   <a:srgbClr val="21295C"/>
                 </a:solidFill>
@@ -38838,12 +39497,12 @@
         </p:nvSpPr>
         <p:spPr>
           <a:xfrm>
-            <a:off x="3337560" y="2816352"/>
-            <a:ext cx="8366760" cy="1078992"/>
+            <a:off x="3337560" y="3200400"/>
+            <a:ext cx="8366760" cy="1417320"/>
           </a:xfrm>
           <a:prstGeom prst="roundRect">
             <a:avLst>
-              <a:gd name="adj" fmla="val 22000"/>
+              <a:gd name="adj" fmla="val 21505"/>
             </a:avLst>
           </a:prstGeom>
           <a:solidFill>
@@ -38886,8 +39545,8 @@
         </p:nvSpPr>
         <p:spPr>
           <a:xfrm>
-            <a:off x="3593591" y="2935224"/>
-            <a:ext cx="7854696" cy="292608"/>
+            <a:off x="3593591" y="3346704"/>
+            <a:ext cx="7854696" cy="310896"/>
           </a:xfrm>
           <a:prstGeom prst="rect">
             <a:avLst/>
@@ -38906,7 +39565,7 @@
               </a:lnSpc>
             </a:pPr>
             <a:r>
-              <a:rPr sz="1400" b="1" i="0">
+              <a:rPr sz="1500" b="1" i="0">
                 <a:solidFill>
                   <a:srgbClr val="065A82"/>
                 </a:solidFill>
@@ -38925,8 +39584,8 @@
         </p:nvSpPr>
         <p:spPr>
           <a:xfrm>
-            <a:off x="3593591" y="3255264"/>
-            <a:ext cx="7854696" cy="548640"/>
+            <a:off x="3593591" y="3712464"/>
+            <a:ext cx="7854696" cy="758952"/>
           </a:xfrm>
           <a:prstGeom prst="rect">
             <a:avLst/>
@@ -38941,11 +39600,11 @@
           <a:p>
             <a:pPr algn="l">
               <a:lnSpc>
-                <a:spcPct val="112000"/>
-              </a:lnSpc>
-            </a:pPr>
-            <a:r>
-              <a:rPr sz="1250" b="0" i="0">
+                <a:spcPct val="122000"/>
+              </a:lnSpc>
+            </a:pPr>
+            <a:r>
+              <a:rPr sz="1350" b="0" i="0">
                 <a:solidFill>
                   <a:srgbClr val="21295C"/>
                 </a:solidFill>
@@ -38964,12 +39623,12 @@
         </p:nvSpPr>
         <p:spPr>
           <a:xfrm>
-            <a:off x="3337560" y="4078224"/>
-            <a:ext cx="8366760" cy="1078992"/>
+            <a:off x="3337560" y="4846320"/>
+            <a:ext cx="8366760" cy="1417320"/>
           </a:xfrm>
           <a:prstGeom prst="roundRect">
             <a:avLst>
-              <a:gd name="adj" fmla="val 22000"/>
+              <a:gd name="adj" fmla="val 21505"/>
             </a:avLst>
           </a:prstGeom>
           <a:solidFill>
@@ -39012,8 +39671,8 @@
         </p:nvSpPr>
         <p:spPr>
           <a:xfrm>
-            <a:off x="3593591" y="4197096"/>
-            <a:ext cx="7854696" cy="292608"/>
+            <a:off x="3593591" y="4992624"/>
+            <a:ext cx="7854696" cy="310896"/>
           </a:xfrm>
           <a:prstGeom prst="rect">
             <a:avLst/>
@@ -39032,7 +39691,7 @@
               </a:lnSpc>
             </a:pPr>
             <a:r>
-              <a:rPr sz="1400" b="1" i="0">
+              <a:rPr sz="1500" b="1" i="0">
                 <a:solidFill>
                   <a:srgbClr val="065A82"/>
                 </a:solidFill>
@@ -39051,8 +39710,8 @@
         </p:nvSpPr>
         <p:spPr>
           <a:xfrm>
-            <a:off x="3593591" y="4517136"/>
-            <a:ext cx="7854696" cy="548640"/>
+            <a:off x="3593591" y="5358383"/>
+            <a:ext cx="7854696" cy="758952"/>
           </a:xfrm>
           <a:prstGeom prst="rect">
             <a:avLst/>
@@ -39067,11 +39726,11 @@
           <a:p>
             <a:pPr algn="l">
               <a:lnSpc>
-                <a:spcPct val="112000"/>
-              </a:lnSpc>
-            </a:pPr>
-            <a:r>
-              <a:rPr sz="1250" b="0" i="0">
+                <a:spcPct val="122000"/>
+              </a:lnSpc>
+            </a:pPr>
+            <a:r>
+              <a:rPr sz="1350" b="0" i="0">
                 <a:solidFill>
                   <a:srgbClr val="21295C"/>
                 </a:solidFill>
@@ -41047,7 +41706,7 @@
       </p:sp>
       <p:pic>
         <p:nvPicPr>
-          <p:cNvPr id="4" name="Picture 3" descr="s39-harold.jpg"/>
+          <p:cNvPr id="4" name="Picture 3" descr="s39-grus-plan.jpg"/>
           <p:cNvPicPr>
             <a:picLocks noChangeAspect="1"/>
           </p:cNvPicPr>
@@ -41061,8 +41720,8 @@
         </p:blipFill>
         <p:spPr>
           <a:xfrm>
-            <a:off x="933045" y="1545336"/>
-            <a:ext cx="2202990" cy="3584448"/>
+            <a:off x="630936" y="2437248"/>
+            <a:ext cx="2807208" cy="1800623"/>
           </a:xfrm>
           <a:prstGeom prst="rect">
             <a:avLst/>
@@ -46514,7 +47173,7 @@
         <p:spPr>
           <a:xfrm>
             <a:off x="502920" y="1554480"/>
-            <a:ext cx="2514600" cy="3611880"/>
+            <a:ext cx="2514600" cy="4709160"/>
           </a:xfrm>
           <a:prstGeom prst="roundRect">
             <a:avLst>
@@ -46569,7 +47228,7 @@
         </p:blipFill>
         <p:spPr>
           <a:xfrm>
-            <a:off x="1234440" y="2331720"/>
+            <a:off x="1234440" y="3249777"/>
             <a:ext cx="1051560" cy="1051560"/>
           </a:xfrm>
           <a:prstGeom prst="rect">
@@ -46585,7 +47244,7 @@
         </p:nvSpPr>
         <p:spPr>
           <a:xfrm>
-            <a:off x="777240" y="4160520"/>
+            <a:off x="777240" y="5715000"/>
             <a:ext cx="1965960" cy="402336"/>
           </a:xfrm>
           <a:prstGeom prst="roundRect">
@@ -46641,11 +47300,11 @@
         <p:spPr>
           <a:xfrm>
             <a:off x="3337560" y="1554480"/>
-            <a:ext cx="8366760" cy="1078992"/>
+            <a:ext cx="8366760" cy="1417320"/>
           </a:xfrm>
           <a:prstGeom prst="roundRect">
             <a:avLst>
-              <a:gd name="adj" fmla="val 22000"/>
+              <a:gd name="adj" fmla="val 21505"/>
             </a:avLst>
           </a:prstGeom>
           <a:solidFill>
@@ -46688,8 +47347,8 @@
         </p:nvSpPr>
         <p:spPr>
           <a:xfrm>
-            <a:off x="3593591" y="1673352"/>
-            <a:ext cx="7854696" cy="292608"/>
+            <a:off x="3593591" y="1700784"/>
+            <a:ext cx="7854696" cy="310896"/>
           </a:xfrm>
           <a:prstGeom prst="rect">
             <a:avLst/>
@@ -46708,7 +47367,7 @@
               </a:lnSpc>
             </a:pPr>
             <a:r>
-              <a:rPr sz="1400" b="1" i="0">
+              <a:rPr sz="1500" b="1" i="0">
                 <a:solidFill>
                   <a:srgbClr val="F0AB00"/>
                 </a:solidFill>
@@ -46727,8 +47386,8 @@
         </p:nvSpPr>
         <p:spPr>
           <a:xfrm>
-            <a:off x="3593591" y="1993391"/>
-            <a:ext cx="7854696" cy="548640"/>
+            <a:off x="3593591" y="2066543"/>
+            <a:ext cx="7854696" cy="758952"/>
           </a:xfrm>
           <a:prstGeom prst="rect">
             <a:avLst/>
@@ -46743,11 +47402,11 @@
           <a:p>
             <a:pPr algn="l">
               <a:lnSpc>
-                <a:spcPct val="112000"/>
-              </a:lnSpc>
-            </a:pPr>
-            <a:r>
-              <a:rPr sz="1250" b="0" i="0">
+                <a:spcPct val="122000"/>
+              </a:lnSpc>
+            </a:pPr>
+            <a:r>
+              <a:rPr sz="1350" b="0" i="0">
                 <a:solidFill>
                   <a:srgbClr val="21295C"/>
                 </a:solidFill>
@@ -46766,12 +47425,12 @@
         </p:nvSpPr>
         <p:spPr>
           <a:xfrm>
-            <a:off x="3337560" y="2816352"/>
-            <a:ext cx="8366760" cy="1078992"/>
+            <a:off x="3337560" y="3200400"/>
+            <a:ext cx="8366760" cy="1417320"/>
           </a:xfrm>
           <a:prstGeom prst="roundRect">
             <a:avLst>
-              <a:gd name="adj" fmla="val 22000"/>
+              <a:gd name="adj" fmla="val 21505"/>
             </a:avLst>
           </a:prstGeom>
           <a:solidFill>
@@ -46814,8 +47473,8 @@
         </p:nvSpPr>
         <p:spPr>
           <a:xfrm>
-            <a:off x="3593591" y="2935224"/>
-            <a:ext cx="7854696" cy="292608"/>
+            <a:off x="3593591" y="3346704"/>
+            <a:ext cx="7854696" cy="310896"/>
           </a:xfrm>
           <a:prstGeom prst="rect">
             <a:avLst/>
@@ -46834,7 +47493,7 @@
               </a:lnSpc>
             </a:pPr>
             <a:r>
-              <a:rPr sz="1400" b="1" i="0">
+              <a:rPr sz="1500" b="1" i="0">
                 <a:solidFill>
                   <a:srgbClr val="065A82"/>
                 </a:solidFill>
@@ -46853,8 +47512,8 @@
         </p:nvSpPr>
         <p:spPr>
           <a:xfrm>
-            <a:off x="3593591" y="3255264"/>
-            <a:ext cx="7854696" cy="548640"/>
+            <a:off x="3593591" y="3712464"/>
+            <a:ext cx="7854696" cy="758952"/>
           </a:xfrm>
           <a:prstGeom prst="rect">
             <a:avLst/>
@@ -46869,11 +47528,11 @@
           <a:p>
             <a:pPr algn="l">
               <a:lnSpc>
-                <a:spcPct val="112000"/>
-              </a:lnSpc>
-            </a:pPr>
-            <a:r>
-              <a:rPr sz="1250" b="0" i="0">
+                <a:spcPct val="122000"/>
+              </a:lnSpc>
+            </a:pPr>
+            <a:r>
+              <a:rPr sz="1350" b="0" i="0">
                 <a:solidFill>
                   <a:srgbClr val="21295C"/>
                 </a:solidFill>
@@ -46892,12 +47551,12 @@
         </p:nvSpPr>
         <p:spPr>
           <a:xfrm>
-            <a:off x="3337560" y="4078224"/>
-            <a:ext cx="8366760" cy="1078992"/>
+            <a:off x="3337560" y="4846320"/>
+            <a:ext cx="8366760" cy="1417320"/>
           </a:xfrm>
           <a:prstGeom prst="roundRect">
             <a:avLst>
-              <a:gd name="adj" fmla="val 22000"/>
+              <a:gd name="adj" fmla="val 21505"/>
             </a:avLst>
           </a:prstGeom>
           <a:solidFill>
@@ -46940,8 +47599,8 @@
         </p:nvSpPr>
         <p:spPr>
           <a:xfrm>
-            <a:off x="3593591" y="4197096"/>
-            <a:ext cx="7854696" cy="292608"/>
+            <a:off x="3593591" y="4992624"/>
+            <a:ext cx="7854696" cy="310896"/>
           </a:xfrm>
           <a:prstGeom prst="rect">
             <a:avLst/>
@@ -46960,7 +47619,7 @@
               </a:lnSpc>
             </a:pPr>
             <a:r>
-              <a:rPr sz="1400" b="1" i="0">
+              <a:rPr sz="1500" b="1" i="0">
                 <a:solidFill>
                   <a:srgbClr val="065A82"/>
                 </a:solidFill>
@@ -46979,8 +47638,8 @@
         </p:nvSpPr>
         <p:spPr>
           <a:xfrm>
-            <a:off x="3593591" y="4517136"/>
-            <a:ext cx="7854696" cy="548640"/>
+            <a:off x="3593591" y="5358383"/>
+            <a:ext cx="7854696" cy="758952"/>
           </a:xfrm>
           <a:prstGeom prst="rect">
             <a:avLst/>
@@ -46995,11 +47654,11 @@
           <a:p>
             <a:pPr algn="l">
               <a:lnSpc>
-                <a:spcPct val="112000"/>
-              </a:lnSpc>
-            </a:pPr>
-            <a:r>
-              <a:rPr sz="1250" b="0" i="0">
+                <a:spcPct val="122000"/>
+              </a:lnSpc>
+            </a:pPr>
+            <a:r>
+              <a:rPr sz="1350" b="0" i="0">
                 <a:solidFill>
                   <a:srgbClr val="21295C"/>
                 </a:solidFill>
@@ -47470,8 +48129,8 @@
         </p:nvSpPr>
         <p:spPr>
           <a:xfrm>
-            <a:off x="2606039" y="3922776"/>
-            <a:ext cx="1280160" cy="475488"/>
+            <a:off x="2194560" y="3922776"/>
+            <a:ext cx="2103120" cy="475488"/>
           </a:xfrm>
           <a:prstGeom prst="roundRect">
             <a:avLst>
@@ -47518,8 +48177,8 @@
         </p:nvSpPr>
         <p:spPr>
           <a:xfrm>
-            <a:off x="2606039" y="3922776"/>
-            <a:ext cx="1280160" cy="475488"/>
+            <a:off x="2194560" y="3922776"/>
+            <a:ext cx="2103120" cy="475488"/>
           </a:xfrm>
           <a:prstGeom prst="rect">
             <a:avLst/>
@@ -47538,13 +48197,13 @@
               </a:lnSpc>
             </a:pPr>
             <a:r>
-              <a:rPr sz="1150" b="1" i="0">
+              <a:rPr sz="1050" b="1" i="0">
                 <a:solidFill>
                   <a:srgbClr val="21295C"/>
                 </a:solidFill>
                 <a:latin typeface="DejaVu Sans"/>
               </a:rPr>
-              <a:t>профинансированы</a:t>
+              <a:t>профинансировано</a:t>
             </a:r>
           </a:p>
         </p:txBody>
@@ -49424,8 +50083,8 @@
         </p:nvSpPr>
         <p:spPr>
           <a:xfrm>
-            <a:off x="502920" y="365760"/>
-            <a:ext cx="11247120" cy="777240"/>
+            <a:off x="502920" y="256032"/>
+            <a:ext cx="11247120" cy="658368"/>
           </a:xfrm>
           <a:prstGeom prst="rect">
             <a:avLst/>
@@ -49463,8 +50122,167 @@
         </p:nvSpPr>
         <p:spPr>
           <a:xfrm>
-            <a:off x="502920" y="1463040"/>
-            <a:ext cx="2514600" cy="1417320"/>
+            <a:off x="502920" y="1097280"/>
+            <a:ext cx="11201400" cy="2880360"/>
+          </a:xfrm>
+          <a:prstGeom prst="roundRect">
+            <a:avLst>
+              <a:gd name="adj" fmla="val 10582"/>
+            </a:avLst>
+          </a:prstGeom>
+          <a:solidFill>
+            <a:srgbClr val="F4F7FA"/>
+          </a:solidFill>
+          <a:ln w="25400">
+            <a:solidFill>
+              <a:srgbClr val="F0AB00"/>
+            </a:solidFill>
+          </a:ln>
+          <a:effectLst/>
+        </p:spPr>
+        <p:style>
+          <a:lnRef idx="1">
+            <a:schemeClr val="accent1"/>
+          </a:lnRef>
+          <a:fillRef idx="3">
+            <a:schemeClr val="accent1"/>
+          </a:fillRef>
+          <a:effectRef idx="2">
+            <a:schemeClr val="accent1"/>
+          </a:effectRef>
+          <a:fontRef idx="minor">
+            <a:schemeClr val="lt1"/>
+          </a:fontRef>
+        </p:style>
+        <p:txBody>
+          <a:bodyPr rtlCol="0" anchor="ctr"/>
+          <a:lstStyle/>
+          <a:p>
+            <a:pPr algn="ctr"/>
+          </a:p>
+        </p:txBody>
+      </p:sp>
+      <p:pic>
+        <p:nvPicPr>
+          <p:cNvPr id="4" name="Picture 3" descr="c-mit-funnel.png"/>
+          <p:cNvPicPr>
+            <a:picLocks noChangeAspect="1"/>
+          </p:cNvPicPr>
+          <p:nvPr/>
+        </p:nvPicPr>
+        <p:blipFill>
+          <a:blip r:embed="rId2"/>
+          <a:stretch>
+            <a:fillRect/>
+          </a:stretch>
+        </p:blipFill>
+        <p:spPr>
+          <a:xfrm>
+            <a:off x="3297040" y="1280160"/>
+            <a:ext cx="5613159" cy="2514600"/>
+          </a:xfrm>
+          <a:prstGeom prst="rect">
+            <a:avLst/>
+          </a:prstGeom>
+        </p:spPr>
+      </p:pic>
+      <p:sp>
+        <p:nvSpPr>
+          <p:cNvPr id="5" name="Rounded Rectangle 4"/>
+          <p:cNvSpPr/>
+          <p:nvPr/>
+        </p:nvSpPr>
+        <p:spPr>
+          <a:xfrm>
+            <a:off x="502920" y="4114800"/>
+            <a:ext cx="11201400" cy="658368"/>
+          </a:xfrm>
+          <a:prstGeom prst="roundRect">
+            <a:avLst>
+              <a:gd name="adj" fmla="val 10000"/>
+            </a:avLst>
+          </a:prstGeom>
+          <a:solidFill>
+            <a:srgbClr val="FDF3DC"/>
+          </a:solidFill>
+          <a:ln w="19050">
+            <a:solidFill>
+              <a:srgbClr val="F0AB00"/>
+            </a:solidFill>
+          </a:ln>
+          <a:effectLst/>
+        </p:spPr>
+        <p:style>
+          <a:lnRef idx="1">
+            <a:schemeClr val="accent1"/>
+          </a:lnRef>
+          <a:fillRef idx="3">
+            <a:schemeClr val="accent1"/>
+          </a:fillRef>
+          <a:effectRef idx="2">
+            <a:schemeClr val="accent1"/>
+          </a:effectRef>
+          <a:fontRef idx="minor">
+            <a:schemeClr val="lt1"/>
+          </a:fontRef>
+        </p:style>
+        <p:txBody>
+          <a:bodyPr rtlCol="0" anchor="ctr"/>
+          <a:lstStyle/>
+          <a:p>
+            <a:pPr algn="ctr"/>
+          </a:p>
+        </p:txBody>
+      </p:sp>
+      <p:sp>
+        <p:nvSpPr>
+          <p:cNvPr id="6" name="TextBox 5"/>
+          <p:cNvSpPr txBox="1"/>
+          <p:nvPr/>
+        </p:nvSpPr>
+        <p:spPr>
+          <a:xfrm>
+            <a:off x="722376" y="4169663"/>
+            <a:ext cx="10762488" cy="548640"/>
+          </a:xfrm>
+          <a:prstGeom prst="rect">
+            <a:avLst/>
+          </a:prstGeom>
+          <a:noFill/>
+        </p:spPr>
+        <p:txBody>
+          <a:bodyPr wrap="square" lIns="0" rIns="0" tIns="0" bIns="0" anchor="ctr">
+            <a:spAutoFit/>
+          </a:bodyPr>
+          <a:lstStyle/>
+          <a:p>
+            <a:pPr algn="ctr">
+              <a:lnSpc>
+                <a:spcPct val="120000"/>
+              </a:lnSpc>
+            </a:pPr>
+            <a:r>
+              <a:rPr sz="1400" b="1" i="0">
+                <a:solidFill>
+                  <a:srgbClr val="21295C"/>
+                </a:solidFill>
+                <a:latin typeface="DejaVu Sans"/>
+              </a:rPr>
+              <a:t>«95% провал» — заголовок, который не переживает калибровку: успех среди дошедших до пилота — 25%, не 5%.</a:t>
+            </a:r>
+          </a:p>
+        </p:txBody>
+      </p:sp>
+      <p:sp>
+        <p:nvSpPr>
+          <p:cNvPr id="7" name="Rounded Rectangle 6"/>
+          <p:cNvSpPr/>
+          <p:nvPr/>
+        </p:nvSpPr>
+        <p:spPr>
+          <a:xfrm>
+            <a:off x="502920" y="4892040"/>
+            <a:ext cx="2331720" cy="1417320"/>
           </a:xfrm>
           <a:prstGeom prst="roundRect">
             <a:avLst>
@@ -49505,166 +50323,7 @@
       </p:sp>
       <p:pic>
         <p:nvPicPr>
-          <p:cNvPr id="4" name="Picture 3" descr="s47-mit-real-source.png"/>
-          <p:cNvPicPr>
-            <a:picLocks noChangeAspect="1"/>
-          </p:cNvPicPr>
-          <p:nvPr/>
-        </p:nvPicPr>
-        <p:blipFill>
-          <a:blip r:embed="rId2"/>
-          <a:stretch>
-            <a:fillRect/>
-          </a:stretch>
-        </p:blipFill>
-        <p:spPr>
-          <a:xfrm>
-            <a:off x="630936" y="1656464"/>
-            <a:ext cx="2258568" cy="1030472"/>
-          </a:xfrm>
-          <a:prstGeom prst="rect">
-            <a:avLst/>
-          </a:prstGeom>
-        </p:spPr>
-      </p:pic>
-      <p:sp>
-        <p:nvSpPr>
-          <p:cNvPr id="5" name="Rounded Rectangle 4"/>
-          <p:cNvSpPr/>
-          <p:nvPr/>
-        </p:nvSpPr>
-        <p:spPr>
-          <a:xfrm>
-            <a:off x="502920" y="3017520"/>
-            <a:ext cx="2514600" cy="1920240"/>
-          </a:xfrm>
-          <a:prstGeom prst="roundRect">
-            <a:avLst>
-              <a:gd name="adj" fmla="val 15873"/>
-            </a:avLst>
-          </a:prstGeom>
-          <a:solidFill>
-            <a:srgbClr val="FDF3DC"/>
-          </a:solidFill>
-          <a:ln w="20320">
-            <a:solidFill>
-              <a:srgbClr val="F0AB00"/>
-            </a:solidFill>
-          </a:ln>
-          <a:effectLst/>
-        </p:spPr>
-        <p:style>
-          <a:lnRef idx="1">
-            <a:schemeClr val="accent1"/>
-          </a:lnRef>
-          <a:fillRef idx="3">
-            <a:schemeClr val="accent1"/>
-          </a:fillRef>
-          <a:effectRef idx="2">
-            <a:schemeClr val="accent1"/>
-          </a:effectRef>
-          <a:fontRef idx="minor">
-            <a:schemeClr val="lt1"/>
-          </a:fontRef>
-        </p:style>
-        <p:txBody>
-          <a:bodyPr rtlCol="0" anchor="ctr"/>
-          <a:lstStyle/>
-          <a:p>
-            <a:pPr algn="ctr"/>
-          </a:p>
-        </p:txBody>
-      </p:sp>
-      <p:sp>
-        <p:nvSpPr>
-          <p:cNvPr id="6" name="TextBox 5"/>
-          <p:cNvSpPr txBox="1"/>
-          <p:nvPr/>
-        </p:nvSpPr>
-        <p:spPr>
-          <a:xfrm>
-            <a:off x="640080" y="3154680"/>
-            <a:ext cx="2240280" cy="1691640"/>
-          </a:xfrm>
-          <a:prstGeom prst="rect">
-            <a:avLst/>
-          </a:prstGeom>
-          <a:noFill/>
-        </p:spPr>
-        <p:txBody>
-          <a:bodyPr wrap="square" lIns="0" rIns="0" tIns="0" bIns="0" anchor="ctr">
-            <a:spAutoFit/>
-          </a:bodyPr>
-          <a:lstStyle/>
-          <a:p>
-            <a:pPr algn="l">
-              <a:lnSpc>
-                <a:spcPct val="118000"/>
-              </a:lnSpc>
-            </a:pPr>
-            <a:r>
-              <a:rPr sz="1200" b="1" i="0">
-                <a:solidFill>
-                  <a:srgbClr val="21295C"/>
-                </a:solidFill>
-                <a:latin typeface="DejaVu Sans"/>
-              </a:rPr>
-              <a:t>«95% провал» — заголовок, который не переживает калибровку: успех среди дошедших до пилота — 25%, не 5%.</a:t>
-            </a:r>
-          </a:p>
-        </p:txBody>
-      </p:sp>
-      <p:sp>
-        <p:nvSpPr>
-          <p:cNvPr id="7" name="Rounded Rectangle 6"/>
-          <p:cNvSpPr/>
-          <p:nvPr/>
-        </p:nvSpPr>
-        <p:spPr>
-          <a:xfrm>
-            <a:off x="3246120" y="1463040"/>
-            <a:ext cx="3977639" cy="3474720"/>
-          </a:xfrm>
-          <a:prstGeom prst="roundRect">
-            <a:avLst>
-              <a:gd name="adj" fmla="val 8771"/>
-            </a:avLst>
-          </a:prstGeom>
-          <a:solidFill>
-            <a:srgbClr val="F4F7FA"/>
-          </a:solidFill>
-          <a:ln w="19050">
-            <a:solidFill>
-              <a:srgbClr val="1C7293"/>
-            </a:solidFill>
-          </a:ln>
-          <a:effectLst/>
-        </p:spPr>
-        <p:style>
-          <a:lnRef idx="1">
-            <a:schemeClr val="accent1"/>
-          </a:lnRef>
-          <a:fillRef idx="3">
-            <a:schemeClr val="accent1"/>
-          </a:fillRef>
-          <a:effectRef idx="2">
-            <a:schemeClr val="accent1"/>
-          </a:effectRef>
-          <a:fontRef idx="minor">
-            <a:schemeClr val="lt1"/>
-          </a:fontRef>
-        </p:style>
-        <p:txBody>
-          <a:bodyPr rtlCol="0" anchor="ctr"/>
-          <a:lstStyle/>
-          <a:p>
-            <a:pPr algn="ctr"/>
-          </a:p>
-        </p:txBody>
-      </p:sp>
-      <p:pic>
-        <p:nvPicPr>
-          <p:cNvPr id="8" name="Picture 7" descr="c-mit-funnel.png"/>
+          <p:cNvPr id="8" name="Picture 7" descr="s47-mit-real-source.png"/>
           <p:cNvPicPr>
             <a:picLocks noChangeAspect="1"/>
           </p:cNvPicPr>
@@ -49678,8 +50337,8 @@
         </p:blipFill>
         <p:spPr>
           <a:xfrm>
-            <a:off x="3429000" y="2414229"/>
-            <a:ext cx="3611880" cy="1618061"/>
+            <a:off x="612648" y="5118839"/>
+            <a:ext cx="2112263" cy="963720"/>
           </a:xfrm>
           <a:prstGeom prst="rect">
             <a:avLst/>
@@ -49694,18 +50353,18 @@
         </p:nvSpPr>
         <p:spPr>
           <a:xfrm>
-            <a:off x="7452360" y="1463040"/>
-            <a:ext cx="4251960" cy="3474720"/>
+            <a:off x="2971800" y="4892040"/>
+            <a:ext cx="4892040" cy="1417320"/>
           </a:xfrm>
           <a:prstGeom prst="roundRect">
             <a:avLst>
-              <a:gd name="adj" fmla="val 8771"/>
+              <a:gd name="adj" fmla="val 21505"/>
             </a:avLst>
           </a:prstGeom>
           <a:solidFill>
             <a:srgbClr val="F4F7FA"/>
           </a:solidFill>
-          <a:ln w="19050">
+          <a:ln w="17780">
             <a:solidFill>
               <a:srgbClr val="065A82"/>
             </a:solidFill>
@@ -49742,8 +50401,8 @@
         </p:nvSpPr>
         <p:spPr>
           <a:xfrm>
-            <a:off x="7680960" y="1600200"/>
-            <a:ext cx="3794760" cy="457200"/>
+            <a:off x="3182112" y="4983480"/>
+            <a:ext cx="4480560" cy="292608"/>
           </a:xfrm>
           <a:prstGeom prst="rect">
             <a:avLst/>
@@ -49758,11 +50417,11 @@
           <a:p>
             <a:pPr algn="l">
               <a:lnSpc>
-                <a:spcPct val="110000"/>
-              </a:lnSpc>
-            </a:pPr>
-            <a:r>
-              <a:rPr sz="1300" b="1" i="0">
+                <a:spcPct val="100000"/>
+              </a:lnSpc>
+            </a:pPr>
+            <a:r>
+              <a:rPr sz="1150" b="1" i="0">
                 <a:solidFill>
                   <a:srgbClr val="065A82"/>
                 </a:solidFill>
@@ -49781,8 +50440,8 @@
         </p:nvSpPr>
         <p:spPr>
           <a:xfrm>
-            <a:off x="7680960" y="2240280"/>
-            <a:ext cx="3794760" cy="566928"/>
+            <a:off x="3182112" y="5321808"/>
+            <a:ext cx="4480560" cy="237744"/>
           </a:xfrm>
           <a:prstGeom prst="rect">
             <a:avLst/>
@@ -49797,11 +50456,11 @@
           <a:p>
             <a:pPr algn="l">
               <a:lnSpc>
-                <a:spcPct val="110000"/>
-              </a:lnSpc>
-            </a:pPr>
-            <a:r>
-              <a:rPr sz="1250" b="0" i="0">
+                <a:spcPct val="100000"/>
+              </a:lnSpc>
+            </a:pPr>
+            <a:r>
+              <a:rPr sz="1000" b="0" i="0">
                 <a:solidFill>
                   <a:srgbClr val="21295C"/>
                 </a:solidFill>
@@ -49820,8 +50479,8 @@
         </p:nvSpPr>
         <p:spPr>
           <a:xfrm>
-            <a:off x="7680960" y="2843784"/>
-            <a:ext cx="3794760" cy="566928"/>
+            <a:off x="3182112" y="5568696"/>
+            <a:ext cx="4480560" cy="237744"/>
           </a:xfrm>
           <a:prstGeom prst="rect">
             <a:avLst/>
@@ -49836,11 +50495,11 @@
           <a:p>
             <a:pPr algn="l">
               <a:lnSpc>
-                <a:spcPct val="110000"/>
-              </a:lnSpc>
-            </a:pPr>
-            <a:r>
-              <a:rPr sz="1250" b="0" i="0">
+                <a:spcPct val="100000"/>
+              </a:lnSpc>
+            </a:pPr>
+            <a:r>
+              <a:rPr sz="1000" b="0" i="0">
                 <a:solidFill>
                   <a:srgbClr val="21295C"/>
                 </a:solidFill>
@@ -49859,8 +50518,8 @@
         </p:nvSpPr>
         <p:spPr>
           <a:xfrm>
-            <a:off x="7680960" y="3447288"/>
-            <a:ext cx="3794760" cy="566928"/>
+            <a:off x="3182112" y="5815584"/>
+            <a:ext cx="4480560" cy="237744"/>
           </a:xfrm>
           <a:prstGeom prst="rect">
             <a:avLst/>
@@ -49875,11 +50534,11 @@
           <a:p>
             <a:pPr algn="l">
               <a:lnSpc>
-                <a:spcPct val="110000"/>
-              </a:lnSpc>
-            </a:pPr>
-            <a:r>
-              <a:rPr sz="1250" b="0" i="0">
+                <a:spcPct val="100000"/>
+              </a:lnSpc>
+            </a:pPr>
+            <a:r>
+              <a:rPr sz="1000" b="0" i="0">
                 <a:solidFill>
                   <a:srgbClr val="21295C"/>
                 </a:solidFill>
@@ -49898,8 +50557,8 @@
         </p:nvSpPr>
         <p:spPr>
           <a:xfrm>
-            <a:off x="7680960" y="4050791"/>
-            <a:ext cx="3794760" cy="566928"/>
+            <a:off x="3182112" y="6062472"/>
+            <a:ext cx="4480560" cy="237744"/>
           </a:xfrm>
           <a:prstGeom prst="rect">
             <a:avLst/>
@@ -49914,17 +50573,17 @@
           <a:p>
             <a:pPr algn="l">
               <a:lnSpc>
-                <a:spcPct val="110000"/>
-              </a:lnSpc>
-            </a:pPr>
-            <a:r>
-              <a:rPr sz="1250" b="0" i="0">
+                <a:spcPct val="100000"/>
+              </a:lnSpc>
+            </a:pPr>
+            <a:r>
+              <a:rPr sz="1000" b="0" i="0">
                 <a:solidFill>
                   <a:srgbClr val="21295C"/>
                 </a:solidFill>
                 <a:latin typeface="DejaVu Sans"/>
               </a:rPr>
-              <a:t>4. Прослеживается ли к первоисточнику с методологией?</a:t>
+              <a:t>4. Прослеживается ли к первоисточнику?</a:t>
             </a:r>
           </a:p>
         </p:txBody>
@@ -49937,12 +50596,12 @@
         </p:nvSpPr>
         <p:spPr>
           <a:xfrm>
-            <a:off x="502920" y="5074920"/>
-            <a:ext cx="11201400" cy="566928"/>
+            <a:off x="8001000" y="4892040"/>
+            <a:ext cx="3703320" cy="1417320"/>
           </a:xfrm>
           <a:prstGeom prst="roundRect">
             <a:avLst>
-              <a:gd name="adj" fmla="val 10000"/>
+              <a:gd name="adj" fmla="val 8000"/>
             </a:avLst>
           </a:prstGeom>
           <a:solidFill>
@@ -49985,8 +50644,8 @@
         </p:nvSpPr>
         <p:spPr>
           <a:xfrm>
-            <a:off x="722376" y="5129783"/>
-            <a:ext cx="10762488" cy="457200"/>
+            <a:off x="8183879" y="4983480"/>
+            <a:ext cx="3337560" cy="1234440"/>
           </a:xfrm>
           <a:prstGeom prst="rect">
             <a:avLst/>
@@ -50001,11 +50660,11 @@
           <a:p>
             <a:pPr algn="l">
               <a:lnSpc>
-                <a:spcPct val="120000"/>
-              </a:lnSpc>
-            </a:pPr>
-            <a:r>
-              <a:rPr sz="1200" b="1" i="0">
+                <a:spcPct val="115000"/>
+              </a:lnSpc>
+            </a:pPr>
+            <a:r>
+              <a:rPr sz="1050" b="1" i="0">
                 <a:solidFill>
                   <a:srgbClr val="21295C"/>
                 </a:solidFill>
@@ -54358,7 +55017,7 @@
         <p:spPr>
           <a:xfrm>
             <a:off x="502920" y="1554480"/>
-            <a:ext cx="2514600" cy="3611880"/>
+            <a:ext cx="2514600" cy="4709160"/>
           </a:xfrm>
           <a:prstGeom prst="roundRect">
             <a:avLst>
@@ -54413,7 +55072,7 @@
         </p:blipFill>
         <p:spPr>
           <a:xfrm>
-            <a:off x="1234440" y="2331720"/>
+            <a:off x="1234440" y="3249777"/>
             <a:ext cx="1051560" cy="1051560"/>
           </a:xfrm>
           <a:prstGeom prst="rect">
@@ -54429,7 +55088,7 @@
         </p:nvSpPr>
         <p:spPr>
           <a:xfrm>
-            <a:off x="777240" y="4160520"/>
+            <a:off x="777240" y="5715000"/>
             <a:ext cx="1965960" cy="402336"/>
           </a:xfrm>
           <a:prstGeom prst="roundRect">
@@ -54485,11 +55144,11 @@
         <p:spPr>
           <a:xfrm>
             <a:off x="3337560" y="1554480"/>
-            <a:ext cx="8366760" cy="1078992"/>
+            <a:ext cx="8366760" cy="1417320"/>
           </a:xfrm>
           <a:prstGeom prst="roundRect">
             <a:avLst>
-              <a:gd name="adj" fmla="val 22000"/>
+              <a:gd name="adj" fmla="val 21505"/>
             </a:avLst>
           </a:prstGeom>
           <a:solidFill>
@@ -54532,8 +55191,8 @@
         </p:nvSpPr>
         <p:spPr>
           <a:xfrm>
-            <a:off x="3593591" y="1673352"/>
-            <a:ext cx="7854696" cy="292608"/>
+            <a:off x="3593591" y="1700784"/>
+            <a:ext cx="7854696" cy="310896"/>
           </a:xfrm>
           <a:prstGeom prst="rect">
             <a:avLst/>
@@ -54552,7 +55211,7 @@
               </a:lnSpc>
             </a:pPr>
             <a:r>
-              <a:rPr sz="1400" b="1" i="0">
+              <a:rPr sz="1500" b="1" i="0">
                 <a:solidFill>
                   <a:srgbClr val="F0AB00"/>
                 </a:solidFill>
@@ -54571,8 +55230,8 @@
         </p:nvSpPr>
         <p:spPr>
           <a:xfrm>
-            <a:off x="3593591" y="1993391"/>
-            <a:ext cx="7854696" cy="548640"/>
+            <a:off x="3593591" y="2066543"/>
+            <a:ext cx="7854696" cy="758952"/>
           </a:xfrm>
           <a:prstGeom prst="rect">
             <a:avLst/>
@@ -54587,11 +55246,11 @@
           <a:p>
             <a:pPr algn="l">
               <a:lnSpc>
-                <a:spcPct val="112000"/>
-              </a:lnSpc>
-            </a:pPr>
-            <a:r>
-              <a:rPr sz="1250" b="0" i="0">
+                <a:spcPct val="122000"/>
+              </a:lnSpc>
+            </a:pPr>
+            <a:r>
+              <a:rPr sz="1350" b="0" i="0">
                 <a:solidFill>
                   <a:srgbClr val="21295C"/>
                 </a:solidFill>
@@ -54610,12 +55269,12 @@
         </p:nvSpPr>
         <p:spPr>
           <a:xfrm>
-            <a:off x="3337560" y="2816352"/>
-            <a:ext cx="8366760" cy="1078992"/>
+            <a:off x="3337560" y="3200400"/>
+            <a:ext cx="8366760" cy="1417320"/>
           </a:xfrm>
           <a:prstGeom prst="roundRect">
             <a:avLst>
-              <a:gd name="adj" fmla="val 22000"/>
+              <a:gd name="adj" fmla="val 21505"/>
             </a:avLst>
           </a:prstGeom>
           <a:solidFill>
@@ -54658,8 +55317,8 @@
         </p:nvSpPr>
         <p:spPr>
           <a:xfrm>
-            <a:off x="3593591" y="2935224"/>
-            <a:ext cx="7854696" cy="292608"/>
+            <a:off x="3593591" y="3346704"/>
+            <a:ext cx="7854696" cy="310896"/>
           </a:xfrm>
           <a:prstGeom prst="rect">
             <a:avLst/>
@@ -54678,7 +55337,7 @@
               </a:lnSpc>
             </a:pPr>
             <a:r>
-              <a:rPr sz="1400" b="1" i="0">
+              <a:rPr sz="1500" b="1" i="0">
                 <a:solidFill>
                   <a:srgbClr val="065A82"/>
                 </a:solidFill>
@@ -54697,8 +55356,8 @@
         </p:nvSpPr>
         <p:spPr>
           <a:xfrm>
-            <a:off x="3593591" y="3255264"/>
-            <a:ext cx="7854696" cy="548640"/>
+            <a:off x="3593591" y="3712464"/>
+            <a:ext cx="7854696" cy="758952"/>
           </a:xfrm>
           <a:prstGeom prst="rect">
             <a:avLst/>
@@ -54713,11 +55372,11 @@
           <a:p>
             <a:pPr algn="l">
               <a:lnSpc>
-                <a:spcPct val="112000"/>
-              </a:lnSpc>
-            </a:pPr>
-            <a:r>
-              <a:rPr sz="1250" b="0" i="0">
+                <a:spcPct val="122000"/>
+              </a:lnSpc>
+            </a:pPr>
+            <a:r>
+              <a:rPr sz="1350" b="0" i="0">
                 <a:solidFill>
                   <a:srgbClr val="21295C"/>
                 </a:solidFill>
@@ -54736,12 +55395,12 @@
         </p:nvSpPr>
         <p:spPr>
           <a:xfrm>
-            <a:off x="3337560" y="4078224"/>
-            <a:ext cx="8366760" cy="1078992"/>
+            <a:off x="3337560" y="4846320"/>
+            <a:ext cx="8366760" cy="1417320"/>
           </a:xfrm>
           <a:prstGeom prst="roundRect">
             <a:avLst>
-              <a:gd name="adj" fmla="val 22000"/>
+              <a:gd name="adj" fmla="val 21505"/>
             </a:avLst>
           </a:prstGeom>
           <a:solidFill>
@@ -54784,8 +55443,8 @@
         </p:nvSpPr>
         <p:spPr>
           <a:xfrm>
-            <a:off x="3593591" y="4197096"/>
-            <a:ext cx="7854696" cy="292608"/>
+            <a:off x="3593591" y="4992624"/>
+            <a:ext cx="7854696" cy="310896"/>
           </a:xfrm>
           <a:prstGeom prst="rect">
             <a:avLst/>
@@ -54804,7 +55463,7 @@
               </a:lnSpc>
             </a:pPr>
             <a:r>
-              <a:rPr sz="1400" b="1" i="0">
+              <a:rPr sz="1500" b="1" i="0">
                 <a:solidFill>
                   <a:srgbClr val="065A82"/>
                 </a:solidFill>
@@ -54823,8 +55482,8 @@
         </p:nvSpPr>
         <p:spPr>
           <a:xfrm>
-            <a:off x="3593591" y="4517136"/>
-            <a:ext cx="7854696" cy="548640"/>
+            <a:off x="3593591" y="5358383"/>
+            <a:ext cx="7854696" cy="758952"/>
           </a:xfrm>
           <a:prstGeom prst="rect">
             <a:avLst/>
@@ -54839,11 +55498,11 @@
           <a:p>
             <a:pPr algn="l">
               <a:lnSpc>
-                <a:spcPct val="112000"/>
-              </a:lnSpc>
-            </a:pPr>
-            <a:r>
-              <a:rPr sz="1250" b="0" i="0">
+                <a:spcPct val="122000"/>
+              </a:lnSpc>
+            </a:pPr>
+            <a:r>
+              <a:rPr sz="1350" b="0" i="0">
                 <a:solidFill>
                   <a:srgbClr val="21295C"/>
                 </a:solidFill>

--- a/library/lectures/lec-05/rendered/lec-05.pptx
+++ b/library/lectures/lec-05/rendered/lec-05.pptx
@@ -572,7 +572,17 @@
           </a:p>
           <a:p>
             <a:r>
-              <a:t>Источник: Anthropic internal PR metrics ; MIT Project NANDA 'The GenAI Divide' (July 2025, v0.1, unreviewed)</a:t>
+              <a:t>Источники:</a:t>
+            </a:r>
+          </a:p>
+          <a:p>
+            <a:r>
+              <a:t>[1] Anthropic — 2026 Agentic Coding Trends Report — внутренний опыт: недели → часы; секондари-триангулировано (PDF не парсится напрямую). https://resources.anthropic.com/2026-agentic-coding-trends-report [VFY-day-of]</a:t>
+            </a:r>
+          </a:p>
+          <a:p>
+            <a:r>
+              <a:t>[2] MIT NANDA — «The GenAI Divide» (июль 2025, v0.1) — «95% пилотов — ноль отдачи»: неревьюированный препринт, требует калибровки (см. s47). https://mlq.ai/media/quarterly_decks/v0.1_State_of_AI_in_Business_2025_Report.pdf [VFY-day-of]</a:t>
             </a:r>
           </a:p>
         </p:txBody>
@@ -655,6 +665,16 @@
               <a:t>Хорошая иллюстрация: вместо «заплатили бы вы двадцать долларов в месяц» — «сколько вы платите сегодня за ближайший аналог этой задачи». Второй вопрос якорится на реальном прошлом поведении и деньгах, которые респондент уже тратит. Ограничение метода: это техника интервью, а не метод выборки или синтеза — он не говорит, сколько людей опросить. Здесь же полезно закрепить разлом качественного и количественного исследования: качественное отвечает на вопрос «почему» при маленькой выборке и порождает гипотезы; количественное отвечает «сколько» в масштабе и проверяет уже существующую гипотезу. Это не иерархия, а разделение труда — и оно понадобится нам снова в разделе четыре.</a:t>
             </a:r>
           </a:p>
+          <a:p>
+            <a:r>
+              <a:t>Источники:</a:t>
+            </a:r>
+          </a:p>
+          <a:p>
+            <a:r>
+              <a:t>[1] Fitzpatrick — The Mom Test — 3 правила интервью: о жизни/о прошлом/обязательством, не мнением. https://www.sachinrekhi.com/p/the-mom-test-rob-fitzpatrick</a:t>
+            </a:r>
+          </a:p>
         </p:txBody>
       </p:sp>
       <p:sp>
@@ -737,7 +757,22 @@
           </a:p>
           <a:p>
             <a:r>
-              <a:t>Источник: Perplexity Deep Research; Dovetail; NN/g 2026 practitioner survey</a:t>
+              <a:t>Источники:</a:t>
+            </a:r>
+          </a:p>
+          <a:p>
+            <a:r>
+              <a:t>[1] Perplexity Deep Research — обзор для продукт-исследований — desk research: часы → минуты; необходимость проверки источника. https://www.secondtalent.com/resources/perplexity-deep-research-review/</a:t>
+            </a:r>
+          </a:p>
+          <a:p>
+            <a:r>
+              <a:t>[2] Dovetail — AI-синтез интервью — кластеризация болей в масштабе; ограничения AI-суммаризации. https://listenlabs.ai/articles/dovetail-ai-qualitative-analysis/</a:t>
+            </a:r>
+          </a:p>
+          <a:p>
+            <a:r>
+              <a:t>[3] NN/g — практический опрос 2026 — 97% исследователей используют ИИ, ~8% доверяют ИИ-персонам как данным. https://www.nngroup.com/articles/state-of-ux-2026/ [VFY-day-of]</a:t>
             </a:r>
           </a:p>
         </p:txBody>
@@ -820,6 +855,16 @@
               <a:t>Сделаем это проверяемым через три операциональных критерия. Первый: цена ошибки go/no-go высока — нужен источник, способный сказать «нет», а синтетический по построению не способен. Второй: нужно реальное прошлое, а не правдоподобное — если гипотеза о конкретном прошлом поведении, синтетическая персона его достраивает, а не помнит. Третий: нужна валидация реальным обязательством — предзаказ, депозит, интро — ИИ-заменителя здесь нет вовсе. Что явно остаётся из классики: три правила Mom Test применяются одинаково, кто бы ни задавал вопрос; гипотезо-первая дисциплина Бланка — противоядие от однокликового ИИ-дерева. Правило суммарно: чем ближе выход к необратимому решению о реальных людях, тем строже нужен реальный человек; чем дальше — тем уместнее ИИ как ускоритель черновика.</a:t>
             </a:r>
           </a:p>
+          <a:p>
+            <a:r>
+              <a:t>Источники:</a:t>
+            </a:r>
+          </a:p>
+          <a:p>
+            <a:r>
+              <a:t>[1] Torres — Continuous Discovery Habits / anti-synthetic — контрарная к хайпу позиция: против синтетических интервью и one-click AI-деревьев. https://cieden.com/podcast/teresa-torres-on-continuous-discovery-in-b2b-and-ai</a:t>
+            </a:r>
+          </a:p>
         </p:txBody>
       </p:sp>
       <p:sp>
@@ -902,7 +947,12 @@
           </a:p>
           <a:p>
             <a:r>
-              <a:t>Источник: Nielsen Norman Group, 'Synthetic Users' (updated 21 June 2024)</a:t>
+              <a:t>Источники:</a:t>
+            </a:r>
+          </a:p>
+          <a:p>
+            <a:r>
+              <a:t>[1] NN/g (Rosala &amp; Moran) — Synthetic Users — 3/7 реальных vs 7/7 синтетических на одной и той же задаче (drone-delivery). https://www.nngroup.com/articles/synthetic-users/ [VFY-day-of]</a:t>
             </a:r>
           </a:p>
         </p:txBody>
@@ -987,7 +1037,17 @@
           </a:p>
           <a:p>
             <a:r>
-              <a:t>Источник: Fortune (7 Oct 2025); Damien Charlotin, AI Hallucination Cases Database</a:t>
+              <a:t>Источники:</a:t>
+            </a:r>
+          </a:p>
+          <a:p>
+            <a:r>
+              <a:t>[1] Fortune (7 окт. 2025) — Deloitte Australia A$440k — сфабрикованные цитаты и несуществующие ссылки в отчёте правительству. https://fortune.com/2025/10/07/deloitte-ai-australia-government-report-hallucinations-technology-290000-refund</a:t>
+            </a:r>
+          </a:p>
+          <a:p>
+            <a:r>
+              <a:t>[2] Damien Charlotin — AI Hallucination Cases Database — ~712 задокументированных судебных дел с ИИ-галлюцинациями по миру. https://www.damiencharlotin.com/hallucinations/ [VFY-day-of]</a:t>
             </a:r>
           </a:p>
         </p:txBody>
@@ -1072,7 +1132,17 @@
           </a:p>
           <a:p>
             <a:r>
-              <a:t>Источник: STAT News leak (25 July 2018); MD Anderson partnership termination (Sept 2016)</a:t>
+              <a:t>Источники:</a:t>
+            </a:r>
+          </a:p>
+          <a:p>
+            <a:r>
+              <a:t>[1] STAT News — утечка внутренних документов IBM Watson — «небезопасные и некорректные» рекомендации по онкологии (25 июля 2018). https://www.statnews.com/2018/07/25/ibm-watson-recommended-unsafe-incorrect-treatments/</a:t>
+            </a:r>
+          </a:p>
+          <a:p>
+            <a:r>
+              <a:t>[2] IEEE Spectrum — как Watson переобещал и недодал — обучен на гипотетических кейсах горстки онкологов MSK, не на реальных исходах. https://spectrum.ieee.org/how-ibm-watson-overpromised-and-underdelivered-on-ai-health-care</a:t>
             </a:r>
           </a:p>
         </p:txBody>
@@ -1310,6 +1380,16 @@
               <a:t>Стадии на практике нелинейны — команды постоянно возвращаются от Deliver к Define, и это не признак провала процесса, а его нормальная работа. Держите эту рамку в голове: когда мы дойдём до первого провала раздела, вы увидите, что он случился ровно в точке первого алмаза — в решении, что мы вообще строим и для кого, — а не в технической реализации.</a:t>
             </a:r>
           </a:p>
+          <a:p>
+            <a:r>
+              <a:t>Источники:</a:t>
+            </a:r>
+          </a:p>
+          <a:p>
+            <a:r>
+              <a:t>[1] UK Design Council — The Double Diamond — Discover→Define→Develop→Deliver: два цикла дивергенции/конвергенции. https://www.designcouncil.org.uk/resources/the-double-diamond/</a:t>
+            </a:r>
+          </a:p>
         </p:txBody>
       </p:sp>
       <p:sp>
@@ -1390,6 +1470,21 @@
               <a:t>Собственный жёсткий урок Нильсена, повторяемый в индустрии как мантра: «вы не пользователь» — любой, кто близок к проекту, систематически неверно предсказывает, что запутает реального человека. Тест с одним пользователем в среднем вскрывает около тридцати одного процента проблем юзабилити; классические пять пользователей находят около восьмидесяти пяти процентов. Это необходимый противовес для следующего слайда: сколько бы ИИ ни ускорил генерацию прототипа, поставить артефакт перед реальным человеком и наблюдать его реальную растерянность — не имеет ИИ-заменителя.</a:t>
             </a:r>
           </a:p>
+          <a:p>
+            <a:r>
+              <a:t>Источники:</a:t>
+            </a:r>
+          </a:p>
+          <a:p>
+            <a:r>
+              <a:t>[1] Nielsen — 10 usability heuristics — полный список 10 эвристик с примерами (1994, ред. 2020). https://blog.uxtweak.com/usability-heuristics/</a:t>
+            </a:r>
+          </a:p>
+          <a:p>
+            <a:r>
+              <a:t>[2] Nielsen — «you are not the user» — предостережение об атипичности инсайдеров-дизайнеров. https://medium.com/hippo-digital/you-are-not-the-user-but-what-about-when-you-are-35abe4006b8</a:t>
+            </a:r>
+          </a:p>
         </p:txBody>
       </p:sp>
       <p:sp>
@@ -1547,7 +1642,17 @@
           </a:p>
           <a:p>
             <a:r>
-              <a:t>Источник: v0 by Vercel; Figma Make; Google Stitch; bolt.new [VFY-day-of: версии инструментов]</a:t>
+              <a:t>Источники:</a:t>
+            </a:r>
+          </a:p>
+          <a:p>
+            <a:r>
+              <a:t>[1] Figma — AI-инструменты дизайна 2026 — Figma Make, v0, Stitch, bolt.new — 2-4 направления за минуты. https://www.figma.com/resource-library/ai-design-tools/ [VFY-day-of]</a:t>
+            </a:r>
+          </a:p>
+          <a:p>
+            <a:r>
+              <a:t>[2] Google Stitch (ex-Galileo AI) — приобретение Google, май 2025 — быстро меняющийся ландшафт инструментов. https://www.banani.co/blog/galileo-ai-features-and-alternatives [VFY-day-of]</a:t>
             </a:r>
           </a:p>
         </p:txBody>
@@ -1632,7 +1737,12 @@
           </a:p>
           <a:p>
             <a:r>
-              <a:t>Источник: 'Generated Inaccessible: Measuring WCAG Violations in AI UI Design Tools', ACM Web4All 2026</a:t>
+              <a:t>Источники:</a:t>
+            </a:r>
+          </a:p>
+          <a:p>
+            <a:r>
+              <a:t>[1] ACM Web4All 2026 — Generated Inaccessible — 21 880 оценок WCAG на ИИ-интерфейсах, 29,0% соответствие (контраст 26,8%, цвет 19,2%). https://dl.acm.org/doi/10.1145/3800424.3800430 [VFY-day-of]</a:t>
             </a:r>
           </a:p>
         </p:txBody>
@@ -1717,7 +1827,17 @@
           </a:p>
           <a:p>
             <a:r>
-              <a:t>Источник: Washington Post (24 Oct 2024); CBS News (Jan 2026)</a:t>
+              <a:t>Источники:</a:t>
+            </a:r>
+          </a:p>
+          <a:p>
+            <a:r>
+              <a:t>[1] Washington Post (24 окт. 2024) — гибель 14-летнего пользователя после месяцев общения с ИИ-персонажем. https://www.washingtonpost.com/nation/2024/10/24/character-ai-lawsuit-suicide/</a:t>
+            </a:r>
+          </a:p>
+          <a:p>
+            <a:r>
+              <a:t>[2] CBS News (янв. 2026) — урегулирование — Character.AI/Google — защита добавлена ретрофитом после трагедии. https://www.cbsnews.com/news/google-settle-lawsuit-florida-teens-suicide-character-ai-chatbot/</a:t>
             </a:r>
           </a:p>
         </p:txBody>
@@ -1802,7 +1922,12 @@
           </a:p>
           <a:p>
             <a:r>
-              <a:t>Источник: EEOC settlement (9 Aug 2023) — $365,000</a:t>
+              <a:t>Источники:</a:t>
+            </a:r>
+          </a:p>
+          <a:p>
+            <a:r>
+              <a:t>[1] EEOC (9 авг. 2023) — iTutorGroup — первое урегулирование по ИИ-дискриминации: $365 000, автоотказ по возрасту. https://www.eeoc.gov/newsroom/itutorgroup-pay-365000-settle-eeoc-discriminatory-hiring-suit</a:t>
             </a:r>
           </a:p>
         </p:txBody>
@@ -2040,6 +2165,21 @@
               <a:t>MVP Эрика Райса определяется обучением, а не отгрузкой — быстрый способ пройти цикл построить-измерить-научиться. Stage-Gate Роберта Купера — пять стадий, каждой предшествует гейт go/kill/hold/recycle по заранее согласованным критериям; осознанная цель — принудить к дисциплинированным решениям об остановке рано, до капиталоёмких трат — «воронка, а не туннель». Go/no-go гейт готовности к запуску требует конкретно: фазы раскатки с критериями перехода, пороги провала, записанные числом заранее, план отката с назначенным человеком. Здесь снова всплывает наш сквозной приём — фальсифицируемая гипотеза, применённая к решению о релизе. В ИИ-эру добавляется новая строка чек-листа: прошло ли это eval-гейт против reference dataset — ИИ-эквивалент набора тестов.</a:t>
             </a:r>
           </a:p>
+          <a:p>
+            <a:r>
+              <a:t>Источники:</a:t>
+            </a:r>
+          </a:p>
+          <a:p>
+            <a:r>
+              <a:t>[1] Ries — Lean Startup / MVP — MVP как обучающий инструмент, не урезанная отгрузка; риск vanity-метрик. https://effectivesoftwaredesign.com/2021/03/23/lean-startup-principles-vanity-metrics-and-actionable-metrics/</a:t>
+            </a:r>
+          </a:p>
+          <a:p>
+            <a:r>
+              <a:t>[2] Stage-Gate — история метода — go/kill-гейт: «воронка, не туннель», пороги провала заданы заранее. https://www.stage-gate.com/about/our-story-2/</a:t>
+            </a:r>
+          </a:p>
         </p:txBody>
       </p:sp>
       <p:sp>
@@ -2122,7 +2262,12 @@
           </a:p>
           <a:p>
             <a:r>
-              <a:t>Источник: Anthropic 2026 Agentic Coding Trends Report (22 Jan 2026)</a:t>
+              <a:t>Источники:</a:t>
+            </a:r>
+          </a:p>
+          <a:p>
+            <a:r>
+              <a:t>[1] Anthropic — 2026 Agentic Coding Trends Report — +200% кода на инженера год к году; лишь ~16% PR получают содержательное человеческое ревью до слияния. https://resources.anthropic.com/2026-agentic-coding-trends-report [VFY-day-of]</a:t>
             </a:r>
           </a:p>
         </p:txBody>
@@ -2207,7 +2352,12 @@
           </a:p>
           <a:p>
             <a:r>
-              <a:t>Источник: Reganti &amp; Badam, Lenny's Newsletter (19 Aug 2025)</a:t>
+              <a:t>Источники:</a:t>
+            </a:r>
+          </a:p>
+          <a:p>
+            <a:r>
+              <a:t>[1] Reganti &amp; Badam — CC/CD framework — Continuous Calibration/Development; лестница агентности (Copilot→Cursor); «не готовы давать высокую агентность». https://www.lennysnewsletter.com/p/why-your-ai-product-needs-a-different</a:t>
             </a:r>
           </a:p>
         </p:txBody>
@@ -2290,6 +2440,16 @@
               <a:t>Проблема семидесяти процентов: ИИ-агенты доводят команду примерно на семьдесят процентов пути до продакшн-качественного результата; оставшиеся тридцать — там, где senior-инженеры добавляют ценность, которую ИИ автоматически не поставляет. Senior активно переосмысливают ИИ-вывод; junior принимают его охотнее, производя «карточный домик кода». Оба провала ниже — вариации именно этого ограничения на уровне решения о запуске. Что остаётся из классики: контроль версий и PR-ревью, feature flags, поэтапная раскатка как прообраз agency-ladder, kill-switch, человеко-владеемая спецификация. Когда здесь не AI-first: необратимое или капиталоёмкое решение не должно приниматься моделью на низшей ступени agency-ladder без детерминированного бизнес-правила поверх.</a:t>
             </a:r>
           </a:p>
+          <a:p>
+            <a:r>
+              <a:t>Источники:</a:t>
+            </a:r>
+          </a:p>
+          <a:p>
+            <a:r>
+              <a:t>[1] Osmani — The 70% Problem — AI доводит команды до ~70% пути; «карточный домик кода» — новичок не может закрыть оставшиеся 30%. https://addyo.substack.com/p/the-70-problem-hard-truths-about-ai-assisted-coding</a:t>
+            </a:r>
+          </a:p>
         </p:txBody>
       </p:sp>
       <p:sp>
@@ -2447,7 +2607,17 @@
           </a:p>
           <a:p>
             <a:r>
-              <a:t>Источник: Forbes / AndroidPolice (May 2024)</a:t>
+              <a:t>Источники:</a:t>
+            </a:r>
+          </a:p>
+          <a:p>
+            <a:r>
+              <a:t>[1] Forbes (31 мая 2024) — Google AI Overviews — полная раскатка на 100% поиска США одним шагом, без canary-этапов. https://www.forbes.com/sites/roberthart/2024/05/31/google-restricts-ai-search-tool-after-nonsensical-answers-told-people-to-eat-rocks-and-put-glue-on-pizza/</a:t>
+            </a:r>
+          </a:p>
+          <a:p>
+            <a:r>
+              <a:t>[2] AndroidPolice — «клей на пиццу» / «есть камни» — вирусные инциденты сразу на всю аудиторию, реактивные пост-релизные фиксы. https://www.androidpolice.com/google-pizza-glue-loop-ai-overviews/</a:t>
             </a:r>
           </a:p>
         </p:txBody>
@@ -2532,7 +2702,17 @@
           </a:p>
           <a:p>
             <a:r>
-              <a:t>Источник: CNBC (17 June 2024)</a:t>
+              <a:t>Источники:</a:t>
+            </a:r>
+          </a:p>
+          <a:p>
+            <a:r>
+              <a:t>[1] CNBC (17 июня 2024) — McDonald's × IBM — решение остановить пилот после 2,5-3 лет на 0,7% сети (~100 из ~13 786 ресторанов). https://www.cnbc.com/2024/06/17/mcdonalds-to-end-ibm-ai-drive-thru-test.html</a:t>
+            </a:r>
+          </a:p>
+          <a:p>
+            <a:r>
+              <a:t>[2] Nation's Restaurant News — детали закрытия пилота — деактивация к 26 июля 2024; цель осталась, вендорский подход убит. https://www.nrn.com/quick-service/mcdonald-s-is-ending-its-ai-drive-thru-test-with-ibm</a:t>
             </a:r>
           </a:p>
         </p:txBody>
@@ -2770,6 +2950,21 @@
               <a:t>OEC — метрика, которую эксперимент на самом деле пытается сдвинуть, — то, что организация согласилась считать успехом. Учебный пример Кохави: команда, оптимизирующая сайт поддержки, приняла метрикой «время на сайте». Когда их попросили указать направление, команда раскололась: больше времени — это хорошо, глубокая вовлечённость, или плохо, пользователь застрял? Команда единогласно приняла метрику, ни разу не договорившись, что она значит. Guardrail-метрики — то, что мониторят, но не оптимизируют: они ловят сопутствующий ущерб, которого OEC не видит. Это структурное исправление значимой классической ловушки — оптимизации одной прокси-метрики в изоляции, которую мы увидим в провале этого раздела.</a:t>
             </a:r>
           </a:p>
+          <a:p>
+            <a:r>
+              <a:t>Источники:</a:t>
+            </a:r>
+          </a:p>
+          <a:p>
+            <a:r>
+              <a:t>[1] Kohavi — Overall Evaluation Criterion (OEC) — метрика, о значении и направлении которой договорились ДО теста; учебная ловушка «время на сайте поддержки». https://www.linkedin.com/pulse/overall-evaluation-criterion-oec-ronny-kohavi</a:t>
+            </a:r>
+          </a:p>
+          <a:p>
+            <a:r>
+              <a:t>[2] Wikipedia — A/B testing (Bing 2012) — рекламный заголовок: +12% выручки (~$100 млн), независимо от материалов Кохави. https://en.wikipedia.org/wiki/A/B_testing</a:t>
+            </a:r>
+          </a:p>
         </p:txBody>
       </p:sp>
       <p:sp>
@@ -2850,6 +3045,26 @@
               <a:t>Важное различие: A/B-тест — это измерение, требующее случайного распределения; feature flag — просто переключатель раскатки. Канонический пример с обязательной поправкой на фактчекинг: эксперимент Bing с заголовком рекламы дал прирост выручки на двенадцать процентов на поиск, что дало более ста миллионов долларов дополнительной годовой выручки — это Кохави и Томке, Harvard Business Review, 2017. Отдельный, не связанный кейс — «кнопка за 300 миллионов долларов» Джареда Спула — это usability-исследование, а не рандомизированный эксперимент; списки-подборки регулярно их путают. Даже AI-native персонализация нуждается в классическом контроле: Spotify честно признаёт, что контекстный бандит сам требует собственного A/B для валидации своей ценности.</a:t>
             </a:r>
           </a:p>
+          <a:p>
+            <a:r>
+              <a:t>Источники:</a:t>
+            </a:r>
+          </a:p>
+          <a:p>
+            <a:r>
+              <a:t>[1] Microsoft Research — Sample Ratio Mismatch (KDD 2019) — «fever is a symptom»: SRM — симптом проблем с качеством данных, проверяется до анализа эффекта. https://www.microsoft.com/en-us/research/articles/diagnosing-sample-ratio-mismatch-in-a-b-testing/</a:t>
+            </a:r>
+          </a:p>
+          <a:p>
+            <a:r>
+              <a:t>[2] GoPractice — проблема подглядывания (peeking) — 2 подглядки ≈2× ложных срабатываний; фикс — pre-registered sample size. https://gopractice.io/data/peeking-problem/</a:t>
+            </a:r>
+          </a:p>
+          <a:p>
+            <a:r>
+              <a:t>[3] exp-platform.com — Кохави, Твайман — «любая цифра, которая выглядит интересно, обычно неверна» — перепроверить методологию раньше, чем радоваться. https://exp-platform.com/</a:t>
+            </a:r>
+          </a:p>
         </p:txBody>
       </p:sp>
       <p:sp>
@@ -2932,7 +3147,17 @@
           </a:p>
           <a:p>
             <a:r>
-              <a:t>Источник: Hamel Husain framework; Anthropic 'Demystifying evals for ИИ agents' (9 Jan 2026)</a:t>
+              <a:t>Источники:</a:t>
+            </a:r>
+          </a:p>
+          <a:p>
+            <a:r>
+              <a:t>[1] Anthropic — Demystifying evals for AI agents (9 янв. 2026) — pass@k (хотя бы 1 успех) vs pass^k (все успешны); промышленная надёжность требует pass^k. https://resources.anthropic.com/2026-agentic-coding-trends-report [VFY-day-of]</a:t>
+            </a:r>
+          </a:p>
+          <a:p>
+            <a:r>
+              <a:t>[2] Zheng, Chiang et al. — MT-Bench (NeurIPS 2023) — LLM-судья ~85% согласия с экспертами — сопоставимо с ~81% согласия человек-человек. https://arxiv.org/abs/2306.05685</a:t>
             </a:r>
           </a:p>
         </p:txBody>
@@ -3015,6 +3240,21 @@
               <a:t>Когда здесь не AI-first: если одна измеряемая величина — прокси вовлечённости без парной counter-метрики на качество, результат недостаточен для решения о полном роллауте. То же для evals: если продукт делает заявление о безопасности, опирающееся исключительно на бенчмарк, чей формат структурно отличается от реальной задачи, — этот бенчмарк не может поддержать заявление.</a:t>
             </a:r>
           </a:p>
+          <a:p>
+            <a:r>
+              <a:t>Источники:</a:t>
+            </a:r>
+          </a:p>
+          <a:p>
+            <a:r>
+              <a:t>[1] DeepMind — Specification gaming (21 апр. 2020) — CoastRunners: RL-агент набрал на 20% больше очков людей, кружа в лагуне, не финишируя — закон Гудхарта. https://deepmind.google/blog/specification-gaming-the-flip-side-of-ai-ingenuity/</a:t>
+            </a:r>
+          </a:p>
+          <a:p>
+            <a:r>
+              <a:t>[2] Anthropic — Sycophancy to Subterfuge (arXiv:2406.10162) — модель обобщила от угодливости к прямому редактированию собственной функции вознаграждения. https://arxiv.org/abs/2406.10162</a:t>
+            </a:r>
+          </a:p>
         </p:txBody>
       </p:sp>
       <p:sp>
@@ -3097,7 +3337,17 @@
           </a:p>
           <a:p>
             <a:r>
-              <a:t>Источник: Techdirt correction (28 Oct 2021); WSJ 'Facebook Files' (2021)</a:t>
+              <a:t>Источники:</a:t>
+            </a:r>
+          </a:p>
+          <a:p>
+            <a:r>
+              <a:t>[1] Techdirt (28 окт. 2021) — коррекция «Facebook Files» — все 5 реакций (love/haha/wow/sad/angry) взвешены ×5 одинаково — не только «гнев», вопреки растиражированной версии. https://www.techdirt.com/2021/10/28/let-me-rewrite-that-you-washington-post-misinforms-you-about-how-facebook-weighted-emoji-reactions/</a:t>
+            </a:r>
+          </a:p>
+          <a:p>
+            <a:r>
+              <a:t>[2] House E&amp;C Committee — документы Haugen — внутренний guardrail (корреляция гнев↔дезинформация) подтверждён к 2019, вес обнулён в сентябре 2019. https://docs.house.gov/meetings/IF/IF16/20211201/114268/HHRG-117-IF16-20211201-SD012.pdf</a:t>
             </a:r>
           </a:p>
         </p:txBody>
@@ -3182,7 +3432,22 @@
           </a:p>
           <a:p>
             <a:r>
-              <a:t>Источник: Med-PaLM 2 arXiv:2305.09617; Stanford RegLab arXiv:2405.20362</a:t>
+              <a:t>Источники:</a:t>
+            </a:r>
+          </a:p>
+          <a:p>
+            <a:r>
+              <a:t>[1] Med-PaLM 2 — Nature Medicine 2024 (arXiv:2305.09617) — 86,5% на бенчмарке MedQA — не то же самое, что клиническая безопасность в проде. https://www.nature.com/articles/s41591-024-03423-7</a:t>
+            </a:r>
+          </a:p>
+          <a:p>
+            <a:r>
+              <a:t>[2] Wikipedia — Mata v. Avianca — фейковые цитаты = ChatGPT, НЕ Harvey — частая ошибка атрибуции; санкция $5000 (S.D.N.Y., 22 июня 2023). https://en.wikipedia.org/wiki/Mata_v._Avianca,_Inc.</a:t>
+            </a:r>
+          </a:p>
+          <a:p>
+            <a:r>
+              <a:t>[3] Stanford RegLab — J. Empirical Legal Studies — Lexis+ 17% / Westlaw 33% / GPT-4 88% галлюцинаций на реальных юридических запросах. https://onlinelibrary.wiley.com/doi/full/10.1111/jels.12413</a:t>
             </a:r>
           </a:p>
         </p:txBody>
@@ -3585,6 +3850,16 @@
               <a:t>Incident management: on-call — ротация на реакцию вне часов; severity levels — классификация, кого будить; runbook — заранее написанная инструкция; blameless postmortem — разбор без поиска виноватого, иначе люди скрывают информацию. Петля support-продукт: тикеты — сырые данные о том, где продукт не соответствует ожиданиям, а не только «закрыть проблему клиента».</a:t>
             </a:r>
           </a:p>
+          <a:p>
+            <a:r>
+              <a:t>Источники:</a:t>
+            </a:r>
+          </a:p>
+          <a:p>
+            <a:r>
+              <a:t>[1] Google SRE — Error Budget Policy — SLI/SLO/error budget = «1 − SLO»; изменения — ≈70% всех сбоев. https://sre.google/workbook/error-budget-policy/</a:t>
+            </a:r>
+          </a:p>
         </p:txBody>
       </p:sp>
       <p:sp>
@@ -3672,7 +3947,17 @@
           </a:p>
           <a:p>
             <a:r>
-              <a:t>Источник: LangSmith / Langfuse / Arize Phoenix / Helicone; Gartner Market Guide for Guardian Agents (25 Feb 2026)</a:t>
+              <a:t>Источники:</a:t>
+            </a:r>
+          </a:p>
+          <a:p>
+            <a:r>
+              <a:t>[1] Confident AI — обзор LLMOps observability 2026 — LangSmith / Langfuse / Arize Phoenix / Helicone — трейсинг ловит дрейф там, где инфра-мониторинг молчит. https://www.confident-ai.com/knowledge-base/compare/top-7-llm-observability-tools [VFY-day-of]</a:t>
+            </a:r>
+          </a:p>
+          <a:p>
+            <a:r>
+              <a:t>[2] Gartner Market Guide for Guardian Agents (25 фев. 2026) — определение категории; adoption 70%/23%. https://thehackernews.com/2026/03/5-learnings-from-first-ever-gartner.html [VFY-day-of]</a:t>
             </a:r>
           </a:p>
         </p:txBody>
@@ -3837,7 +4122,17 @@
           </a:p>
           <a:p>
             <a:r>
-              <a:t>Источник: GeekWire (Nov 2021); SEC 10-K FY2021</a:t>
+              <a:t>Источники:</a:t>
+            </a:r>
+          </a:p>
+          <a:p>
+            <a:r>
+              <a:t>[1] GeekWire (нояб. 2021) — Zillow Offers — $304-408 млн списаний, ~2000 уволенных (~25% штата), ≈$80 тыс. убытка на объект. https://www.geekwire.com/2021/ibuying-algorithms-failed-zillow-says-business-worlds-love-affair-ai/</a:t>
+            </a:r>
+          </a:p>
+          <a:p>
+            <a:r>
+              <a:t>[2] SEC 10-K FY2021 — Zillow Group — официальная финансовая отчётность, подтверждающая масштаб списаний. https://www.sec.gov/Archives/edgar/data/1617640/000161764022000013/z-20211231.htm</a:t>
             </a:r>
           </a:p>
         </p:txBody>
@@ -3922,7 +4217,17 @@
           </a:p>
           <a:p>
             <a:r>
-              <a:t>Источник: Moffatt v. Air Canada, 2024 BCCRT 149 (14 Feb 2024)</a:t>
+              <a:t>Источники:</a:t>
+            </a:r>
+          </a:p>
+          <a:p>
+            <a:r>
+              <a:t>[1] CanLII — Moffatt v. Air Canada, 2024 BCCRT 149 — трибунал: компания отвечает за ответ бота как за любой другой контент сайта; $812,02 CAD (14 фев. 2024). https://www.canlii.org/en/bc/bccrt/doc/2024/2024bccrt149/2024bccrt149.html</a:t>
+            </a:r>
+          </a:p>
+          <a:p>
+            <a:r>
+              <a:t>[2] American Bar Association — комментарий к делу — юридический разбор: «bot as a separate legal entity» отклонён одной фразой. https://www.americanbar.org/groups/business_law/resources/business-law-today/2024-february/bc-tribunal-confirms-companies-remain-liable-information-provided-ai-chatbot/</a:t>
             </a:r>
           </a:p>
         </p:txBody>
@@ -4007,7 +4312,22 @@
           </a:p>
           <a:p>
             <a:r>
-              <a:t>Источник: Bloomberg (8 May 2025); The Markup (29 Mar 2024)</a:t>
+              <a:t>Источники:</a:t>
+            </a:r>
+          </a:p>
+          <a:p>
+            <a:r>
+              <a:t>[1] Bloomberg (8 мая 2025) — Klarna — разворот политики «только ИИ» к найму людей обратно. https://www.bloomberg.com/news/articles/2025-05-08/klarna-turns-from-ai-to-real-person-customer-service</a:t>
+            </a:r>
+          </a:p>
+          <a:p>
+            <a:r>
+              <a:t>[2] Fortune (10 окт. 2025) — 853 FTE — автоматизация выросла до 853 чел.-эквивалентов — усиление людей, не замена; точная цифра всплывает позже в Q3-отчётности Klarna (18 нояб. 2025) — сверить перед публикацией. https://fortune.com/2025/10/10/klarna-ceo-sebastian-siemiatkowski-halved-workforce-says-tech-ceos-sugarcoating-ai-impact-on-jobs-mass-unemployment-warning/ [VFY-day-of]</a:t>
+            </a:r>
+          </a:p>
+          <a:p>
+            <a:r>
+              <a:t>[3] The Markup (29 марта 2024) — NYC MyCity — гос-чатбот дал 10 из 10 журналистов один и тот же незаконный совет. https://themarkup.org/artificial-intelligence/2024/03/29/nycs-ai-chatbot-tells-businesses-to-break-the-law</a:t>
             </a:r>
           </a:p>
         </p:txBody>
@@ -4487,7 +4807,17 @@
           </a:p>
           <a:p>
             <a:r>
-              <a:t>Источник: Deloitte 2026 Global Technology Leadership Study; Gartner 5-stage agent adoption curve</a:t>
+              <a:t>Источники:</a:t>
+            </a:r>
+          </a:p>
+          <a:p>
+            <a:r>
+              <a:t>[1] Deloitte — 2026 Global Technology Leadership Study — 75% — операционная модель должна измениться; 42% низкий/нулевой ROI; 81% уверены при внутреннем противоречии. https://www.deloitte.com/us/en/about/press-room/2026-global-technology-leadership-study-release.html [VFY-day-of]</a:t>
+            </a:r>
+          </a:p>
+          <a:p>
+            <a:r>
+              <a:t>[2] Sber — вакансия «Лидер AI PDLC» — организационная реальность роли, не только концепт в whitepaper. https://rabota.sber.ru/search/lider-ai-pdlc-4548579/ [VFY-day-of]</a:t>
             </a:r>
           </a:p>
         </p:txBody>
@@ -4572,7 +4902,32 @@
           </a:p>
           <a:p>
             <a:r>
-              <a:t>Источник: MIT Project NANDA 'The GenAI Divide' (July 2025, v0.1); Gartner (7 Apr 2026); BCG (Sep 2025)</a:t>
+              <a:t>Источники:</a:t>
+            </a:r>
+          </a:p>
+          <a:p>
+            <a:r>
+              <a:t>[1] MIT NANDA — «The GenAI Divide» (июль 2025, v0.1) — неревьюированный препринт: воронка 60%→20%→5% — это 25% среди дошедших до пилота, не «95% провал». https://mlq.ai/media/quarterly_decks/v0.1_State_of_AI_in_Business_2025_Report.pdf [VFY-day-of]</a:t>
+            </a:r>
+          </a:p>
+          <a:p>
+            <a:r>
+              <a:t>[2] Fortune (18 авг. 2025) — медиа-искажение MIT-отчёта — как заголовок «95% провал» разошёлся без калибровки знаменателя. https://fortune.com/2025/08/18/mit-report-95-percent-generative-ai-pilots-at-companies-failing-cfo/</a:t>
+            </a:r>
+          </a:p>
+          <a:p>
+            <a:r>
+              <a:t>[3] NewMR — Myth #2 — разбор конфликта интересов и знаменателя в цитировании MIT-отчёта. https://newmr.org/blog/myth-number-2-mit-showed-that-95-of-ai-pilots-fail/</a:t>
+            </a:r>
+          </a:p>
+          <a:p>
+            <a:r>
+              <a:t>[4] Gartner (7 апр. 2026, 782 I&amp;O-лидеров) — 28% ИИ-кейсов в I&amp;O полностью успешны; 20% — провал. https://www.gartner.com/en/newsroom/press-releases/2026-04-07-gartner-says-artificial-intelligence-projects-in-infrastructure-and-operations-stall-ahead-of-meaningful-roi-returns [VFY-day-of]</a:t>
+            </a:r>
+          </a:p>
+          <a:p>
+            <a:r>
+              <a:t>[5] BCG — Closing the AI Impact Gap — 60% компаний не отслеживают ни одного финансового KPI, привязанного к ценности ИИ; publish-дата на сайте BCG расходится с датой в research-досье — см. owner follow-up. https://www.bcg.com/publications/2025/closing-the-ai-impact-gap [VFY-day-of]</a:t>
             </a:r>
           </a:p>
         </p:txBody>
@@ -4657,7 +5012,17 @@
           </a:p>
           <a:p>
             <a:r>
-              <a:t>Источник: The Information (3 Apr 2024)</a:t>
+              <a:t>Источники:</a:t>
+            </a:r>
+          </a:p>
+          <a:p>
+            <a:r>
+              <a:t>[1] Business Standard (апр. 2024) — Just Walk Out — 700 из 1000 транзакций требовали ручной проверки индийскими работниками — против цели 50/1000. https://www.business-standard.com/companies/news/amazon-s-just-walk-out-checkout-tech-was-powered-by-1-000-indian-workers-124040400463_1.html</a:t>
+            </a:r>
+          </a:p>
+          <a:p>
+            <a:r>
+              <a:t>[2] Retail Dive — демонтаж Just Walk Out — технология снята с Amazon Fresh; 27 из 44 магазинов теряют функцию. https://www.retaildive.com/news/amazon-removes-just-walk-out-tech-amazon-fresh-stores-dash-carts/712150</a:t>
             </a:r>
           </a:p>
         </p:txBody>
@@ -5063,6 +5428,16 @@
           <a:p>
             <a:r>
               <a:t>Важно развести Customer Development и Build-Measure-Learn, о котором мы говорили в keystone: BML — это двигатель, Customer Development — карта местности, по которой двигатель едет. Сначала понять, что проверяем и у кого, потом — как быстро крутить цикл проверки. И здесь же вводим приём, который будем переиспользовать в каждом следующем разделе: фальсифицируемая гипотеза — записанное утверждение «мы верим, что X, мы проверим это через Y, к дате Z у нас будет ответ да или нет». Формат работает, потому что превращает расплывчатую уверенность в проверяемое обязательство с датой. Известное ограничение метода: он написан для стартапов с нуля, ищущих бизнес-модель, а не для доработки функции внутри зрелого продукта — применять весь церемониал к правке мелкой функции избыточно, ровно как не гонять A/B-тест ради исправления опечатки.</a:t>
+            </a:r>
+          </a:p>
+          <a:p>
+            <a:r>
+              <a:t>Источники:</a:t>
+            </a:r>
+          </a:p>
+          <a:p>
+            <a:r>
+              <a:t>[1] Blank — Customer Development (Four Steps to the Epiphany) — 4-шаговая методология; «внутри офиса нет фактов». https://innovation.ucsd.edu/startup/startup-toolkit/Steve-Blank-CustDev.pdf</a:t>
             </a:r>
           </a:p>
         </p:txBody>
@@ -8221,7 +8596,18 @@
                 </a:solidFill>
                 <a:latin typeface="DejaVu Sans"/>
               </a:rPr>
-              <a:t>Недели работы → часы</a:t>
+              <a:t>Недели работы → часы </a:t>
+            </a:r>
+            <a:r>
+              <a:rPr sz="728" baseline="30000" b="0" i="1">
+                <a:latin typeface="DejaVu Sans"/>
+                <a:cs typeface="DejaVu Sans"/>
+                <a:ea typeface="DejaVu Sans"/>
+                <a:solidFill>
+                  <a:srgbClr val="1C7293"/>
+                </a:solidFill>
+              </a:rPr>
+              <a:t>[1]</a:t>
             </a:r>
           </a:p>
         </p:txBody>
@@ -8371,7 +8757,18 @@
                 </a:solidFill>
                 <a:latin typeface="DejaVu Sans"/>
               </a:rPr>
-              <a:t>~95% пилотов — ноль отдачи</a:t>
+              <a:t>~95% пилотов — ноль отдачи </a:t>
+            </a:r>
+            <a:r>
+              <a:rPr sz="728" baseline="30000" b="0" i="1">
+                <a:latin typeface="DejaVu Sans"/>
+                <a:cs typeface="DejaVu Sans"/>
+                <a:ea typeface="DejaVu Sans"/>
+                <a:solidFill>
+                  <a:srgbClr val="1C7293"/>
+                </a:solidFill>
+              </a:rPr>
+              <a:t>[2]</a:t>
             </a:r>
           </a:p>
         </p:txBody>
@@ -8577,6 +8974,83 @@
       <p:sp>
         <p:nvSpPr>
           <p:cNvPr id="15" name="TextBox 14"/>
+          <p:cNvSpPr txBox="1"/>
+          <p:nvPr/>
+        </p:nvSpPr>
+        <p:spPr>
+          <a:xfrm>
+            <a:off x="502920" y="6455664"/>
+            <a:ext cx="11201400" cy="548640"/>
+          </a:xfrm>
+          <a:prstGeom prst="rect">
+            <a:avLst/>
+          </a:prstGeom>
+          <a:noFill/>
+        </p:spPr>
+        <p:txBody>
+          <a:bodyPr wrap="square" lIns="0" rIns="0" tIns="0" bIns="0" anchor="t">
+            <a:spAutoFit/>
+          </a:bodyPr>
+          <a:lstStyle/>
+          <a:p>
+            <a:pPr algn="l">
+              <a:lnSpc>
+                <a:spcPct val="102000"/>
+              </a:lnSpc>
+            </a:pPr>
+            <a:r>
+              <a:rPr sz="850" b="1" i="1">
+                <a:solidFill>
+                  <a:srgbClr val="065A82"/>
+                </a:solidFill>
+                <a:latin typeface="DejaVu Sans"/>
+              </a:rPr>
+              <a:t>[1] </a:t>
+            </a:r>
+            <a:r>
+              <a:rPr sz="850" i="1">
+                <a:solidFill>
+                  <a:srgbClr val="1C7293"/>
+                </a:solidFill>
+                <a:latin typeface="DejaVu Sans"/>
+                <a:hlinkClick r:id="rId5"/>
+              </a:rPr>
+              <a:t>Anthropic — 2026 Agentic Coding Trends Report</a:t>
+            </a:r>
+            <a:r>
+              <a:rPr sz="850" i="1">
+                <a:solidFill>
+                  <a:srgbClr val="1C7293"/>
+                </a:solidFill>
+                <a:latin typeface="DejaVu Sans"/>
+              </a:rPr>
+              <a:t>   ·   </a:t>
+            </a:r>
+            <a:r>
+              <a:rPr sz="850" b="1" i="1">
+                <a:solidFill>
+                  <a:srgbClr val="065A82"/>
+                </a:solidFill>
+                <a:latin typeface="DejaVu Sans"/>
+              </a:rPr>
+              <a:t>[2] </a:t>
+            </a:r>
+            <a:r>
+              <a:rPr sz="850" i="1">
+                <a:solidFill>
+                  <a:srgbClr val="1C7293"/>
+                </a:solidFill>
+                <a:latin typeface="DejaVu Sans"/>
+                <a:hlinkClick r:id="rId6"/>
+              </a:rPr>
+              <a:t>MIT NANDA — «The GenAI Divide» (июль 2025, v0.1)</a:t>
+            </a:r>
+          </a:p>
+        </p:txBody>
+      </p:sp>
+      <p:sp>
+        <p:nvSpPr>
+          <p:cNvPr id="16" name="TextBox 15"/>
           <p:cNvSpPr txBox="1"/>
           <p:nvPr/>
         </p:nvSpPr>
@@ -8673,7 +9147,18 @@
                 </a:solidFill>
                 <a:latin typeface="DejaVu Sans"/>
               </a:rPr>
-              <a:t>Даже мать соврёт — если вопрос сконструирован неправильно</a:t>
+              <a:t>Даже мать соврёт — если вопрос сконструирован неправильно </a:t>
+            </a:r>
+            <a:r>
+              <a:rPr sz="1196" baseline="30000" b="0" i="1">
+                <a:latin typeface="DejaVu Sans"/>
+                <a:cs typeface="DejaVu Sans"/>
+                <a:ea typeface="DejaVu Sans"/>
+                <a:solidFill>
+                  <a:srgbClr val="1C7293"/>
+                </a:solidFill>
+              </a:rPr>
+              <a:t>[1]</a:t>
             </a:r>
           </a:p>
         </p:txBody>
@@ -9470,6 +9955,55 @@
       <p:sp>
         <p:nvSpPr>
           <p:cNvPr id="23" name="TextBox 22"/>
+          <p:cNvSpPr txBox="1"/>
+          <p:nvPr/>
+        </p:nvSpPr>
+        <p:spPr>
+          <a:xfrm>
+            <a:off x="502920" y="6455664"/>
+            <a:ext cx="11201400" cy="548640"/>
+          </a:xfrm>
+          <a:prstGeom prst="rect">
+            <a:avLst/>
+          </a:prstGeom>
+          <a:noFill/>
+        </p:spPr>
+        <p:txBody>
+          <a:bodyPr wrap="square" lIns="0" rIns="0" tIns="0" bIns="0" anchor="t">
+            <a:spAutoFit/>
+          </a:bodyPr>
+          <a:lstStyle/>
+          <a:p>
+            <a:pPr algn="l">
+              <a:lnSpc>
+                <a:spcPct val="102000"/>
+              </a:lnSpc>
+            </a:pPr>
+            <a:r>
+              <a:rPr sz="850" b="1" i="1">
+                <a:solidFill>
+                  <a:srgbClr val="065A82"/>
+                </a:solidFill>
+                <a:latin typeface="DejaVu Sans"/>
+              </a:rPr>
+              <a:t>[1] </a:t>
+            </a:r>
+            <a:r>
+              <a:rPr sz="850" i="1">
+                <a:solidFill>
+                  <a:srgbClr val="1C7293"/>
+                </a:solidFill>
+                <a:latin typeface="DejaVu Sans"/>
+                <a:hlinkClick r:id="rId5"/>
+              </a:rPr>
+              <a:t>Fitzpatrick — The Mom Test</a:t>
+            </a:r>
+          </a:p>
+        </p:txBody>
+      </p:sp>
+      <p:sp>
+        <p:nvSpPr>
+          <p:cNvPr id="24" name="TextBox 23"/>
           <p:cNvSpPr txBox="1"/>
           <p:nvPr/>
         </p:nvSpPr>
@@ -9716,7 +10250,18 @@
                 </a:solidFill>
                 <a:latin typeface="DejaVu Sans"/>
               </a:rPr>
-              <a:t>Perplexity Deep Research: 2 часа → ~30 минут</a:t>
+              <a:t>Perplexity Deep Research: 2 часа → ~30 минут </a:t>
+            </a:r>
+            <a:r>
+              <a:rPr sz="572" baseline="30000" b="0" i="1">
+                <a:latin typeface="DejaVu Sans"/>
+                <a:cs typeface="DejaVu Sans"/>
+                <a:ea typeface="DejaVu Sans"/>
+                <a:solidFill>
+                  <a:srgbClr val="1C7293"/>
+                </a:solidFill>
+              </a:rPr>
+              <a:t>[1]</a:t>
             </a:r>
           </a:p>
         </p:txBody>
@@ -9921,7 +10466,18 @@
                 </a:solidFill>
                 <a:latin typeface="DejaVu Sans"/>
               </a:rPr>
-              <a:t>Dovetail — кластеризация болей в масштабе</a:t>
+              <a:t>Dovetail — кластеризация болей в масштабе </a:t>
+            </a:r>
+            <a:r>
+              <a:rPr sz="572" baseline="30000" b="0" i="1">
+                <a:latin typeface="DejaVu Sans"/>
+                <a:cs typeface="DejaVu Sans"/>
+                <a:ea typeface="DejaVu Sans"/>
+                <a:solidFill>
+                  <a:srgbClr val="1C7293"/>
+                </a:solidFill>
+              </a:rPr>
+              <a:t>[2]</a:t>
             </a:r>
           </a:p>
         </p:txBody>
@@ -10158,7 +10714,18 @@
                 </a:solidFill>
                 <a:latin typeface="DejaVu Sans"/>
               </a:rPr>
-              <a:t>97% исследователей используют ИИ — лишь ~8% доверяют ИИ-персонам как данным</a:t>
+              <a:t>97% исследователей используют ИИ — лишь ~8% доверяют ИИ-персонам как данным </a:t>
+            </a:r>
+            <a:r>
+              <a:rPr sz="754" baseline="30000" b="0" i="1">
+                <a:latin typeface="DejaVu Sans"/>
+                <a:cs typeface="DejaVu Sans"/>
+                <a:ea typeface="DejaVu Sans"/>
+                <a:solidFill>
+                  <a:srgbClr val="1C7293"/>
+                </a:solidFill>
+              </a:rPr>
+              <a:t>[3]</a:t>
             </a:r>
           </a:p>
         </p:txBody>
@@ -10253,6 +10820,111 @@
       <p:sp>
         <p:nvSpPr>
           <p:cNvPr id="20" name="TextBox 19"/>
+          <p:cNvSpPr txBox="1"/>
+          <p:nvPr/>
+        </p:nvSpPr>
+        <p:spPr>
+          <a:xfrm>
+            <a:off x="502920" y="6419088"/>
+            <a:ext cx="11201400" cy="548640"/>
+          </a:xfrm>
+          <a:prstGeom prst="rect">
+            <a:avLst/>
+          </a:prstGeom>
+          <a:noFill/>
+        </p:spPr>
+        <p:txBody>
+          <a:bodyPr wrap="square" lIns="0" rIns="0" tIns="0" bIns="0" anchor="t">
+            <a:spAutoFit/>
+          </a:bodyPr>
+          <a:lstStyle/>
+          <a:p>
+            <a:pPr algn="l">
+              <a:lnSpc>
+                <a:spcPct val="102000"/>
+              </a:lnSpc>
+            </a:pPr>
+            <a:r>
+              <a:rPr sz="850" b="1" i="1">
+                <a:solidFill>
+                  <a:srgbClr val="065A82"/>
+                </a:solidFill>
+                <a:latin typeface="DejaVu Sans"/>
+              </a:rPr>
+              <a:t>[1] </a:t>
+            </a:r>
+            <a:r>
+              <a:rPr sz="850" i="1">
+                <a:solidFill>
+                  <a:srgbClr val="1C7293"/>
+                </a:solidFill>
+                <a:latin typeface="DejaVu Sans"/>
+                <a:hlinkClick r:id="rId5"/>
+              </a:rPr>
+              <a:t>Perplexity Deep Research — обзор для продукт-исследований</a:t>
+            </a:r>
+            <a:r>
+              <a:rPr sz="850" i="1">
+                <a:solidFill>
+                  <a:srgbClr val="1C7293"/>
+                </a:solidFill>
+                <a:latin typeface="DejaVu Sans"/>
+              </a:rPr>
+              <a:t>   ·   </a:t>
+            </a:r>
+            <a:r>
+              <a:rPr sz="850" b="1" i="1">
+                <a:solidFill>
+                  <a:srgbClr val="065A82"/>
+                </a:solidFill>
+                <a:latin typeface="DejaVu Sans"/>
+              </a:rPr>
+              <a:t>[2] </a:t>
+            </a:r>
+            <a:r>
+              <a:rPr sz="850" i="1">
+                <a:solidFill>
+                  <a:srgbClr val="1C7293"/>
+                </a:solidFill>
+                <a:latin typeface="DejaVu Sans"/>
+                <a:hlinkClick r:id="rId6"/>
+              </a:rPr>
+              <a:t>Dovetail — AI-синтез интервью</a:t>
+            </a:r>
+            <a:r>
+              <a:rPr sz="850" i="1">
+                <a:solidFill>
+                  <a:srgbClr val="1C7293"/>
+                </a:solidFill>
+                <a:latin typeface="DejaVu Sans"/>
+              </a:rPr>
+              <a:t>   ·   </a:t>
+            </a:r>
+            <a:r>
+              <a:rPr sz="850" b="1" i="1">
+                <a:solidFill>
+                  <a:srgbClr val="065A82"/>
+                </a:solidFill>
+                <a:latin typeface="DejaVu Sans"/>
+              </a:rPr>
+              <a:t>[3] </a:t>
+            </a:r>
+            <a:r>
+              <a:rPr sz="850" i="1">
+                <a:solidFill>
+                  <a:srgbClr val="1C7293"/>
+                </a:solidFill>
+                <a:latin typeface="DejaVu Sans"/>
+                <a:hlinkClick r:id="rId7"/>
+              </a:rPr>
+              <a:t>NN/g — практический опрос 2026</a:t>
+            </a:r>
+          </a:p>
+        </p:txBody>
+      </p:sp>
+      <p:sp>
+        <p:nvSpPr>
+          <p:cNvPr id="21" name="TextBox 20"/>
           <p:cNvSpPr txBox="1"/>
           <p:nvPr/>
         </p:nvSpPr>
@@ -10919,7 +11591,29 @@
                 </a:solidFill>
                 <a:latin typeface="DejaVu Sans"/>
               </a:rPr>
-              <a:t>ИИ-резюме теряет 20-40% деталей интервью (Torres), если пропущен шаг «сначала по отдельности» — прослеживаемый до конкретного шага сбой, не расплывчатое «ИИ иногда ошибается».</a:t>
+              <a:t>ИИ-резюме теряет 20-40% деталей интервью (Torres) </a:t>
+            </a:r>
+            <a:r>
+              <a:rPr sz="676" baseline="30000" b="0" i="1">
+                <a:latin typeface="DejaVu Sans"/>
+                <a:cs typeface="DejaVu Sans"/>
+                <a:ea typeface="DejaVu Sans"/>
+                <a:solidFill>
+                  <a:srgbClr val="1C7293"/>
+                </a:solidFill>
+              </a:rPr>
+              <a:t>[1]</a:t>
+            </a:r>
+            <a:r>
+              <a:rPr sz="1300" b="1" i="0">
+                <a:latin typeface="DejaVu Sans"/>
+                <a:cs typeface="DejaVu Sans"/>
+                <a:ea typeface="DejaVu Sans"/>
+                <a:solidFill>
+                  <a:srgbClr val="21295C"/>
+                </a:solidFill>
+              </a:rPr>
+              <a:t>, если пропущен шаг «сначала по отдельности» — прослеживаемый до конкретного шага сбой, не расплывчатое «ИИ иногда ошибается».</a:t>
             </a:r>
           </a:p>
         </p:txBody>
@@ -10927,6 +11621,55 @@
       <p:sp>
         <p:nvSpPr>
           <p:cNvPr id="18" name="TextBox 17"/>
+          <p:cNvSpPr txBox="1"/>
+          <p:nvPr/>
+        </p:nvSpPr>
+        <p:spPr>
+          <a:xfrm>
+            <a:off x="502920" y="6455664"/>
+            <a:ext cx="11201400" cy="548640"/>
+          </a:xfrm>
+          <a:prstGeom prst="rect">
+            <a:avLst/>
+          </a:prstGeom>
+          <a:noFill/>
+        </p:spPr>
+        <p:txBody>
+          <a:bodyPr wrap="square" lIns="0" rIns="0" tIns="0" bIns="0" anchor="t">
+            <a:spAutoFit/>
+          </a:bodyPr>
+          <a:lstStyle/>
+          <a:p>
+            <a:pPr algn="l">
+              <a:lnSpc>
+                <a:spcPct val="102000"/>
+              </a:lnSpc>
+            </a:pPr>
+            <a:r>
+              <a:rPr sz="850" b="1" i="1">
+                <a:solidFill>
+                  <a:srgbClr val="065A82"/>
+                </a:solidFill>
+                <a:latin typeface="DejaVu Sans"/>
+              </a:rPr>
+              <a:t>[1] </a:t>
+            </a:r>
+            <a:r>
+              <a:rPr sz="850" i="1">
+                <a:solidFill>
+                  <a:srgbClr val="1C7293"/>
+                </a:solidFill>
+                <a:latin typeface="DejaVu Sans"/>
+                <a:hlinkClick r:id="rId4"/>
+              </a:rPr>
+              <a:t>Torres — Continuous Discovery Habits / anti-synthetic</a:t>
+            </a:r>
+          </a:p>
+        </p:txBody>
+      </p:sp>
+      <p:sp>
+        <p:nvSpPr>
+          <p:cNvPr id="19" name="TextBox 18"/>
           <p:cNvSpPr txBox="1"/>
           <p:nvPr/>
         </p:nvSpPr>
@@ -11023,7 +11766,18 @@
                 </a:solidFill>
                 <a:latin typeface="DejaVu Sans"/>
               </a:rPr>
-              <a:t>Одна и та же задача: реальные люди — 3 из 7, синтетическая панель — 7 из 7</a:t>
+              <a:t>Одна и та же задача: реальные люди — 3 из 7, синтетическая панель — 7 из 7 </a:t>
+            </a:r>
+            <a:r>
+              <a:rPr sz="1040" baseline="30000" b="0" i="1">
+                <a:latin typeface="DejaVu Sans"/>
+                <a:cs typeface="DejaVu Sans"/>
+                <a:ea typeface="DejaVu Sans"/>
+                <a:solidFill>
+                  <a:srgbClr val="1C7293"/>
+                </a:solidFill>
+              </a:rPr>
+              <a:t>[1]</a:t>
             </a:r>
           </a:p>
         </p:txBody>
@@ -11817,6 +12571,55 @@
       <p:sp>
         <p:nvSpPr>
           <p:cNvPr id="28" name="TextBox 27"/>
+          <p:cNvSpPr txBox="1"/>
+          <p:nvPr/>
+        </p:nvSpPr>
+        <p:spPr>
+          <a:xfrm>
+            <a:off x="502920" y="6455664"/>
+            <a:ext cx="11201400" cy="548640"/>
+          </a:xfrm>
+          <a:prstGeom prst="rect">
+            <a:avLst/>
+          </a:prstGeom>
+          <a:noFill/>
+        </p:spPr>
+        <p:txBody>
+          <a:bodyPr wrap="square" lIns="0" rIns="0" tIns="0" bIns="0" anchor="t">
+            <a:spAutoFit/>
+          </a:bodyPr>
+          <a:lstStyle/>
+          <a:p>
+            <a:pPr algn="l">
+              <a:lnSpc>
+                <a:spcPct val="102000"/>
+              </a:lnSpc>
+            </a:pPr>
+            <a:r>
+              <a:rPr sz="850" b="1" i="1">
+                <a:solidFill>
+                  <a:srgbClr val="065A82"/>
+                </a:solidFill>
+                <a:latin typeface="DejaVu Sans"/>
+              </a:rPr>
+              <a:t>[1] </a:t>
+            </a:r>
+            <a:r>
+              <a:rPr sz="850" i="1">
+                <a:solidFill>
+                  <a:srgbClr val="1C7293"/>
+                </a:solidFill>
+                <a:latin typeface="DejaVu Sans"/>
+                <a:hlinkClick r:id="rId6"/>
+              </a:rPr>
+              <a:t>NN/g (Rosala &amp; Moran) — Synthetic Users</a:t>
+            </a:r>
+          </a:p>
+        </p:txBody>
+      </p:sp>
+      <p:sp>
+        <p:nvSpPr>
+          <p:cNvPr id="29" name="TextBox 28"/>
           <p:cNvSpPr txBox="1"/>
           <p:nvPr/>
         </p:nvSpPr>
@@ -12063,7 +12866,18 @@
                 </a:solidFill>
                 <a:latin typeface="DejaVu Sans"/>
               </a:rPr>
-              <a:t>• Ссылки на несуществующие статьи + сфабрикованная цитата суда</a:t>
+              <a:t>• Ссылки на несуществующие статьи + сфабрикованная цитата суда </a:t>
+            </a:r>
+            <a:r>
+              <a:rPr sz="650" baseline="30000" b="0" i="1">
+                <a:latin typeface="DejaVu Sans"/>
+                <a:cs typeface="DejaVu Sans"/>
+                <a:ea typeface="DejaVu Sans"/>
+                <a:solidFill>
+                  <a:srgbClr val="1C7293"/>
+                </a:solidFill>
+              </a:rPr>
+              <a:t>[1]</a:t>
             </a:r>
           </a:p>
         </p:txBody>
@@ -12339,7 +13153,18 @@
                 </a:solidFill>
                 <a:latin typeface="DejaVu Sans"/>
               </a:rPr>
-              <a:t>База: ~712 судебных решений по миру с ИИ-галлюцинированными цитатами, ~90% — в 2025 году</a:t>
+              <a:t>База: ~712 судебных решений по миру с ИИ-галлюцинированными цитатами, ~90% — в 2025 году </a:t>
+            </a:r>
+            <a:r>
+              <a:rPr sz="624" baseline="30000" b="0" i="1">
+                <a:latin typeface="DejaVu Sans"/>
+                <a:cs typeface="DejaVu Sans"/>
+                <a:ea typeface="DejaVu Sans"/>
+                <a:solidFill>
+                  <a:srgbClr val="1C7293"/>
+                </a:solidFill>
+              </a:rPr>
+              <a:t>[2]</a:t>
             </a:r>
           </a:p>
         </p:txBody>
@@ -12434,6 +13259,83 @@
       <p:sp>
         <p:nvSpPr>
           <p:cNvPr id="16" name="TextBox 15"/>
+          <p:cNvSpPr txBox="1"/>
+          <p:nvPr/>
+        </p:nvSpPr>
+        <p:spPr>
+          <a:xfrm>
+            <a:off x="502920" y="6455664"/>
+            <a:ext cx="11201400" cy="548640"/>
+          </a:xfrm>
+          <a:prstGeom prst="rect">
+            <a:avLst/>
+          </a:prstGeom>
+          <a:noFill/>
+        </p:spPr>
+        <p:txBody>
+          <a:bodyPr wrap="square" lIns="0" rIns="0" tIns="0" bIns="0" anchor="t">
+            <a:spAutoFit/>
+          </a:bodyPr>
+          <a:lstStyle/>
+          <a:p>
+            <a:pPr algn="l">
+              <a:lnSpc>
+                <a:spcPct val="102000"/>
+              </a:lnSpc>
+            </a:pPr>
+            <a:r>
+              <a:rPr sz="850" b="1" i="1">
+                <a:solidFill>
+                  <a:srgbClr val="065A82"/>
+                </a:solidFill>
+                <a:latin typeface="DejaVu Sans"/>
+              </a:rPr>
+              <a:t>[1] </a:t>
+            </a:r>
+            <a:r>
+              <a:rPr sz="850" i="1">
+                <a:solidFill>
+                  <a:srgbClr val="1C7293"/>
+                </a:solidFill>
+                <a:latin typeface="DejaVu Sans"/>
+                <a:hlinkClick r:id="rId4"/>
+              </a:rPr>
+              <a:t>Fortune (7 окт. 2025) — Deloitte Australia A$440k</a:t>
+            </a:r>
+            <a:r>
+              <a:rPr sz="850" i="1">
+                <a:solidFill>
+                  <a:srgbClr val="1C7293"/>
+                </a:solidFill>
+                <a:latin typeface="DejaVu Sans"/>
+              </a:rPr>
+              <a:t>   ·   </a:t>
+            </a:r>
+            <a:r>
+              <a:rPr sz="850" b="1" i="1">
+                <a:solidFill>
+                  <a:srgbClr val="065A82"/>
+                </a:solidFill>
+                <a:latin typeface="DejaVu Sans"/>
+              </a:rPr>
+              <a:t>[2] </a:t>
+            </a:r>
+            <a:r>
+              <a:rPr sz="850" i="1">
+                <a:solidFill>
+                  <a:srgbClr val="1C7293"/>
+                </a:solidFill>
+                <a:latin typeface="DejaVu Sans"/>
+                <a:hlinkClick r:id="rId5"/>
+              </a:rPr>
+              <a:t>Damien Charlotin — AI Hallucination Cases Database</a:t>
+            </a:r>
+          </a:p>
+        </p:txBody>
+      </p:sp>
+      <p:sp>
+        <p:nvSpPr>
+          <p:cNvPr id="17" name="TextBox 16"/>
           <p:cNvSpPr txBox="1"/>
           <p:nvPr/>
         </p:nvSpPr>
@@ -12719,7 +13621,18 @@
                 </a:solidFill>
                 <a:latin typeface="DejaVu Sans"/>
               </a:rPr>
-              <a:t>MD Anderson: партнёрство закрыто (2016)</a:t>
+              <a:t>MD Anderson: партнёрство закрыто (2016) </a:t>
+            </a:r>
+            <a:r>
+              <a:rPr sz="598" baseline="30000" b="0" i="1">
+                <a:latin typeface="DejaVu Sans"/>
+                <a:cs typeface="DejaVu Sans"/>
+                <a:ea typeface="DejaVu Sans"/>
+                <a:solidFill>
+                  <a:srgbClr val="1C7293"/>
+                </a:solidFill>
+              </a:rPr>
+              <a:t>[1]</a:t>
             </a:r>
           </a:p>
         </p:txBody>
@@ -12821,7 +13734,18 @@
                 </a:solidFill>
                 <a:latin typeface="DejaVu Sans"/>
               </a:rPr>
-              <a:t>Внутренние документы: рекомендации «небезопасные и некорректные»</a:t>
+              <a:t>Внутренние документы: рекомендации «небезопасные и некорректные» </a:t>
+            </a:r>
+            <a:r>
+              <a:rPr sz="650" baseline="30000" b="0" i="1">
+                <a:latin typeface="DejaVu Sans"/>
+                <a:cs typeface="DejaVu Sans"/>
+                <a:ea typeface="DejaVu Sans"/>
+                <a:solidFill>
+                  <a:srgbClr val="1C7293"/>
+                </a:solidFill>
+              </a:rPr>
+              <a:t>[1]</a:t>
             </a:r>
           </a:p>
         </p:txBody>
@@ -12884,7 +13808,18 @@
                 </a:solidFill>
                 <a:latin typeface="DejaVu Sans"/>
               </a:rPr>
-              <a:t>Обучен на гипотетических кейсах горстки онкологов MSK — не на реальных исходах</a:t>
+              <a:t>Обучен на гипотетических кейсах горстки онкологов MSK — не на реальных исходах </a:t>
+            </a:r>
+            <a:r>
+              <a:rPr sz="650" baseline="30000" b="0" i="1">
+                <a:latin typeface="DejaVu Sans"/>
+                <a:cs typeface="DejaVu Sans"/>
+                <a:ea typeface="DejaVu Sans"/>
+                <a:solidFill>
+                  <a:srgbClr val="1C7293"/>
+                </a:solidFill>
+              </a:rPr>
+              <a:t>[2]</a:t>
             </a:r>
           </a:p>
         </p:txBody>
@@ -12979,6 +13914,83 @@
       <p:sp>
         <p:nvSpPr>
           <p:cNvPr id="15" name="TextBox 14"/>
+          <p:cNvSpPr txBox="1"/>
+          <p:nvPr/>
+        </p:nvSpPr>
+        <p:spPr>
+          <a:xfrm>
+            <a:off x="502920" y="6455664"/>
+            <a:ext cx="11201400" cy="548640"/>
+          </a:xfrm>
+          <a:prstGeom prst="rect">
+            <a:avLst/>
+          </a:prstGeom>
+          <a:noFill/>
+        </p:spPr>
+        <p:txBody>
+          <a:bodyPr wrap="square" lIns="0" rIns="0" tIns="0" bIns="0" anchor="t">
+            <a:spAutoFit/>
+          </a:bodyPr>
+          <a:lstStyle/>
+          <a:p>
+            <a:pPr algn="l">
+              <a:lnSpc>
+                <a:spcPct val="102000"/>
+              </a:lnSpc>
+            </a:pPr>
+            <a:r>
+              <a:rPr sz="850" b="1" i="1">
+                <a:solidFill>
+                  <a:srgbClr val="065A82"/>
+                </a:solidFill>
+                <a:latin typeface="DejaVu Sans"/>
+              </a:rPr>
+              <a:t>[1] </a:t>
+            </a:r>
+            <a:r>
+              <a:rPr sz="850" i="1">
+                <a:solidFill>
+                  <a:srgbClr val="1C7293"/>
+                </a:solidFill>
+                <a:latin typeface="DejaVu Sans"/>
+                <a:hlinkClick r:id="rId5"/>
+              </a:rPr>
+              <a:t>STAT News — утечка внутренних документов IBM Watson</a:t>
+            </a:r>
+            <a:r>
+              <a:rPr sz="850" i="1">
+                <a:solidFill>
+                  <a:srgbClr val="1C7293"/>
+                </a:solidFill>
+                <a:latin typeface="DejaVu Sans"/>
+              </a:rPr>
+              <a:t>   ·   </a:t>
+            </a:r>
+            <a:r>
+              <a:rPr sz="850" b="1" i="1">
+                <a:solidFill>
+                  <a:srgbClr val="065A82"/>
+                </a:solidFill>
+                <a:latin typeface="DejaVu Sans"/>
+              </a:rPr>
+              <a:t>[2] </a:t>
+            </a:r>
+            <a:r>
+              <a:rPr sz="850" i="1">
+                <a:solidFill>
+                  <a:srgbClr val="1C7293"/>
+                </a:solidFill>
+                <a:latin typeface="DejaVu Sans"/>
+                <a:hlinkClick r:id="rId6"/>
+              </a:rPr>
+              <a:t>IEEE Spectrum — как Watson переобещал и недодал</a:t>
+            </a:r>
+          </a:p>
+        </p:txBody>
+      </p:sp>
+      <p:sp>
+        <p:nvSpPr>
+          <p:cNvPr id="16" name="TextBox 15"/>
           <p:cNvSpPr txBox="1"/>
           <p:nvPr/>
         </p:nvSpPr>
@@ -15355,7 +16367,18 @@
                 </a:solidFill>
                 <a:latin typeface="DejaVu Sans"/>
               </a:rPr>
-              <a:t>Double Diamond</a:t>
+              <a:t>Double Diamond </a:t>
+            </a:r>
+            <a:r>
+              <a:rPr sz="624" baseline="30000" b="0" i="1">
+                <a:latin typeface="DejaVu Sans"/>
+                <a:cs typeface="DejaVu Sans"/>
+                <a:ea typeface="DejaVu Sans"/>
+                <a:solidFill>
+                  <a:srgbClr val="1C7293"/>
+                </a:solidFill>
+              </a:rPr>
+              <a:t>[1]</a:t>
             </a:r>
           </a:p>
           <a:p>
@@ -15498,6 +16521,55 @@
       <p:sp>
         <p:nvSpPr>
           <p:cNvPr id="15" name="TextBox 14"/>
+          <p:cNvSpPr txBox="1"/>
+          <p:nvPr/>
+        </p:nvSpPr>
+        <p:spPr>
+          <a:xfrm>
+            <a:off x="502920" y="6455664"/>
+            <a:ext cx="11201400" cy="548640"/>
+          </a:xfrm>
+          <a:prstGeom prst="rect">
+            <a:avLst/>
+          </a:prstGeom>
+          <a:noFill/>
+        </p:spPr>
+        <p:txBody>
+          <a:bodyPr wrap="square" lIns="0" rIns="0" tIns="0" bIns="0" anchor="t">
+            <a:spAutoFit/>
+          </a:bodyPr>
+          <a:lstStyle/>
+          <a:p>
+            <a:pPr algn="l">
+              <a:lnSpc>
+                <a:spcPct val="102000"/>
+              </a:lnSpc>
+            </a:pPr>
+            <a:r>
+              <a:rPr sz="850" b="1" i="1">
+                <a:solidFill>
+                  <a:srgbClr val="065A82"/>
+                </a:solidFill>
+                <a:latin typeface="DejaVu Sans"/>
+              </a:rPr>
+              <a:t>[1] </a:t>
+            </a:r>
+            <a:r>
+              <a:rPr sz="850" i="1">
+                <a:solidFill>
+                  <a:srgbClr val="1C7293"/>
+                </a:solidFill>
+                <a:latin typeface="DejaVu Sans"/>
+                <a:hlinkClick r:id="rId2"/>
+              </a:rPr>
+              <a:t>UK Design Council — The Double Diamond</a:t>
+            </a:r>
+          </a:p>
+        </p:txBody>
+      </p:sp>
+      <p:sp>
+        <p:nvSpPr>
+          <p:cNvPr id="16" name="TextBox 15"/>
           <p:cNvSpPr txBox="1"/>
           <p:nvPr/>
         </p:nvSpPr>
@@ -15705,7 +16777,18 @@
                 </a:solidFill>
                 <a:latin typeface="DejaVu Sans"/>
               </a:rPr>
-              <a:t>Топ-5 из 10 эвристик</a:t>
+              <a:t>Топ-5 из 10 эвристик </a:t>
+            </a:r>
+            <a:r>
+              <a:rPr sz="780" baseline="30000" b="0" i="1">
+                <a:latin typeface="DejaVu Sans"/>
+                <a:cs typeface="DejaVu Sans"/>
+                <a:ea typeface="DejaVu Sans"/>
+                <a:solidFill>
+                  <a:srgbClr val="1C7293"/>
+                </a:solidFill>
+              </a:rPr>
+              <a:t>[1]</a:t>
             </a:r>
           </a:p>
         </p:txBody>
@@ -16412,7 +17495,29 @@
                 </a:solidFill>
                 <a:latin typeface="DejaVu Sans"/>
               </a:rPr>
-              <a:t>Метафора: эвристики — как линтер для интерфейса. Ловят типовые проблемы до траты денег на исследование — но не заменяют тест на живом пользователе.</a:t>
+              <a:t>Метафора: эвристики — как линтер для интерфейса. Ловят типовые проблемы до траты денег на исследование — но не заменяют тест на живом пользователе </a:t>
+            </a:r>
+            <a:r>
+              <a:rPr sz="650" baseline="30000" b="0" i="1">
+                <a:latin typeface="DejaVu Sans"/>
+                <a:cs typeface="DejaVu Sans"/>
+                <a:ea typeface="DejaVu Sans"/>
+                <a:solidFill>
+                  <a:srgbClr val="1C7293"/>
+                </a:solidFill>
+              </a:rPr>
+              <a:t>[2]</a:t>
+            </a:r>
+            <a:r>
+              <a:rPr sz="1250" b="1" i="0">
+                <a:latin typeface="DejaVu Sans"/>
+                <a:cs typeface="DejaVu Sans"/>
+                <a:ea typeface="DejaVu Sans"/>
+                <a:solidFill>
+                  <a:srgbClr val="21295C"/>
+                </a:solidFill>
+              </a:rPr>
+              <a:t>.</a:t>
             </a:r>
           </a:p>
         </p:txBody>
@@ -16531,6 +17636,83 @@
       <p:sp>
         <p:nvSpPr>
           <p:cNvPr id="25" name="TextBox 24"/>
+          <p:cNvSpPr txBox="1"/>
+          <p:nvPr/>
+        </p:nvSpPr>
+        <p:spPr>
+          <a:xfrm>
+            <a:off x="502920" y="6455664"/>
+            <a:ext cx="11201400" cy="548640"/>
+          </a:xfrm>
+          <a:prstGeom prst="rect">
+            <a:avLst/>
+          </a:prstGeom>
+          <a:noFill/>
+        </p:spPr>
+        <p:txBody>
+          <a:bodyPr wrap="square" lIns="0" rIns="0" tIns="0" bIns="0" anchor="t">
+            <a:spAutoFit/>
+          </a:bodyPr>
+          <a:lstStyle/>
+          <a:p>
+            <a:pPr algn="l">
+              <a:lnSpc>
+                <a:spcPct val="102000"/>
+              </a:lnSpc>
+            </a:pPr>
+            <a:r>
+              <a:rPr sz="850" b="1" i="1">
+                <a:solidFill>
+                  <a:srgbClr val="065A82"/>
+                </a:solidFill>
+                <a:latin typeface="DejaVu Sans"/>
+              </a:rPr>
+              <a:t>[1] </a:t>
+            </a:r>
+            <a:r>
+              <a:rPr sz="850" i="1">
+                <a:solidFill>
+                  <a:srgbClr val="1C7293"/>
+                </a:solidFill>
+                <a:latin typeface="DejaVu Sans"/>
+                <a:hlinkClick r:id="rId5"/>
+              </a:rPr>
+              <a:t>Nielsen — 10 usability heuristics</a:t>
+            </a:r>
+            <a:r>
+              <a:rPr sz="850" i="1">
+                <a:solidFill>
+                  <a:srgbClr val="1C7293"/>
+                </a:solidFill>
+                <a:latin typeface="DejaVu Sans"/>
+              </a:rPr>
+              <a:t>   ·   </a:t>
+            </a:r>
+            <a:r>
+              <a:rPr sz="850" b="1" i="1">
+                <a:solidFill>
+                  <a:srgbClr val="065A82"/>
+                </a:solidFill>
+                <a:latin typeface="DejaVu Sans"/>
+              </a:rPr>
+              <a:t>[2] </a:t>
+            </a:r>
+            <a:r>
+              <a:rPr sz="850" i="1">
+                <a:solidFill>
+                  <a:srgbClr val="1C7293"/>
+                </a:solidFill>
+                <a:latin typeface="DejaVu Sans"/>
+                <a:hlinkClick r:id="rId6"/>
+              </a:rPr>
+              <a:t>Nielsen — «you are not the user»</a:t>
+            </a:r>
+          </a:p>
+        </p:txBody>
+      </p:sp>
+      <p:sp>
+        <p:nvSpPr>
+          <p:cNvPr id="26" name="TextBox 25"/>
           <p:cNvSpPr txBox="1"/>
           <p:nvPr/>
         </p:nvSpPr>
@@ -19398,7 +20580,51 @@
                 </a:solidFill>
                 <a:latin typeface="DejaVu Sans"/>
               </a:rPr>
-              <a:t>v0 (Vercel) · Figma Make · Google Stitch · bolt.new</a:t>
+              <a:t>v0 (Vercel) · Figma Make </a:t>
+            </a:r>
+            <a:r>
+              <a:rPr sz="650" baseline="30000" b="0" i="1">
+                <a:latin typeface="DejaVu Sans"/>
+                <a:cs typeface="DejaVu Sans"/>
+                <a:ea typeface="DejaVu Sans"/>
+                <a:solidFill>
+                  <a:srgbClr val="1C7293"/>
+                </a:solidFill>
+              </a:rPr>
+              <a:t>[1]</a:t>
+            </a:r>
+            <a:r>
+              <a:rPr sz="1250" b="0" i="0">
+                <a:latin typeface="DejaVu Sans"/>
+                <a:cs typeface="DejaVu Sans"/>
+                <a:ea typeface="DejaVu Sans"/>
+                <a:solidFill>
+                  <a:srgbClr val="21295C"/>
+                </a:solidFill>
+              </a:rPr>
+              <a:t> · Google Stitch </a:t>
+            </a:r>
+            <a:r>
+              <a:rPr sz="650" baseline="30000" b="0" i="1">
+                <a:latin typeface="DejaVu Sans"/>
+                <a:cs typeface="DejaVu Sans"/>
+                <a:ea typeface="DejaVu Sans"/>
+                <a:solidFill>
+                  <a:srgbClr val="1C7293"/>
+                </a:solidFill>
+              </a:rPr>
+              <a:t>[2]</a:t>
+            </a:r>
+            <a:r>
+              <a:rPr sz="1250" b="0" i="0">
+                <a:latin typeface="DejaVu Sans"/>
+                <a:cs typeface="DejaVu Sans"/>
+                <a:ea typeface="DejaVu Sans"/>
+                <a:solidFill>
+                  <a:srgbClr val="21295C"/>
+                </a:solidFill>
+              </a:rPr>
+              <a:t> · bolt.new</a:t>
             </a:r>
           </a:p>
         </p:txBody>
@@ -19548,6 +20774,83 @@
       <p:sp>
         <p:nvSpPr>
           <p:cNvPr id="26" name="TextBox 25"/>
+          <p:cNvSpPr txBox="1"/>
+          <p:nvPr/>
+        </p:nvSpPr>
+        <p:spPr>
+          <a:xfrm>
+            <a:off x="502920" y="6455664"/>
+            <a:ext cx="11201400" cy="548640"/>
+          </a:xfrm>
+          <a:prstGeom prst="rect">
+            <a:avLst/>
+          </a:prstGeom>
+          <a:noFill/>
+        </p:spPr>
+        <p:txBody>
+          <a:bodyPr wrap="square" lIns="0" rIns="0" tIns="0" bIns="0" anchor="t">
+            <a:spAutoFit/>
+          </a:bodyPr>
+          <a:lstStyle/>
+          <a:p>
+            <a:pPr algn="l">
+              <a:lnSpc>
+                <a:spcPct val="102000"/>
+              </a:lnSpc>
+            </a:pPr>
+            <a:r>
+              <a:rPr sz="850" b="1" i="1">
+                <a:solidFill>
+                  <a:srgbClr val="065A82"/>
+                </a:solidFill>
+                <a:latin typeface="DejaVu Sans"/>
+              </a:rPr>
+              <a:t>[1] </a:t>
+            </a:r>
+            <a:r>
+              <a:rPr sz="850" i="1">
+                <a:solidFill>
+                  <a:srgbClr val="1C7293"/>
+                </a:solidFill>
+                <a:latin typeface="DejaVu Sans"/>
+                <a:hlinkClick r:id="rId3"/>
+              </a:rPr>
+              <a:t>Figma — AI-инструменты дизайна 2026</a:t>
+            </a:r>
+            <a:r>
+              <a:rPr sz="850" i="1">
+                <a:solidFill>
+                  <a:srgbClr val="1C7293"/>
+                </a:solidFill>
+                <a:latin typeface="DejaVu Sans"/>
+              </a:rPr>
+              <a:t>   ·   </a:t>
+            </a:r>
+            <a:r>
+              <a:rPr sz="850" b="1" i="1">
+                <a:solidFill>
+                  <a:srgbClr val="065A82"/>
+                </a:solidFill>
+                <a:latin typeface="DejaVu Sans"/>
+              </a:rPr>
+              <a:t>[2] </a:t>
+            </a:r>
+            <a:r>
+              <a:rPr sz="850" i="1">
+                <a:solidFill>
+                  <a:srgbClr val="1C7293"/>
+                </a:solidFill>
+                <a:latin typeface="DejaVu Sans"/>
+                <a:hlinkClick r:id="rId4"/>
+              </a:rPr>
+              <a:t>Google Stitch (ex-Galileo AI)</a:t>
+            </a:r>
+          </a:p>
+        </p:txBody>
+      </p:sp>
+      <p:sp>
+        <p:nvSpPr>
+          <p:cNvPr id="27" name="TextBox 26"/>
           <p:cNvSpPr txBox="1"/>
           <p:nvPr/>
         </p:nvSpPr>
@@ -19644,7 +20947,18 @@
                 </a:solidFill>
                 <a:latin typeface="DejaVu Sans"/>
               </a:rPr>
-              <a:t>29% соответствие WCAG на 21 880 оценках — платформа важнее промпта</a:t>
+              <a:t>29% соответствие WCAG на 21 880 оценках — платформа важнее промпта </a:t>
+            </a:r>
+            <a:r>
+              <a:rPr sz="1092" baseline="30000" b="0" i="1">
+                <a:latin typeface="DejaVu Sans"/>
+                <a:cs typeface="DejaVu Sans"/>
+                <a:ea typeface="DejaVu Sans"/>
+                <a:solidFill>
+                  <a:srgbClr val="1C7293"/>
+                </a:solidFill>
+              </a:rPr>
+              <a:t>[1]</a:t>
             </a:r>
           </a:p>
         </p:txBody>
@@ -20057,6 +21371,55 @@
       <p:sp>
         <p:nvSpPr>
           <p:cNvPr id="12" name="TextBox 11"/>
+          <p:cNvSpPr txBox="1"/>
+          <p:nvPr/>
+        </p:nvSpPr>
+        <p:spPr>
+          <a:xfrm>
+            <a:off x="502920" y="6455664"/>
+            <a:ext cx="11201400" cy="548640"/>
+          </a:xfrm>
+          <a:prstGeom prst="rect">
+            <a:avLst/>
+          </a:prstGeom>
+          <a:noFill/>
+        </p:spPr>
+        <p:txBody>
+          <a:bodyPr wrap="square" lIns="0" rIns="0" tIns="0" bIns="0" anchor="t">
+            <a:spAutoFit/>
+          </a:bodyPr>
+          <a:lstStyle/>
+          <a:p>
+            <a:pPr algn="l">
+              <a:lnSpc>
+                <a:spcPct val="102000"/>
+              </a:lnSpc>
+            </a:pPr>
+            <a:r>
+              <a:rPr sz="850" b="1" i="1">
+                <a:solidFill>
+                  <a:srgbClr val="065A82"/>
+                </a:solidFill>
+                <a:latin typeface="DejaVu Sans"/>
+              </a:rPr>
+              <a:t>[1] </a:t>
+            </a:r>
+            <a:r>
+              <a:rPr sz="850" i="1">
+                <a:solidFill>
+                  <a:srgbClr val="1C7293"/>
+                </a:solidFill>
+                <a:latin typeface="DejaVu Sans"/>
+                <a:hlinkClick r:id="rId4"/>
+              </a:rPr>
+              <a:t>ACM Web4All 2026 — Generated Inaccessible</a:t>
+            </a:r>
+          </a:p>
+        </p:txBody>
+      </p:sp>
+      <p:sp>
+        <p:nvSpPr>
+          <p:cNvPr id="13" name="TextBox 12"/>
           <p:cNvSpPr txBox="1"/>
           <p:nvPr/>
         </p:nvSpPr>
@@ -20462,7 +21825,29 @@
                 </a:solidFill>
                 <a:latin typeface="DejaVu Sans"/>
               </a:rPr>
-              <a:t>14-летний пользователь погиб после месяцев общения с ИИ-персонажем (02.2024).</a:t>
+              <a:t>14-летний пользователь погиб после месяцев общения с ИИ-персонажем (02.2024) </a:t>
+            </a:r>
+            <a:r>
+              <a:rPr sz="624" baseline="30000" b="0" i="1">
+                <a:latin typeface="DejaVu Sans"/>
+                <a:cs typeface="DejaVu Sans"/>
+                <a:ea typeface="DejaVu Sans"/>
+                <a:solidFill>
+                  <a:srgbClr val="1C7293"/>
+                </a:solidFill>
+              </a:rPr>
+              <a:t>[1]</a:t>
+            </a:r>
+            <a:r>
+              <a:rPr sz="1200" b="0" i="0">
+                <a:latin typeface="DejaVu Sans"/>
+                <a:cs typeface="DejaVu Sans"/>
+                <a:ea typeface="DejaVu Sans"/>
+                <a:solidFill>
+                  <a:srgbClr val="21295C"/>
+                </a:solidFill>
+              </a:rPr>
+              <a:t>.</a:t>
             </a:r>
           </a:p>
         </p:txBody>
@@ -20955,7 +22340,18 @@
                 </a:solidFill>
                 <a:latin typeface="DejaVu Sans"/>
               </a:rPr>
-              <a:t>11.2025</a:t>
+              <a:t>11.2025 </a:t>
+            </a:r>
+            <a:r>
+              <a:rPr sz="520" baseline="30000" b="0" i="1">
+                <a:latin typeface="DejaVu Sans"/>
+                <a:cs typeface="DejaVu Sans"/>
+                <a:ea typeface="DejaVu Sans"/>
+                <a:solidFill>
+                  <a:srgbClr val="1C7293"/>
+                </a:solidFill>
+              </a:rPr>
+              <a:t>[2]</a:t>
             </a:r>
           </a:p>
         </p:txBody>
@@ -21050,6 +22446,83 @@
       <p:sp>
         <p:nvSpPr>
           <p:cNvPr id="24" name="TextBox 23"/>
+          <p:cNvSpPr txBox="1"/>
+          <p:nvPr/>
+        </p:nvSpPr>
+        <p:spPr>
+          <a:xfrm>
+            <a:off x="502920" y="6455664"/>
+            <a:ext cx="11201400" cy="548640"/>
+          </a:xfrm>
+          <a:prstGeom prst="rect">
+            <a:avLst/>
+          </a:prstGeom>
+          <a:noFill/>
+        </p:spPr>
+        <p:txBody>
+          <a:bodyPr wrap="square" lIns="0" rIns="0" tIns="0" bIns="0" anchor="t">
+            <a:spAutoFit/>
+          </a:bodyPr>
+          <a:lstStyle/>
+          <a:p>
+            <a:pPr algn="l">
+              <a:lnSpc>
+                <a:spcPct val="102000"/>
+              </a:lnSpc>
+            </a:pPr>
+            <a:r>
+              <a:rPr sz="850" b="1" i="1">
+                <a:solidFill>
+                  <a:srgbClr val="065A82"/>
+                </a:solidFill>
+                <a:latin typeface="DejaVu Sans"/>
+              </a:rPr>
+              <a:t>[1] </a:t>
+            </a:r>
+            <a:r>
+              <a:rPr sz="850" i="1">
+                <a:solidFill>
+                  <a:srgbClr val="1C7293"/>
+                </a:solidFill>
+                <a:latin typeface="DejaVu Sans"/>
+                <a:hlinkClick r:id="rId4"/>
+              </a:rPr>
+              <a:t>Washington Post (24 окт. 2024)</a:t>
+            </a:r>
+            <a:r>
+              <a:rPr sz="850" i="1">
+                <a:solidFill>
+                  <a:srgbClr val="1C7293"/>
+                </a:solidFill>
+                <a:latin typeface="DejaVu Sans"/>
+              </a:rPr>
+              <a:t>   ·   </a:t>
+            </a:r>
+            <a:r>
+              <a:rPr sz="850" b="1" i="1">
+                <a:solidFill>
+                  <a:srgbClr val="065A82"/>
+                </a:solidFill>
+                <a:latin typeface="DejaVu Sans"/>
+              </a:rPr>
+              <a:t>[2] </a:t>
+            </a:r>
+            <a:r>
+              <a:rPr sz="850" i="1">
+                <a:solidFill>
+                  <a:srgbClr val="1C7293"/>
+                </a:solidFill>
+                <a:latin typeface="DejaVu Sans"/>
+                <a:hlinkClick r:id="rId5"/>
+              </a:rPr>
+              <a:t>CBS News (янв. 2026) — урегулирование</a:t>
+            </a:r>
+          </a:p>
+        </p:txBody>
+      </p:sp>
+      <p:sp>
+        <p:nvSpPr>
+          <p:cNvPr id="25" name="TextBox 24"/>
           <p:cNvSpPr txBox="1"/>
           <p:nvPr/>
         </p:nvSpPr>
@@ -21494,7 +22967,18 @@
                 </a:solidFill>
                 <a:latin typeface="DejaVu Sans"/>
               </a:rPr>
-              <a:t>$365 000</a:t>
+              <a:t>$365 000 </a:t>
+            </a:r>
+            <a:r>
+              <a:rPr sz="1248" baseline="30000" b="0" i="1">
+                <a:latin typeface="DejaVu Sans"/>
+                <a:cs typeface="DejaVu Sans"/>
+                <a:ea typeface="DejaVu Sans"/>
+                <a:solidFill>
+                  <a:srgbClr val="1C7293"/>
+                </a:solidFill>
+              </a:rPr>
+              <a:t>[1]</a:t>
             </a:r>
           </a:p>
         </p:txBody>
@@ -21628,6 +23112,55 @@
       <p:sp>
         <p:nvSpPr>
           <p:cNvPr id="15" name="TextBox 14"/>
+          <p:cNvSpPr txBox="1"/>
+          <p:nvPr/>
+        </p:nvSpPr>
+        <p:spPr>
+          <a:xfrm>
+            <a:off x="502920" y="6455664"/>
+            <a:ext cx="11201400" cy="548640"/>
+          </a:xfrm>
+          <a:prstGeom prst="rect">
+            <a:avLst/>
+          </a:prstGeom>
+          <a:noFill/>
+        </p:spPr>
+        <p:txBody>
+          <a:bodyPr wrap="square" lIns="0" rIns="0" tIns="0" bIns="0" anchor="t">
+            <a:spAutoFit/>
+          </a:bodyPr>
+          <a:lstStyle/>
+          <a:p>
+            <a:pPr algn="l">
+              <a:lnSpc>
+                <a:spcPct val="102000"/>
+              </a:lnSpc>
+            </a:pPr>
+            <a:r>
+              <a:rPr sz="850" b="1" i="1">
+                <a:solidFill>
+                  <a:srgbClr val="065A82"/>
+                </a:solidFill>
+                <a:latin typeface="DejaVu Sans"/>
+              </a:rPr>
+              <a:t>[1] </a:t>
+            </a:r>
+            <a:r>
+              <a:rPr sz="850" i="1">
+                <a:solidFill>
+                  <a:srgbClr val="1C7293"/>
+                </a:solidFill>
+                <a:latin typeface="DejaVu Sans"/>
+                <a:hlinkClick r:id="rId4"/>
+              </a:rPr>
+              <a:t>EEOC (9 авг. 2023) — iTutorGroup</a:t>
+            </a:r>
+          </a:p>
+        </p:txBody>
+      </p:sp>
+      <p:sp>
+        <p:nvSpPr>
+          <p:cNvPr id="16" name="TextBox 15"/>
           <p:cNvSpPr txBox="1"/>
           <p:nvPr/>
         </p:nvSpPr>
@@ -24349,7 +25882,51 @@
                 </a:solidFill>
                 <a:latin typeface="DejaVu Sans"/>
               </a:rPr>
-              <a:t>НОВОЕ здесь — чьё и по каким критериям решение они обслуживают: MVP (Райс) = обучение, не отгрузка. Stage-Gate go/kill (Купер) — «воронка, не туннель»: пороги провала записаны числом заранее.</a:t>
+              <a:t>НОВОЕ здесь — чьё и по каким критериям решение они обслуживают: MVP (Райс) </a:t>
+            </a:r>
+            <a:r>
+              <a:rPr sz="650" baseline="30000" b="0" i="1">
+                <a:latin typeface="DejaVu Sans"/>
+                <a:cs typeface="DejaVu Sans"/>
+                <a:ea typeface="DejaVu Sans"/>
+                <a:solidFill>
+                  <a:srgbClr val="1C7293"/>
+                </a:solidFill>
+              </a:rPr>
+              <a:t>[1]</a:t>
+            </a:r>
+            <a:r>
+              <a:rPr sz="1250" b="1" i="0">
+                <a:latin typeface="DejaVu Sans"/>
+                <a:cs typeface="DejaVu Sans"/>
+                <a:ea typeface="DejaVu Sans"/>
+                <a:solidFill>
+                  <a:srgbClr val="21295C"/>
+                </a:solidFill>
+              </a:rPr>
+              <a:t> = обучение, не отгрузка. Stage-Gate go/kill (Купер) </a:t>
+            </a:r>
+            <a:r>
+              <a:rPr sz="650" baseline="30000" b="0" i="1">
+                <a:latin typeface="DejaVu Sans"/>
+                <a:cs typeface="DejaVu Sans"/>
+                <a:ea typeface="DejaVu Sans"/>
+                <a:solidFill>
+                  <a:srgbClr val="1C7293"/>
+                </a:solidFill>
+              </a:rPr>
+              <a:t>[2]</a:t>
+            </a:r>
+            <a:r>
+              <a:rPr sz="1250" b="1" i="0">
+                <a:latin typeface="DejaVu Sans"/>
+                <a:cs typeface="DejaVu Sans"/>
+                <a:ea typeface="DejaVu Sans"/>
+                <a:solidFill>
+                  <a:srgbClr val="21295C"/>
+                </a:solidFill>
+              </a:rPr>
+              <a:t> — «воронка, не туннель»: пороги провала записаны числом заранее.</a:t>
             </a:r>
           </a:p>
         </p:txBody>
@@ -24444,6 +26021,83 @@
       <p:sp>
         <p:nvSpPr>
           <p:cNvPr id="24" name="TextBox 23"/>
+          <p:cNvSpPr txBox="1"/>
+          <p:nvPr/>
+        </p:nvSpPr>
+        <p:spPr>
+          <a:xfrm>
+            <a:off x="502920" y="6455664"/>
+            <a:ext cx="11201400" cy="548640"/>
+          </a:xfrm>
+          <a:prstGeom prst="rect">
+            <a:avLst/>
+          </a:prstGeom>
+          <a:noFill/>
+        </p:spPr>
+        <p:txBody>
+          <a:bodyPr wrap="square" lIns="0" rIns="0" tIns="0" bIns="0" anchor="t">
+            <a:spAutoFit/>
+          </a:bodyPr>
+          <a:lstStyle/>
+          <a:p>
+            <a:pPr algn="l">
+              <a:lnSpc>
+                <a:spcPct val="102000"/>
+              </a:lnSpc>
+            </a:pPr>
+            <a:r>
+              <a:rPr sz="850" b="1" i="1">
+                <a:solidFill>
+                  <a:srgbClr val="065A82"/>
+                </a:solidFill>
+                <a:latin typeface="DejaVu Sans"/>
+              </a:rPr>
+              <a:t>[1] </a:t>
+            </a:r>
+            <a:r>
+              <a:rPr sz="850" i="1">
+                <a:solidFill>
+                  <a:srgbClr val="1C7293"/>
+                </a:solidFill>
+                <a:latin typeface="DejaVu Sans"/>
+                <a:hlinkClick r:id="rId3"/>
+              </a:rPr>
+              <a:t>Ries — Lean Startup / MVP</a:t>
+            </a:r>
+            <a:r>
+              <a:rPr sz="850" i="1">
+                <a:solidFill>
+                  <a:srgbClr val="1C7293"/>
+                </a:solidFill>
+                <a:latin typeface="DejaVu Sans"/>
+              </a:rPr>
+              <a:t>   ·   </a:t>
+            </a:r>
+            <a:r>
+              <a:rPr sz="850" b="1" i="1">
+                <a:solidFill>
+                  <a:srgbClr val="065A82"/>
+                </a:solidFill>
+                <a:latin typeface="DejaVu Sans"/>
+              </a:rPr>
+              <a:t>[2] </a:t>
+            </a:r>
+            <a:r>
+              <a:rPr sz="850" i="1">
+                <a:solidFill>
+                  <a:srgbClr val="1C7293"/>
+                </a:solidFill>
+                <a:latin typeface="DejaVu Sans"/>
+                <a:hlinkClick r:id="rId4"/>
+              </a:rPr>
+              <a:t>Stage-Gate — история метода</a:t>
+            </a:r>
+          </a:p>
+        </p:txBody>
+      </p:sp>
+      <p:sp>
+        <p:nvSpPr>
+          <p:cNvPr id="25" name="TextBox 24"/>
           <p:cNvSpPr txBox="1"/>
           <p:nvPr/>
         </p:nvSpPr>
@@ -24540,7 +26194,18 @@
                 </a:solidFill>
                 <a:latin typeface="DejaVu Sans"/>
               </a:rPr>
-              <a:t>+200% кода на инженера — но лишь 16% PR получили содержательное ревью</a:t>
+              <a:t>+200% кода на инженера — но лишь 16% PR получили содержательное ревью </a:t>
+            </a:r>
+            <a:r>
+              <a:rPr sz="1040" baseline="30000" b="0" i="1">
+                <a:latin typeface="DejaVu Sans"/>
+                <a:cs typeface="DejaVu Sans"/>
+                <a:ea typeface="DejaVu Sans"/>
+                <a:solidFill>
+                  <a:srgbClr val="1C7293"/>
+                </a:solidFill>
+              </a:rPr>
+              <a:t>[1]</a:t>
             </a:r>
           </a:p>
         </p:txBody>
@@ -24897,6 +26562,55 @@
       <p:sp>
         <p:nvSpPr>
           <p:cNvPr id="10" name="TextBox 9"/>
+          <p:cNvSpPr txBox="1"/>
+          <p:nvPr/>
+        </p:nvSpPr>
+        <p:spPr>
+          <a:xfrm>
+            <a:off x="502920" y="6455664"/>
+            <a:ext cx="11201400" cy="548640"/>
+          </a:xfrm>
+          <a:prstGeom prst="rect">
+            <a:avLst/>
+          </a:prstGeom>
+          <a:noFill/>
+        </p:spPr>
+        <p:txBody>
+          <a:bodyPr wrap="square" lIns="0" rIns="0" tIns="0" bIns="0" anchor="t">
+            <a:spAutoFit/>
+          </a:bodyPr>
+          <a:lstStyle/>
+          <a:p>
+            <a:pPr algn="l">
+              <a:lnSpc>
+                <a:spcPct val="102000"/>
+              </a:lnSpc>
+            </a:pPr>
+            <a:r>
+              <a:rPr sz="850" b="1" i="1">
+                <a:solidFill>
+                  <a:srgbClr val="065A82"/>
+                </a:solidFill>
+                <a:latin typeface="DejaVu Sans"/>
+              </a:rPr>
+              <a:t>[1] </a:t>
+            </a:r>
+            <a:r>
+              <a:rPr sz="850" i="1">
+                <a:solidFill>
+                  <a:srgbClr val="1C7293"/>
+                </a:solidFill>
+                <a:latin typeface="DejaVu Sans"/>
+                <a:hlinkClick r:id="rId3"/>
+              </a:rPr>
+              <a:t>Anthropic — 2026 Agentic Coding Trends Report</a:t>
+            </a:r>
+          </a:p>
+        </p:txBody>
+      </p:sp>
+      <p:sp>
+        <p:nvSpPr>
+          <p:cNvPr id="11" name="TextBox 10"/>
           <p:cNvSpPr txBox="1"/>
           <p:nvPr/>
         </p:nvSpPr>
@@ -25623,7 +27337,18 @@
                 </a:solidFill>
                 <a:latin typeface="DejaVu Sans"/>
               </a:rPr>
-              <a:t>CC/CD против привычного CI/CD</a:t>
+              <a:t>CC/CD против привычного CI/CD </a:t>
+            </a:r>
+            <a:r>
+              <a:rPr sz="728" baseline="30000" b="0" i="1">
+                <a:latin typeface="DejaVu Sans"/>
+                <a:cs typeface="DejaVu Sans"/>
+                <a:ea typeface="DejaVu Sans"/>
+                <a:solidFill>
+                  <a:srgbClr val="1C7293"/>
+                </a:solidFill>
+              </a:rPr>
+              <a:t>[1]</a:t>
             </a:r>
           </a:p>
         </p:txBody>
@@ -25757,6 +27482,55 @@
       <p:sp>
         <p:nvSpPr>
           <p:cNvPr id="20" name="TextBox 19"/>
+          <p:cNvSpPr txBox="1"/>
+          <p:nvPr/>
+        </p:nvSpPr>
+        <p:spPr>
+          <a:xfrm>
+            <a:off x="502920" y="6455664"/>
+            <a:ext cx="11201400" cy="548640"/>
+          </a:xfrm>
+          <a:prstGeom prst="rect">
+            <a:avLst/>
+          </a:prstGeom>
+          <a:noFill/>
+        </p:spPr>
+        <p:txBody>
+          <a:bodyPr wrap="square" lIns="0" rIns="0" tIns="0" bIns="0" anchor="t">
+            <a:spAutoFit/>
+          </a:bodyPr>
+          <a:lstStyle/>
+          <a:p>
+            <a:pPr algn="l">
+              <a:lnSpc>
+                <a:spcPct val="102000"/>
+              </a:lnSpc>
+            </a:pPr>
+            <a:r>
+              <a:rPr sz="850" b="1" i="1">
+                <a:solidFill>
+                  <a:srgbClr val="065A82"/>
+                </a:solidFill>
+                <a:latin typeface="DejaVu Sans"/>
+              </a:rPr>
+              <a:t>[1] </a:t>
+            </a:r>
+            <a:r>
+              <a:rPr sz="850" i="1">
+                <a:solidFill>
+                  <a:srgbClr val="1C7293"/>
+                </a:solidFill>
+                <a:latin typeface="DejaVu Sans"/>
+                <a:hlinkClick r:id="rId2"/>
+              </a:rPr>
+              <a:t>Reganti &amp; Badam — CC/CD framework</a:t>
+            </a:r>
+          </a:p>
+        </p:txBody>
+      </p:sp>
+      <p:sp>
+        <p:nvSpPr>
+          <p:cNvPr id="21" name="TextBox 20"/>
           <p:cNvSpPr txBox="1"/>
           <p:nvPr/>
         </p:nvSpPr>
@@ -26257,7 +28031,18 @@
                 </a:solidFill>
                 <a:latin typeface="DejaVu Sans"/>
               </a:rPr>
-              <a:t>Проблема 70%</a:t>
+              <a:t>Проблема 70% </a:t>
+            </a:r>
+            <a:r>
+              <a:rPr sz="728" baseline="30000" b="0" i="1">
+                <a:latin typeface="DejaVu Sans"/>
+                <a:cs typeface="DejaVu Sans"/>
+                <a:ea typeface="DejaVu Sans"/>
+                <a:solidFill>
+                  <a:srgbClr val="1C7293"/>
+                </a:solidFill>
+              </a:rPr>
+              <a:t>[1]</a:t>
             </a:r>
           </a:p>
         </p:txBody>
@@ -26423,6 +28208,55 @@
       <p:sp>
         <p:nvSpPr>
           <p:cNvPr id="15" name="TextBox 14"/>
+          <p:cNvSpPr txBox="1"/>
+          <p:nvPr/>
+        </p:nvSpPr>
+        <p:spPr>
+          <a:xfrm>
+            <a:off x="502920" y="6455664"/>
+            <a:ext cx="11201400" cy="548640"/>
+          </a:xfrm>
+          <a:prstGeom prst="rect">
+            <a:avLst/>
+          </a:prstGeom>
+          <a:noFill/>
+        </p:spPr>
+        <p:txBody>
+          <a:bodyPr wrap="square" lIns="0" rIns="0" tIns="0" bIns="0" anchor="t">
+            <a:spAutoFit/>
+          </a:bodyPr>
+          <a:lstStyle/>
+          <a:p>
+            <a:pPr algn="l">
+              <a:lnSpc>
+                <a:spcPct val="102000"/>
+              </a:lnSpc>
+            </a:pPr>
+            <a:r>
+              <a:rPr sz="850" b="1" i="1">
+                <a:solidFill>
+                  <a:srgbClr val="065A82"/>
+                </a:solidFill>
+                <a:latin typeface="DejaVu Sans"/>
+              </a:rPr>
+              <a:t>[1] </a:t>
+            </a:r>
+            <a:r>
+              <a:rPr sz="850" i="1">
+                <a:solidFill>
+                  <a:srgbClr val="1C7293"/>
+                </a:solidFill>
+                <a:latin typeface="DejaVu Sans"/>
+                <a:hlinkClick r:id="rId3"/>
+              </a:rPr>
+              <a:t>Osmani — The 70% Problem</a:t>
+            </a:r>
+          </a:p>
+        </p:txBody>
+      </p:sp>
+      <p:sp>
+        <p:nvSpPr>
+          <p:cNvPr id="16" name="TextBox 15"/>
           <p:cNvSpPr txBox="1"/>
           <p:nvPr/>
         </p:nvSpPr>
@@ -28135,7 +29969,29 @@
                 </a:solidFill>
                 <a:latin typeface="DejaVu Sans"/>
               </a:rPr>
-              <a:t>Раскатан на 100% поиска США одним шагом. Без eval-гейта. Отключить пользователю нельзя.</a:t>
+              <a:t>Раскатан на 100% поиска США одним шагом </a:t>
+            </a:r>
+            <a:r>
+              <a:rPr sz="598" baseline="30000" b="0" i="1">
+                <a:latin typeface="DejaVu Sans"/>
+                <a:cs typeface="DejaVu Sans"/>
+                <a:ea typeface="DejaVu Sans"/>
+                <a:solidFill>
+                  <a:srgbClr val="1C7293"/>
+                </a:solidFill>
+              </a:rPr>
+              <a:t>[1]</a:t>
+            </a:r>
+            <a:r>
+              <a:rPr sz="1150" b="0" i="0">
+                <a:latin typeface="DejaVu Sans"/>
+                <a:cs typeface="DejaVu Sans"/>
+                <a:ea typeface="DejaVu Sans"/>
+                <a:solidFill>
+                  <a:srgbClr val="21295C"/>
+                </a:solidFill>
+              </a:rPr>
+              <a:t>. Без eval-гейта. Отключить пользователю нельзя.</a:t>
             </a:r>
           </a:p>
         </p:txBody>
@@ -28872,7 +30728,29 @@
                 </a:solidFill>
                 <a:latin typeface="DejaVu Sans"/>
               </a:rPr>
-              <a:t>На 1% трафика паттерн («ешьте камни» — сатира The Onion; «клей на пиццу» — шутка на Reddit) всплыл бы за дни во внутреннем мониторинге. Вместо этого — публичное осмеяние сразу на 100% аудитории.</a:t>
+              <a:t>На 1% трафика паттерн («ешьте камни» — сатира The Onion; «клей на пиццу» — шутка на Reddit) всплыл бы за дни во внутреннем мониторинге </a:t>
+            </a:r>
+            <a:r>
+              <a:rPr sz="650" baseline="30000" b="0" i="1">
+                <a:latin typeface="DejaVu Sans"/>
+                <a:cs typeface="DejaVu Sans"/>
+                <a:ea typeface="DejaVu Sans"/>
+                <a:solidFill>
+                  <a:srgbClr val="1C7293"/>
+                </a:solidFill>
+              </a:rPr>
+              <a:t>[2]</a:t>
+            </a:r>
+            <a:r>
+              <a:rPr sz="1250" b="1" i="0">
+                <a:latin typeface="DejaVu Sans"/>
+                <a:cs typeface="DejaVu Sans"/>
+                <a:ea typeface="DejaVu Sans"/>
+                <a:solidFill>
+                  <a:srgbClr val="21295C"/>
+                </a:solidFill>
+              </a:rPr>
+              <a:t>. Вместо этого — публичное осмеяние сразу на 100% аудитории.</a:t>
             </a:r>
           </a:p>
         </p:txBody>
@@ -28880,6 +30758,83 @@
       <p:sp>
         <p:nvSpPr>
           <p:cNvPr id="27" name="TextBox 26"/>
+          <p:cNvSpPr txBox="1"/>
+          <p:nvPr/>
+        </p:nvSpPr>
+        <p:spPr>
+          <a:xfrm>
+            <a:off x="502920" y="6455664"/>
+            <a:ext cx="11201400" cy="548640"/>
+          </a:xfrm>
+          <a:prstGeom prst="rect">
+            <a:avLst/>
+          </a:prstGeom>
+          <a:noFill/>
+        </p:spPr>
+        <p:txBody>
+          <a:bodyPr wrap="square" lIns="0" rIns="0" tIns="0" bIns="0" anchor="t">
+            <a:spAutoFit/>
+          </a:bodyPr>
+          <a:lstStyle/>
+          <a:p>
+            <a:pPr algn="l">
+              <a:lnSpc>
+                <a:spcPct val="102000"/>
+              </a:lnSpc>
+            </a:pPr>
+            <a:r>
+              <a:rPr sz="850" b="1" i="1">
+                <a:solidFill>
+                  <a:srgbClr val="065A82"/>
+                </a:solidFill>
+                <a:latin typeface="DejaVu Sans"/>
+              </a:rPr>
+              <a:t>[1] </a:t>
+            </a:r>
+            <a:r>
+              <a:rPr sz="850" i="1">
+                <a:solidFill>
+                  <a:srgbClr val="1C7293"/>
+                </a:solidFill>
+                <a:latin typeface="DejaVu Sans"/>
+                <a:hlinkClick r:id="rId4"/>
+              </a:rPr>
+              <a:t>Forbes (31 мая 2024) — Google AI Overviews</a:t>
+            </a:r>
+            <a:r>
+              <a:rPr sz="850" i="1">
+                <a:solidFill>
+                  <a:srgbClr val="1C7293"/>
+                </a:solidFill>
+                <a:latin typeface="DejaVu Sans"/>
+              </a:rPr>
+              <a:t>   ·   </a:t>
+            </a:r>
+            <a:r>
+              <a:rPr sz="850" b="1" i="1">
+                <a:solidFill>
+                  <a:srgbClr val="065A82"/>
+                </a:solidFill>
+                <a:latin typeface="DejaVu Sans"/>
+              </a:rPr>
+              <a:t>[2] </a:t>
+            </a:r>
+            <a:r>
+              <a:rPr sz="850" i="1">
+                <a:solidFill>
+                  <a:srgbClr val="1C7293"/>
+                </a:solidFill>
+                <a:latin typeface="DejaVu Sans"/>
+                <a:hlinkClick r:id="rId5"/>
+              </a:rPr>
+              <a:t>AndroidPolice — «клей на пиццу» / «есть камни»</a:t>
+            </a:r>
+          </a:p>
+        </p:txBody>
+      </p:sp>
+      <p:sp>
+        <p:nvSpPr>
+          <p:cNvPr id="28" name="TextBox 27"/>
           <p:cNvSpPr txBox="1"/>
           <p:nvPr/>
         </p:nvSpPr>
@@ -28976,7 +30931,18 @@
                 </a:solidFill>
                 <a:latin typeface="DejaVu Sans"/>
               </a:rPr>
-              <a:t>2,5–3 года на 0,7% сети — и решение остановиться было правильным</a:t>
+              <a:t>2,5–3 года на 0,7% сети — и решение остановиться было правильным </a:t>
+            </a:r>
+            <a:r>
+              <a:rPr sz="1040" baseline="30000" b="0" i="1">
+                <a:latin typeface="DejaVu Sans"/>
+                <a:cs typeface="DejaVu Sans"/>
+                <a:ea typeface="DejaVu Sans"/>
+                <a:solidFill>
+                  <a:srgbClr val="1C7293"/>
+                </a:solidFill>
+              </a:rPr>
+              <a:t>[1]</a:t>
             </a:r>
           </a:p>
         </p:txBody>
@@ -29300,7 +31266,18 @@
                 </a:solidFill>
                 <a:latin typeface="DejaVu Sans"/>
               </a:rPr>
-              <a:t>• 2,5–3 года пилота на 0,7% сети</a:t>
+              <a:t>• 2,5–3 года пилота на 0,7% сети </a:t>
+            </a:r>
+            <a:r>
+              <a:rPr sz="676" baseline="30000" b="0" i="1">
+                <a:latin typeface="DejaVu Sans"/>
+                <a:cs typeface="DejaVu Sans"/>
+                <a:ea typeface="DejaVu Sans"/>
+                <a:solidFill>
+                  <a:srgbClr val="1C7293"/>
+                </a:solidFill>
+              </a:rPr>
+              <a:t>[2]</a:t>
             </a:r>
           </a:p>
           <a:p>
@@ -29459,6 +31436,83 @@
       <p:sp>
         <p:nvSpPr>
           <p:cNvPr id="13" name="TextBox 12"/>
+          <p:cNvSpPr txBox="1"/>
+          <p:nvPr/>
+        </p:nvSpPr>
+        <p:spPr>
+          <a:xfrm>
+            <a:off x="502920" y="6455664"/>
+            <a:ext cx="11201400" cy="548640"/>
+          </a:xfrm>
+          <a:prstGeom prst="rect">
+            <a:avLst/>
+          </a:prstGeom>
+          <a:noFill/>
+        </p:spPr>
+        <p:txBody>
+          <a:bodyPr wrap="square" lIns="0" rIns="0" tIns="0" bIns="0" anchor="t">
+            <a:spAutoFit/>
+          </a:bodyPr>
+          <a:lstStyle/>
+          <a:p>
+            <a:pPr algn="l">
+              <a:lnSpc>
+                <a:spcPct val="102000"/>
+              </a:lnSpc>
+            </a:pPr>
+            <a:r>
+              <a:rPr sz="850" b="1" i="1">
+                <a:solidFill>
+                  <a:srgbClr val="065A82"/>
+                </a:solidFill>
+                <a:latin typeface="DejaVu Sans"/>
+              </a:rPr>
+              <a:t>[1] </a:t>
+            </a:r>
+            <a:r>
+              <a:rPr sz="850" i="1">
+                <a:solidFill>
+                  <a:srgbClr val="1C7293"/>
+                </a:solidFill>
+                <a:latin typeface="DejaVu Sans"/>
+                <a:hlinkClick r:id="rId3"/>
+              </a:rPr>
+              <a:t>CNBC (17 июня 2024) — McDonald's × IBM</a:t>
+            </a:r>
+            <a:r>
+              <a:rPr sz="850" i="1">
+                <a:solidFill>
+                  <a:srgbClr val="1C7293"/>
+                </a:solidFill>
+                <a:latin typeface="DejaVu Sans"/>
+              </a:rPr>
+              <a:t>   ·   </a:t>
+            </a:r>
+            <a:r>
+              <a:rPr sz="850" b="1" i="1">
+                <a:solidFill>
+                  <a:srgbClr val="065A82"/>
+                </a:solidFill>
+                <a:latin typeface="DejaVu Sans"/>
+              </a:rPr>
+              <a:t>[2] </a:t>
+            </a:r>
+            <a:r>
+              <a:rPr sz="850" i="1">
+                <a:solidFill>
+                  <a:srgbClr val="1C7293"/>
+                </a:solidFill>
+                <a:latin typeface="DejaVu Sans"/>
+                <a:hlinkClick r:id="rId4"/>
+              </a:rPr>
+              <a:t>Nation's Restaurant News — детали закрытия пилота</a:t>
+            </a:r>
+          </a:p>
+        </p:txBody>
+      </p:sp>
+      <p:sp>
+        <p:nvSpPr>
+          <p:cNvPr id="14" name="TextBox 13"/>
           <p:cNvSpPr txBox="1"/>
           <p:nvPr/>
         </p:nvSpPr>
@@ -31904,7 +33958,18 @@
                 </a:solidFill>
                 <a:latin typeface="DejaVu Sans"/>
               </a:rPr>
-              <a:t>OEC — метрика, о значении которой договорились заранее</a:t>
+              <a:t>OEC — метрика, о значении которой договорились заранее </a:t>
+            </a:r>
+            <a:r>
+              <a:rPr sz="702" baseline="30000" b="0" i="1">
+                <a:latin typeface="DejaVu Sans"/>
+                <a:cs typeface="DejaVu Sans"/>
+                <a:ea typeface="DejaVu Sans"/>
+                <a:solidFill>
+                  <a:srgbClr val="1C7293"/>
+                </a:solidFill>
+              </a:rPr>
+              <a:t>[1]</a:t>
             </a:r>
           </a:p>
         </p:txBody>
@@ -32062,7 +34127,29 @@
                 </a:solidFill>
                 <a:latin typeface="DejaVu Sans"/>
               </a:rPr>
-              <a:t>Только случайное деление групп даёт причинность: разница между Control и Treatment вызвана вашим изменением, а не сезоном, рекламой или везением.</a:t>
+              <a:t>Только случайное деление групп даёт причинность: разница между Control и Treatment вызвана вашим изменением, а не сезоном, рекламой или везением </a:t>
+            </a:r>
+            <a:r>
+              <a:rPr sz="676" baseline="30000" b="0" i="1">
+                <a:latin typeface="DejaVu Sans"/>
+                <a:cs typeface="DejaVu Sans"/>
+                <a:ea typeface="DejaVu Sans"/>
+                <a:solidFill>
+                  <a:srgbClr val="1C7293"/>
+                </a:solidFill>
+              </a:rPr>
+              <a:t>[2]</a:t>
+            </a:r>
+            <a:r>
+              <a:rPr sz="1300" b="1" i="0">
+                <a:latin typeface="DejaVu Sans"/>
+                <a:cs typeface="DejaVu Sans"/>
+                <a:ea typeface="DejaVu Sans"/>
+                <a:solidFill>
+                  <a:srgbClr val="21295C"/>
+                </a:solidFill>
+              </a:rPr>
+              <a:t>.</a:t>
             </a:r>
           </a:p>
         </p:txBody>
@@ -32070,6 +34157,83 @@
       <p:sp>
         <p:nvSpPr>
           <p:cNvPr id="19" name="TextBox 18"/>
+          <p:cNvSpPr txBox="1"/>
+          <p:nvPr/>
+        </p:nvSpPr>
+        <p:spPr>
+          <a:xfrm>
+            <a:off x="502920" y="6455664"/>
+            <a:ext cx="11201400" cy="548640"/>
+          </a:xfrm>
+          <a:prstGeom prst="rect">
+            <a:avLst/>
+          </a:prstGeom>
+          <a:noFill/>
+        </p:spPr>
+        <p:txBody>
+          <a:bodyPr wrap="square" lIns="0" rIns="0" tIns="0" bIns="0" anchor="t">
+            <a:spAutoFit/>
+          </a:bodyPr>
+          <a:lstStyle/>
+          <a:p>
+            <a:pPr algn="l">
+              <a:lnSpc>
+                <a:spcPct val="102000"/>
+              </a:lnSpc>
+            </a:pPr>
+            <a:r>
+              <a:rPr sz="850" b="1" i="1">
+                <a:solidFill>
+                  <a:srgbClr val="065A82"/>
+                </a:solidFill>
+                <a:latin typeface="DejaVu Sans"/>
+              </a:rPr>
+              <a:t>[1] </a:t>
+            </a:r>
+            <a:r>
+              <a:rPr sz="850" i="1">
+                <a:solidFill>
+                  <a:srgbClr val="1C7293"/>
+                </a:solidFill>
+                <a:latin typeface="DejaVu Sans"/>
+                <a:hlinkClick r:id="rId5"/>
+              </a:rPr>
+              <a:t>Kohavi — Overall Evaluation Criterion (OEC)</a:t>
+            </a:r>
+            <a:r>
+              <a:rPr sz="850" i="1">
+                <a:solidFill>
+                  <a:srgbClr val="1C7293"/>
+                </a:solidFill>
+                <a:latin typeface="DejaVu Sans"/>
+              </a:rPr>
+              <a:t>   ·   </a:t>
+            </a:r>
+            <a:r>
+              <a:rPr sz="850" b="1" i="1">
+                <a:solidFill>
+                  <a:srgbClr val="065A82"/>
+                </a:solidFill>
+                <a:latin typeface="DejaVu Sans"/>
+              </a:rPr>
+              <a:t>[2] </a:t>
+            </a:r>
+            <a:r>
+              <a:rPr sz="850" i="1">
+                <a:solidFill>
+                  <a:srgbClr val="1C7293"/>
+                </a:solidFill>
+                <a:latin typeface="DejaVu Sans"/>
+                <a:hlinkClick r:id="rId6"/>
+              </a:rPr>
+              <a:t>Wikipedia — A/B testing (Bing 2012)</a:t>
+            </a:r>
+          </a:p>
+        </p:txBody>
+      </p:sp>
+      <p:sp>
+        <p:nvSpPr>
+          <p:cNvPr id="20" name="TextBox 19"/>
           <p:cNvSpPr txBox="1"/>
           <p:nvPr/>
         </p:nvSpPr>
@@ -32426,7 +34590,29 @@
                 </a:solidFill>
                 <a:latin typeface="DejaVu Sans"/>
               </a:rPr>
-              <a:t>SRM (перекос групп) — доли пользователей в группах не совпали с планом; размер выборки должен быть зафиксирован заранее, а не подогнан под результат</a:t>
+              <a:t>SRM (перекос групп) </a:t>
+            </a:r>
+            <a:r>
+              <a:rPr sz="520" baseline="30000" b="0" i="1">
+                <a:latin typeface="DejaVu Sans"/>
+                <a:cs typeface="DejaVu Sans"/>
+                <a:ea typeface="DejaVu Sans"/>
+                <a:solidFill>
+                  <a:srgbClr val="1C7293"/>
+                </a:solidFill>
+              </a:rPr>
+              <a:t>[1]</a:t>
+            </a:r>
+            <a:r>
+              <a:rPr sz="1000" b="0" i="1">
+                <a:latin typeface="DejaVu Sans"/>
+                <a:cs typeface="DejaVu Sans"/>
+                <a:ea typeface="DejaVu Sans"/>
+                <a:solidFill>
+                  <a:srgbClr val="5B6678"/>
+                </a:solidFill>
+              </a:rPr>
+              <a:t> — доли пользователей в группах не совпали с планом; размер выборки должен быть зафиксирован заранее, а не подогнан под результат</a:t>
             </a:r>
           </a:p>
         </p:txBody>
@@ -32686,7 +34872,29 @@
                 </a:solidFill>
                 <a:latin typeface="DejaVu Sans"/>
               </a:rPr>
-              <a:t>peeking (подглядывание) — досрочная проверка результата: 2 подглядки ≈2× ложных срабатываний, поэтому решение принимается только на заранее заданный размер выборки</a:t>
+              <a:t>peeking (подглядывание) </a:t>
+            </a:r>
+            <a:r>
+              <a:rPr sz="520" baseline="30000" b="0" i="1">
+                <a:latin typeface="DejaVu Sans"/>
+                <a:cs typeface="DejaVu Sans"/>
+                <a:ea typeface="DejaVu Sans"/>
+                <a:solidFill>
+                  <a:srgbClr val="1C7293"/>
+                </a:solidFill>
+              </a:rPr>
+              <a:t>[2]</a:t>
+            </a:r>
+            <a:r>
+              <a:rPr sz="1000" b="0" i="1">
+                <a:latin typeface="DejaVu Sans"/>
+                <a:cs typeface="DejaVu Sans"/>
+                <a:ea typeface="DejaVu Sans"/>
+                <a:solidFill>
+                  <a:srgbClr val="5B6678"/>
+                </a:solidFill>
+              </a:rPr>
+              <a:t> — досрочная проверка результата: 2 подглядки ≈2× ложных срабатываний, поэтому решение принимается только на заранее заданный размер выборки</a:t>
             </a:r>
           </a:p>
         </p:txBody>
@@ -32946,7 +35154,29 @@
                 </a:solidFill>
                 <a:latin typeface="DejaVu Sans"/>
               </a:rPr>
-              <a:t>закон Тваймана: слишком красивая или неожиданная цифра обычно означает ошибку измерения, а не реальный эффект — сначала перепроверь методологию, потом радуйся результату</a:t>
+              <a:t>закон Тваймана </a:t>
+            </a:r>
+            <a:r>
+              <a:rPr sz="520" baseline="30000" b="0" i="1">
+                <a:latin typeface="DejaVu Sans"/>
+                <a:cs typeface="DejaVu Sans"/>
+                <a:ea typeface="DejaVu Sans"/>
+                <a:solidFill>
+                  <a:srgbClr val="1C7293"/>
+                </a:solidFill>
+              </a:rPr>
+              <a:t>[3]</a:t>
+            </a:r>
+            <a:r>
+              <a:rPr sz="1000" b="0" i="1">
+                <a:latin typeface="DejaVu Sans"/>
+                <a:cs typeface="DejaVu Sans"/>
+                <a:ea typeface="DejaVu Sans"/>
+                <a:solidFill>
+                  <a:srgbClr val="5B6678"/>
+                </a:solidFill>
+              </a:rPr>
+              <a:t>: слишком красивая или неожиданная цифра обычно означает ошибку измерения, а не реальный эффект — сначала перепроверь методологию, потом радуйся результату</a:t>
             </a:r>
           </a:p>
         </p:txBody>
@@ -33041,6 +35271,111 @@
       <p:sp>
         <p:nvSpPr>
           <p:cNvPr id="23" name="TextBox 22"/>
+          <p:cNvSpPr txBox="1"/>
+          <p:nvPr/>
+        </p:nvSpPr>
+        <p:spPr>
+          <a:xfrm>
+            <a:off x="502920" y="6419088"/>
+            <a:ext cx="11201400" cy="548640"/>
+          </a:xfrm>
+          <a:prstGeom prst="rect">
+            <a:avLst/>
+          </a:prstGeom>
+          <a:noFill/>
+        </p:spPr>
+        <p:txBody>
+          <a:bodyPr wrap="square" lIns="0" rIns="0" tIns="0" bIns="0" anchor="t">
+            <a:spAutoFit/>
+          </a:bodyPr>
+          <a:lstStyle/>
+          <a:p>
+            <a:pPr algn="l">
+              <a:lnSpc>
+                <a:spcPct val="102000"/>
+              </a:lnSpc>
+            </a:pPr>
+            <a:r>
+              <a:rPr sz="850" b="1" i="1">
+                <a:solidFill>
+                  <a:srgbClr val="065A82"/>
+                </a:solidFill>
+                <a:latin typeface="DejaVu Sans"/>
+              </a:rPr>
+              <a:t>[1] </a:t>
+            </a:r>
+            <a:r>
+              <a:rPr sz="850" i="1">
+                <a:solidFill>
+                  <a:srgbClr val="1C7293"/>
+                </a:solidFill>
+                <a:latin typeface="DejaVu Sans"/>
+                <a:hlinkClick r:id="rId5"/>
+              </a:rPr>
+              <a:t>Microsoft Research — Sample Ratio Mismatch (KDD 2019)</a:t>
+            </a:r>
+            <a:r>
+              <a:rPr sz="850" i="1">
+                <a:solidFill>
+                  <a:srgbClr val="1C7293"/>
+                </a:solidFill>
+                <a:latin typeface="DejaVu Sans"/>
+              </a:rPr>
+              <a:t>   ·   </a:t>
+            </a:r>
+            <a:r>
+              <a:rPr sz="850" b="1" i="1">
+                <a:solidFill>
+                  <a:srgbClr val="065A82"/>
+                </a:solidFill>
+                <a:latin typeface="DejaVu Sans"/>
+              </a:rPr>
+              <a:t>[2] </a:t>
+            </a:r>
+            <a:r>
+              <a:rPr sz="850" i="1">
+                <a:solidFill>
+                  <a:srgbClr val="1C7293"/>
+                </a:solidFill>
+                <a:latin typeface="DejaVu Sans"/>
+                <a:hlinkClick r:id="rId6"/>
+              </a:rPr>
+              <a:t>GoPractice — проблема подглядывания (peeking)</a:t>
+            </a:r>
+            <a:r>
+              <a:rPr sz="850" i="1">
+                <a:solidFill>
+                  <a:srgbClr val="1C7293"/>
+                </a:solidFill>
+                <a:latin typeface="DejaVu Sans"/>
+              </a:rPr>
+              <a:t>   ·   </a:t>
+            </a:r>
+            <a:r>
+              <a:rPr sz="850" b="1" i="1">
+                <a:solidFill>
+                  <a:srgbClr val="065A82"/>
+                </a:solidFill>
+                <a:latin typeface="DejaVu Sans"/>
+              </a:rPr>
+              <a:t>[3] </a:t>
+            </a:r>
+            <a:r>
+              <a:rPr sz="850" i="1">
+                <a:solidFill>
+                  <a:srgbClr val="1C7293"/>
+                </a:solidFill>
+                <a:latin typeface="DejaVu Sans"/>
+                <a:hlinkClick r:id="rId7"/>
+              </a:rPr>
+              <a:t>exp-platform.com — Кохави, Твайман</a:t>
+            </a:r>
+          </a:p>
+        </p:txBody>
+      </p:sp>
+      <p:sp>
+        <p:nvSpPr>
+          <p:cNvPr id="24" name="TextBox 23"/>
           <p:cNvSpPr txBox="1"/>
           <p:nvPr/>
         </p:nvSpPr>
@@ -33508,7 +35843,18 @@
                 </a:solidFill>
                 <a:latin typeface="DejaVu Sans"/>
               </a:rPr>
-              <a:t>Человек + LLM-as-judge (модель-судья)</a:t>
+              <a:t>Человек + LLM-as-judge (модель-судья) </a:t>
+            </a:r>
+            <a:r>
+              <a:rPr sz="598" baseline="30000" b="0" i="1">
+                <a:latin typeface="DejaVu Sans"/>
+                <a:cs typeface="DejaVu Sans"/>
+                <a:ea typeface="DejaVu Sans"/>
+                <a:solidFill>
+                  <a:srgbClr val="1C7293"/>
+                </a:solidFill>
+              </a:rPr>
+              <a:t>[2]</a:t>
             </a:r>
           </a:p>
         </p:txBody>
@@ -33809,7 +36155,29 @@
                 </a:solidFill>
                 <a:latin typeface="DejaVu Sans"/>
               </a:rPr>
-              <a:t>pass@k = хотя бы 1 успех из k; pass^k = ВСЕ k успешны. Промышленная надёжность почти всегда требует pass^k — «юнит-тесты для агента», где вероятностный вывод ломает привычный «прошёл/не прошёл».</a:t>
+              <a:t>pass@k = хотя бы 1 успех из k; pass^k = ВСЕ k успешны </a:t>
+            </a:r>
+            <a:r>
+              <a:rPr sz="676" baseline="30000" b="0" i="1">
+                <a:latin typeface="DejaVu Sans"/>
+                <a:cs typeface="DejaVu Sans"/>
+                <a:ea typeface="DejaVu Sans"/>
+                <a:solidFill>
+                  <a:srgbClr val="1C7293"/>
+                </a:solidFill>
+              </a:rPr>
+              <a:t>[1]</a:t>
+            </a:r>
+            <a:r>
+              <a:rPr sz="1300" b="1" i="0">
+                <a:latin typeface="DejaVu Sans"/>
+                <a:cs typeface="DejaVu Sans"/>
+                <a:ea typeface="DejaVu Sans"/>
+                <a:solidFill>
+                  <a:srgbClr val="21295C"/>
+                </a:solidFill>
+              </a:rPr>
+              <a:t>. Промышленная надёжность почти всегда требует pass^k — «юнит-тесты для агента», где вероятностный вывод ломает привычный «прошёл/не прошёл».</a:t>
             </a:r>
           </a:p>
         </p:txBody>
@@ -33817,6 +36185,83 @@
       <p:sp>
         <p:nvSpPr>
           <p:cNvPr id="18" name="TextBox 17"/>
+          <p:cNvSpPr txBox="1"/>
+          <p:nvPr/>
+        </p:nvSpPr>
+        <p:spPr>
+          <a:xfrm>
+            <a:off x="502920" y="6455664"/>
+            <a:ext cx="11201400" cy="548640"/>
+          </a:xfrm>
+          <a:prstGeom prst="rect">
+            <a:avLst/>
+          </a:prstGeom>
+          <a:noFill/>
+        </p:spPr>
+        <p:txBody>
+          <a:bodyPr wrap="square" lIns="0" rIns="0" tIns="0" bIns="0" anchor="t">
+            <a:spAutoFit/>
+          </a:bodyPr>
+          <a:lstStyle/>
+          <a:p>
+            <a:pPr algn="l">
+              <a:lnSpc>
+                <a:spcPct val="102000"/>
+              </a:lnSpc>
+            </a:pPr>
+            <a:r>
+              <a:rPr sz="850" b="1" i="1">
+                <a:solidFill>
+                  <a:srgbClr val="065A82"/>
+                </a:solidFill>
+                <a:latin typeface="DejaVu Sans"/>
+              </a:rPr>
+              <a:t>[1] </a:t>
+            </a:r>
+            <a:r>
+              <a:rPr sz="850" i="1">
+                <a:solidFill>
+                  <a:srgbClr val="1C7293"/>
+                </a:solidFill>
+                <a:latin typeface="DejaVu Sans"/>
+                <a:hlinkClick r:id="rId3"/>
+              </a:rPr>
+              <a:t>Anthropic — Demystifying evals for AI agents (9 янв. 2026)</a:t>
+            </a:r>
+            <a:r>
+              <a:rPr sz="850" i="1">
+                <a:solidFill>
+                  <a:srgbClr val="1C7293"/>
+                </a:solidFill>
+                <a:latin typeface="DejaVu Sans"/>
+              </a:rPr>
+              <a:t>   ·   </a:t>
+            </a:r>
+            <a:r>
+              <a:rPr sz="850" b="1" i="1">
+                <a:solidFill>
+                  <a:srgbClr val="065A82"/>
+                </a:solidFill>
+                <a:latin typeface="DejaVu Sans"/>
+              </a:rPr>
+              <a:t>[2] </a:t>
+            </a:r>
+            <a:r>
+              <a:rPr sz="850" i="1">
+                <a:solidFill>
+                  <a:srgbClr val="1C7293"/>
+                </a:solidFill>
+                <a:latin typeface="DejaVu Sans"/>
+                <a:hlinkClick r:id="rId4"/>
+              </a:rPr>
+              <a:t>Zheng, Chiang et al. — MT-Bench (NeurIPS 2023)</a:t>
+            </a:r>
+          </a:p>
+        </p:txBody>
+      </p:sp>
+      <p:sp>
+        <p:nvSpPr>
+          <p:cNvPr id="19" name="TextBox 18"/>
           <p:cNvSpPr txBox="1"/>
           <p:nvPr/>
         </p:nvSpPr>
@@ -34024,7 +36469,29 @@
                 </a:solidFill>
                 <a:latin typeface="DejaVu Sans"/>
               </a:rPr>
-              <a:t>RL-агент в гонке набрал на 20% больше очков людей — кружа в лагуне и собирая бонусы, никогда не пересекая финиш. Оптимизировал прокси, а не реальную цель.</a:t>
+              <a:t>RL-агент в гонке набрал на 20% больше очков людей — кружа в лагуне и собирая бонусы, никогда не пересекая финиш </a:t>
+            </a:r>
+            <a:r>
+              <a:rPr sz="650" baseline="30000" b="0" i="1">
+                <a:latin typeface="DejaVu Sans"/>
+                <a:cs typeface="DejaVu Sans"/>
+                <a:ea typeface="DejaVu Sans"/>
+                <a:solidFill>
+                  <a:srgbClr val="1C7293"/>
+                </a:solidFill>
+              </a:rPr>
+              <a:t>[1]</a:t>
+            </a:r>
+            <a:r>
+              <a:rPr sz="1250" b="0" i="0">
+                <a:latin typeface="DejaVu Sans"/>
+                <a:cs typeface="DejaVu Sans"/>
+                <a:ea typeface="DejaVu Sans"/>
+                <a:solidFill>
+                  <a:srgbClr val="21295C"/>
+                </a:solidFill>
+              </a:rPr>
+              <a:t>. Оптимизировал прокси, а не реальную цель.</a:t>
             </a:r>
           </a:p>
         </p:txBody>
@@ -34150,7 +36617,29 @@
                 </a:solidFill>
                 <a:latin typeface="DejaVu Sans"/>
               </a:rPr>
-              <a:t>Anthropic: модель обобщила от угодливости к прямому редактированию собственной функции вознаграждения.</a:t>
+              <a:t>Anthropic: модель обобщила от угодливости к прямому редактированию собственной функции вознаграждения </a:t>
+            </a:r>
+            <a:r>
+              <a:rPr sz="624" baseline="30000" b="0" i="1">
+                <a:latin typeface="DejaVu Sans"/>
+                <a:cs typeface="DejaVu Sans"/>
+                <a:ea typeface="DejaVu Sans"/>
+                <a:solidFill>
+                  <a:srgbClr val="1C7293"/>
+                </a:solidFill>
+              </a:rPr>
+              <a:t>[2]</a:t>
+            </a:r>
+            <a:r>
+              <a:rPr sz="1200" b="0" i="0">
+                <a:latin typeface="DejaVu Sans"/>
+                <a:cs typeface="DejaVu Sans"/>
+                <a:ea typeface="DejaVu Sans"/>
+                <a:solidFill>
+                  <a:srgbClr val="21295C"/>
+                </a:solidFill>
+              </a:rPr>
+              <a:t>.</a:t>
             </a:r>
           </a:p>
           <a:p>
@@ -34277,6 +36766,83 @@
       <p:sp>
         <p:nvSpPr>
           <p:cNvPr id="11" name="TextBox 10"/>
+          <p:cNvSpPr txBox="1"/>
+          <p:nvPr/>
+        </p:nvSpPr>
+        <p:spPr>
+          <a:xfrm>
+            <a:off x="502920" y="6455664"/>
+            <a:ext cx="11201400" cy="548640"/>
+          </a:xfrm>
+          <a:prstGeom prst="rect">
+            <a:avLst/>
+          </a:prstGeom>
+          <a:noFill/>
+        </p:spPr>
+        <p:txBody>
+          <a:bodyPr wrap="square" lIns="0" rIns="0" tIns="0" bIns="0" anchor="t">
+            <a:spAutoFit/>
+          </a:bodyPr>
+          <a:lstStyle/>
+          <a:p>
+            <a:pPr algn="l">
+              <a:lnSpc>
+                <a:spcPct val="102000"/>
+              </a:lnSpc>
+            </a:pPr>
+            <a:r>
+              <a:rPr sz="850" b="1" i="1">
+                <a:solidFill>
+                  <a:srgbClr val="065A82"/>
+                </a:solidFill>
+                <a:latin typeface="DejaVu Sans"/>
+              </a:rPr>
+              <a:t>[1] </a:t>
+            </a:r>
+            <a:r>
+              <a:rPr sz="850" i="1">
+                <a:solidFill>
+                  <a:srgbClr val="1C7293"/>
+                </a:solidFill>
+                <a:latin typeface="DejaVu Sans"/>
+                <a:hlinkClick r:id="rId3"/>
+              </a:rPr>
+              <a:t>DeepMind — Specification gaming (21 апр. 2020)</a:t>
+            </a:r>
+            <a:r>
+              <a:rPr sz="850" i="1">
+                <a:solidFill>
+                  <a:srgbClr val="1C7293"/>
+                </a:solidFill>
+                <a:latin typeface="DejaVu Sans"/>
+              </a:rPr>
+              <a:t>   ·   </a:t>
+            </a:r>
+            <a:r>
+              <a:rPr sz="850" b="1" i="1">
+                <a:solidFill>
+                  <a:srgbClr val="065A82"/>
+                </a:solidFill>
+                <a:latin typeface="DejaVu Sans"/>
+              </a:rPr>
+              <a:t>[2] </a:t>
+            </a:r>
+            <a:r>
+              <a:rPr sz="850" i="1">
+                <a:solidFill>
+                  <a:srgbClr val="1C7293"/>
+                </a:solidFill>
+                <a:latin typeface="DejaVu Sans"/>
+                <a:hlinkClick r:id="rId4"/>
+              </a:rPr>
+              <a:t>Anthropic — Sycophancy to Subterfuge (arXiv:2406.10162)</a:t>
+            </a:r>
+          </a:p>
+        </p:txBody>
+      </p:sp>
+      <p:sp>
+        <p:nvSpPr>
+          <p:cNvPr id="12" name="TextBox 11"/>
           <p:cNvSpPr txBox="1"/>
           <p:nvPr/>
         </p:nvSpPr>
@@ -34604,7 +37170,29 @@
                 </a:solidFill>
                 <a:latin typeface="DejaVu Sans"/>
               </a:rPr>
-              <a:t>Facebook MSI, январь 2018: love/haha/wow/sad/angry — все ×5 выше лайка (не только гнев).</a:t>
+              <a:t>Facebook MSI, январь 2018: love/haha/wow/sad/angry — все ×5 выше лайка (не только гнев) </a:t>
+            </a:r>
+            <a:r>
+              <a:rPr sz="624" baseline="30000" b="0" i="1">
+                <a:latin typeface="DejaVu Sans"/>
+                <a:cs typeface="DejaVu Sans"/>
+                <a:ea typeface="DejaVu Sans"/>
+                <a:solidFill>
+                  <a:srgbClr val="1C7293"/>
+                </a:solidFill>
+              </a:rPr>
+              <a:t>[1]</a:t>
+            </a:r>
+            <a:r>
+              <a:rPr sz="1200" b="0" i="0">
+                <a:latin typeface="DejaVu Sans"/>
+                <a:cs typeface="DejaVu Sans"/>
+                <a:ea typeface="DejaVu Sans"/>
+                <a:solidFill>
+                  <a:srgbClr val="21295C"/>
+                </a:solidFill>
+              </a:rPr>
+              <a:t>.</a:t>
             </a:r>
           </a:p>
         </p:txBody>
@@ -35401,7 +37989,29 @@
                 </a:solidFill>
                 <a:latin typeface="DejaVu Sans"/>
               </a:rPr>
-              <a:t>Прокси вовлечённости без guardrail на дезинформацию скрывал вред ~2 года: внутренний guardrail (корреляция гнев ↔ дезинформация) подтверждён к 2019, вес обнулён в сентябре 2019. Урок: guardrail-метрику надо измерять с первого дня, а не когда вред уже случился.</a:t>
+              <a:t>Прокси вовлечённости без guardrail на дезинформацию скрывал вред ~2 года: внутренний guardrail (корреляция гнев ↔ дезинформация) подтверждён к 2019, вес обнулён в сентябре 2019 </a:t>
+            </a:r>
+            <a:r>
+              <a:rPr sz="650" baseline="30000" b="0" i="1">
+                <a:latin typeface="DejaVu Sans"/>
+                <a:cs typeface="DejaVu Sans"/>
+                <a:ea typeface="DejaVu Sans"/>
+                <a:solidFill>
+                  <a:srgbClr val="1C7293"/>
+                </a:solidFill>
+              </a:rPr>
+              <a:t>[2]</a:t>
+            </a:r>
+            <a:r>
+              <a:rPr sz="1250" b="1" i="0">
+                <a:latin typeface="DejaVu Sans"/>
+                <a:cs typeface="DejaVu Sans"/>
+                <a:ea typeface="DejaVu Sans"/>
+                <a:solidFill>
+                  <a:srgbClr val="21295C"/>
+                </a:solidFill>
+              </a:rPr>
+              <a:t>. Урок: guardrail-метрику надо измерять с первого дня, а не когда вред уже случился.</a:t>
             </a:r>
           </a:p>
         </p:txBody>
@@ -35409,6 +38019,83 @@
       <p:sp>
         <p:nvSpPr>
           <p:cNvPr id="26" name="TextBox 25"/>
+          <p:cNvSpPr txBox="1"/>
+          <p:nvPr/>
+        </p:nvSpPr>
+        <p:spPr>
+          <a:xfrm>
+            <a:off x="502920" y="6455664"/>
+            <a:ext cx="11201400" cy="548640"/>
+          </a:xfrm>
+          <a:prstGeom prst="rect">
+            <a:avLst/>
+          </a:prstGeom>
+          <a:noFill/>
+        </p:spPr>
+        <p:txBody>
+          <a:bodyPr wrap="square" lIns="0" rIns="0" tIns="0" bIns="0" anchor="t">
+            <a:spAutoFit/>
+          </a:bodyPr>
+          <a:lstStyle/>
+          <a:p>
+            <a:pPr algn="l">
+              <a:lnSpc>
+                <a:spcPct val="102000"/>
+              </a:lnSpc>
+            </a:pPr>
+            <a:r>
+              <a:rPr sz="850" b="1" i="1">
+                <a:solidFill>
+                  <a:srgbClr val="065A82"/>
+                </a:solidFill>
+                <a:latin typeface="DejaVu Sans"/>
+              </a:rPr>
+              <a:t>[1] </a:t>
+            </a:r>
+            <a:r>
+              <a:rPr sz="850" i="1">
+                <a:solidFill>
+                  <a:srgbClr val="1C7293"/>
+                </a:solidFill>
+                <a:latin typeface="DejaVu Sans"/>
+                <a:hlinkClick r:id="rId4"/>
+              </a:rPr>
+              <a:t>Techdirt (28 окт. 2021) — коррекция «Facebook Files»</a:t>
+            </a:r>
+            <a:r>
+              <a:rPr sz="850" i="1">
+                <a:solidFill>
+                  <a:srgbClr val="1C7293"/>
+                </a:solidFill>
+                <a:latin typeface="DejaVu Sans"/>
+              </a:rPr>
+              <a:t>   ·   </a:t>
+            </a:r>
+            <a:r>
+              <a:rPr sz="850" b="1" i="1">
+                <a:solidFill>
+                  <a:srgbClr val="065A82"/>
+                </a:solidFill>
+                <a:latin typeface="DejaVu Sans"/>
+              </a:rPr>
+              <a:t>[2] </a:t>
+            </a:r>
+            <a:r>
+              <a:rPr sz="850" i="1">
+                <a:solidFill>
+                  <a:srgbClr val="1C7293"/>
+                </a:solidFill>
+                <a:latin typeface="DejaVu Sans"/>
+                <a:hlinkClick r:id="rId5"/>
+              </a:rPr>
+              <a:t>House E&amp;C Committee — документы Haugen</a:t>
+            </a:r>
+          </a:p>
+        </p:txBody>
+      </p:sp>
+      <p:sp>
+        <p:nvSpPr>
+          <p:cNvPr id="27" name="TextBox 26"/>
           <p:cNvSpPr txBox="1"/>
           <p:nvPr/>
         </p:nvSpPr>
@@ -35647,7 +38334,7 @@
                 </a:solidFill>
                 <a:latin typeface="DejaVu Sans"/>
               </a:rPr>
-              <a:t>86,5% MedQA</a:t>
+              <a:t>86,5% MedQA [1]</a:t>
             </a:r>
           </a:p>
         </p:txBody>
@@ -35812,7 +38499,29 @@
                 </a:solidFill>
                 <a:latin typeface="DejaVu Sans"/>
               </a:rPr>
-              <a:t>Stanford RegLab: Lexis+ 17% галлюцинаций, Westlaw 33% — на реальных юридических запросах.</a:t>
+              <a:t>Stanford RegLab: Lexis+ 17% галлюцинаций, Westlaw 33% — на реальных юридических запросах </a:t>
+            </a:r>
+            <a:r>
+              <a:rPr sz="650" baseline="30000" b="0" i="1">
+                <a:latin typeface="DejaVu Sans"/>
+                <a:cs typeface="DejaVu Sans"/>
+                <a:ea typeface="DejaVu Sans"/>
+                <a:solidFill>
+                  <a:srgbClr val="1C7293"/>
+                </a:solidFill>
+              </a:rPr>
+              <a:t>[3]</a:t>
+            </a:r>
+            <a:r>
+              <a:rPr sz="1250" b="0" i="0">
+                <a:latin typeface="DejaVu Sans"/>
+                <a:cs typeface="DejaVu Sans"/>
+                <a:ea typeface="DejaVu Sans"/>
+                <a:solidFill>
+                  <a:srgbClr val="21295C"/>
+                </a:solidFill>
+              </a:rPr>
+              <a:t>.</a:t>
             </a:r>
           </a:p>
         </p:txBody>
@@ -35899,7 +38608,29 @@
                 </a:solidFill>
                 <a:latin typeface="DejaVu Sans"/>
               </a:rPr>
-              <a:t>Дело Mata v. Avianca (фейковые цитаты) = ChatGPT, НЕ Harvey — частая ошибка атрибуции.</a:t>
+              <a:t>Дело Mata v. Avianca (фейковые цитаты) = ChatGPT, НЕ Harvey </a:t>
+            </a:r>
+            <a:r>
+              <a:rPr sz="624" baseline="30000" b="0" i="1">
+                <a:latin typeface="DejaVu Sans"/>
+                <a:cs typeface="DejaVu Sans"/>
+                <a:ea typeface="DejaVu Sans"/>
+                <a:solidFill>
+                  <a:srgbClr val="1C7293"/>
+                </a:solidFill>
+              </a:rPr>
+              <a:t>[2]</a:t>
+            </a:r>
+            <a:r>
+              <a:rPr sz="1200" b="1" i="0">
+                <a:latin typeface="DejaVu Sans"/>
+                <a:cs typeface="DejaVu Sans"/>
+                <a:ea typeface="DejaVu Sans"/>
+                <a:solidFill>
+                  <a:srgbClr val="21295C"/>
+                </a:solidFill>
+              </a:rPr>
+              <a:t> — частая ошибка атрибуции.</a:t>
             </a:r>
           </a:p>
         </p:txBody>
@@ -35994,6 +38725,111 @@
       <p:sp>
         <p:nvSpPr>
           <p:cNvPr id="14" name="TextBox 13"/>
+          <p:cNvSpPr txBox="1"/>
+          <p:nvPr/>
+        </p:nvSpPr>
+        <p:spPr>
+          <a:xfrm>
+            <a:off x="502920" y="6419088"/>
+            <a:ext cx="11201400" cy="548640"/>
+          </a:xfrm>
+          <a:prstGeom prst="rect">
+            <a:avLst/>
+          </a:prstGeom>
+          <a:noFill/>
+        </p:spPr>
+        <p:txBody>
+          <a:bodyPr wrap="square" lIns="0" rIns="0" tIns="0" bIns="0" anchor="t">
+            <a:spAutoFit/>
+          </a:bodyPr>
+          <a:lstStyle/>
+          <a:p>
+            <a:pPr algn="l">
+              <a:lnSpc>
+                <a:spcPct val="102000"/>
+              </a:lnSpc>
+            </a:pPr>
+            <a:r>
+              <a:rPr sz="850" b="1" i="1">
+                <a:solidFill>
+                  <a:srgbClr val="065A82"/>
+                </a:solidFill>
+                <a:latin typeface="DejaVu Sans"/>
+              </a:rPr>
+              <a:t>[1] </a:t>
+            </a:r>
+            <a:r>
+              <a:rPr sz="850" i="1">
+                <a:solidFill>
+                  <a:srgbClr val="1C7293"/>
+                </a:solidFill>
+                <a:latin typeface="DejaVu Sans"/>
+                <a:hlinkClick r:id="rId2"/>
+              </a:rPr>
+              <a:t>Med-PaLM 2 — Nature Medicine 2024 (arXiv:2305.09617)</a:t>
+            </a:r>
+            <a:r>
+              <a:rPr sz="850" i="1">
+                <a:solidFill>
+                  <a:srgbClr val="1C7293"/>
+                </a:solidFill>
+                <a:latin typeface="DejaVu Sans"/>
+              </a:rPr>
+              <a:t>   ·   </a:t>
+            </a:r>
+            <a:r>
+              <a:rPr sz="850" b="1" i="1">
+                <a:solidFill>
+                  <a:srgbClr val="065A82"/>
+                </a:solidFill>
+                <a:latin typeface="DejaVu Sans"/>
+              </a:rPr>
+              <a:t>[2] </a:t>
+            </a:r>
+            <a:r>
+              <a:rPr sz="850" i="1">
+                <a:solidFill>
+                  <a:srgbClr val="1C7293"/>
+                </a:solidFill>
+                <a:latin typeface="DejaVu Sans"/>
+                <a:hlinkClick r:id="rId3"/>
+              </a:rPr>
+              <a:t>Wikipedia — Mata v. Avianca</a:t>
+            </a:r>
+            <a:r>
+              <a:rPr sz="850" i="1">
+                <a:solidFill>
+                  <a:srgbClr val="1C7293"/>
+                </a:solidFill>
+                <a:latin typeface="DejaVu Sans"/>
+              </a:rPr>
+              <a:t>   ·   </a:t>
+            </a:r>
+            <a:r>
+              <a:rPr sz="850" b="1" i="1">
+                <a:solidFill>
+                  <a:srgbClr val="065A82"/>
+                </a:solidFill>
+                <a:latin typeface="DejaVu Sans"/>
+              </a:rPr>
+              <a:t>[3] </a:t>
+            </a:r>
+            <a:r>
+              <a:rPr sz="850" i="1">
+                <a:solidFill>
+                  <a:srgbClr val="1C7293"/>
+                </a:solidFill>
+                <a:latin typeface="DejaVu Sans"/>
+                <a:hlinkClick r:id="rId4"/>
+              </a:rPr>
+              <a:t>Stanford RegLab — J. Empirical Legal Studies</a:t>
+            </a:r>
+          </a:p>
+        </p:txBody>
+      </p:sp>
+      <p:sp>
+        <p:nvSpPr>
+          <p:cNvPr id="15" name="TextBox 14"/>
           <p:cNvSpPr txBox="1"/>
           <p:nvPr/>
         </p:nvSpPr>
@@ -40345,7 +43181,29 @@
                 </a:solidFill>
                 <a:latin typeface="DejaVu Sans"/>
               </a:rPr>
-              <a:t>Error budget = «1 − SLO». Пример: 99,9% → 1000 ошибок на 1 млн запросов за 4 недели. Изменения — ≈70% всех сбоев.</a:t>
+              <a:t>Error budget = «1 − SLO». Пример: 99,9% → 1000 ошибок на 1 млн запросов за 4 недели. Изменения — ≈70% всех сбоев </a:t>
+            </a:r>
+            <a:r>
+              <a:rPr sz="650" baseline="30000" b="0" i="1">
+                <a:latin typeface="DejaVu Sans"/>
+                <a:cs typeface="DejaVu Sans"/>
+                <a:ea typeface="DejaVu Sans"/>
+                <a:solidFill>
+                  <a:srgbClr val="1C7293"/>
+                </a:solidFill>
+              </a:rPr>
+              <a:t>[1]</a:t>
+            </a:r>
+            <a:r>
+              <a:rPr sz="1250" b="0" i="0">
+                <a:latin typeface="DejaVu Sans"/>
+                <a:cs typeface="DejaVu Sans"/>
+                <a:ea typeface="DejaVu Sans"/>
+                <a:solidFill>
+                  <a:srgbClr val="21295C"/>
+                </a:solidFill>
+              </a:rPr>
+              <a:t>.</a:t>
             </a:r>
           </a:p>
         </p:txBody>
@@ -40551,6 +43409,55 @@
       <p:sp>
         <p:nvSpPr>
           <p:cNvPr id="20" name="TextBox 19"/>
+          <p:cNvSpPr txBox="1"/>
+          <p:nvPr/>
+        </p:nvSpPr>
+        <p:spPr>
+          <a:xfrm>
+            <a:off x="502920" y="6455664"/>
+            <a:ext cx="11201400" cy="548640"/>
+          </a:xfrm>
+          <a:prstGeom prst="rect">
+            <a:avLst/>
+          </a:prstGeom>
+          <a:noFill/>
+        </p:spPr>
+        <p:txBody>
+          <a:bodyPr wrap="square" lIns="0" rIns="0" tIns="0" bIns="0" anchor="t">
+            <a:spAutoFit/>
+          </a:bodyPr>
+          <a:lstStyle/>
+          <a:p>
+            <a:pPr algn="l">
+              <a:lnSpc>
+                <a:spcPct val="102000"/>
+              </a:lnSpc>
+            </a:pPr>
+            <a:r>
+              <a:rPr sz="850" b="1" i="1">
+                <a:solidFill>
+                  <a:srgbClr val="065A82"/>
+                </a:solidFill>
+                <a:latin typeface="DejaVu Sans"/>
+              </a:rPr>
+              <a:t>[1] </a:t>
+            </a:r>
+            <a:r>
+              <a:rPr sz="850" i="1">
+                <a:solidFill>
+                  <a:srgbClr val="1C7293"/>
+                </a:solidFill>
+                <a:latin typeface="DejaVu Sans"/>
+                <a:hlinkClick r:id="rId3"/>
+              </a:rPr>
+              <a:t>Google SRE — Error Budget Policy</a:t>
+            </a:r>
+          </a:p>
+        </p:txBody>
+      </p:sp>
+      <p:sp>
+        <p:nvSpPr>
+          <p:cNvPr id="21" name="TextBox 20"/>
           <p:cNvSpPr txBox="1"/>
           <p:nvPr/>
         </p:nvSpPr>
@@ -40686,7 +43593,18 @@
                 </a:solidFill>
                 <a:latin typeface="DejaVu Sans"/>
               </a:rPr>
-              <a:t>Трейсинг (камера над каждым узлом): LangSmith · Langfuse · Arize Phoenix · Helicone</a:t>
+              <a:t>Трейсинг (камера над каждым узлом): LangSmith · Langfuse · Arize Phoenix · Helicone </a:t>
+            </a:r>
+            <a:r>
+              <a:rPr sz="624" baseline="30000" b="0" i="1">
+                <a:latin typeface="DejaVu Sans"/>
+                <a:cs typeface="DejaVu Sans"/>
+                <a:ea typeface="DejaVu Sans"/>
+                <a:solidFill>
+                  <a:srgbClr val="1C7293"/>
+                </a:solidFill>
+              </a:rPr>
+              <a:t>[1]</a:t>
             </a:r>
           </a:p>
         </p:txBody>
@@ -41349,7 +44267,29 @@
                 </a:solidFill>
                 <a:latin typeface="DejaVu Sans"/>
               </a:rPr>
-              <a:t>LLMOps/AgentOps: дрейф данных vs дрейф концепта · runtime guardrails · circuit breaker (предохранитель). Guardian Agents (категория Gartner) — агенты, следящие за агентами.</a:t>
+              <a:t>LLMOps/AgentOps: дрейф данных vs дрейф концепта · runtime guardrails · circuit breaker (предохранитель). Guardian Agents (категория Gartner) </a:t>
+            </a:r>
+            <a:r>
+              <a:rPr sz="624" baseline="30000" b="0" i="1">
+                <a:latin typeface="DejaVu Sans"/>
+                <a:cs typeface="DejaVu Sans"/>
+                <a:ea typeface="DejaVu Sans"/>
+                <a:solidFill>
+                  <a:srgbClr val="1C7293"/>
+                </a:solidFill>
+              </a:rPr>
+              <a:t>[2]</a:t>
+            </a:r>
+            <a:r>
+              <a:rPr sz="1200" b="0" i="0">
+                <a:latin typeface="DejaVu Sans"/>
+                <a:cs typeface="DejaVu Sans"/>
+                <a:ea typeface="DejaVu Sans"/>
+                <a:solidFill>
+                  <a:srgbClr val="21295C"/>
+                </a:solidFill>
+              </a:rPr>
+              <a:t> — агенты, следящие за агентами.</a:t>
             </a:r>
           </a:p>
         </p:txBody>
@@ -41555,6 +44495,83 @@
       <p:sp>
         <p:nvSpPr>
           <p:cNvPr id="26" name="TextBox 25"/>
+          <p:cNvSpPr txBox="1"/>
+          <p:nvPr/>
+        </p:nvSpPr>
+        <p:spPr>
+          <a:xfrm>
+            <a:off x="502920" y="6455664"/>
+            <a:ext cx="11201400" cy="548640"/>
+          </a:xfrm>
+          <a:prstGeom prst="rect">
+            <a:avLst/>
+          </a:prstGeom>
+          <a:noFill/>
+        </p:spPr>
+        <p:txBody>
+          <a:bodyPr wrap="square" lIns="0" rIns="0" tIns="0" bIns="0" anchor="t">
+            <a:spAutoFit/>
+          </a:bodyPr>
+          <a:lstStyle/>
+          <a:p>
+            <a:pPr algn="l">
+              <a:lnSpc>
+                <a:spcPct val="102000"/>
+              </a:lnSpc>
+            </a:pPr>
+            <a:r>
+              <a:rPr sz="850" b="1" i="1">
+                <a:solidFill>
+                  <a:srgbClr val="065A82"/>
+                </a:solidFill>
+                <a:latin typeface="DejaVu Sans"/>
+              </a:rPr>
+              <a:t>[1] </a:t>
+            </a:r>
+            <a:r>
+              <a:rPr sz="850" i="1">
+                <a:solidFill>
+                  <a:srgbClr val="1C7293"/>
+                </a:solidFill>
+                <a:latin typeface="DejaVu Sans"/>
+                <a:hlinkClick r:id="rId4"/>
+              </a:rPr>
+              <a:t>Confident AI — обзор LLMOps observability 2026</a:t>
+            </a:r>
+            <a:r>
+              <a:rPr sz="850" i="1">
+                <a:solidFill>
+                  <a:srgbClr val="1C7293"/>
+                </a:solidFill>
+                <a:latin typeface="DejaVu Sans"/>
+              </a:rPr>
+              <a:t>   ·   </a:t>
+            </a:r>
+            <a:r>
+              <a:rPr sz="850" b="1" i="1">
+                <a:solidFill>
+                  <a:srgbClr val="065A82"/>
+                </a:solidFill>
+                <a:latin typeface="DejaVu Sans"/>
+              </a:rPr>
+              <a:t>[2] </a:t>
+            </a:r>
+            <a:r>
+              <a:rPr sz="850" i="1">
+                <a:solidFill>
+                  <a:srgbClr val="1C7293"/>
+                </a:solidFill>
+                <a:latin typeface="DejaVu Sans"/>
+                <a:hlinkClick r:id="rId5"/>
+              </a:rPr>
+              <a:t>Gartner Market Guide for Guardian Agents (25 фев. 2026)</a:t>
+            </a:r>
+          </a:p>
+        </p:txBody>
+      </p:sp>
+      <p:sp>
+        <p:nvSpPr>
+          <p:cNvPr id="27" name="TextBox 26"/>
           <p:cNvSpPr txBox="1"/>
           <p:nvPr/>
         </p:nvSpPr>
@@ -42484,7 +45501,51 @@
                 </a:solidFill>
                 <a:latin typeface="DejaVu Sans"/>
               </a:rPr>
-              <a:t>Zillow Offers, ноябрь 2021: 9680 домов куплено, 3032 продано · ~2000 уволенных (~25% штата) · ≈$80 тыс. убытка на объект.</a:t>
+              <a:t>Zillow Offers, ноябрь 2021: 9680 домов куплено, 3032 продано · ~2000 уволенных (~25% штата) </a:t>
+            </a:r>
+            <a:r>
+              <a:rPr sz="624" baseline="30000" b="0" i="1">
+                <a:latin typeface="DejaVu Sans"/>
+                <a:cs typeface="DejaVu Sans"/>
+                <a:ea typeface="DejaVu Sans"/>
+                <a:solidFill>
+                  <a:srgbClr val="1C7293"/>
+                </a:solidFill>
+              </a:rPr>
+              <a:t>[1]</a:t>
+            </a:r>
+            <a:r>
+              <a:rPr sz="1200" b="0" i="0">
+                <a:latin typeface="DejaVu Sans"/>
+                <a:cs typeface="DejaVu Sans"/>
+                <a:ea typeface="DejaVu Sans"/>
+                <a:solidFill>
+                  <a:srgbClr val="21295C"/>
+                </a:solidFill>
+              </a:rPr>
+              <a:t> · ≈$80 тыс. убытка на объект </a:t>
+            </a:r>
+            <a:r>
+              <a:rPr sz="624" baseline="30000" b="0" i="1">
+                <a:latin typeface="DejaVu Sans"/>
+                <a:cs typeface="DejaVu Sans"/>
+                <a:ea typeface="DejaVu Sans"/>
+                <a:solidFill>
+                  <a:srgbClr val="1C7293"/>
+                </a:solidFill>
+              </a:rPr>
+              <a:t>[2]</a:t>
+            </a:r>
+            <a:r>
+              <a:rPr sz="1200" b="0" i="0">
+                <a:latin typeface="DejaVu Sans"/>
+                <a:cs typeface="DejaVu Sans"/>
+                <a:ea typeface="DejaVu Sans"/>
+                <a:solidFill>
+                  <a:srgbClr val="21295C"/>
+                </a:solidFill>
+              </a:rPr>
+              <a:t>.</a:t>
             </a:r>
           </a:p>
         </p:txBody>
@@ -42579,6 +45640,83 @@
       <p:sp>
         <p:nvSpPr>
           <p:cNvPr id="13" name="TextBox 12"/>
+          <p:cNvSpPr txBox="1"/>
+          <p:nvPr/>
+        </p:nvSpPr>
+        <p:spPr>
+          <a:xfrm>
+            <a:off x="502920" y="6455664"/>
+            <a:ext cx="11201400" cy="548640"/>
+          </a:xfrm>
+          <a:prstGeom prst="rect">
+            <a:avLst/>
+          </a:prstGeom>
+          <a:noFill/>
+        </p:spPr>
+        <p:txBody>
+          <a:bodyPr wrap="square" lIns="0" rIns="0" tIns="0" bIns="0" anchor="t">
+            <a:spAutoFit/>
+          </a:bodyPr>
+          <a:lstStyle/>
+          <a:p>
+            <a:pPr algn="l">
+              <a:lnSpc>
+                <a:spcPct val="102000"/>
+              </a:lnSpc>
+            </a:pPr>
+            <a:r>
+              <a:rPr sz="850" b="1" i="1">
+                <a:solidFill>
+                  <a:srgbClr val="065A82"/>
+                </a:solidFill>
+                <a:latin typeface="DejaVu Sans"/>
+              </a:rPr>
+              <a:t>[1] </a:t>
+            </a:r>
+            <a:r>
+              <a:rPr sz="850" i="1">
+                <a:solidFill>
+                  <a:srgbClr val="1C7293"/>
+                </a:solidFill>
+                <a:latin typeface="DejaVu Sans"/>
+                <a:hlinkClick r:id="rId5"/>
+              </a:rPr>
+              <a:t>GeekWire (нояб. 2021) — Zillow Offers</a:t>
+            </a:r>
+            <a:r>
+              <a:rPr sz="850" i="1">
+                <a:solidFill>
+                  <a:srgbClr val="1C7293"/>
+                </a:solidFill>
+                <a:latin typeface="DejaVu Sans"/>
+              </a:rPr>
+              <a:t>   ·   </a:t>
+            </a:r>
+            <a:r>
+              <a:rPr sz="850" b="1" i="1">
+                <a:solidFill>
+                  <a:srgbClr val="065A82"/>
+                </a:solidFill>
+                <a:latin typeface="DejaVu Sans"/>
+              </a:rPr>
+              <a:t>[2] </a:t>
+            </a:r>
+            <a:r>
+              <a:rPr sz="850" i="1">
+                <a:solidFill>
+                  <a:srgbClr val="1C7293"/>
+                </a:solidFill>
+                <a:latin typeface="DejaVu Sans"/>
+                <a:hlinkClick r:id="rId6"/>
+              </a:rPr>
+              <a:t>SEC 10-K FY2021 — Zillow Group</a:t>
+            </a:r>
+          </a:p>
+        </p:txBody>
+      </p:sp>
+      <p:sp>
+        <p:nvSpPr>
+          <p:cNvPr id="14" name="TextBox 13"/>
           <p:cNvSpPr txBox="1"/>
           <p:nvPr/>
         </p:nvSpPr>
@@ -42984,7 +46122,51 @@
                 </a:solidFill>
                 <a:latin typeface="DejaVu Sans"/>
               </a:rPr>
-              <a:t>Бот некорректно сообщил о ретроактивной скидке. Трибунал — $812,02 CAD: компания отвечает за ответ бота как за любой другой контент сайта.</a:t>
+              <a:t>Бот некорректно сообщил о ретроактивной скидке. Трибунал — $812,02 CAD </a:t>
+            </a:r>
+            <a:r>
+              <a:rPr sz="624" baseline="30000" b="0" i="1">
+                <a:latin typeface="DejaVu Sans"/>
+                <a:cs typeface="DejaVu Sans"/>
+                <a:ea typeface="DejaVu Sans"/>
+                <a:solidFill>
+                  <a:srgbClr val="1C7293"/>
+                </a:solidFill>
+              </a:rPr>
+              <a:t>[1]</a:t>
+            </a:r>
+            <a:r>
+              <a:rPr sz="1200" b="0" i="0">
+                <a:latin typeface="DejaVu Sans"/>
+                <a:cs typeface="DejaVu Sans"/>
+                <a:ea typeface="DejaVu Sans"/>
+                <a:solidFill>
+                  <a:srgbClr val="21295C"/>
+                </a:solidFill>
+              </a:rPr>
+              <a:t>: компания отвечает за ответ бота как за любой другой контент сайта </a:t>
+            </a:r>
+            <a:r>
+              <a:rPr sz="624" baseline="30000" b="0" i="1">
+                <a:latin typeface="DejaVu Sans"/>
+                <a:cs typeface="DejaVu Sans"/>
+                <a:ea typeface="DejaVu Sans"/>
+                <a:solidFill>
+                  <a:srgbClr val="1C7293"/>
+                </a:solidFill>
+              </a:rPr>
+              <a:t>[2]</a:t>
+            </a:r>
+            <a:r>
+              <a:rPr sz="1200" b="0" i="0">
+                <a:latin typeface="DejaVu Sans"/>
+                <a:cs typeface="DejaVu Sans"/>
+                <a:ea typeface="DejaVu Sans"/>
+                <a:solidFill>
+                  <a:srgbClr val="21295C"/>
+                </a:solidFill>
+              </a:rPr>
+              <a:t>.</a:t>
             </a:r>
           </a:p>
         </p:txBody>
@@ -43079,6 +46261,83 @@
       <p:sp>
         <p:nvSpPr>
           <p:cNvPr id="13" name="TextBox 12"/>
+          <p:cNvSpPr txBox="1"/>
+          <p:nvPr/>
+        </p:nvSpPr>
+        <p:spPr>
+          <a:xfrm>
+            <a:off x="502920" y="6455664"/>
+            <a:ext cx="11201400" cy="548640"/>
+          </a:xfrm>
+          <a:prstGeom prst="rect">
+            <a:avLst/>
+          </a:prstGeom>
+          <a:noFill/>
+        </p:spPr>
+        <p:txBody>
+          <a:bodyPr wrap="square" lIns="0" rIns="0" tIns="0" bIns="0" anchor="t">
+            <a:spAutoFit/>
+          </a:bodyPr>
+          <a:lstStyle/>
+          <a:p>
+            <a:pPr algn="l">
+              <a:lnSpc>
+                <a:spcPct val="102000"/>
+              </a:lnSpc>
+            </a:pPr>
+            <a:r>
+              <a:rPr sz="850" b="1" i="1">
+                <a:solidFill>
+                  <a:srgbClr val="065A82"/>
+                </a:solidFill>
+                <a:latin typeface="DejaVu Sans"/>
+              </a:rPr>
+              <a:t>[1] </a:t>
+            </a:r>
+            <a:r>
+              <a:rPr sz="850" i="1">
+                <a:solidFill>
+                  <a:srgbClr val="1C7293"/>
+                </a:solidFill>
+                <a:latin typeface="DejaVu Sans"/>
+                <a:hlinkClick r:id="rId4"/>
+              </a:rPr>
+              <a:t>CanLII — Moffatt v. Air Canada, 2024 BCCRT 149</a:t>
+            </a:r>
+            <a:r>
+              <a:rPr sz="850" i="1">
+                <a:solidFill>
+                  <a:srgbClr val="1C7293"/>
+                </a:solidFill>
+                <a:latin typeface="DejaVu Sans"/>
+              </a:rPr>
+              <a:t>   ·   </a:t>
+            </a:r>
+            <a:r>
+              <a:rPr sz="850" b="1" i="1">
+                <a:solidFill>
+                  <a:srgbClr val="065A82"/>
+                </a:solidFill>
+                <a:latin typeface="DejaVu Sans"/>
+              </a:rPr>
+              <a:t>[2] </a:t>
+            </a:r>
+            <a:r>
+              <a:rPr sz="850" i="1">
+                <a:solidFill>
+                  <a:srgbClr val="1C7293"/>
+                </a:solidFill>
+                <a:latin typeface="DejaVu Sans"/>
+                <a:hlinkClick r:id="rId5"/>
+              </a:rPr>
+              <a:t>American Bar Association — комментарий к делу</a:t>
+            </a:r>
+          </a:p>
+        </p:txBody>
+      </p:sp>
+      <p:sp>
+        <p:nvSpPr>
+          <p:cNvPr id="14" name="TextBox 13"/>
           <p:cNvSpPr txBox="1"/>
           <p:nvPr/>
         </p:nvSpPr>
@@ -43358,7 +46617,51 @@
                 </a:solidFill>
                 <a:latin typeface="DejaVu Sans"/>
               </a:rPr>
-              <a:t>Klarna: политика «только ИИ» откатилась (05.2025) — но автоматизация выросла до 853 чел.-эквивалентов (усиление людей, не замена).</a:t>
+              <a:t>Klarna: политика «только ИИ» откатилась (05.2025) </a:t>
+            </a:r>
+            <a:r>
+              <a:rPr sz="598" baseline="30000" b="0" i="1">
+                <a:latin typeface="DejaVu Sans"/>
+                <a:cs typeface="DejaVu Sans"/>
+                <a:ea typeface="DejaVu Sans"/>
+                <a:solidFill>
+                  <a:srgbClr val="1C7293"/>
+                </a:solidFill>
+              </a:rPr>
+              <a:t>[1]</a:t>
+            </a:r>
+            <a:r>
+              <a:rPr sz="1150" b="0" i="0">
+                <a:latin typeface="DejaVu Sans"/>
+                <a:cs typeface="DejaVu Sans"/>
+                <a:ea typeface="DejaVu Sans"/>
+                <a:solidFill>
+                  <a:srgbClr val="21295C"/>
+                </a:solidFill>
+              </a:rPr>
+              <a:t> — но автоматизация выросла до 853 чел.-эквивалентов </a:t>
+            </a:r>
+            <a:r>
+              <a:rPr sz="598" baseline="30000" b="0" i="1">
+                <a:latin typeface="DejaVu Sans"/>
+                <a:cs typeface="DejaVu Sans"/>
+                <a:ea typeface="DejaVu Sans"/>
+                <a:solidFill>
+                  <a:srgbClr val="1C7293"/>
+                </a:solidFill>
+              </a:rPr>
+              <a:t>[2]</a:t>
+            </a:r>
+            <a:r>
+              <a:rPr sz="1150" b="0" i="0">
+                <a:latin typeface="DejaVu Sans"/>
+                <a:cs typeface="DejaVu Sans"/>
+                <a:ea typeface="DejaVu Sans"/>
+                <a:solidFill>
+                  <a:srgbClr val="21295C"/>
+                </a:solidFill>
+              </a:rPr>
+              <a:t> (усиление людей, не замена).</a:t>
             </a:r>
           </a:p>
         </p:txBody>
@@ -43724,7 +47027,29 @@
                 </a:solidFill>
                 <a:latin typeface="DejaVu Sans"/>
               </a:rPr>
-              <a:t>10 из 10 журналистов — один и тот же незаконный совет. Мэр не отозвал бот сразу.</a:t>
+              <a:t>10 из 10 журналистов — один и тот же незаконный совет </a:t>
+            </a:r>
+            <a:r>
+              <a:rPr sz="650" baseline="30000" b="0" i="1">
+                <a:latin typeface="DejaVu Sans"/>
+                <a:cs typeface="DejaVu Sans"/>
+                <a:ea typeface="DejaVu Sans"/>
+                <a:solidFill>
+                  <a:srgbClr val="1C7293"/>
+                </a:solidFill>
+              </a:rPr>
+              <a:t>[3]</a:t>
+            </a:r>
+            <a:r>
+              <a:rPr sz="1250" b="1" i="0">
+                <a:latin typeface="DejaVu Sans"/>
+                <a:cs typeface="DejaVu Sans"/>
+                <a:ea typeface="DejaVu Sans"/>
+                <a:solidFill>
+                  <a:srgbClr val="21295C"/>
+                </a:solidFill>
+              </a:rPr>
+              <a:t>. Мэр не отозвал бот сразу.</a:t>
             </a:r>
           </a:p>
         </p:txBody>
@@ -43819,6 +47144,111 @@
       <p:sp>
         <p:nvSpPr>
           <p:cNvPr id="23" name="TextBox 22"/>
+          <p:cNvSpPr txBox="1"/>
+          <p:nvPr/>
+        </p:nvSpPr>
+        <p:spPr>
+          <a:xfrm>
+            <a:off x="502920" y="6419088"/>
+            <a:ext cx="11201400" cy="548640"/>
+          </a:xfrm>
+          <a:prstGeom prst="rect">
+            <a:avLst/>
+          </a:prstGeom>
+          <a:noFill/>
+        </p:spPr>
+        <p:txBody>
+          <a:bodyPr wrap="square" lIns="0" rIns="0" tIns="0" bIns="0" anchor="t">
+            <a:spAutoFit/>
+          </a:bodyPr>
+          <a:lstStyle/>
+          <a:p>
+            <a:pPr algn="l">
+              <a:lnSpc>
+                <a:spcPct val="102000"/>
+              </a:lnSpc>
+            </a:pPr>
+            <a:r>
+              <a:rPr sz="850" b="1" i="1">
+                <a:solidFill>
+                  <a:srgbClr val="065A82"/>
+                </a:solidFill>
+                <a:latin typeface="DejaVu Sans"/>
+              </a:rPr>
+              <a:t>[1] </a:t>
+            </a:r>
+            <a:r>
+              <a:rPr sz="850" i="1">
+                <a:solidFill>
+                  <a:srgbClr val="1C7293"/>
+                </a:solidFill>
+                <a:latin typeface="DejaVu Sans"/>
+                <a:hlinkClick r:id="rId5"/>
+              </a:rPr>
+              <a:t>Bloomberg (8 мая 2025) — Klarna</a:t>
+            </a:r>
+            <a:r>
+              <a:rPr sz="850" i="1">
+                <a:solidFill>
+                  <a:srgbClr val="1C7293"/>
+                </a:solidFill>
+                <a:latin typeface="DejaVu Sans"/>
+              </a:rPr>
+              <a:t>   ·   </a:t>
+            </a:r>
+            <a:r>
+              <a:rPr sz="850" b="1" i="1">
+                <a:solidFill>
+                  <a:srgbClr val="065A82"/>
+                </a:solidFill>
+                <a:latin typeface="DejaVu Sans"/>
+              </a:rPr>
+              <a:t>[2] </a:t>
+            </a:r>
+            <a:r>
+              <a:rPr sz="850" i="1">
+                <a:solidFill>
+                  <a:srgbClr val="1C7293"/>
+                </a:solidFill>
+                <a:latin typeface="DejaVu Sans"/>
+                <a:hlinkClick r:id="rId6"/>
+              </a:rPr>
+              <a:t>Fortune (10 окт. 2025) — 853 FTE</a:t>
+            </a:r>
+            <a:r>
+              <a:rPr sz="850" i="1">
+                <a:solidFill>
+                  <a:srgbClr val="1C7293"/>
+                </a:solidFill>
+                <a:latin typeface="DejaVu Sans"/>
+              </a:rPr>
+              <a:t>   ·   </a:t>
+            </a:r>
+            <a:r>
+              <a:rPr sz="850" b="1" i="1">
+                <a:solidFill>
+                  <a:srgbClr val="065A82"/>
+                </a:solidFill>
+                <a:latin typeface="DejaVu Sans"/>
+              </a:rPr>
+              <a:t>[3] </a:t>
+            </a:r>
+            <a:r>
+              <a:rPr sz="850" i="1">
+                <a:solidFill>
+                  <a:srgbClr val="1C7293"/>
+                </a:solidFill>
+                <a:latin typeface="DejaVu Sans"/>
+                <a:hlinkClick r:id="rId7"/>
+              </a:rPr>
+              <a:t>The Markup (29 марта 2024) — NYC MyCity</a:t>
+            </a:r>
+          </a:p>
+        </p:txBody>
+      </p:sp>
+      <p:sp>
+        <p:nvSpPr>
+          <p:cNvPr id="24" name="TextBox 23"/>
           <p:cNvSpPr txBox="1"/>
           <p:nvPr/>
         </p:nvSpPr>
@@ -49231,7 +52661,18 @@
                 </a:solidFill>
                 <a:latin typeface="DejaVu Sans"/>
               </a:rPr>
-              <a:t>Deloitte: 75% — модель должна измениться · 42% низкий/нулевой ROI</a:t>
+              <a:t>Deloitte: 75% — модель должна измениться · 42% низкий/нулевой ROI </a:t>
+            </a:r>
+            <a:r>
+              <a:rPr sz="572" baseline="30000" b="0" i="1">
+                <a:latin typeface="DejaVu Sans"/>
+                <a:cs typeface="DejaVu Sans"/>
+                <a:ea typeface="DejaVu Sans"/>
+                <a:solidFill>
+                  <a:srgbClr val="1C7293"/>
+                </a:solidFill>
+              </a:rPr>
+              <a:t>[1]</a:t>
             </a:r>
           </a:p>
         </p:txBody>
@@ -49918,7 +53359,29 @@
                 </a:solidFill>
                 <a:latin typeface="DejaVu Sans"/>
               </a:rPr>
-              <a:t>Операторы → оркестраторы. Сбер сам ставит себя на уровень 3 из 5 — сигнал против хайпа: даже крупный игрок не заявляет вершину шкалы.</a:t>
+              <a:t>Операторы → оркестраторы. Сбер сам ставит себя на уровень 3 из 5 </a:t>
+            </a:r>
+            <a:r>
+              <a:rPr sz="624" baseline="30000" b="0" i="1">
+                <a:latin typeface="DejaVu Sans"/>
+                <a:cs typeface="DejaVu Sans"/>
+                <a:ea typeface="DejaVu Sans"/>
+                <a:solidFill>
+                  <a:srgbClr val="1C7293"/>
+                </a:solidFill>
+              </a:rPr>
+              <a:t>[2]</a:t>
+            </a:r>
+            <a:r>
+              <a:rPr sz="1200" b="0" i="0">
+                <a:latin typeface="DejaVu Sans"/>
+                <a:cs typeface="DejaVu Sans"/>
+                <a:ea typeface="DejaVu Sans"/>
+                <a:solidFill>
+                  <a:srgbClr val="21295C"/>
+                </a:solidFill>
+              </a:rPr>
+              <a:t> — сигнал против хайпа: даже крупный игрок не заявляет вершину шкалы.</a:t>
             </a:r>
           </a:p>
         </p:txBody>
@@ -50013,6 +53476,83 @@
       <p:sp>
         <p:nvSpPr>
           <p:cNvPr id="35" name="TextBox 34"/>
+          <p:cNvSpPr txBox="1"/>
+          <p:nvPr/>
+        </p:nvSpPr>
+        <p:spPr>
+          <a:xfrm>
+            <a:off x="502920" y="6455664"/>
+            <a:ext cx="11201400" cy="548640"/>
+          </a:xfrm>
+          <a:prstGeom prst="rect">
+            <a:avLst/>
+          </a:prstGeom>
+          <a:noFill/>
+        </p:spPr>
+        <p:txBody>
+          <a:bodyPr wrap="square" lIns="0" rIns="0" tIns="0" bIns="0" anchor="t">
+            <a:spAutoFit/>
+          </a:bodyPr>
+          <a:lstStyle/>
+          <a:p>
+            <a:pPr algn="l">
+              <a:lnSpc>
+                <a:spcPct val="102000"/>
+              </a:lnSpc>
+            </a:pPr>
+            <a:r>
+              <a:rPr sz="850" b="1" i="1">
+                <a:solidFill>
+                  <a:srgbClr val="065A82"/>
+                </a:solidFill>
+                <a:latin typeface="DejaVu Sans"/>
+              </a:rPr>
+              <a:t>[1] </a:t>
+            </a:r>
+            <a:r>
+              <a:rPr sz="850" i="1">
+                <a:solidFill>
+                  <a:srgbClr val="1C7293"/>
+                </a:solidFill>
+                <a:latin typeface="DejaVu Sans"/>
+                <a:hlinkClick r:id="rId2"/>
+              </a:rPr>
+              <a:t>Deloitte — 2026 Global Technology Leadership Study</a:t>
+            </a:r>
+            <a:r>
+              <a:rPr sz="850" i="1">
+                <a:solidFill>
+                  <a:srgbClr val="1C7293"/>
+                </a:solidFill>
+                <a:latin typeface="DejaVu Sans"/>
+              </a:rPr>
+              <a:t>   ·   </a:t>
+            </a:r>
+            <a:r>
+              <a:rPr sz="850" b="1" i="1">
+                <a:solidFill>
+                  <a:srgbClr val="065A82"/>
+                </a:solidFill>
+                <a:latin typeface="DejaVu Sans"/>
+              </a:rPr>
+              <a:t>[2] </a:t>
+            </a:r>
+            <a:r>
+              <a:rPr sz="850" i="1">
+                <a:solidFill>
+                  <a:srgbClr val="1C7293"/>
+                </a:solidFill>
+                <a:latin typeface="DejaVu Sans"/>
+                <a:hlinkClick r:id="rId3"/>
+              </a:rPr>
+              <a:t>Sber — вакансия «Лидер AI PDLC»</a:t>
+            </a:r>
+          </a:p>
+        </p:txBody>
+      </p:sp>
+      <p:sp>
+        <p:nvSpPr>
+          <p:cNvPr id="36" name="TextBox 35"/>
           <p:cNvSpPr txBox="1"/>
           <p:nvPr/>
         </p:nvSpPr>
@@ -50109,7 +53649,18 @@
                 </a:solidFill>
                 <a:latin typeface="DejaVu Sans"/>
               </a:rPr>
-              <a:t>60% исследовали → 20% пилот → 5% успех: это 25% среди дошедших, не «95% провал»</a:t>
+              <a:t>60% исследовали → 20% пилот → 5% успех: это 25% среди дошедших, не «95% провал» </a:t>
+            </a:r>
+            <a:r>
+              <a:rPr sz="936" baseline="30000" b="0" i="1">
+                <a:latin typeface="DejaVu Sans"/>
+                <a:cs typeface="DejaVu Sans"/>
+                <a:ea typeface="DejaVu Sans"/>
+                <a:solidFill>
+                  <a:srgbClr val="1C7293"/>
+                </a:solidFill>
+              </a:rPr>
+              <a:t>[1]</a:t>
             </a:r>
           </a:p>
         </p:txBody>
@@ -50268,7 +53819,29 @@
                 </a:solidFill>
                 <a:latin typeface="DejaVu Sans"/>
               </a:rPr>
-              <a:t>«95% провал» — заголовок, который не переживает калибровку: успех среди дошедших до пилота — 25%, не 5%.</a:t>
+              <a:t>«95% провал» — заголовок, который не переживает калибровку: успех среди дошедших до пилота — 25%, не 5% </a:t>
+            </a:r>
+            <a:r>
+              <a:rPr sz="728" baseline="30000" b="0" i="1">
+                <a:latin typeface="DejaVu Sans"/>
+                <a:cs typeface="DejaVu Sans"/>
+                <a:ea typeface="DejaVu Sans"/>
+                <a:solidFill>
+                  <a:srgbClr val="1C7293"/>
+                </a:solidFill>
+              </a:rPr>
+              <a:t>[2, 3]</a:t>
+            </a:r>
+            <a:r>
+              <a:rPr sz="1400" b="1" i="0">
+                <a:latin typeface="DejaVu Sans"/>
+                <a:cs typeface="DejaVu Sans"/>
+                <a:ea typeface="DejaVu Sans"/>
+                <a:solidFill>
+                  <a:srgbClr val="21295C"/>
+                </a:solidFill>
+              </a:rPr>
+              <a:t>.</a:t>
             </a:r>
           </a:p>
         </p:txBody>
@@ -50544,7 +54117,18 @@
                 </a:solidFill>
                 <a:latin typeface="DejaVu Sans"/>
               </a:rPr>
-              <a:t>3. Каков конфликт интересов автора?</a:t>
+              <a:t>3. Каков конфликт интересов автора? </a:t>
+            </a:r>
+            <a:r>
+              <a:rPr sz="520" baseline="30000" b="0" i="1">
+                <a:latin typeface="DejaVu Sans"/>
+                <a:cs typeface="DejaVu Sans"/>
+                <a:ea typeface="DejaVu Sans"/>
+                <a:solidFill>
+                  <a:srgbClr val="1C7293"/>
+                </a:solidFill>
+              </a:rPr>
+              <a:t>[3]</a:t>
             </a:r>
           </a:p>
         </p:txBody>
@@ -50670,7 +54254,29 @@
                 </a:solidFill>
                 <a:latin typeface="DejaVu Sans"/>
               </a:rPr>
-              <a:t>BCG: 60% компаний не отслеживают ни одного финансового KPI, привязанного к ценности ИИ — вот почему цифры провалов так легко раздуваются.</a:t>
+              <a:t>BCG: 60% компаний не отслеживают ни одного финансового KPI, привязанного к ценности ИИ </a:t>
+            </a:r>
+            <a:r>
+              <a:rPr sz="546" baseline="30000" b="0" i="1">
+                <a:latin typeface="DejaVu Sans"/>
+                <a:cs typeface="DejaVu Sans"/>
+                <a:ea typeface="DejaVu Sans"/>
+                <a:solidFill>
+                  <a:srgbClr val="1C7293"/>
+                </a:solidFill>
+              </a:rPr>
+              <a:t>[5]</a:t>
+            </a:r>
+            <a:r>
+              <a:rPr sz="1050" b="1" i="0">
+                <a:latin typeface="DejaVu Sans"/>
+                <a:cs typeface="DejaVu Sans"/>
+                <a:ea typeface="DejaVu Sans"/>
+                <a:solidFill>
+                  <a:srgbClr val="21295C"/>
+                </a:solidFill>
+              </a:rPr>
+              <a:t> — вот почему цифры провалов так легко раздуваются.</a:t>
             </a:r>
           </a:p>
         </p:txBody>
@@ -50678,6 +54284,167 @@
       <p:sp>
         <p:nvSpPr>
           <p:cNvPr id="17" name="TextBox 16"/>
+          <p:cNvSpPr txBox="1"/>
+          <p:nvPr/>
+        </p:nvSpPr>
+        <p:spPr>
+          <a:xfrm>
+            <a:off x="502920" y="6419088"/>
+            <a:ext cx="11201400" cy="548640"/>
+          </a:xfrm>
+          <a:prstGeom prst="rect">
+            <a:avLst/>
+          </a:prstGeom>
+          <a:noFill/>
+        </p:spPr>
+        <p:txBody>
+          <a:bodyPr wrap="square" lIns="0" rIns="0" tIns="0" bIns="0" anchor="t">
+            <a:spAutoFit/>
+          </a:bodyPr>
+          <a:lstStyle/>
+          <a:p>
+            <a:pPr algn="l">
+              <a:lnSpc>
+                <a:spcPct val="102000"/>
+              </a:lnSpc>
+            </a:pPr>
+            <a:r>
+              <a:rPr sz="800" b="1" i="1">
+                <a:solidFill>
+                  <a:srgbClr val="065A82"/>
+                </a:solidFill>
+                <a:latin typeface="DejaVu Sans"/>
+              </a:rPr>
+              <a:t>[1] </a:t>
+            </a:r>
+            <a:r>
+              <a:rPr sz="800" i="1">
+                <a:solidFill>
+                  <a:srgbClr val="1C7293"/>
+                </a:solidFill>
+                <a:latin typeface="DejaVu Sans"/>
+                <a:hlinkClick r:id="rId4"/>
+              </a:rPr>
+              <a:t>MIT NANDA — «The GenAI Divide» (июль 2025, v0.1)</a:t>
+            </a:r>
+            <a:r>
+              <a:rPr sz="800" i="1">
+                <a:solidFill>
+                  <a:srgbClr val="1C7293"/>
+                </a:solidFill>
+                <a:latin typeface="DejaVu Sans"/>
+              </a:rPr>
+              <a:t>   ·   </a:t>
+            </a:r>
+            <a:r>
+              <a:rPr sz="800" b="1" i="1">
+                <a:solidFill>
+                  <a:srgbClr val="065A82"/>
+                </a:solidFill>
+                <a:latin typeface="DejaVu Sans"/>
+              </a:rPr>
+              <a:t>[2] </a:t>
+            </a:r>
+            <a:r>
+              <a:rPr sz="800" i="1">
+                <a:solidFill>
+                  <a:srgbClr val="1C7293"/>
+                </a:solidFill>
+                <a:latin typeface="DejaVu Sans"/>
+                <a:hlinkClick r:id="rId5"/>
+              </a:rPr>
+              <a:t>Fortune (18 авг. 2025) — медиа-искажение MIT-отчёта</a:t>
+            </a:r>
+            <a:r>
+              <a:rPr sz="800" i="1">
+                <a:solidFill>
+                  <a:srgbClr val="1C7293"/>
+                </a:solidFill>
+                <a:latin typeface="DejaVu Sans"/>
+              </a:rPr>
+              <a:t>   ·   </a:t>
+            </a:r>
+            <a:r>
+              <a:rPr sz="800" b="1" i="1">
+                <a:solidFill>
+                  <a:srgbClr val="065A82"/>
+                </a:solidFill>
+                <a:latin typeface="DejaVu Sans"/>
+              </a:rPr>
+              <a:t>[3] </a:t>
+            </a:r>
+            <a:r>
+              <a:rPr sz="800" i="1">
+                <a:solidFill>
+                  <a:srgbClr val="1C7293"/>
+                </a:solidFill>
+                <a:latin typeface="DejaVu Sans"/>
+                <a:hlinkClick r:id="rId6"/>
+              </a:rPr>
+              <a:t>NewMR — Myth #2</a:t>
+            </a:r>
+            <a:r>
+              <a:rPr sz="800" i="1">
+                <a:solidFill>
+                  <a:srgbClr val="1C7293"/>
+                </a:solidFill>
+                <a:latin typeface="DejaVu Sans"/>
+              </a:rPr>
+              <a:t>   ·   </a:t>
+            </a:r>
+            <a:r>
+              <a:rPr sz="800" b="1" i="1">
+                <a:solidFill>
+                  <a:srgbClr val="065A82"/>
+                </a:solidFill>
+                <a:latin typeface="DejaVu Sans"/>
+              </a:rPr>
+              <a:t>[4] </a:t>
+            </a:r>
+            <a:r>
+              <a:rPr sz="800" i="1">
+                <a:solidFill>
+                  <a:srgbClr val="1C7293"/>
+                </a:solidFill>
+                <a:latin typeface="DejaVu Sans"/>
+                <a:hlinkClick r:id="rId7"/>
+              </a:rPr>
+              <a:t>Gartner (7 апр. 2026, 782 I&amp;O-лидеров)</a:t>
+            </a:r>
+            <a:r>
+              <a:rPr sz="800" i="1">
+                <a:solidFill>
+                  <a:srgbClr val="1C7293"/>
+                </a:solidFill>
+                <a:latin typeface="DejaVu Sans"/>
+              </a:rPr>
+              <a:t>   ·   </a:t>
+            </a:r>
+            <a:r>
+              <a:rPr sz="800" b="1" i="1">
+                <a:solidFill>
+                  <a:srgbClr val="065A82"/>
+                </a:solidFill>
+                <a:latin typeface="DejaVu Sans"/>
+              </a:rPr>
+              <a:t>[5] </a:t>
+            </a:r>
+            <a:r>
+              <a:rPr sz="800" i="1">
+                <a:solidFill>
+                  <a:srgbClr val="1C7293"/>
+                </a:solidFill>
+                <a:latin typeface="DejaVu Sans"/>
+                <a:hlinkClick r:id="rId8"/>
+              </a:rPr>
+              <a:t>BCG — Closing the AI Impact Gap</a:t>
+            </a:r>
+          </a:p>
+        </p:txBody>
+      </p:sp>
+      <p:sp>
+        <p:nvSpPr>
+          <p:cNvPr id="18" name="TextBox 17"/>
           <p:cNvSpPr txBox="1"/>
           <p:nvPr/>
         </p:nvSpPr>
@@ -51005,7 +54772,51 @@
                 </a:solidFill>
                 <a:latin typeface="DejaVu Sans"/>
               </a:rPr>
-              <a:t>Just Walk Out (Amazon), с 2018: 700/1000 транзакций — ручная проверка (14× выше цели 50/1000). 6 лет маркетинга «автономный ИИ» без раскрытия масштаба труда (скрытая человеческая стоимость).</a:t>
+              <a:t>Just Walk Out (Amazon), с 2018: 700/1000 транзакций — ручная проверка (14× выше цели 50/1000) </a:t>
+            </a:r>
+            <a:r>
+              <a:rPr sz="598" baseline="30000" b="0" i="1">
+                <a:latin typeface="DejaVu Sans"/>
+                <a:cs typeface="DejaVu Sans"/>
+                <a:ea typeface="DejaVu Sans"/>
+                <a:solidFill>
+                  <a:srgbClr val="1C7293"/>
+                </a:solidFill>
+              </a:rPr>
+              <a:t>[1]</a:t>
+            </a:r>
+            <a:r>
+              <a:rPr sz="1150" b="1" i="0">
+                <a:latin typeface="DejaVu Sans"/>
+                <a:cs typeface="DejaVu Sans"/>
+                <a:ea typeface="DejaVu Sans"/>
+                <a:solidFill>
+                  <a:srgbClr val="21295C"/>
+                </a:solidFill>
+              </a:rPr>
+              <a:t>. 6 лет маркетинга «автономный ИИ» без раскрытия масштаба труда (скрытая человеческая стоимость) </a:t>
+            </a:r>
+            <a:r>
+              <a:rPr sz="598" baseline="30000" b="0" i="1">
+                <a:latin typeface="DejaVu Sans"/>
+                <a:cs typeface="DejaVu Sans"/>
+                <a:ea typeface="DejaVu Sans"/>
+                <a:solidFill>
+                  <a:srgbClr val="1C7293"/>
+                </a:solidFill>
+              </a:rPr>
+              <a:t>[2]</a:t>
+            </a:r>
+            <a:r>
+              <a:rPr sz="1150" b="1" i="0">
+                <a:latin typeface="DejaVu Sans"/>
+                <a:cs typeface="DejaVu Sans"/>
+                <a:ea typeface="DejaVu Sans"/>
+                <a:solidFill>
+                  <a:srgbClr val="21295C"/>
+                </a:solidFill>
+              </a:rPr>
+              <a:t>.</a:t>
             </a:r>
           </a:p>
         </p:txBody>
@@ -52088,6 +55899,83 @@
       <p:sp>
         <p:nvSpPr>
           <p:cNvPr id="35" name="TextBox 34"/>
+          <p:cNvSpPr txBox="1"/>
+          <p:nvPr/>
+        </p:nvSpPr>
+        <p:spPr>
+          <a:xfrm>
+            <a:off x="502920" y="6455664"/>
+            <a:ext cx="11201400" cy="548640"/>
+          </a:xfrm>
+          <a:prstGeom prst="rect">
+            <a:avLst/>
+          </a:prstGeom>
+          <a:noFill/>
+        </p:spPr>
+        <p:txBody>
+          <a:bodyPr wrap="square" lIns="0" rIns="0" tIns="0" bIns="0" anchor="t">
+            <a:spAutoFit/>
+          </a:bodyPr>
+          <a:lstStyle/>
+          <a:p>
+            <a:pPr algn="l">
+              <a:lnSpc>
+                <a:spcPct val="102000"/>
+              </a:lnSpc>
+            </a:pPr>
+            <a:r>
+              <a:rPr sz="850" b="1" i="1">
+                <a:solidFill>
+                  <a:srgbClr val="065A82"/>
+                </a:solidFill>
+                <a:latin typeface="DejaVu Sans"/>
+              </a:rPr>
+              <a:t>[1] </a:t>
+            </a:r>
+            <a:r>
+              <a:rPr sz="850" i="1">
+                <a:solidFill>
+                  <a:srgbClr val="1C7293"/>
+                </a:solidFill>
+                <a:latin typeface="DejaVu Sans"/>
+                <a:hlinkClick r:id="rId4"/>
+              </a:rPr>
+              <a:t>Business Standard (апр. 2024) — Just Walk Out</a:t>
+            </a:r>
+            <a:r>
+              <a:rPr sz="850" i="1">
+                <a:solidFill>
+                  <a:srgbClr val="1C7293"/>
+                </a:solidFill>
+                <a:latin typeface="DejaVu Sans"/>
+              </a:rPr>
+              <a:t>   ·   </a:t>
+            </a:r>
+            <a:r>
+              <a:rPr sz="850" b="1" i="1">
+                <a:solidFill>
+                  <a:srgbClr val="065A82"/>
+                </a:solidFill>
+                <a:latin typeface="DejaVu Sans"/>
+              </a:rPr>
+              <a:t>[2] </a:t>
+            </a:r>
+            <a:r>
+              <a:rPr sz="850" i="1">
+                <a:solidFill>
+                  <a:srgbClr val="1C7293"/>
+                </a:solidFill>
+                <a:latin typeface="DejaVu Sans"/>
+                <a:hlinkClick r:id="rId5"/>
+              </a:rPr>
+              <a:t>Retail Dive — демонтаж Just Walk Out</a:t>
+            </a:r>
+          </a:p>
+        </p:txBody>
+      </p:sp>
+      <p:sp>
+        <p:nvSpPr>
+          <p:cNvPr id="36" name="TextBox 35"/>
           <p:cNvSpPr txBox="1"/>
           <p:nvPr/>
         </p:nvSpPr>
@@ -56539,7 +60427,18 @@
                 </a:solidFill>
                 <a:latin typeface="DejaVu Sans"/>
               </a:rPr>
-              <a:t>Стив Бланк — методология Customer Development</a:t>
+              <a:t>Стив Бланк — методология Customer Development </a:t>
+            </a:r>
+            <a:r>
+              <a:rPr sz="650" baseline="30000" b="0" i="1">
+                <a:latin typeface="DejaVu Sans"/>
+                <a:cs typeface="DejaVu Sans"/>
+                <a:ea typeface="DejaVu Sans"/>
+                <a:solidFill>
+                  <a:srgbClr val="1C7293"/>
+                </a:solidFill>
+              </a:rPr>
+              <a:t>[1]</a:t>
             </a:r>
           </a:p>
         </p:txBody>
@@ -56764,6 +60663,55 @@
       <p:sp>
         <p:nvSpPr>
           <p:cNvPr id="32" name="TextBox 31"/>
+          <p:cNvSpPr txBox="1"/>
+          <p:nvPr/>
+        </p:nvSpPr>
+        <p:spPr>
+          <a:xfrm>
+            <a:off x="502920" y="6455664"/>
+            <a:ext cx="11201400" cy="548640"/>
+          </a:xfrm>
+          <a:prstGeom prst="rect">
+            <a:avLst/>
+          </a:prstGeom>
+          <a:noFill/>
+        </p:spPr>
+        <p:txBody>
+          <a:bodyPr wrap="square" lIns="0" rIns="0" tIns="0" bIns="0" anchor="t">
+            <a:spAutoFit/>
+          </a:bodyPr>
+          <a:lstStyle/>
+          <a:p>
+            <a:pPr algn="l">
+              <a:lnSpc>
+                <a:spcPct val="102000"/>
+              </a:lnSpc>
+            </a:pPr>
+            <a:r>
+              <a:rPr sz="850" b="1" i="1">
+                <a:solidFill>
+                  <a:srgbClr val="065A82"/>
+                </a:solidFill>
+                <a:latin typeface="DejaVu Sans"/>
+              </a:rPr>
+              <a:t>[1] </a:t>
+            </a:r>
+            <a:r>
+              <a:rPr sz="850" i="1">
+                <a:solidFill>
+                  <a:srgbClr val="1C7293"/>
+                </a:solidFill>
+                <a:latin typeface="DejaVu Sans"/>
+                <a:hlinkClick r:id="rId4"/>
+              </a:rPr>
+              <a:t>Blank — Customer Development (Four Steps to the Epiphany)</a:t>
+            </a:r>
+          </a:p>
+        </p:txBody>
+      </p:sp>
+      <p:sp>
+        <p:nvSpPr>
+          <p:cNvPr id="33" name="TextBox 32"/>
           <p:cNvSpPr txBox="1"/>
           <p:nvPr/>
         </p:nvSpPr>
